--- a/ground-vehicle/docs/courses/advanced/l4_lighting_state_machine.pptx
+++ b/ground-vehicle/docs/courses/advanced/l4_lighting_state_machine.pptx
@@ -3147,267 +3147,9 @@
           </a:p>
         </p:txBody>
       </p:sp>
-      <p:sp>
-        <p:nvSpPr>
-          <p:cNvPr id="3" name="TextBox 2"/>
-          <p:cNvSpPr txBox="1"/>
-          <p:nvPr/>
-        </p:nvSpPr>
-        <p:spPr>
-          <a:xfrm>
-            <a:off x="502920" y="1051560"/>
-            <a:ext cx="6492240" cy="365760"/>
-          </a:xfrm>
-          <a:prstGeom prst="rect">
-            <a:avLst/>
-          </a:prstGeom>
-          <a:noFill/>
-        </p:spPr>
-        <p:txBody>
-          <a:bodyPr wrap="square" lIns="0" tIns="0" rIns="0" bIns="0">
-            <a:spAutoFit/>
-          </a:bodyPr>
-          <a:lstStyle/>
-          <a:p>
-            <a:pPr algn="l">
-              <a:lnSpc>
-                <a:spcPct val="100000"/>
-              </a:lnSpc>
-              <a:spcAft>
-                <a:spcPts val="0"/>
-              </a:spcAft>
-              <a:defRPr sz="1600" b="1">
-                <a:solidFill>
-                  <a:srgbClr val="0E7C86"/>
-                </a:solidFill>
-                <a:latin typeface="Calibri"/>
-              </a:defRPr>
-            </a:pPr>
-            <a:r>
-              <a:rPr sz="1600" b="1">
-                <a:solidFill>
-                  <a:srgbClr val="0E7C86"/>
-                </a:solidFill>
-                <a:latin typeface="Calibri"/>
-              </a:rPr>
-              <a:t>LESSON 4</a:t>
-            </a:r>
-          </a:p>
-        </p:txBody>
-      </p:sp>
-      <p:sp>
-        <p:nvSpPr>
-          <p:cNvPr id="4" name="TextBox 3"/>
-          <p:cNvSpPr txBox="1"/>
-          <p:nvPr/>
-        </p:nvSpPr>
-        <p:spPr>
-          <a:xfrm>
-            <a:off x="502920" y="1481328"/>
-            <a:ext cx="6492240" cy="1554480"/>
-          </a:xfrm>
-          <a:prstGeom prst="rect">
-            <a:avLst/>
-          </a:prstGeom>
-          <a:noFill/>
-        </p:spPr>
-        <p:txBody>
-          <a:bodyPr wrap="square" lIns="0" tIns="0" rIns="0" bIns="0">
-            <a:spAutoFit/>
-          </a:bodyPr>
-          <a:lstStyle/>
-          <a:p>
-            <a:pPr algn="l">
-              <a:lnSpc>
-                <a:spcPct val="95000"/>
-              </a:lnSpc>
-              <a:spcAft>
-                <a:spcPts val="0"/>
-              </a:spcAft>
-              <a:defRPr sz="4000" b="1">
-                <a:solidFill>
-                  <a:srgbClr val="1F3A5F"/>
-                </a:solidFill>
-                <a:latin typeface="Calibri"/>
-              </a:defRPr>
-            </a:pPr>
-            <a:r>
-              <a:rPr sz="4000" b="1">
-                <a:solidFill>
-                  <a:srgbClr val="1F3A5F"/>
-                </a:solidFill>
-                <a:latin typeface="Calibri"/>
-              </a:rPr>
-              <a:t>The Lighting State Machine</a:t>
-            </a:r>
-          </a:p>
-        </p:txBody>
-      </p:sp>
-      <p:sp>
-        <p:nvSpPr>
-          <p:cNvPr id="5" name="TextBox 4"/>
-          <p:cNvSpPr txBox="1"/>
-          <p:nvPr/>
-        </p:nvSpPr>
-        <p:spPr>
-          <a:xfrm>
-            <a:off x="502920" y="3154680"/>
-            <a:ext cx="6492240" cy="960120"/>
-          </a:xfrm>
-          <a:prstGeom prst="rect">
-            <a:avLst/>
-          </a:prstGeom>
-          <a:noFill/>
-        </p:spPr>
-        <p:txBody>
-          <a:bodyPr wrap="square" lIns="0" tIns="0" rIns="0" bIns="0">
-            <a:spAutoFit/>
-          </a:bodyPr>
-          <a:lstStyle/>
-          <a:p>
-            <a:pPr algn="l">
-              <a:lnSpc>
-                <a:spcPct val="100000"/>
-              </a:lnSpc>
-              <a:spcAft>
-                <a:spcPts val="0"/>
-              </a:spcAft>
-              <a:defRPr sz="1700" b="0">
-                <a:solidFill>
-                  <a:srgbClr val="222222"/>
-                </a:solidFill>
-                <a:latin typeface="Calibri"/>
-              </a:defRPr>
-            </a:pPr>
-            <a:r>
-              <a:rPr sz="1700" b="0">
-                <a:solidFill>
-                  <a:srgbClr val="222222"/>
-                </a:solidFill>
-                <a:latin typeface="Calibri"/>
-              </a:rPr>
-              <a:t>Six modes, one variable, no delay() anywhere, and geometry that is not symmetric.</a:t>
-            </a:r>
-          </a:p>
-        </p:txBody>
-      </p:sp>
-      <p:sp>
-        <p:nvSpPr>
-          <p:cNvPr id="6" name="TextBox 5"/>
-          <p:cNvSpPr txBox="1"/>
-          <p:nvPr/>
-        </p:nvSpPr>
-        <p:spPr>
-          <a:xfrm>
-            <a:off x="502920" y="4224528"/>
-            <a:ext cx="6492240" cy="1371600"/>
-          </a:xfrm>
-          <a:prstGeom prst="rect">
-            <a:avLst/>
-          </a:prstGeom>
-          <a:noFill/>
-        </p:spPr>
-        <p:txBody>
-          <a:bodyPr wrap="square" lIns="0" tIns="0" rIns="0" bIns="0">
-            <a:spAutoFit/>
-          </a:bodyPr>
-          <a:lstStyle/>
-          <a:p>
-            <a:pPr algn="l">
-              <a:lnSpc>
-                <a:spcPct val="100000"/>
-              </a:lnSpc>
-              <a:spcAft>
-                <a:spcPts val="200"/>
-              </a:spcAft>
-              <a:defRPr sz="1300" b="0">
-                <a:solidFill>
-                  <a:srgbClr val="666666"/>
-                </a:solidFill>
-                <a:latin typeface="Calibri"/>
-              </a:defRPr>
-            </a:pPr>
-            <a:r>
-              <a:rPr sz="1300" b="0">
-                <a:solidFill>
-                  <a:srgbClr val="666666"/>
-                </a:solidFill>
-                <a:latin typeface="Calibri"/>
-              </a:rPr>
-              <a:t>Porpoise Robotics  -  porpoiserobotics.org</a:t>
-            </a:r>
-          </a:p>
-          <a:p>
-            <a:pPr algn="l">
-              <a:lnSpc>
-                <a:spcPct val="100000"/>
-              </a:lnSpc>
-              <a:spcAft>
-                <a:spcPts val="200"/>
-              </a:spcAft>
-              <a:defRPr sz="1300" b="0">
-                <a:solidFill>
-                  <a:srgbClr val="666666"/>
-                </a:solidFill>
-                <a:latin typeface="Calibri"/>
-              </a:defRPr>
-            </a:pPr>
-            <a:r>
-              <a:rPr sz="1300" b="0">
-                <a:solidFill>
-                  <a:srgbClr val="666666"/>
-                </a:solidFill>
-                <a:latin typeface="Calibri"/>
-              </a:rPr>
-              <a:t>Kevin P. Bowen, President  -  kbowen6@icloud.com</a:t>
-            </a:r>
-          </a:p>
-          <a:p>
-            <a:pPr algn="l">
-              <a:lnSpc>
-                <a:spcPct val="100000"/>
-              </a:lnSpc>
-              <a:spcAft>
-                <a:spcPts val="200"/>
-              </a:spcAft>
-              <a:defRPr sz="1300" b="0">
-                <a:solidFill>
-                  <a:srgbClr val="666666"/>
-                </a:solidFill>
-                <a:latin typeface="Calibri"/>
-              </a:defRPr>
-            </a:pPr>
-          </a:p>
-          <a:p>
-            <a:pPr algn="l">
-              <a:lnSpc>
-                <a:spcPct val="100000"/>
-              </a:lnSpc>
-              <a:spcAft>
-                <a:spcPts val="200"/>
-              </a:spcAft>
-              <a:defRPr sz="1300" b="0">
-                <a:solidFill>
-                  <a:srgbClr val="666666"/>
-                </a:solidFill>
-                <a:latin typeface="Calibri"/>
-              </a:defRPr>
-            </a:pPr>
-            <a:r>
-              <a:rPr sz="1300" b="0">
-                <a:solidFill>
-                  <a:srgbClr val="666666"/>
-                </a:solidFill>
-                <a:latin typeface="Calibri"/>
-              </a:rPr>
-              <a:t>Three hours.  Nothing moves today.</a:t>
-            </a:r>
-          </a:p>
-        </p:txBody>
-      </p:sp>
       <p:pic>
         <p:nvPicPr>
-          <p:cNvPr id="7" name="Picture 6" descr="vehicle-green-leds.jpg"/>
+          <p:cNvPr id="3" name="Picture 2" descr="porpoise-logo.png"/>
           <p:cNvPicPr>
             <a:picLocks noChangeAspect="1"/>
           </p:cNvPicPr>
@@ -3421,8 +3163,8 @@
         </p:blipFill>
         <p:spPr>
           <a:xfrm>
-            <a:off x="7223760" y="1371600"/>
-            <a:ext cx="4480560" cy="3359046"/>
+            <a:off x="10922762" y="457200"/>
+            <a:ext cx="766013" cy="777240"/>
           </a:xfrm>
           <a:prstGeom prst="rect">
             <a:avLst/>
@@ -3431,7 +3173,289 @@
       </p:pic>
       <p:sp>
         <p:nvSpPr>
-          <p:cNvPr id="8" name="TextBox 7"/>
+          <p:cNvPr id="4" name="TextBox 3"/>
+          <p:cNvSpPr txBox="1"/>
+          <p:nvPr/>
+        </p:nvSpPr>
+        <p:spPr>
+          <a:xfrm>
+            <a:off x="502920" y="1051560"/>
+            <a:ext cx="6492240" cy="365760"/>
+          </a:xfrm>
+          <a:prstGeom prst="rect">
+            <a:avLst/>
+          </a:prstGeom>
+          <a:noFill/>
+        </p:spPr>
+        <p:txBody>
+          <a:bodyPr wrap="square" lIns="0" tIns="0" rIns="0" bIns="0">
+            <a:spAutoFit/>
+          </a:bodyPr>
+          <a:lstStyle/>
+          <a:p>
+            <a:pPr algn="l">
+              <a:lnSpc>
+                <a:spcPct val="100000"/>
+              </a:lnSpc>
+              <a:spcAft>
+                <a:spcPts val="0"/>
+              </a:spcAft>
+              <a:defRPr sz="1600" b="1">
+                <a:solidFill>
+                  <a:srgbClr val="0E7C86"/>
+                </a:solidFill>
+                <a:latin typeface="Calibri"/>
+              </a:defRPr>
+            </a:pPr>
+            <a:r>
+              <a:rPr sz="1600" b="1">
+                <a:solidFill>
+                  <a:srgbClr val="0E7C86"/>
+                </a:solidFill>
+                <a:latin typeface="Calibri"/>
+              </a:rPr>
+              <a:t>LESSON 4</a:t>
+            </a:r>
+          </a:p>
+        </p:txBody>
+      </p:sp>
+      <p:sp>
+        <p:nvSpPr>
+          <p:cNvPr id="5" name="TextBox 4"/>
+          <p:cNvSpPr txBox="1"/>
+          <p:nvPr/>
+        </p:nvSpPr>
+        <p:spPr>
+          <a:xfrm>
+            <a:off x="502920" y="1481328"/>
+            <a:ext cx="6492240" cy="1554480"/>
+          </a:xfrm>
+          <a:prstGeom prst="rect">
+            <a:avLst/>
+          </a:prstGeom>
+          <a:noFill/>
+        </p:spPr>
+        <p:txBody>
+          <a:bodyPr wrap="square" lIns="0" tIns="0" rIns="0" bIns="0">
+            <a:spAutoFit/>
+          </a:bodyPr>
+          <a:lstStyle/>
+          <a:p>
+            <a:pPr algn="l">
+              <a:lnSpc>
+                <a:spcPct val="95000"/>
+              </a:lnSpc>
+              <a:spcAft>
+                <a:spcPts val="0"/>
+              </a:spcAft>
+              <a:defRPr sz="4000" b="1">
+                <a:solidFill>
+                  <a:srgbClr val="1F3A5F"/>
+                </a:solidFill>
+                <a:latin typeface="Calibri"/>
+              </a:defRPr>
+            </a:pPr>
+            <a:r>
+              <a:rPr sz="4000" b="1">
+                <a:solidFill>
+                  <a:srgbClr val="1F3A5F"/>
+                </a:solidFill>
+                <a:latin typeface="Calibri"/>
+              </a:rPr>
+              <a:t>The Lighting State Machine</a:t>
+            </a:r>
+          </a:p>
+        </p:txBody>
+      </p:sp>
+      <p:sp>
+        <p:nvSpPr>
+          <p:cNvPr id="6" name="TextBox 5"/>
+          <p:cNvSpPr txBox="1"/>
+          <p:nvPr/>
+        </p:nvSpPr>
+        <p:spPr>
+          <a:xfrm>
+            <a:off x="502920" y="3154680"/>
+            <a:ext cx="6492240" cy="960120"/>
+          </a:xfrm>
+          <a:prstGeom prst="rect">
+            <a:avLst/>
+          </a:prstGeom>
+          <a:noFill/>
+        </p:spPr>
+        <p:txBody>
+          <a:bodyPr wrap="square" lIns="0" tIns="0" rIns="0" bIns="0">
+            <a:spAutoFit/>
+          </a:bodyPr>
+          <a:lstStyle/>
+          <a:p>
+            <a:pPr algn="l">
+              <a:lnSpc>
+                <a:spcPct val="100000"/>
+              </a:lnSpc>
+              <a:spcAft>
+                <a:spcPts val="0"/>
+              </a:spcAft>
+              <a:defRPr sz="1700" b="0">
+                <a:solidFill>
+                  <a:srgbClr val="222222"/>
+                </a:solidFill>
+                <a:latin typeface="Calibri"/>
+              </a:defRPr>
+            </a:pPr>
+            <a:r>
+              <a:rPr sz="1700" b="0">
+                <a:solidFill>
+                  <a:srgbClr val="222222"/>
+                </a:solidFill>
+                <a:latin typeface="Calibri"/>
+              </a:rPr>
+              <a:t>Six modes, one variable, no delay() anywhere, and geometry that is not symmetric.</a:t>
+            </a:r>
+          </a:p>
+        </p:txBody>
+      </p:sp>
+      <p:sp>
+        <p:nvSpPr>
+          <p:cNvPr id="7" name="TextBox 6"/>
+          <p:cNvSpPr txBox="1"/>
+          <p:nvPr/>
+        </p:nvSpPr>
+        <p:spPr>
+          <a:xfrm>
+            <a:off x="502920" y="4224528"/>
+            <a:ext cx="6492240" cy="1371600"/>
+          </a:xfrm>
+          <a:prstGeom prst="rect">
+            <a:avLst/>
+          </a:prstGeom>
+          <a:noFill/>
+        </p:spPr>
+        <p:txBody>
+          <a:bodyPr wrap="square" lIns="0" tIns="0" rIns="0" bIns="0">
+            <a:spAutoFit/>
+          </a:bodyPr>
+          <a:lstStyle/>
+          <a:p>
+            <a:pPr algn="l">
+              <a:lnSpc>
+                <a:spcPct val="100000"/>
+              </a:lnSpc>
+              <a:spcAft>
+                <a:spcPts val="200"/>
+              </a:spcAft>
+              <a:defRPr sz="1300" b="0">
+                <a:solidFill>
+                  <a:srgbClr val="666666"/>
+                </a:solidFill>
+                <a:latin typeface="Calibri"/>
+              </a:defRPr>
+            </a:pPr>
+            <a:r>
+              <a:rPr sz="1300" b="0">
+                <a:solidFill>
+                  <a:srgbClr val="666666"/>
+                </a:solidFill>
+                <a:latin typeface="Calibri"/>
+              </a:rPr>
+              <a:t>Porpoise Robotics  -  porpoiserobotics.org</a:t>
+            </a:r>
+          </a:p>
+          <a:p>
+            <a:pPr algn="l">
+              <a:lnSpc>
+                <a:spcPct val="100000"/>
+              </a:lnSpc>
+              <a:spcAft>
+                <a:spcPts val="200"/>
+              </a:spcAft>
+              <a:defRPr sz="1300" b="0">
+                <a:solidFill>
+                  <a:srgbClr val="666666"/>
+                </a:solidFill>
+                <a:latin typeface="Calibri"/>
+              </a:defRPr>
+            </a:pPr>
+            <a:r>
+              <a:rPr sz="1300" b="0">
+                <a:solidFill>
+                  <a:srgbClr val="666666"/>
+                </a:solidFill>
+                <a:latin typeface="Calibri"/>
+              </a:rPr>
+              <a:t>Kevin P. Bowen, President  -  kbowen6@icloud.com</a:t>
+            </a:r>
+          </a:p>
+          <a:p>
+            <a:pPr algn="l">
+              <a:lnSpc>
+                <a:spcPct val="100000"/>
+              </a:lnSpc>
+              <a:spcAft>
+                <a:spcPts val="200"/>
+              </a:spcAft>
+              <a:defRPr sz="1300" b="0">
+                <a:solidFill>
+                  <a:srgbClr val="666666"/>
+                </a:solidFill>
+                <a:latin typeface="Calibri"/>
+              </a:defRPr>
+            </a:pPr>
+          </a:p>
+          <a:p>
+            <a:pPr algn="l">
+              <a:lnSpc>
+                <a:spcPct val="100000"/>
+              </a:lnSpc>
+              <a:spcAft>
+                <a:spcPts val="200"/>
+              </a:spcAft>
+              <a:defRPr sz="1300" b="0">
+                <a:solidFill>
+                  <a:srgbClr val="666666"/>
+                </a:solidFill>
+                <a:latin typeface="Calibri"/>
+              </a:defRPr>
+            </a:pPr>
+            <a:r>
+              <a:rPr sz="1300" b="0">
+                <a:solidFill>
+                  <a:srgbClr val="666666"/>
+                </a:solidFill>
+                <a:latin typeface="Calibri"/>
+              </a:rPr>
+              <a:t>Three hours.  Nothing moves today.</a:t>
+            </a:r>
+          </a:p>
+        </p:txBody>
+      </p:sp>
+      <p:pic>
+        <p:nvPicPr>
+          <p:cNvPr id="8" name="Picture 7" descr="vehicle-green-leds.jpg"/>
+          <p:cNvPicPr>
+            <a:picLocks noChangeAspect="1"/>
+          </p:cNvPicPr>
+          <p:nvPr/>
+        </p:nvPicPr>
+        <p:blipFill>
+          <a:blip r:embed="rId3"/>
+          <a:stretch>
+            <a:fillRect/>
+          </a:stretch>
+        </p:blipFill>
+        <p:spPr>
+          <a:xfrm>
+            <a:off x="7223760" y="1371600"/>
+            <a:ext cx="4480560" cy="3359046"/>
+          </a:xfrm>
+          <a:prstGeom prst="rect">
+            <a:avLst/>
+          </a:prstGeom>
+        </p:spPr>
+      </p:pic>
+      <p:sp>
+        <p:nvSpPr>
+          <p:cNvPr id="9" name="TextBox 8"/>
           <p:cNvSpPr txBox="1"/>
           <p:nvPr/>
         </p:nvSpPr>

--- a/ground-vehicle/docs/courses/advanced/l4_lighting_state_machine.pptx
+++ b/ground-vehicle/docs/courses/advanced/l4_lighting_state_machine.pptx
@@ -3755,7 +3755,7 @@
       </p:sp>
       <p:sp>
         <p:nvSpPr>
-          <p:cNvPr id="7" name="Rounded Rectangle 6"/>
+          <p:cNvPr id="7" name="CODE_PANEL"/>
           <p:cNvSpPr/>
           <p:nvPr/>
         </p:nvSpPr>
@@ -5194,7 +5194,7 @@
       </p:sp>
       <p:sp>
         <p:nvSpPr>
-          <p:cNvPr id="7" name="Rounded Rectangle 6"/>
+          <p:cNvPr id="7" name="CODE_PANEL"/>
           <p:cNvSpPr/>
           <p:nvPr/>
         </p:nvSpPr>
@@ -5606,7 +5606,7 @@
                 </a:solidFill>
                 <a:latin typeface="Consolas"/>
               </a:rPr>
-              <a:t>    if (now - kitt_time &lt; KITT_SPEED_MS) return;</a:t>
+              <a:t>    if (now - kitt_time &lt; (unsigned long)KITT_SPEED_MS) return;</a:t>
             </a:r>
           </a:p>
           <a:p>
@@ -11335,7 +11335,7 @@
       </p:sp>
       <p:sp>
         <p:nvSpPr>
-          <p:cNvPr id="7" name="Rounded Rectangle 6"/>
+          <p:cNvPr id="7" name="CODE_PANEL"/>
           <p:cNvSpPr/>
           <p:nvPr/>
         </p:nvSpPr>
@@ -11725,7 +11725,7 @@
                 </a:solidFill>
                 <a:latin typeface="Consolas"/>
               </a:rPr>
-              <a:t>// ...and in the state machine:</a:t>
+              <a:t>// ...and the last branch of update_lighting():</a:t>
             </a:r>
           </a:p>
           <a:p>
@@ -11747,7 +11747,7 @@
                 </a:solidFill>
                 <a:latin typeface="Consolas"/>
               </a:rPr>
-              <a:t>case STANDBY:</a:t>
+              <a:t>  if (led_mode == STANDBY &amp;&amp; standby_dirty) {</a:t>
             </a:r>
           </a:p>
           <a:p>
@@ -11769,7 +11769,7 @@
                 </a:solidFill>
                 <a:latin typeface="Consolas"/>
               </a:rPr>
-              <a:t>  if (standby_dirty) set_standby_lighting();</a:t>
+              <a:t>    set_standby_lighting();</a:t>
             </a:r>
           </a:p>
           <a:p>
@@ -11791,7 +11791,7 @@
                 </a:solidFill>
                 <a:latin typeface="Consolas"/>
               </a:rPr>
-              <a:t>  break;</a:t>
+              <a:t>  }</a:t>
             </a:r>
           </a:p>
         </p:txBody>

--- a/ground-vehicle/docs/courses/advanced/l4_lighting_state_machine.pptx
+++ b/ground-vehicle/docs/courses/advanced/l4_lighting_state_machine.pptx
@@ -925,7 +925,7 @@
               <a:rPr sz="1200">
                 <a:latin typeface="Calibri"/>
               </a:rPr>
-              <a:t>The bar grows outward from the centre towards the turning corner, on both bars at once. Trace it with a finger before showing the indices.</a:t>
+              <a:t>The bar grows outward from the center toward the turning corner, on both bars at once. Trace it with a finger before showing the indices.</a:t>
             </a:r>
           </a:p>
           <a:p>
@@ -1031,7 +1031,7 @@
               <a:rPr sz="1200">
                 <a:latin typeface="Calibri"/>
               </a:rPr>
-              <a:t>The bar grows outward from the centre towards the turning corner, on both bars at once. Trace it with a finger before showing the indices.</a:t>
+              <a:t>The bar grows outward from the center toward the turning corner, on both bars at once. Trace it with a finger before showing the indices.</a:t>
             </a:r>
           </a:p>
           <a:p>
@@ -1298,7 +1298,7 @@
               <a:rPr sz="1200">
                 <a:latin typeface="Calibri"/>
               </a:rPr>
-              <a:t>Step 6 is open-ended. A fading trailing edge needs scale_colour(), which they met two slides ago.</a:t>
+              <a:t>Step 6 is open-ended. A fading trailing edge needs scale_color(), which they met two slides ago.</a:t>
             </a:r>
           </a:p>
           <a:p>
@@ -1663,7 +1663,7 @@
               <a:rPr sz="1200">
                 <a:latin typeface="Calibri"/>
               </a:rPr>
-              <a:t>A sine slows at the extremes, which is what your eye expects. That is a perception point, like the colour lesson in the beginner course.</a:t>
+              <a:t>A sine slows at the extremes, which is what your eye expects. That is a perception point, like the color lesson in the beginner course.</a:t>
             </a:r>
           </a:p>
           <a:p>
@@ -1769,7 +1769,7 @@
               <a:rPr sz="1200">
                 <a:latin typeface="Calibri"/>
               </a:rPr>
-              <a:t>A sine slows at the extremes, which is what your eye expects. That is a perception point, like the colour lesson in the beginner course.</a:t>
+              <a:t>A sine slows at the extremes, which is what your eye expects. That is a perception point, like the color lesson in the beginner course.</a:t>
             </a:r>
           </a:p>
           <a:p>
@@ -2109,7 +2109,7 @@
               <a:rPr sz="1200">
                 <a:latin typeface="Calibri"/>
               </a:rPr>
-              <a:t>The front counts down for a left signal because the growth is outward from the centre of the bar.</a:t>
+              <a:t>The front counts down for a left signal because the growth is outward from the center of the bar.</a:t>
             </a:r>
           </a:p>
           <a:p>
@@ -7036,7 +7036,7 @@
                 </a:solidFill>
                 <a:latin typeface="Calibri"/>
               </a:rPr>
-              <a:t>Colour helpers, written out longhand</a:t>
+              <a:t>Color helpers, written out longhand</a:t>
             </a:r>
           </a:p>
         </p:txBody>
@@ -7450,7 +7450,7 @@
                 </a:solidFill>
                 <a:latin typeface="Calibri"/>
               </a:rPr>
-              <a:t>scale_colour() unpacks a 32-bit colour into three bytes, scales each, and repacks it. Four lines, and now the bit-shifting is visible instead of magic.</a:t>
+              <a:t>scale_color() unpacks a 32-bit color into three bytes, scales each, and repacks it. Four lines, and now the bit-shifting is visible instead of magic.</a:t>
             </a:r>
           </a:p>
           <a:p>
@@ -7555,7 +7555,7 @@
                 </a:solidFill>
                 <a:latin typeface="Calibri"/>
               </a:rPr>
-              <a:t>Colour helpers, written out longhand  (continued)</a:t>
+              <a:t>Color helpers, written out longhand  (continued)</a:t>
             </a:r>
           </a:p>
         </p:txBody>
@@ -8264,7 +8264,7 @@
                 </a:solidFill>
                 <a:latin typeface="Calibri"/>
               </a:rPr>
-              <a:t>The bar has to grow OUTWARD from the centre of the vehicle towards the corner that is turning, on both bars at once.</a:t>
+              <a:t>The bar has to grow OUTWARD from the center of the vehicle toward the corner that is turning, on both bars at once.</a:t>
             </a:r>
           </a:p>
           <a:p>
@@ -9165,7 +9165,7 @@
                 </a:solidFill>
                 <a:latin typeface="Consolas"/>
               </a:rPr>
-              <a:t>// ...then blank the signalling side, then draw the amber over it.</a:t>
+              <a:t>// ...then blank the signaling side, then draw the amber over it.</a:t>
             </a:r>
           </a:p>
           <a:p>
@@ -10590,7 +10590,7 @@
                 </a:solidFill>
                 <a:latin typeface="Calibri"/>
               </a:rPr>
-              <a:t>Amber growing outward from the centre towards the turning corner, front and rear mirrored.</a:t>
+              <a:t>Amber growing outward from the center toward the turning corner, front and rear mirrored.</a:t>
             </a:r>
           </a:p>
         </p:txBody>
@@ -15149,7 +15149,7 @@
                           </a:solidFill>
                           <a:latin typeface="Calibri"/>
                         </a:rPr>
-                        <a:t>Colour helpers, and why they are written out longhand</a:t>
+                        <a:t>Color helpers, and why they are written out longhand</a:t>
                       </a:r>
                     </a:p>
                   </a:txBody>

--- a/ground-vehicle/docs/courses/advanced/l4_lighting_state_machine.pptx
+++ b/ground-vehicle/docs/courses/advanced/l4_lighting_state_machine.pptx
@@ -6596,7 +6596,7 @@
         <p:spPr>
           <a:xfrm>
             <a:off x="502920" y="1901952"/>
-            <a:ext cx="5387187" cy="4361688"/>
+            <a:ext cx="6249137" cy="4361688"/>
           </a:xfrm>
           <a:prstGeom prst="rect">
             <a:avLst/>
@@ -6616,15 +6616,15 @@
               <a:spcAft>
                 <a:spcPts val="800"/>
               </a:spcAft>
-              <a:defRPr sz="1800" b="0">
-                <a:solidFill>
-                  <a:srgbClr val="222222"/>
-                </a:solidFill>
-                <a:latin typeface="Calibri"/>
-              </a:defRPr>
-            </a:pPr>
-            <a:r>
-              <a:rPr sz="1800" b="0">
+              <a:defRPr sz="1900" b="0">
+                <a:solidFill>
+                  <a:srgbClr val="222222"/>
+                </a:solidFill>
+                <a:latin typeface="Calibri"/>
+              </a:defRPr>
+            </a:pPr>
+            <a:r>
+              <a:rPr sz="1900" b="0">
                 <a:solidFill>
                   <a:srgbClr val="222222"/>
                 </a:solidFill>
@@ -6641,15 +6641,15 @@
               <a:spcAft>
                 <a:spcPts val="800"/>
               </a:spcAft>
-              <a:defRPr sz="1800" b="0">
-                <a:solidFill>
-                  <a:srgbClr val="222222"/>
-                </a:solidFill>
-                <a:latin typeface="Calibri"/>
-              </a:defRPr>
-            </a:pPr>
-            <a:r>
-              <a:rPr sz="1800" b="0">
+              <a:defRPr sz="1900" b="0">
+                <a:solidFill>
+                  <a:srgbClr val="222222"/>
+                </a:solidFill>
+                <a:latin typeface="Calibri"/>
+              </a:defRPr>
+            </a:pPr>
+            <a:r>
+              <a:rPr sz="1900" b="0">
                 <a:solidFill>
                   <a:srgbClr val="222222"/>
                 </a:solidFill>
@@ -6666,15 +6666,15 @@
               <a:spcAft>
                 <a:spcPts val="800"/>
               </a:spcAft>
-              <a:defRPr sz="1800" b="0">
-                <a:solidFill>
-                  <a:srgbClr val="222222"/>
-                </a:solidFill>
-                <a:latin typeface="Calibri"/>
-              </a:defRPr>
-            </a:pPr>
-            <a:r>
-              <a:rPr sz="1800" b="0">
+              <a:defRPr sz="1900" b="0">
+                <a:solidFill>
+                  <a:srgbClr val="222222"/>
+                </a:solidFill>
+                <a:latin typeface="Calibri"/>
+              </a:defRPr>
+            </a:pPr>
+            <a:r>
+              <a:rPr sz="1900" b="0">
                 <a:solidFill>
                   <a:srgbClr val="222222"/>
                 </a:solidFill>
@@ -6691,15 +6691,15 @@
               <a:spcAft>
                 <a:spcPts val="800"/>
               </a:spcAft>
-              <a:defRPr sz="1800" b="0">
-                <a:solidFill>
-                  <a:srgbClr val="222222"/>
-                </a:solidFill>
-                <a:latin typeface="Calibri"/>
-              </a:defRPr>
-            </a:pPr>
-            <a:r>
-              <a:rPr sz="1800" b="0">
+              <a:defRPr sz="1900" b="0">
+                <a:solidFill>
+                  <a:srgbClr val="222222"/>
+                </a:solidFill>
+                <a:latin typeface="Calibri"/>
+              </a:defRPr>
+            </a:pPr>
+            <a:r>
+              <a:rPr sz="1900" b="0">
                 <a:solidFill>
                   <a:srgbClr val="222222"/>
                 </a:solidFill>
@@ -6716,15 +6716,15 @@
               <a:spcAft>
                 <a:spcPts val="800"/>
               </a:spcAft>
-              <a:defRPr sz="1800" b="0">
-                <a:solidFill>
-                  <a:srgbClr val="222222"/>
-                </a:solidFill>
-                <a:latin typeface="Calibri"/>
-              </a:defRPr>
-            </a:pPr>
-            <a:r>
-              <a:rPr sz="1800" b="0">
+              <a:defRPr sz="1900" b="0">
+                <a:solidFill>
+                  <a:srgbClr val="222222"/>
+                </a:solidFill>
+                <a:latin typeface="Calibri"/>
+              </a:defRPr>
+            </a:pPr>
+            <a:r>
+              <a:rPr sz="1900" b="0">
                 <a:solidFill>
                   <a:srgbClr val="222222"/>
                 </a:solidFill>
@@ -6741,15 +6741,15 @@
               <a:spcAft>
                 <a:spcPts val="800"/>
               </a:spcAft>
-              <a:defRPr sz="1800" b="0">
-                <a:solidFill>
-                  <a:srgbClr val="222222"/>
-                </a:solidFill>
-                <a:latin typeface="Calibri"/>
-              </a:defRPr>
-            </a:pPr>
-            <a:r>
-              <a:rPr sz="1800" b="0">
+              <a:defRPr sz="1900" b="0">
+                <a:solidFill>
+                  <a:srgbClr val="222222"/>
+                </a:solidFill>
+                <a:latin typeface="Calibri"/>
+              </a:defRPr>
+            </a:pPr>
+            <a:r>
+              <a:rPr sz="1900" b="0">
                 <a:solidFill>
                   <a:srgbClr val="222222"/>
                 </a:solidFill>
@@ -6768,8 +6768,8 @@
         </p:nvSpPr>
         <p:spPr>
           <a:xfrm>
-            <a:off x="6301587" y="1901952"/>
-            <a:ext cx="5387187" cy="365760"/>
+            <a:off x="7163537" y="1901952"/>
+            <a:ext cx="4525238" cy="365760"/>
           </a:xfrm>
           <a:prstGeom prst="rect">
             <a:avLst/>
@@ -6816,8 +6816,8 @@
         </p:nvSpPr>
         <p:spPr>
           <a:xfrm>
-            <a:off x="6301587" y="2304288"/>
-            <a:ext cx="5387187" cy="1778508"/>
+            <a:off x="7163537" y="2304288"/>
+            <a:ext cx="4525238" cy="1458305"/>
           </a:xfrm>
           <a:prstGeom prst="rect">
             <a:avLst/>
@@ -6835,17 +6835,17 @@
                 <a:spcPct val="100000"/>
               </a:lnSpc>
               <a:spcAft>
-                <a:spcPts val="600"/>
-              </a:spcAft>
-              <a:defRPr sz="2900" b="0">
-                <a:solidFill>
-                  <a:srgbClr val="222222"/>
-                </a:solidFill>
-                <a:latin typeface="Calibri"/>
-              </a:defRPr>
-            </a:pPr>
-            <a:r>
-              <a:rPr sz="2900" b="0">
+                <a:spcPts val="300"/>
+              </a:spcAft>
+              <a:defRPr sz="2400" b="0">
+                <a:solidFill>
+                  <a:srgbClr val="222222"/>
+                </a:solidFill>
+                <a:latin typeface="Calibri"/>
+              </a:defRPr>
+            </a:pPr>
+            <a:r>
+              <a:rPr sz="2400" b="0">
                 <a:solidFill>
                   <a:srgbClr val="222222"/>
                 </a:solidFill>
@@ -6864,8 +6864,8 @@
         </p:nvSpPr>
         <p:spPr>
           <a:xfrm>
-            <a:off x="6301587" y="4119372"/>
-            <a:ext cx="5387187" cy="365760"/>
+            <a:off x="7163537" y="3835745"/>
+            <a:ext cx="4525238" cy="365760"/>
           </a:xfrm>
           <a:prstGeom prst="rect">
             <a:avLst/>
@@ -6912,8 +6912,8 @@
         </p:nvSpPr>
         <p:spPr>
           <a:xfrm>
-            <a:off x="6301587" y="4521708"/>
-            <a:ext cx="5387187" cy="1778508"/>
+            <a:off x="7163537" y="4238081"/>
+            <a:ext cx="4525238" cy="2025558"/>
           </a:xfrm>
           <a:prstGeom prst="rect">
             <a:avLst/>
@@ -6933,15 +6933,15 @@
               <a:spcAft>
                 <a:spcPts val="300"/>
               </a:spcAft>
-              <a:defRPr sz="2600" b="0">
-                <a:solidFill>
-                  <a:srgbClr val="222222"/>
-                </a:solidFill>
-                <a:latin typeface="Calibri"/>
-              </a:defRPr>
-            </a:pPr>
-            <a:r>
-              <a:rPr sz="2600" b="0">
+              <a:defRPr sz="2400" b="0">
+                <a:solidFill>
+                  <a:srgbClr val="222222"/>
+                </a:solidFill>
+                <a:latin typeface="Calibri"/>
+              </a:defRPr>
+            </a:pPr>
+            <a:r>
+              <a:rPr sz="2400" b="0">
                 <a:solidFill>
                   <a:srgbClr val="222222"/>
                 </a:solidFill>
@@ -6958,15 +6958,15 @@
               <a:spcAft>
                 <a:spcPts val="300"/>
               </a:spcAft>
-              <a:defRPr sz="2600" b="0">
-                <a:solidFill>
-                  <a:srgbClr val="222222"/>
-                </a:solidFill>
-                <a:latin typeface="Calibri"/>
-              </a:defRPr>
-            </a:pPr>
-            <a:r>
-              <a:rPr sz="2600" b="0">
+              <a:defRPr sz="2400" b="0">
+                <a:solidFill>
+                  <a:srgbClr val="222222"/>
+                </a:solidFill>
+                <a:latin typeface="Calibri"/>
+              </a:defRPr>
+            </a:pPr>
+            <a:r>
+              <a:rPr sz="2400" b="0">
                 <a:solidFill>
                   <a:srgbClr val="222222"/>
                 </a:solidFill>
@@ -10335,7 +10335,7 @@
         <p:spPr>
           <a:xfrm>
             <a:off x="502920" y="1901952"/>
-            <a:ext cx="5387187" cy="4361688"/>
+            <a:ext cx="6249137" cy="4361688"/>
           </a:xfrm>
           <a:prstGeom prst="rect">
             <a:avLst/>
@@ -10355,15 +10355,15 @@
               <a:spcAft>
                 <a:spcPts val="800"/>
               </a:spcAft>
-              <a:defRPr sz="1900" b="0">
-                <a:solidFill>
-                  <a:srgbClr val="222222"/>
-                </a:solidFill>
-                <a:latin typeface="Calibri"/>
-              </a:defRPr>
-            </a:pPr>
-            <a:r>
-              <a:rPr sz="1900" b="0">
+              <a:defRPr sz="2100" b="0">
+                <a:solidFill>
+                  <a:srgbClr val="222222"/>
+                </a:solidFill>
+                <a:latin typeface="Calibri"/>
+              </a:defRPr>
+            </a:pPr>
+            <a:r>
+              <a:rPr sz="2100" b="0">
                 <a:solidFill>
                   <a:srgbClr val="222222"/>
                 </a:solidFill>
@@ -10380,15 +10380,15 @@
               <a:spcAft>
                 <a:spcPts val="800"/>
               </a:spcAft>
-              <a:defRPr sz="1900" b="0">
-                <a:solidFill>
-                  <a:srgbClr val="222222"/>
-                </a:solidFill>
-                <a:latin typeface="Calibri"/>
-              </a:defRPr>
-            </a:pPr>
-            <a:r>
-              <a:rPr sz="1900" b="0">
+              <a:defRPr sz="2100" b="0">
+                <a:solidFill>
+                  <a:srgbClr val="222222"/>
+                </a:solidFill>
+                <a:latin typeface="Calibri"/>
+              </a:defRPr>
+            </a:pPr>
+            <a:r>
+              <a:rPr sz="2100" b="0">
                 <a:solidFill>
                   <a:srgbClr val="222222"/>
                 </a:solidFill>
@@ -10405,15 +10405,15 @@
               <a:spcAft>
                 <a:spcPts val="800"/>
               </a:spcAft>
-              <a:defRPr sz="1900" b="0">
-                <a:solidFill>
-                  <a:srgbClr val="222222"/>
-                </a:solidFill>
-                <a:latin typeface="Calibri"/>
-              </a:defRPr>
-            </a:pPr>
-            <a:r>
-              <a:rPr sz="1900" b="0">
+              <a:defRPr sz="2100" b="0">
+                <a:solidFill>
+                  <a:srgbClr val="222222"/>
+                </a:solidFill>
+                <a:latin typeface="Calibri"/>
+              </a:defRPr>
+            </a:pPr>
+            <a:r>
+              <a:rPr sz="2100" b="0">
                 <a:solidFill>
                   <a:srgbClr val="222222"/>
                 </a:solidFill>
@@ -10430,15 +10430,15 @@
               <a:spcAft>
                 <a:spcPts val="800"/>
               </a:spcAft>
-              <a:defRPr sz="1900" b="0">
-                <a:solidFill>
-                  <a:srgbClr val="222222"/>
-                </a:solidFill>
-                <a:latin typeface="Calibri"/>
-              </a:defRPr>
-            </a:pPr>
-            <a:r>
-              <a:rPr sz="1900" b="0">
+              <a:defRPr sz="2100" b="0">
+                <a:solidFill>
+                  <a:srgbClr val="222222"/>
+                </a:solidFill>
+                <a:latin typeface="Calibri"/>
+              </a:defRPr>
+            </a:pPr>
+            <a:r>
+              <a:rPr sz="2100" b="0">
                 <a:solidFill>
                   <a:srgbClr val="222222"/>
                 </a:solidFill>
@@ -10455,15 +10455,15 @@
               <a:spcAft>
                 <a:spcPts val="800"/>
               </a:spcAft>
-              <a:defRPr sz="1900" b="0">
-                <a:solidFill>
-                  <a:srgbClr val="222222"/>
-                </a:solidFill>
-                <a:latin typeface="Calibri"/>
-              </a:defRPr>
-            </a:pPr>
-            <a:r>
-              <a:rPr sz="1900" b="0">
+              <a:defRPr sz="2100" b="0">
+                <a:solidFill>
+                  <a:srgbClr val="222222"/>
+                </a:solidFill>
+                <a:latin typeface="Calibri"/>
+              </a:defRPr>
+            </a:pPr>
+            <a:r>
+              <a:rPr sz="2100" b="0">
                 <a:solidFill>
                   <a:srgbClr val="222222"/>
                 </a:solidFill>
@@ -10480,15 +10480,15 @@
               <a:spcAft>
                 <a:spcPts val="800"/>
               </a:spcAft>
-              <a:defRPr sz="1900" b="0">
-                <a:solidFill>
-                  <a:srgbClr val="222222"/>
-                </a:solidFill>
-                <a:latin typeface="Calibri"/>
-              </a:defRPr>
-            </a:pPr>
-            <a:r>
-              <a:rPr sz="1900" b="0">
+              <a:defRPr sz="2100" b="0">
+                <a:solidFill>
+                  <a:srgbClr val="222222"/>
+                </a:solidFill>
+                <a:latin typeface="Calibri"/>
+              </a:defRPr>
+            </a:pPr>
+            <a:r>
+              <a:rPr sz="2100" b="0">
                 <a:solidFill>
                   <a:srgbClr val="222222"/>
                 </a:solidFill>
@@ -10507,8 +10507,8 @@
         </p:nvSpPr>
         <p:spPr>
           <a:xfrm>
-            <a:off x="6301587" y="1901952"/>
-            <a:ext cx="5387187" cy="365760"/>
+            <a:off x="7163537" y="1901952"/>
+            <a:ext cx="4525238" cy="365760"/>
           </a:xfrm>
           <a:prstGeom prst="rect">
             <a:avLst/>
@@ -10555,8 +10555,8 @@
         </p:nvSpPr>
         <p:spPr>
           <a:xfrm>
-            <a:off x="6301587" y="2304288"/>
-            <a:ext cx="5387187" cy="1778508"/>
+            <a:off x="7163537" y="2304288"/>
+            <a:ext cx="4525238" cy="1458305"/>
           </a:xfrm>
           <a:prstGeom prst="rect">
             <a:avLst/>
@@ -10574,17 +10574,17 @@
                 <a:spcPct val="100000"/>
               </a:lnSpc>
               <a:spcAft>
-                <a:spcPts val="600"/>
-              </a:spcAft>
-              <a:defRPr sz="2800" b="0">
-                <a:solidFill>
-                  <a:srgbClr val="222222"/>
-                </a:solidFill>
-                <a:latin typeface="Calibri"/>
-              </a:defRPr>
-            </a:pPr>
-            <a:r>
-              <a:rPr sz="2800" b="0">
+                <a:spcPts val="300"/>
+              </a:spcAft>
+              <a:defRPr sz="2300" b="0">
+                <a:solidFill>
+                  <a:srgbClr val="222222"/>
+                </a:solidFill>
+                <a:latin typeface="Calibri"/>
+              </a:defRPr>
+            </a:pPr>
+            <a:r>
+              <a:rPr sz="2300" b="0">
                 <a:solidFill>
                   <a:srgbClr val="222222"/>
                 </a:solidFill>
@@ -10603,8 +10603,8 @@
         </p:nvSpPr>
         <p:spPr>
           <a:xfrm>
-            <a:off x="6301587" y="4119372"/>
-            <a:ext cx="5387187" cy="365760"/>
+            <a:off x="7163537" y="3835745"/>
+            <a:ext cx="4525238" cy="365760"/>
           </a:xfrm>
           <a:prstGeom prst="rect">
             <a:avLst/>
@@ -10651,8 +10651,8 @@
         </p:nvSpPr>
         <p:spPr>
           <a:xfrm>
-            <a:off x="6301587" y="4521708"/>
-            <a:ext cx="5387187" cy="1778508"/>
+            <a:off x="7163537" y="4238081"/>
+            <a:ext cx="4525238" cy="2025558"/>
           </a:xfrm>
           <a:prstGeom prst="rect">
             <a:avLst/>
@@ -10672,15 +10672,15 @@
               <a:spcAft>
                 <a:spcPts val="300"/>
               </a:spcAft>
-              <a:defRPr sz="2100" b="0">
-                <a:solidFill>
-                  <a:srgbClr val="222222"/>
-                </a:solidFill>
-                <a:latin typeface="Calibri"/>
-              </a:defRPr>
-            </a:pPr>
-            <a:r>
-              <a:rPr sz="2100" b="0">
+              <a:defRPr sz="2000" b="0">
+                <a:solidFill>
+                  <a:srgbClr val="222222"/>
+                </a:solidFill>
+                <a:latin typeface="Calibri"/>
+              </a:defRPr>
+            </a:pPr>
+            <a:r>
+              <a:rPr sz="2000" b="0">
                 <a:solidFill>
                   <a:srgbClr val="222222"/>
                 </a:solidFill>
@@ -10697,15 +10697,15 @@
               <a:spcAft>
                 <a:spcPts val="300"/>
               </a:spcAft>
-              <a:defRPr sz="2100" b="0">
-                <a:solidFill>
-                  <a:srgbClr val="222222"/>
-                </a:solidFill>
-                <a:latin typeface="Calibri"/>
-              </a:defRPr>
-            </a:pPr>
-            <a:r>
-              <a:rPr sz="2100" b="0">
+              <a:defRPr sz="2000" b="0">
+                <a:solidFill>
+                  <a:srgbClr val="222222"/>
+                </a:solidFill>
+                <a:latin typeface="Calibri"/>
+              </a:defRPr>
+            </a:pPr>
+            <a:r>
+              <a:rPr sz="2000" b="0">
                 <a:solidFill>
                   <a:srgbClr val="222222"/>
                 </a:solidFill>

--- a/ground-vehicle/docs/courses/advanced/l4_lighting_state_machine.pptx
+++ b/ground-vehicle/docs/courses/advanced/l4_lighting_state_machine.pptx
@@ -27,8 +27,6 @@
     <p:sldId id="275" r:id="rId27"/>
     <p:sldId id="276" r:id="rId28"/>
     <p:sldId id="277" r:id="rId29"/>
-    <p:sldId id="278" r:id="rId30"/>
-    <p:sldId id="279" r:id="rId31"/>
   </p:sldIdLst>
   <p:sldSz cx="12191695" cy="6858000" type="screen4x3"/>
   <p:notesSz cx="6858000" cy="9144000"/>
@@ -1006,16 +1004,15 @@
               <a:rPr sz="1200">
                 <a:latin typeface="Calibri"/>
               </a:rPr>
-              <a:t>(Continued from the previous slide - the same notes apply.)</a:t>
-            </a:r>
-          </a:p>
-          <a:p/>
+              <a:t>Two details, both of which look like paranoia until you skip them.</a:t>
+            </a:r>
+          </a:p>
           <a:p>
             <a:r>
               <a:rPr sz="1200">
                 <a:latin typeface="Calibri"/>
               </a:rPr>
-              <a:t>This is the hardest slide in the lesson. Have a real vehicle out and point at LEDs while you talk.</a:t>
+              <a:t>Repainting the base first means the previous frame is not left underneath. Ask what a signal painted over a stale frame would look like.</a:t>
             </a:r>
           </a:p>
           <a:p>
@@ -1023,7 +1020,7 @@
               <a:rPr sz="1200">
                 <a:latin typeface="Calibri"/>
               </a:rPr>
-              <a:t>The strip is ONE loop, so the two halves of each side run in opposite directions. That is the whole reason the arithmetic is asymmetric.</a:t>
+              <a:t>The D-pad only STARTS the animation. It does not hold it on and it does not stop it.</a:t>
             </a:r>
           </a:p>
           <a:p>
@@ -1031,15 +1028,7 @@
               <a:rPr sz="1200">
                 <a:latin typeface="Calibri"/>
               </a:rPr>
-              <a:t>The bar grows outward from the center toward the turning corner, on both bars at once. Trace it with a finger before showing the indices.</a:t>
-            </a:r>
-          </a:p>
-          <a:p>
-            <a:r>
-              <a:rPr sz="1200">
-                <a:latin typeface="Calibri"/>
-              </a:rPr>
-              <a:t>Take the advice on the slide seriously: do not derive it. Step through it and read the numbers off a real vehicle. They do exactly that in the activity.</a:t>
+              <a:t>That matches a real indicator, which finishes its blink after you let go of the stalk. Small detail, and it is what makes it feel right.</a:t>
             </a:r>
           </a:p>
         </p:txBody>
@@ -1112,31 +1101,7 @@
               <a:rPr sz="1200">
                 <a:latin typeface="Calibri"/>
               </a:rPr>
-              <a:t>Two details, both of which look like paranoia until you skip them.</a:t>
-            </a:r>
-          </a:p>
-          <a:p>
-            <a:r>
-              <a:rPr sz="1200">
-                <a:latin typeface="Calibri"/>
-              </a:rPr>
-              <a:t>Repainting the base first means the previous frame is not left underneath. Ask what a signal painted over a stale frame would look like.</a:t>
-            </a:r>
-          </a:p>
-          <a:p>
-            <a:r>
-              <a:rPr sz="1200">
-                <a:latin typeface="Calibri"/>
-              </a:rPr>
-              <a:t>The D-pad only STARTS the animation. It does not hold it on and it does not stop it.</a:t>
-            </a:r>
-          </a:p>
-          <a:p>
-            <a:r>
-              <a:rPr sz="1200">
-                <a:latin typeface="Calibri"/>
-              </a:rPr>
-              <a:t>That matches a real indicator, which finishes its blink after you let go of the stalk. Small detail, and it is what makes it feel right.</a:t>
+              <a:t>Twenty seconds. Second activity.</a:t>
             </a:r>
           </a:p>
         </p:txBody>
@@ -1209,7 +1174,31 @@
               <a:rPr sz="1200">
                 <a:latin typeface="Calibri"/>
               </a:rPr>
-              <a:t>Twenty seconds. Second activity.</a:t>
+              <a:t>Step 2 is the point of the whole activity: freeze it, step it, and read the indices against a real vehicle.</a:t>
+            </a:r>
+          </a:p>
+          <a:p>
+            <a:r>
+              <a:rPr sz="1200">
+                <a:latin typeface="Calibri"/>
+              </a:rPr>
+              <a:t>Step 5 breaks the left branch on purpose. The bar grows the wrong way, inward instead of outward, and they should be able to say why.</a:t>
+            </a:r>
+          </a:p>
+          <a:p>
+            <a:r>
+              <a:rPr sz="1200">
+                <a:latin typeface="Calibri"/>
+              </a:rPr>
+              <a:t>Step 6 is open-ended. A fading trailing edge needs scale_color(), which they met two slides ago.</a:t>
+            </a:r>
+          </a:p>
+          <a:p>
+            <a:r>
+              <a:rPr sz="1200">
+                <a:latin typeface="Calibri"/>
+              </a:rPr>
+              <a:t>Answers: the front counts down for a left signal because the left half of the front bar is indices 0 to 7 and the growth is outward from 8; without the base repaint you would see the previous frame left underneath.</a:t>
             </a:r>
           </a:p>
         </p:txBody>
@@ -1282,7 +1271,7 @@
               <a:rPr sz="1200">
                 <a:latin typeface="Calibri"/>
               </a:rPr>
-              <a:t>Step 2 is the point of the whole activity: freeze it, step it, and read the indices against a real vehicle.</a:t>
+              <a:t>This is the whole state machine on one screen. Let them look at it in silence for thirty seconds before you say anything.</a:t>
             </a:r>
           </a:p>
           <a:p>
@@ -1290,7 +1279,7 @@
               <a:rPr sz="1200">
                 <a:latin typeface="Calibri"/>
               </a:rPr>
-              <a:t>Step 5 breaks the left branch on purpose. The bar grows the wrong way, inward instead of outward, and they should be able to say why.</a:t>
+              <a:t>Every branch does the same three things: is it my turn, is it time yet, draw one frame. Get them to notice the repetition themselves.</a:t>
             </a:r>
           </a:p>
           <a:p>
@@ -1298,7 +1287,7 @@
               <a:rPr sz="1200">
                 <a:latin typeface="Calibri"/>
               </a:rPr>
-              <a:t>Step 6 is open-ended. A fading trailing edge needs scale_color(), which they met two slides ago.</a:t>
+              <a:t>The early returns are what keeps it flat and readable. Ask what this would look like as nested ifs.</a:t>
             </a:r>
           </a:p>
           <a:p>
@@ -1306,7 +1295,7 @@
               <a:rPr sz="1200">
                 <a:latin typeface="Calibri"/>
               </a:rPr>
-              <a:t>Answers: the front counts down for a left signal because the left half of the front bar is indices 0 to 7 and the growth is outward from 8; without the base repaint you would see the previous frame left underneath.</a:t>
+              <a:t>Point out that STANDBY is last and is the only branch guarded by a flag rather than a clock.</a:t>
             </a:r>
           </a:p>
         </p:txBody>
@@ -1379,6 +1368,15 @@
               <a:rPr sz="1200">
                 <a:latin typeface="Calibri"/>
               </a:rPr>
+              <a:t>(Continued from the previous slide - the same notes apply.)</a:t>
+            </a:r>
+          </a:p>
+          <a:p/>
+          <a:p>
+            <a:r>
+              <a:rPr sz="1200">
+                <a:latin typeface="Calibri"/>
+              </a:rPr>
               <a:t>This is the whole state machine on one screen. Let them look at it in silence for thirty seconds before you say anything.</a:t>
             </a:r>
           </a:p>
@@ -1476,16 +1474,15 @@
               <a:rPr sz="1200">
                 <a:latin typeface="Calibri"/>
               </a:rPr>
-              <a:t>(Continued from the previous slide - the same notes apply.)</a:t>
-            </a:r>
-          </a:p>
-          <a:p/>
+              <a:t>Start with why a linear fade looks wrong: it appears to hover at the ends and rush through the middle.</a:t>
+            </a:r>
+          </a:p>
           <a:p>
             <a:r>
               <a:rPr sz="1200">
                 <a:latin typeface="Calibri"/>
               </a:rPr>
-              <a:t>This is the whole state machine on one screen. Let them look at it in silence for thirty seconds before you say anything.</a:t>
+              <a:t>A sine slows at the extremes, which is what your eye expects. That is a perception point, like the color lesson in the beginner course.</a:t>
             </a:r>
           </a:p>
           <a:p>
@@ -1493,7 +1490,7 @@
               <a:rPr sz="1200">
                 <a:latin typeface="Calibri"/>
               </a:rPr>
-              <a:t>Every branch does the same three things: is it my turn, is it time yet, draw one frame. Get them to notice the repetition themselves.</a:t>
+              <a:t>The 0..255 in, 0..255 out convention keeps floating point out of the caller entirely. Worth noticing as an interface design choice.</a:t>
             </a:r>
           </a:p>
           <a:p>
@@ -1501,15 +1498,7 @@
               <a:rPr sz="1200">
                 <a:latin typeface="Calibri"/>
               </a:rPr>
-              <a:t>The early returns are what keeps it flat and readable. Ask what this would look like as nested ifs.</a:t>
-            </a:r>
-          </a:p>
-          <a:p>
-            <a:r>
-              <a:rPr sz="1200">
-                <a:latin typeface="Calibri"/>
-              </a:rPr>
-              <a:t>Point out that STANDBY is last and is the only branch guarded by a flag rather than a clock.</a:t>
+              <a:t>Deriving the phase from millis() rather than a counter means the animation keeps correct time even if a frame is missed. That is the transferable idea.</a:t>
             </a:r>
           </a:p>
         </p:txBody>
@@ -1655,6 +1644,15 @@
               <a:rPr sz="1200">
                 <a:latin typeface="Calibri"/>
               </a:rPr>
+              <a:t>(Continued from the previous slide - the same notes apply.)</a:t>
+            </a:r>
+          </a:p>
+          <a:p/>
+          <a:p>
+            <a:r>
+              <a:rPr sz="1200">
+                <a:latin typeface="Calibri"/>
+              </a:rPr>
               <a:t>Start with why a linear fade looks wrong: it appears to hover at the ends and rush through the middle.</a:t>
             </a:r>
           </a:p>
@@ -1752,16 +1750,15 @@
               <a:rPr sz="1200">
                 <a:latin typeface="Calibri"/>
               </a:rPr>
-              <a:t>(Continued from the previous slide - the same notes apply.)</a:t>
-            </a:r>
-          </a:p>
-          <a:p/>
+              <a:t>Thirty minutes, hands off. Circulate but do not solve.</a:t>
+            </a:r>
+          </a:p>
           <a:p>
             <a:r>
               <a:rPr sz="1200">
                 <a:latin typeface="Calibri"/>
               </a:rPr>
-              <a:t>Start with why a linear fade looks wrong: it appears to hover at the ends and rush through the middle.</a:t>
+              <a:t>The five steps are the architecture of the program, restated as a recipe. Insist on step 2 - constants at the top, not buried in the function.</a:t>
             </a:r>
           </a:p>
           <a:p>
@@ -1769,7 +1766,7 @@
               <a:rPr sz="1200">
                 <a:latin typeface="Calibri"/>
               </a:rPr>
-              <a:t>A sine slows at the extremes, which is what your eye expects. That is a perception point, like the color lesson in the beginner course.</a:t>
+              <a:t>The first question is the real assessment. Count the lines they had to change in existing code.</a:t>
             </a:r>
           </a:p>
           <a:p>
@@ -1777,7 +1774,7 @@
               <a:rPr sz="1200">
                 <a:latin typeface="Calibri"/>
               </a:rPr>
-              <a:t>The 0..255 in, 0..255 out convention keeps floating point out of the caller entirely. Worth noticing as an interface design choice.</a:t>
+              <a:t>HAZARD and TURN_LEFT can never both be on, because there is one variable holding one value. Make sure somebody says that out loud.</a:t>
             </a:r>
           </a:p>
           <a:p>
@@ -1785,7 +1782,7 @@
               <a:rPr sz="1200">
                 <a:latin typeface="Calibri"/>
               </a:rPr>
-              <a:t>Deriving the phase from millis() rather than a counter means the animation keeps correct time even if a frame is missed. That is the transferable idea.</a:t>
+              <a:t>Leave five minutes to demonstrate. Every group shows theirs.</a:t>
             </a:r>
           </a:p>
         </p:txBody>
@@ -1811,225 +1808,6 @@
 </file>
 
 <file path=ppt/notesSlides/notesSlide22.xml><?xml version="1.0" encoding="utf-8"?>
-<p:notes xmlns:a="http://schemas.openxmlformats.org/drawingml/2006/main" xmlns:p="http://schemas.openxmlformats.org/presentationml/2006/main" xmlns:r="http://schemas.openxmlformats.org/officeDocument/2006/relationships">
-  <p:cSld>
-    <p:spTree>
-      <p:nvGrpSpPr>
-        <p:cNvPr id="1" name=""/>
-        <p:cNvGrpSpPr/>
-        <p:nvPr/>
-      </p:nvGrpSpPr>
-      <p:grpSpPr>
-        <a:xfrm>
-          <a:off x="0" y="0"/>
-          <a:ext cx="0" cy="0"/>
-          <a:chOff x="0" y="0"/>
-          <a:chExt cx="0" cy="0"/>
-        </a:xfrm>
-      </p:grpSpPr>
-      <p:sp>
-        <p:nvSpPr>
-          <p:cNvPr id="2" name="Slide Image Placeholder 1"/>
-          <p:cNvSpPr>
-            <a:spLocks noGrp="1"/>
-          </p:cNvSpPr>
-          <p:nvPr>
-            <p:ph type="sldImg" idx="2"/>
-          </p:nvPr>
-        </p:nvSpPr>
-        <p:spPr/>
-      </p:sp>
-      <p:sp>
-        <p:nvSpPr>
-          <p:cNvPr id="3" name="Notes Placeholder 2"/>
-          <p:cNvSpPr>
-            <a:spLocks noGrp="1"/>
-          </p:cNvSpPr>
-          <p:nvPr>
-            <p:ph type="body" idx="3" sz="quarter"/>
-          </p:nvPr>
-        </p:nvSpPr>
-        <p:spPr/>
-        <p:txBody>
-          <a:bodyPr/>
-          <a:lstStyle/>
-          <a:p>
-            <a:r>
-              <a:rPr sz="1200">
-                <a:latin typeface="Calibri"/>
-              </a:rPr>
-              <a:t>Thirty minutes, hands off. Circulate but do not solve.</a:t>
-            </a:r>
-          </a:p>
-          <a:p>
-            <a:r>
-              <a:rPr sz="1200">
-                <a:latin typeface="Calibri"/>
-              </a:rPr>
-              <a:t>The five steps are the architecture of the program, restated as a recipe. Insist on step 2 - constants at the top, not buried in the function.</a:t>
-            </a:r>
-          </a:p>
-          <a:p>
-            <a:r>
-              <a:rPr sz="1200">
-                <a:latin typeface="Calibri"/>
-              </a:rPr>
-              <a:t>The first question is the real assessment. Count the lines they had to change in existing code.</a:t>
-            </a:r>
-          </a:p>
-          <a:p>
-            <a:r>
-              <a:rPr sz="1200">
-                <a:latin typeface="Calibri"/>
-              </a:rPr>
-              <a:t>HAZARD and TURN_LEFT can never both be on, because there is one variable holding one value. Make sure somebody says that out loud.</a:t>
-            </a:r>
-          </a:p>
-          <a:p>
-            <a:r>
-              <a:rPr sz="1200">
-                <a:latin typeface="Calibri"/>
-              </a:rPr>
-              <a:t>Leave five minutes to demonstrate. Every group shows theirs.</a:t>
-            </a:r>
-          </a:p>
-        </p:txBody>
-      </p:sp>
-      <p:sp>
-        <p:nvSpPr>
-          <p:cNvPr id="4" name="Slide Number Placeholder 3"/>
-          <p:cNvSpPr>
-            <a:spLocks noGrp="1"/>
-          </p:cNvSpPr>
-          <p:nvPr>
-            <p:ph type="sldNum" idx="5" sz="quarter"/>
-          </p:nvPr>
-        </p:nvSpPr>
-        <p:spPr/>
-      </p:sp>
-    </p:spTree>
-  </p:cSld>
-  <p:clrMapOvr>
-    <a:masterClrMapping/>
-  </p:clrMapOvr>
-</p:notes>
-</file>
-
-<file path=ppt/notesSlides/notesSlide23.xml><?xml version="1.0" encoding="utf-8"?>
-<p:notes xmlns:a="http://schemas.openxmlformats.org/drawingml/2006/main" xmlns:p="http://schemas.openxmlformats.org/presentationml/2006/main" xmlns:r="http://schemas.openxmlformats.org/officeDocument/2006/relationships">
-  <p:cSld>
-    <p:spTree>
-      <p:nvGrpSpPr>
-        <p:cNvPr id="1" name=""/>
-        <p:cNvGrpSpPr/>
-        <p:nvPr/>
-      </p:nvGrpSpPr>
-      <p:grpSpPr>
-        <a:xfrm>
-          <a:off x="0" y="0"/>
-          <a:ext cx="0" cy="0"/>
-          <a:chOff x="0" y="0"/>
-          <a:chExt cx="0" cy="0"/>
-        </a:xfrm>
-      </p:grpSpPr>
-      <p:sp>
-        <p:nvSpPr>
-          <p:cNvPr id="2" name="Slide Image Placeholder 1"/>
-          <p:cNvSpPr>
-            <a:spLocks noGrp="1"/>
-          </p:cNvSpPr>
-          <p:nvPr>
-            <p:ph type="sldImg" idx="2"/>
-          </p:nvPr>
-        </p:nvSpPr>
-        <p:spPr/>
-      </p:sp>
-      <p:sp>
-        <p:nvSpPr>
-          <p:cNvPr id="3" name="Notes Placeholder 2"/>
-          <p:cNvSpPr>
-            <a:spLocks noGrp="1"/>
-          </p:cNvSpPr>
-          <p:nvPr>
-            <p:ph type="body" idx="3" sz="quarter"/>
-          </p:nvPr>
-        </p:nvSpPr>
-        <p:spPr/>
-        <p:txBody>
-          <a:bodyPr/>
-          <a:lstStyle/>
-          <a:p>
-            <a:r>
-              <a:rPr sz="1200">
-                <a:latin typeface="Calibri"/>
-              </a:rPr>
-              <a:t>(Continued from the previous slide - the same notes apply.)</a:t>
-            </a:r>
-          </a:p>
-          <a:p/>
-          <a:p>
-            <a:r>
-              <a:rPr sz="1200">
-                <a:latin typeface="Calibri"/>
-              </a:rPr>
-              <a:t>Thirty minutes, hands off. Circulate but do not solve.</a:t>
-            </a:r>
-          </a:p>
-          <a:p>
-            <a:r>
-              <a:rPr sz="1200">
-                <a:latin typeface="Calibri"/>
-              </a:rPr>
-              <a:t>The five steps are the architecture of the program, restated as a recipe. Insist on step 2 - constants at the top, not buried in the function.</a:t>
-            </a:r>
-          </a:p>
-          <a:p>
-            <a:r>
-              <a:rPr sz="1200">
-                <a:latin typeface="Calibri"/>
-              </a:rPr>
-              <a:t>The first question is the real assessment. Count the lines they had to change in existing code.</a:t>
-            </a:r>
-          </a:p>
-          <a:p>
-            <a:r>
-              <a:rPr sz="1200">
-                <a:latin typeface="Calibri"/>
-              </a:rPr>
-              <a:t>HAZARD and TURN_LEFT can never both be on, because there is one variable holding one value. Make sure somebody says that out loud.</a:t>
-            </a:r>
-          </a:p>
-          <a:p>
-            <a:r>
-              <a:rPr sz="1200">
-                <a:latin typeface="Calibri"/>
-              </a:rPr>
-              <a:t>Leave five minutes to demonstrate. Every group shows theirs.</a:t>
-            </a:r>
-          </a:p>
-        </p:txBody>
-      </p:sp>
-      <p:sp>
-        <p:nvSpPr>
-          <p:cNvPr id="4" name="Slide Number Placeholder 3"/>
-          <p:cNvSpPr>
-            <a:spLocks noGrp="1"/>
-          </p:cNvSpPr>
-          <p:nvPr>
-            <p:ph type="sldNum" idx="5" sz="quarter"/>
-          </p:nvPr>
-        </p:nvSpPr>
-        <p:spPr/>
-      </p:sp>
-    </p:spTree>
-  </p:cSld>
-  <p:clrMapOvr>
-    <a:masterClrMapping/>
-  </p:clrMapOvr>
-</p:notes>
-</file>
-
-<file path=ppt/notesSlides/notesSlide24.xml><?xml version="1.0" encoding="utf-8"?>
 <p:notes xmlns:a="http://schemas.openxmlformats.org/drawingml/2006/main" xmlns:p="http://schemas.openxmlformats.org/presentationml/2006/main" xmlns:r="http://schemas.openxmlformats.org/officeDocument/2006/relationships">
   <p:cSld>
     <p:spTree>
@@ -6062,6 +5840,22 @@
               <a:spcAft>
                 <a:spcPts val="100"/>
               </a:spcAft>
+              <a:defRPr sz="600" b="0">
+                <a:solidFill>
+                  <a:srgbClr val="666666"/>
+                </a:solidFill>
+                <a:latin typeface="Calibri"/>
+              </a:defRPr>
+            </a:pPr>
+          </a:p>
+          <a:p>
+            <a:pPr algn="l">
+              <a:lnSpc>
+                <a:spcPct val="100000"/>
+              </a:lnSpc>
+              <a:spcAft>
+                <a:spcPts val="100"/>
+              </a:spcAft>
               <a:defRPr sz="1200" b="0">
                 <a:solidFill>
                   <a:srgbClr val="666666"/>
@@ -6069,6 +5863,15 @@
                 <a:latin typeface="Calibri"/>
               </a:defRPr>
             </a:pPr>
+            <a:r>
+              <a:rPr sz="1200" b="0">
+                <a:solidFill>
+                  <a:srgbClr val="666666"/>
+                </a:solidFill>
+                <a:latin typeface="Calibri"/>
+              </a:rPr>
+              <a:t>Kevin Bowen, President  -  kbowen6@icloud.com</a:t>
+            </a:r>
           </a:p>
           <a:p>
             <a:pPr algn="l">
@@ -6092,7 +5895,7 @@
                 </a:solidFill>
                 <a:latin typeface="Calibri"/>
               </a:rPr>
-              <a:t>Kevin Bowen, President  -  kbowen6@icloud.com</a:t>
+              <a:t>Malcom Graham, VP Education      Louis Parker, VP Technology</a:t>
             </a:r>
           </a:p>
           <a:p>
@@ -6117,7 +5920,7 @@
                 </a:solidFill>
                 <a:latin typeface="Calibri"/>
               </a:rPr>
-              <a:t>Malcom Graham, VP Education      Louis Parker, VP Technology</a:t>
+              <a:t>Valen Farre, System Engineer      Gary Howland, Animation</a:t>
             </a:r>
           </a:p>
           <a:p>
@@ -6142,7 +5945,7 @@
                 </a:solidFill>
                 <a:latin typeface="Calibri"/>
               </a:rPr>
-              <a:t>Valen Farre, System Engineer      Gary Howland, Animation</a:t>
+              <a:t>Eddie Revollo, Artificial Intelligence</a:t>
             </a:r>
           </a:p>
           <a:p>
@@ -6167,7 +5970,7 @@
                 </a:solidFill>
                 <a:latin typeface="Calibri"/>
               </a:rPr>
-              <a:t>Eddie Revollo, Artificial Intelligence</a:t>
+              <a:t>Interns: Oscar Canazales, Krishnansh Vemulapalli, Soham Gangal, Erik Olsen</a:t>
             </a:r>
           </a:p>
           <a:p>
@@ -6178,32 +5981,7 @@
               <a:spcAft>
                 <a:spcPts val="100"/>
               </a:spcAft>
-              <a:defRPr sz="1200" b="0">
-                <a:solidFill>
-                  <a:srgbClr val="666666"/>
-                </a:solidFill>
-                <a:latin typeface="Calibri"/>
-              </a:defRPr>
-            </a:pPr>
-            <a:r>
-              <a:rPr sz="1200" b="0">
-                <a:solidFill>
-                  <a:srgbClr val="666666"/>
-                </a:solidFill>
-                <a:latin typeface="Calibri"/>
-              </a:rPr>
-              <a:t>Interns: Oscar Canazales, Krishnansh Vemulapalli, Soham Gangal, Erik Olsen</a:t>
-            </a:r>
-          </a:p>
-          <a:p>
-            <a:pPr algn="l">
-              <a:lnSpc>
-                <a:spcPct val="100000"/>
-              </a:lnSpc>
-              <a:spcAft>
-                <a:spcPts val="100"/>
-              </a:spcAft>
-              <a:defRPr sz="1200" b="0">
+              <a:defRPr sz="600" b="0">
                 <a:solidFill>
                   <a:srgbClr val="666666"/>
                 </a:solidFill>
@@ -7283,6 +7061,22 @@
               <a:spcAft>
                 <a:spcPts val="800"/>
               </a:spcAft>
+              <a:defRPr sz="900" b="0">
+                <a:solidFill>
+                  <a:srgbClr val="222222"/>
+                </a:solidFill>
+                <a:latin typeface="Calibri"/>
+              </a:defRPr>
+            </a:pPr>
+          </a:p>
+          <a:p>
+            <a:pPr algn="l">
+              <a:lnSpc>
+                <a:spcPct val="100000"/>
+              </a:lnSpc>
+              <a:spcAft>
+                <a:spcPts val="800"/>
+              </a:spcAft>
               <a:defRPr sz="1800" b="0">
                 <a:solidFill>
                   <a:srgbClr val="222222"/>
@@ -7290,6 +7084,15 @@
                 <a:latin typeface="Calibri"/>
               </a:defRPr>
             </a:pPr>
+            <a:r>
+              <a:rPr sz="1800" b="0">
+                <a:solidFill>
+                  <a:srgbClr val="222222"/>
+                </a:solidFill>
+                <a:latin typeface="Calibri"/>
+              </a:rPr>
+              <a:t>Op 12 cannot use FastLED: version 3.10.5 auto-enables an ESP-DSP FFT backend, and the bluepad32 SDK ships that header without the include directory it needs. There is no per-sketch opt-out.</a:t>
+            </a:r>
           </a:p>
           <a:p>
             <a:pPr algn="l">
@@ -7299,32 +7102,7 @@
               <a:spcAft>
                 <a:spcPts val="800"/>
               </a:spcAft>
-              <a:defRPr sz="1800" b="0">
-                <a:solidFill>
-                  <a:srgbClr val="222222"/>
-                </a:solidFill>
-                <a:latin typeface="Calibri"/>
-              </a:defRPr>
-            </a:pPr>
-            <a:r>
-              <a:rPr sz="1800" b="0">
-                <a:solidFill>
-                  <a:srgbClr val="222222"/>
-                </a:solidFill>
-                <a:latin typeface="Calibri"/>
-              </a:rPr>
-              <a:t>Op 12 cannot use FastLED: version 3.10.5 auto-enables an ESP-DSP FFT backend, and the bluepad32 SDK ships that header without the include directory it needs. There is no per-sketch opt-out.</a:t>
-            </a:r>
-          </a:p>
-          <a:p>
-            <a:pPr algn="l">
-              <a:lnSpc>
-                <a:spcPct val="100000"/>
-              </a:lnSpc>
-              <a:spcAft>
-                <a:spcPts val="800"/>
-              </a:spcAft>
-              <a:defRPr sz="1800" b="0">
+              <a:defRPr sz="900" b="0">
                 <a:solidFill>
                   <a:srgbClr val="222222"/>
                 </a:solidFill>
@@ -7461,7 +7239,7 @@
               <a:spcAft>
                 <a:spcPts val="800"/>
               </a:spcAft>
-              <a:defRPr sz="1800" b="0">
+              <a:defRPr sz="900" b="0">
                 <a:solidFill>
                   <a:srgbClr val="222222"/>
                 </a:solidFill>
@@ -7777,7 +7555,7 @@
               <a:spcAft>
                 <a:spcPts val="800"/>
               </a:spcAft>
-              <a:defRPr sz="1800" b="0">
+              <a:defRPr sz="900" b="0">
                 <a:solidFill>
                   <a:srgbClr val="222222"/>
                 </a:solidFill>
@@ -8139,7 +7917,7 @@
         <p:spPr>
           <a:xfrm>
             <a:off x="502920" y="1755648"/>
-            <a:ext cx="11185855" cy="4507992"/>
+            <a:ext cx="5364327" cy="4507992"/>
           </a:xfrm>
           <a:prstGeom prst="rect">
             <a:avLst/>
@@ -8157,17 +7935,17 @@
                 <a:spcPct val="100000"/>
               </a:lnSpc>
               <a:spcAft>
-                <a:spcPts val="600"/>
-              </a:spcAft>
-              <a:defRPr sz="2100" b="0">
-                <a:solidFill>
-                  <a:srgbClr val="222222"/>
-                </a:solidFill>
-                <a:latin typeface="Calibri"/>
-              </a:defRPr>
-            </a:pPr>
-            <a:r>
-              <a:rPr sz="2100" b="0">
+                <a:spcPts val="900"/>
+              </a:spcAft>
+              <a:defRPr sz="1800" b="0">
+                <a:solidFill>
+                  <a:srgbClr val="222222"/>
+                </a:solidFill>
+                <a:latin typeface="Calibri"/>
+              </a:defRPr>
+            </a:pPr>
+            <a:r>
+              <a:rPr sz="1800" b="0">
                 <a:solidFill>
                   <a:srgbClr val="222222"/>
                 </a:solidFill>
@@ -8182,17 +7960,17 @@
                 <a:spcPct val="100000"/>
               </a:lnSpc>
               <a:spcAft>
-                <a:spcPts val="600"/>
-              </a:spcAft>
-              <a:defRPr sz="2100" b="0">
-                <a:solidFill>
-                  <a:srgbClr val="222222"/>
-                </a:solidFill>
-                <a:latin typeface="Calibri"/>
-              </a:defRPr>
-            </a:pPr>
-            <a:r>
-              <a:rPr sz="2100" b="0">
+                <a:spcPts val="900"/>
+              </a:spcAft>
+              <a:defRPr sz="1800" b="0">
+                <a:solidFill>
+                  <a:srgbClr val="222222"/>
+                </a:solidFill>
+                <a:latin typeface="Calibri"/>
+              </a:defRPr>
+            </a:pPr>
+            <a:r>
+              <a:rPr sz="1800" b="0">
                 <a:solidFill>
                   <a:srgbClr val="222222"/>
                 </a:solidFill>
@@ -8207,17 +7985,17 @@
                 <a:spcPct val="100000"/>
               </a:lnSpc>
               <a:spcAft>
-                <a:spcPts val="600"/>
-              </a:spcAft>
-              <a:defRPr sz="2100" b="0">
-                <a:solidFill>
-                  <a:srgbClr val="222222"/>
-                </a:solidFill>
-                <a:latin typeface="Calibri"/>
-              </a:defRPr>
-            </a:pPr>
-            <a:r>
-              <a:rPr sz="2100" b="0">
+                <a:spcPts val="900"/>
+              </a:spcAft>
+              <a:defRPr sz="1800" b="0">
+                <a:solidFill>
+                  <a:srgbClr val="222222"/>
+                </a:solidFill>
+                <a:latin typeface="Calibri"/>
+              </a:defRPr>
+            </a:pPr>
+            <a:r>
+              <a:rPr sz="1800" b="0">
                 <a:solidFill>
                   <a:srgbClr val="222222"/>
                 </a:solidFill>
@@ -8232,33 +8010,33 @@
                 <a:spcPct val="100000"/>
               </a:lnSpc>
               <a:spcAft>
-                <a:spcPts val="600"/>
-              </a:spcAft>
-              <a:defRPr sz="2100" b="0">
-                <a:solidFill>
-                  <a:srgbClr val="222222"/>
-                </a:solidFill>
-                <a:latin typeface="Calibri"/>
-              </a:defRPr>
-            </a:pPr>
-          </a:p>
-          <a:p>
-            <a:pPr algn="l">
-              <a:lnSpc>
-                <a:spcPct val="100000"/>
-              </a:lnSpc>
-              <a:spcAft>
-                <a:spcPts val="600"/>
-              </a:spcAft>
-              <a:defRPr sz="2100" b="0">
-                <a:solidFill>
-                  <a:srgbClr val="222222"/>
-                </a:solidFill>
-                <a:latin typeface="Calibri"/>
-              </a:defRPr>
-            </a:pPr>
-            <a:r>
-              <a:rPr sz="2100" b="0">
+                <a:spcPts val="900"/>
+              </a:spcAft>
+              <a:defRPr sz="900" b="0">
+                <a:solidFill>
+                  <a:srgbClr val="222222"/>
+                </a:solidFill>
+                <a:latin typeface="Calibri"/>
+              </a:defRPr>
+            </a:pPr>
+          </a:p>
+          <a:p>
+            <a:pPr algn="l">
+              <a:lnSpc>
+                <a:spcPct val="100000"/>
+              </a:lnSpc>
+              <a:spcAft>
+                <a:spcPts val="900"/>
+              </a:spcAft>
+              <a:defRPr sz="1800" b="0">
+                <a:solidFill>
+                  <a:srgbClr val="222222"/>
+                </a:solidFill>
+                <a:latin typeface="Calibri"/>
+              </a:defRPr>
+            </a:pPr>
+            <a:r>
+              <a:rPr sz="1800" b="0">
                 <a:solidFill>
                   <a:srgbClr val="222222"/>
                 </a:solidFill>
@@ -8267,39 +8045,46 @@
               <a:t>The bar has to grow OUTWARD from the center of the vehicle toward the corner that is turning, on both bars at once.</a:t>
             </a:r>
           </a:p>
-          <a:p>
-            <a:pPr algn="l">
-              <a:lnSpc>
-                <a:spcPct val="100000"/>
-              </a:lnSpc>
-              <a:spcAft>
-                <a:spcPts val="600"/>
-              </a:spcAft>
-              <a:defRPr sz="2100" b="0">
-                <a:solidFill>
-                  <a:srgbClr val="222222"/>
-                </a:solidFill>
-                <a:latin typeface="Calibri"/>
-              </a:defRPr>
-            </a:pPr>
-          </a:p>
-          <a:p>
-            <a:pPr algn="l">
-              <a:lnSpc>
-                <a:spcPct val="100000"/>
-              </a:lnSpc>
-              <a:spcAft>
-                <a:spcPts val="600"/>
-              </a:spcAft>
-              <a:defRPr sz="2100" b="0">
-                <a:solidFill>
-                  <a:srgbClr val="222222"/>
-                </a:solidFill>
-                <a:latin typeface="Calibri"/>
-              </a:defRPr>
-            </a:pPr>
-            <a:r>
-              <a:rPr sz="2100" b="0">
+        </p:txBody>
+      </p:sp>
+      <p:sp>
+        <p:nvSpPr>
+          <p:cNvPr id="8" name="TextBox 7"/>
+          <p:cNvSpPr txBox="1"/>
+          <p:nvPr/>
+        </p:nvSpPr>
+        <p:spPr>
+          <a:xfrm>
+            <a:off x="6324447" y="1755648"/>
+            <a:ext cx="5364327" cy="4507992"/>
+          </a:xfrm>
+          <a:prstGeom prst="rect">
+            <a:avLst/>
+          </a:prstGeom>
+          <a:noFill/>
+        </p:spPr>
+        <p:txBody>
+          <a:bodyPr wrap="square" lIns="0" tIns="0" rIns="0" bIns="0">
+            <a:spAutoFit/>
+          </a:bodyPr>
+          <a:lstStyle/>
+          <a:p>
+            <a:pPr algn="l">
+              <a:lnSpc>
+                <a:spcPct val="100000"/>
+              </a:lnSpc>
+              <a:spcAft>
+                <a:spcPts val="500"/>
+              </a:spcAft>
+              <a:defRPr sz="1800" b="0">
+                <a:solidFill>
+                  <a:srgbClr val="222222"/>
+                </a:solidFill>
+                <a:latin typeface="Calibri"/>
+              </a:defRPr>
+            </a:pPr>
+            <a:r>
+              <a:rPr sz="1800" b="0">
                 <a:solidFill>
                   <a:srgbClr val="222222"/>
                 </a:solidFill>
@@ -8314,17 +8099,17 @@
                 <a:spcPct val="100000"/>
               </a:lnSpc>
               <a:spcAft>
-                <a:spcPts val="600"/>
-              </a:spcAft>
-              <a:defRPr sz="2100" b="0">
-                <a:solidFill>
-                  <a:srgbClr val="222222"/>
-                </a:solidFill>
-                <a:latin typeface="Calibri"/>
-              </a:defRPr>
-            </a:pPr>
-            <a:r>
-              <a:rPr sz="2100" b="0">
+                <a:spcPts val="500"/>
+              </a:spcAft>
+              <a:defRPr sz="1800" b="0">
+                <a:solidFill>
+                  <a:srgbClr val="222222"/>
+                </a:solidFill>
+                <a:latin typeface="Calibri"/>
+              </a:defRPr>
+            </a:pPr>
+            <a:r>
+              <a:rPr sz="1800" b="0">
                 <a:solidFill>
                   <a:srgbClr val="222222"/>
                 </a:solidFill>
@@ -8339,23 +8124,155 @@
                 <a:spcPct val="100000"/>
               </a:lnSpc>
               <a:spcAft>
-                <a:spcPts val="600"/>
-              </a:spcAft>
-              <a:defRPr sz="2100" b="0">
-                <a:solidFill>
-                  <a:srgbClr val="222222"/>
-                </a:solidFill>
-                <a:latin typeface="Calibri"/>
-              </a:defRPr>
-            </a:pPr>
-            <a:r>
-              <a:rPr sz="2100" b="0">
+                <a:spcPts val="500"/>
+              </a:spcAft>
+              <a:defRPr sz="1800" b="0">
+                <a:solidFill>
+                  <a:srgbClr val="222222"/>
+                </a:solidFill>
+                <a:latin typeface="Calibri"/>
+              </a:defRPr>
+            </a:pPr>
+            <a:r>
+              <a:rPr sz="1800" b="0">
                 <a:solidFill>
                   <a:srgbClr val="222222"/>
                 </a:solidFill>
                 <a:latin typeface="Calibri"/>
               </a:rPr>
               <a:t>rear:   LEFT_REAR_START + i            (counts UP from 24)</a:t>
+            </a:r>
+          </a:p>
+          <a:p>
+            <a:pPr algn="l">
+              <a:lnSpc>
+                <a:spcPct val="100000"/>
+              </a:lnSpc>
+              <a:spcAft>
+                <a:spcPts val="500"/>
+              </a:spcAft>
+              <a:defRPr sz="900" b="0">
+                <a:solidFill>
+                  <a:srgbClr val="222222"/>
+                </a:solidFill>
+                <a:latin typeface="Calibri"/>
+              </a:defRPr>
+            </a:pPr>
+          </a:p>
+          <a:p>
+            <a:pPr algn="l">
+              <a:lnSpc>
+                <a:spcPct val="100000"/>
+              </a:lnSpc>
+              <a:spcAft>
+                <a:spcPts val="500"/>
+              </a:spcAft>
+              <a:defRPr sz="1800" b="0">
+                <a:solidFill>
+                  <a:srgbClr val="222222"/>
+                </a:solidFill>
+                <a:latin typeface="Calibri"/>
+              </a:defRPr>
+            </a:pPr>
+            <a:r>
+              <a:rPr sz="1800" b="0">
+                <a:solidFill>
+                  <a:srgbClr val="222222"/>
+                </a:solidFill>
+                <a:latin typeface="Calibri"/>
+              </a:rPr>
+              <a:t>RIGHT signal:</a:t>
+            </a:r>
+          </a:p>
+          <a:p>
+            <a:pPr lvl="1" algn="l">
+              <a:lnSpc>
+                <a:spcPct val="100000"/>
+              </a:lnSpc>
+              <a:spcAft>
+                <a:spcPts val="500"/>
+              </a:spcAft>
+              <a:defRPr sz="1800" b="0">
+                <a:solidFill>
+                  <a:srgbClr val="222222"/>
+                </a:solidFill>
+                <a:latin typeface="Calibri"/>
+              </a:defRPr>
+            </a:pPr>
+            <a:r>
+              <a:rPr sz="1800" b="0">
+                <a:solidFill>
+                  <a:srgbClr val="222222"/>
+                </a:solidFill>
+                <a:latin typeface="Calibri"/>
+              </a:rPr>
+              <a:t>front:  RIGHT_FRONT_START + i          (counts UP from 8)</a:t>
+            </a:r>
+          </a:p>
+          <a:p>
+            <a:pPr lvl="1" algn="l">
+              <a:lnSpc>
+                <a:spcPct val="100000"/>
+              </a:lnSpc>
+              <a:spcAft>
+                <a:spcPts val="500"/>
+              </a:spcAft>
+              <a:defRPr sz="1800" b="0">
+                <a:solidFill>
+                  <a:srgbClr val="222222"/>
+                </a:solidFill>
+                <a:latin typeface="Calibri"/>
+              </a:defRPr>
+            </a:pPr>
+            <a:r>
+              <a:rPr sz="1800" b="0">
+                <a:solidFill>
+                  <a:srgbClr val="222222"/>
+                </a:solidFill>
+                <a:latin typeface="Calibri"/>
+              </a:rPr>
+              <a:t>rear:   LEFT_REAR_START - 1 - i        (counts DOWN from 23)</a:t>
+            </a:r>
+          </a:p>
+          <a:p>
+            <a:pPr algn="l">
+              <a:lnSpc>
+                <a:spcPct val="100000"/>
+              </a:lnSpc>
+              <a:spcAft>
+                <a:spcPts val="500"/>
+              </a:spcAft>
+              <a:defRPr sz="900" b="0">
+                <a:solidFill>
+                  <a:srgbClr val="222222"/>
+                </a:solidFill>
+                <a:latin typeface="Calibri"/>
+              </a:defRPr>
+            </a:pPr>
+          </a:p>
+          <a:p>
+            <a:pPr algn="l">
+              <a:lnSpc>
+                <a:spcPct val="100000"/>
+              </a:lnSpc>
+              <a:spcAft>
+                <a:spcPts val="500"/>
+              </a:spcAft>
+              <a:defRPr sz="1800" b="0">
+                <a:solidFill>
+                  <a:srgbClr val="222222"/>
+                </a:solidFill>
+                <a:latin typeface="Calibri"/>
+              </a:defRPr>
+            </a:pPr>
+            <a:r>
+              <a:rPr sz="1800" b="0">
+                <a:solidFill>
+                  <a:srgbClr val="222222"/>
+                </a:solidFill>
+                <a:latin typeface="Calibri"/>
+              </a:rPr>
+              <a:t>Do not try to derive this. Step through it and read the indices.</a:t>
             </a:r>
           </a:p>
         </p:txBody>
@@ -8403,9 +8320,9 @@
                 <a:spcPct val="100000"/>
               </a:lnSpc>
               <a:spcAft>
-                <a:spcPts val="100"/>
-              </a:spcAft>
-              <a:defRPr sz="2500" b="1">
+                <a:spcPts val="0"/>
+              </a:spcAft>
+              <a:defRPr sz="2800" b="1">
                 <a:solidFill>
                   <a:srgbClr val="1F3A5F"/>
                 </a:solidFill>
@@ -8413,13 +8330,13 @@
               </a:defRPr>
             </a:pPr>
             <a:r>
-              <a:rPr sz="2500" b="1">
+              <a:rPr sz="2800" b="1">
                 <a:solidFill>
                   <a:srgbClr val="1F3A5F"/>
                 </a:solidFill>
                 <a:latin typeface="Calibri"/>
               </a:rPr>
-              <a:t>Turn signal geometry, which is the genuinely hard part  (continued)</a:t>
+              <a:t>Two details that are easy to miss</a:t>
             </a:r>
           </a:p>
         </p:txBody>
@@ -8573,7 +8490,7 @@
         <p:spPr>
           <a:xfrm>
             <a:off x="502920" y="1188720"/>
-            <a:ext cx="11185855" cy="5074920"/>
+            <a:ext cx="7047088" cy="274320"/>
           </a:xfrm>
           <a:prstGeom prst="rect">
             <a:avLst/>
@@ -8591,130 +8508,543 @@
                 <a:spcPct val="100000"/>
               </a:lnSpc>
               <a:spcAft>
-                <a:spcPts val="900"/>
-              </a:spcAft>
-              <a:defRPr sz="3000" b="0">
-                <a:solidFill>
-                  <a:srgbClr val="222222"/>
-                </a:solidFill>
-                <a:latin typeface="Calibri"/>
-              </a:defRPr>
-            </a:pPr>
-          </a:p>
-          <a:p>
-            <a:pPr algn="l">
-              <a:lnSpc>
-                <a:spcPct val="100000"/>
-              </a:lnSpc>
-              <a:spcAft>
-                <a:spcPts val="900"/>
-              </a:spcAft>
-              <a:defRPr sz="3000" b="0">
-                <a:solidFill>
-                  <a:srgbClr val="222222"/>
-                </a:solidFill>
-                <a:latin typeface="Calibri"/>
-              </a:defRPr>
-            </a:pPr>
-            <a:r>
-              <a:rPr sz="3000" b="0">
-                <a:solidFill>
-                  <a:srgbClr val="222222"/>
-                </a:solidFill>
-                <a:latin typeface="Calibri"/>
-              </a:rPr>
-              <a:t>RIGHT signal:</a:t>
-            </a:r>
-          </a:p>
-          <a:p>
-            <a:pPr lvl="1" algn="l">
-              <a:lnSpc>
-                <a:spcPct val="100000"/>
-              </a:lnSpc>
-              <a:spcAft>
-                <a:spcPts val="900"/>
-              </a:spcAft>
-              <a:defRPr sz="3000" b="0">
-                <a:solidFill>
-                  <a:srgbClr val="222222"/>
-                </a:solidFill>
-                <a:latin typeface="Calibri"/>
-              </a:defRPr>
-            </a:pPr>
-            <a:r>
-              <a:rPr sz="3000" b="0">
-                <a:solidFill>
-                  <a:srgbClr val="222222"/>
-                </a:solidFill>
-                <a:latin typeface="Calibri"/>
-              </a:rPr>
-              <a:t>front:  RIGHT_FRONT_START + i          (counts UP from 8)</a:t>
-            </a:r>
-          </a:p>
-          <a:p>
-            <a:pPr lvl="1" algn="l">
-              <a:lnSpc>
-                <a:spcPct val="100000"/>
-              </a:lnSpc>
-              <a:spcAft>
-                <a:spcPts val="900"/>
-              </a:spcAft>
-              <a:defRPr sz="3000" b="0">
-                <a:solidFill>
-                  <a:srgbClr val="222222"/>
-                </a:solidFill>
-                <a:latin typeface="Calibri"/>
-              </a:defRPr>
-            </a:pPr>
-            <a:r>
-              <a:rPr sz="3000" b="0">
-                <a:solidFill>
-                  <a:srgbClr val="222222"/>
-                </a:solidFill>
-                <a:latin typeface="Calibri"/>
-              </a:rPr>
-              <a:t>rear:   LEFT_REAR_START - 1 - i        (counts DOWN from 23)</a:t>
-            </a:r>
-          </a:p>
-          <a:p>
-            <a:pPr algn="l">
-              <a:lnSpc>
-                <a:spcPct val="100000"/>
-              </a:lnSpc>
-              <a:spcAft>
-                <a:spcPts val="900"/>
-              </a:spcAft>
-              <a:defRPr sz="3000" b="0">
-                <a:solidFill>
-                  <a:srgbClr val="222222"/>
-                </a:solidFill>
-                <a:latin typeface="Calibri"/>
-              </a:defRPr>
-            </a:pPr>
-          </a:p>
-          <a:p>
-            <a:pPr algn="l">
-              <a:lnSpc>
-                <a:spcPct val="100000"/>
-              </a:lnSpc>
-              <a:spcAft>
-                <a:spcPts val="900"/>
-              </a:spcAft>
-              <a:defRPr sz="3000" b="0">
-                <a:solidFill>
-                  <a:srgbClr val="222222"/>
-                </a:solidFill>
-                <a:latin typeface="Calibri"/>
-              </a:defRPr>
-            </a:pPr>
-            <a:r>
-              <a:rPr sz="3000" b="0">
-                <a:solidFill>
-                  <a:srgbClr val="222222"/>
-                </a:solidFill>
-                <a:latin typeface="Calibri"/>
-              </a:rPr>
-              <a:t>Do not try to derive this. Step through it and read the indices.</a:t>
+                <a:spcPts val="200"/>
+              </a:spcAft>
+              <a:defRPr sz="1200" b="1">
+                <a:solidFill>
+                  <a:srgbClr val="0E7C86"/>
+                </a:solidFill>
+                <a:latin typeface="Consolas"/>
+              </a:defRPr>
+            </a:pPr>
+            <a:r>
+              <a:rPr sz="1200" b="1">
+                <a:solidFill>
+                  <a:srgbClr val="0E7C86"/>
+                </a:solidFill>
+                <a:latin typeface="Consolas"/>
+              </a:rPr>
+              <a:t>Lighting.ino</a:t>
+            </a:r>
+          </a:p>
+        </p:txBody>
+      </p:sp>
+      <p:sp>
+        <p:nvSpPr>
+          <p:cNvPr id="7" name="CODE_PANEL"/>
+          <p:cNvSpPr/>
+          <p:nvPr/>
+        </p:nvSpPr>
+        <p:spPr>
+          <a:xfrm>
+            <a:off x="502920" y="1517904"/>
+            <a:ext cx="7047088" cy="4745736"/>
+          </a:xfrm>
+          <a:prstGeom prst="roundRect">
+            <a:avLst>
+              <a:gd name="adj" fmla="val 4000"/>
+            </a:avLst>
+          </a:prstGeom>
+          <a:solidFill>
+            <a:srgbClr val="F4F6F8"/>
+          </a:solidFill>
+          <a:ln w="12700">
+            <a:solidFill>
+              <a:srgbClr val="C8D2DE"/>
+            </a:solidFill>
+          </a:ln>
+          <a:effectLst/>
+        </p:spPr>
+        <p:style>
+          <a:lnRef idx="1">
+            <a:schemeClr val="accent1"/>
+          </a:lnRef>
+          <a:fillRef idx="3">
+            <a:schemeClr val="accent1"/>
+          </a:fillRef>
+          <a:effectRef idx="2">
+            <a:schemeClr val="accent1"/>
+          </a:effectRef>
+          <a:fontRef idx="minor">
+            <a:schemeClr val="lt1"/>
+          </a:fontRef>
+        </p:style>
+        <p:txBody>
+          <a:bodyPr rtlCol="0" anchor="t" wrap="square" lIns="146304" tIns="91440" bIns="73152"/>
+          <a:lstStyle/>
+          <a:p>
+            <a:pPr algn="l">
+              <a:lnSpc>
+                <a:spcPct val="100000"/>
+              </a:lnSpc>
+              <a:spcAft>
+                <a:spcPts val="0"/>
+              </a:spcAft>
+              <a:defRPr sz="1400">
+                <a:latin typeface="Consolas"/>
+              </a:defRPr>
+            </a:pPr>
+            <a:r>
+              <a:rPr sz="1400">
+                <a:solidFill>
+                  <a:srgbClr val="666666"/>
+                </a:solidFill>
+                <a:latin typeface="Consolas"/>
+              </a:rPr>
+              <a:t>// 1. Repaint the BASE lighting first, every frame.</a:t>
+            </a:r>
+          </a:p>
+          <a:p>
+            <a:pPr algn="l">
+              <a:lnSpc>
+                <a:spcPct val="100000"/>
+              </a:lnSpc>
+              <a:spcAft>
+                <a:spcPts val="0"/>
+              </a:spcAft>
+              <a:defRPr sz="1400">
+                <a:latin typeface="Consolas"/>
+              </a:defRPr>
+            </a:pPr>
+            <a:r>
+              <a:rPr sz="1400">
+                <a:solidFill>
+                  <a:srgbClr val="222222"/>
+                </a:solidFill>
+                <a:latin typeface="Consolas"/>
+              </a:rPr>
+              <a:t>strip.clear();</a:t>
+            </a:r>
+          </a:p>
+          <a:p>
+            <a:pPr algn="l">
+              <a:lnSpc>
+                <a:spcPct val="100000"/>
+              </a:lnSpc>
+              <a:spcAft>
+                <a:spcPts val="0"/>
+              </a:spcAft>
+              <a:defRPr sz="1400">
+                <a:latin typeface="Consolas"/>
+              </a:defRPr>
+            </a:pPr>
+            <a:r>
+              <a:rPr sz="1400">
+                <a:solidFill>
+                  <a:srgbClr val="222222"/>
+                </a:solidFill>
+                <a:latin typeface="Consolas"/>
+              </a:rPr>
+              <a:t>if (running_lights_on) {</a:t>
+            </a:r>
+          </a:p>
+          <a:p>
+            <a:pPr algn="l">
+              <a:lnSpc>
+                <a:spcPct val="100000"/>
+              </a:lnSpc>
+              <a:spcAft>
+                <a:spcPts val="0"/>
+              </a:spcAft>
+              <a:defRPr sz="1400">
+                <a:latin typeface="Consolas"/>
+              </a:defRPr>
+            </a:pPr>
+            <a:r>
+              <a:rPr sz="1400">
+                <a:solidFill>
+                  <a:srgbClr val="222222"/>
+                </a:solidFill>
+                <a:latin typeface="Consolas"/>
+              </a:rPr>
+              <a:t>  fill_range(LEFT_FRONT_START, CORNER_LEN * 2, headlights);</a:t>
+            </a:r>
+          </a:p>
+          <a:p>
+            <a:pPr algn="l">
+              <a:lnSpc>
+                <a:spcPct val="100000"/>
+              </a:lnSpc>
+              <a:spcAft>
+                <a:spcPts val="0"/>
+              </a:spcAft>
+              <a:defRPr sz="1400">
+                <a:latin typeface="Consolas"/>
+              </a:defRPr>
+            </a:pPr>
+            <a:r>
+              <a:rPr sz="1400">
+                <a:solidFill>
+                  <a:srgbClr val="222222"/>
+                </a:solidFill>
+                <a:latin typeface="Consolas"/>
+              </a:rPr>
+              <a:t>  fill_range(RIGHT_REAR_START, CORNER_LEN * 2, taillights);</a:t>
+            </a:r>
+          </a:p>
+          <a:p>
+            <a:pPr algn="l">
+              <a:lnSpc>
+                <a:spcPct val="100000"/>
+              </a:lnSpc>
+              <a:spcAft>
+                <a:spcPts val="0"/>
+              </a:spcAft>
+              <a:defRPr sz="1400">
+                <a:latin typeface="Consolas"/>
+              </a:defRPr>
+            </a:pPr>
+            <a:r>
+              <a:rPr sz="1400">
+                <a:solidFill>
+                  <a:srgbClr val="222222"/>
+                </a:solidFill>
+                <a:latin typeface="Consolas"/>
+              </a:rPr>
+              <a:t>}</a:t>
+            </a:r>
+          </a:p>
+          <a:p>
+            <a:pPr algn="l">
+              <a:lnSpc>
+                <a:spcPct val="100000"/>
+              </a:lnSpc>
+              <a:spcAft>
+                <a:spcPts val="0"/>
+              </a:spcAft>
+              <a:defRPr sz="1400">
+                <a:latin typeface="Consolas"/>
+              </a:defRPr>
+            </a:pPr>
+            <a:r>
+              <a:rPr sz="1400">
+                <a:solidFill>
+                  <a:srgbClr val="666666"/>
+                </a:solidFill>
+                <a:latin typeface="Consolas"/>
+              </a:rPr>
+              <a:t>// ...then blank the signaling side, then draw the amber over it.</a:t>
+            </a:r>
+          </a:p>
+          <a:p>
+            <a:pPr algn="l">
+              <a:lnSpc>
+                <a:spcPct val="100000"/>
+              </a:lnSpc>
+              <a:spcAft>
+                <a:spcPts val="0"/>
+              </a:spcAft>
+              <a:defRPr sz="1400">
+                <a:latin typeface="Consolas"/>
+              </a:defRPr>
+            </a:pPr>
+            <a:r>
+              <a:rPr sz="1400">
+                <a:solidFill>
+                  <a:srgbClr val="666666"/>
+                </a:solidFill>
+                <a:latin typeface="Consolas"/>
+              </a:rPr>
+              <a:t>// Painting only the amber would leave the last frame underneath.</a:t>
+            </a:r>
+          </a:p>
+          <a:p>
+            <a:pPr algn="l">
+              <a:lnSpc>
+                <a:spcPct val="100000"/>
+              </a:lnSpc>
+              <a:spcAft>
+                <a:spcPts val="0"/>
+              </a:spcAft>
+              <a:defRPr sz="1400">
+                <a:latin typeface="Consolas"/>
+              </a:defRPr>
+            </a:pPr>
+            <a:r>
+              <a:rPr sz="1400">
+                <a:solidFill>
+                  <a:srgbClr val="222222"/>
+                </a:solidFill>
+                <a:latin typeface="Consolas"/>
+              </a:rPr>
+              <a:t> </a:t>
+            </a:r>
+          </a:p>
+          <a:p>
+            <a:pPr algn="l">
+              <a:lnSpc>
+                <a:spcPct val="100000"/>
+              </a:lnSpc>
+              <a:spcAft>
+                <a:spcPts val="0"/>
+              </a:spcAft>
+              <a:defRPr sz="1400">
+                <a:latin typeface="Consolas"/>
+              </a:defRPr>
+            </a:pPr>
+            <a:r>
+              <a:rPr sz="1400">
+                <a:solidFill>
+                  <a:srgbClr val="666666"/>
+                </a:solidFill>
+                <a:latin typeface="Consolas"/>
+              </a:rPr>
+              <a:t>// 2. The animation finishes its own cycles.</a:t>
+            </a:r>
+          </a:p>
+          <a:p>
+            <a:pPr algn="l">
+              <a:lnSpc>
+                <a:spcPct val="100000"/>
+              </a:lnSpc>
+              <a:spcAft>
+                <a:spcPts val="0"/>
+              </a:spcAft>
+              <a:defRPr sz="1400">
+                <a:latin typeface="Consolas"/>
+              </a:defRPr>
+            </a:pPr>
+            <a:r>
+              <a:rPr sz="1400" b="1">
+                <a:solidFill>
+                  <a:srgbClr val="0E7C86"/>
+                </a:solidFill>
+                <a:latin typeface="Consolas"/>
+              </a:rPr>
+              <a:t>bool still_held = (led_mode == TURN_LEFT  &amp;&amp; (dpad &amp; DPAD_LEFT)) ||</a:t>
+            </a:r>
+          </a:p>
+          <a:p>
+            <a:pPr algn="l">
+              <a:lnSpc>
+                <a:spcPct val="100000"/>
+              </a:lnSpc>
+              <a:spcAft>
+                <a:spcPts val="0"/>
+              </a:spcAft>
+              <a:defRPr sz="1400">
+                <a:latin typeface="Consolas"/>
+              </a:defRPr>
+            </a:pPr>
+            <a:r>
+              <a:rPr sz="1400" b="1">
+                <a:solidFill>
+                  <a:srgbClr val="0E7C86"/>
+                </a:solidFill>
+                <a:latin typeface="Consolas"/>
+              </a:rPr>
+              <a:t>                  (led_mode == TURN_RIGHT &amp;&amp; (dpad &amp; DPAD_RIGHT));</a:t>
+            </a:r>
+          </a:p>
+          <a:p>
+            <a:pPr algn="l">
+              <a:lnSpc>
+                <a:spcPct val="100000"/>
+              </a:lnSpc>
+              <a:spcAft>
+                <a:spcPts val="0"/>
+              </a:spcAft>
+              <a:defRPr sz="1400">
+                <a:latin typeface="Consolas"/>
+              </a:defRPr>
+            </a:pPr>
+            <a:r>
+              <a:rPr sz="1400" b="1">
+                <a:solidFill>
+                  <a:srgbClr val="0E7C86"/>
+                </a:solidFill>
+                <a:latin typeface="Consolas"/>
+              </a:rPr>
+              <a:t>if (!still_held &amp;&amp; turn_signal_cycles &gt;= TURN_CYCLES) {</a:t>
+            </a:r>
+          </a:p>
+          <a:p>
+            <a:pPr algn="l">
+              <a:lnSpc>
+                <a:spcPct val="100000"/>
+              </a:lnSpc>
+              <a:spcAft>
+                <a:spcPts val="0"/>
+              </a:spcAft>
+              <a:defRPr sz="1400">
+                <a:latin typeface="Consolas"/>
+              </a:defRPr>
+            </a:pPr>
+            <a:r>
+              <a:rPr sz="1400">
+                <a:solidFill>
+                  <a:srgbClr val="222222"/>
+                </a:solidFill>
+                <a:latin typeface="Consolas"/>
+              </a:rPr>
+              <a:t>  led_mode = STANDBY;</a:t>
+            </a:r>
+          </a:p>
+          <a:p>
+            <a:pPr algn="l">
+              <a:lnSpc>
+                <a:spcPct val="100000"/>
+              </a:lnSpc>
+              <a:spcAft>
+                <a:spcPts val="0"/>
+              </a:spcAft>
+              <a:defRPr sz="1400">
+                <a:latin typeface="Consolas"/>
+              </a:defRPr>
+            </a:pPr>
+            <a:r>
+              <a:rPr sz="1400">
+                <a:solidFill>
+                  <a:srgbClr val="222222"/>
+                </a:solidFill>
+                <a:latin typeface="Consolas"/>
+              </a:rPr>
+              <a:t>  standby_dirty = true;</a:t>
+            </a:r>
+          </a:p>
+          <a:p>
+            <a:pPr algn="l">
+              <a:lnSpc>
+                <a:spcPct val="100000"/>
+              </a:lnSpc>
+              <a:spcAft>
+                <a:spcPts val="0"/>
+              </a:spcAft>
+              <a:defRPr sz="1400">
+                <a:latin typeface="Consolas"/>
+              </a:defRPr>
+            </a:pPr>
+            <a:r>
+              <a:rPr sz="1400">
+                <a:solidFill>
+                  <a:srgbClr val="222222"/>
+                </a:solidFill>
+                <a:latin typeface="Consolas"/>
+              </a:rPr>
+              <a:t>}</a:t>
+            </a:r>
+          </a:p>
+        </p:txBody>
+      </p:sp>
+      <p:sp>
+        <p:nvSpPr>
+          <p:cNvPr id="8" name="TextBox 7"/>
+          <p:cNvSpPr txBox="1"/>
+          <p:nvPr/>
+        </p:nvSpPr>
+        <p:spPr>
+          <a:xfrm>
+            <a:off x="7870048" y="1517904"/>
+            <a:ext cx="3818727" cy="4745736"/>
+          </a:xfrm>
+          <a:prstGeom prst="rect">
+            <a:avLst/>
+          </a:prstGeom>
+          <a:noFill/>
+        </p:spPr>
+        <p:txBody>
+          <a:bodyPr wrap="square" lIns="0" tIns="0" rIns="0" bIns="0">
+            <a:spAutoFit/>
+          </a:bodyPr>
+          <a:lstStyle/>
+          <a:p>
+            <a:pPr algn="l">
+              <a:lnSpc>
+                <a:spcPct val="100000"/>
+              </a:lnSpc>
+              <a:spcAft>
+                <a:spcPts val="700"/>
+              </a:spcAft>
+              <a:defRPr sz="2000" b="0">
+                <a:solidFill>
+                  <a:srgbClr val="222222"/>
+                </a:solidFill>
+                <a:latin typeface="Calibri"/>
+              </a:defRPr>
+            </a:pPr>
+            <a:r>
+              <a:rPr sz="2000" b="0">
+                <a:solidFill>
+                  <a:srgbClr val="222222"/>
+                </a:solidFill>
+                <a:latin typeface="Calibri"/>
+              </a:rPr>
+              <a:t>The D-pad only ever STARTS the animation. It does not hold it on and it does not stop it.</a:t>
+            </a:r>
+          </a:p>
+          <a:p>
+            <a:pPr algn="l">
+              <a:lnSpc>
+                <a:spcPct val="100000"/>
+              </a:lnSpc>
+              <a:spcAft>
+                <a:spcPts val="700"/>
+              </a:spcAft>
+              <a:defRPr sz="2000" b="0">
+                <a:solidFill>
+                  <a:srgbClr val="222222"/>
+                </a:solidFill>
+                <a:latin typeface="Calibri"/>
+              </a:defRPr>
+            </a:pPr>
+            <a:r>
+              <a:rPr sz="2000" b="0">
+                <a:solidFill>
+                  <a:srgbClr val="222222"/>
+                </a:solidFill>
+                <a:latin typeface="Calibri"/>
+              </a:rPr>
+              <a:t>A real indicator does not stop mid-blink when you let go of the stalk. It finishes.</a:t>
+            </a:r>
+          </a:p>
+          <a:p>
+            <a:pPr algn="l">
+              <a:lnSpc>
+                <a:spcPct val="100000"/>
+              </a:lnSpc>
+              <a:spcAft>
+                <a:spcPts val="700"/>
+              </a:spcAft>
+              <a:defRPr sz="2000" b="0">
+                <a:solidFill>
+                  <a:srgbClr val="222222"/>
+                </a:solidFill>
+                <a:latin typeface="Calibri"/>
+              </a:defRPr>
+            </a:pPr>
+            <a:r>
+              <a:rPr sz="2000" b="0">
+                <a:solidFill>
+                  <a:srgbClr val="222222"/>
+                </a:solidFill>
+                <a:latin typeface="Calibri"/>
+              </a:rPr>
+              <a:t>Holding the D-pad keeps resetting the count, so it carries on for as long as you hold it and then finishes cleanly.</a:t>
+            </a:r>
+          </a:p>
+          <a:p>
+            <a:pPr algn="l">
+              <a:lnSpc>
+                <a:spcPct val="100000"/>
+              </a:lnSpc>
+              <a:spcAft>
+                <a:spcPts val="700"/>
+              </a:spcAft>
+              <a:defRPr sz="2000" b="0">
+                <a:solidFill>
+                  <a:srgbClr val="222222"/>
+                </a:solidFill>
+                <a:latin typeface="Calibri"/>
+              </a:defRPr>
+            </a:pPr>
+            <a:r>
+              <a:rPr sz="2000" b="0">
+                <a:solidFill>
+                  <a:srgbClr val="222222"/>
+                </a:solidFill>
+                <a:latin typeface="Calibri"/>
+              </a:rPr>
+              <a:t>This is a small thing that makes a machine feel considered rather than twitchy.</a:t>
             </a:r>
           </a:p>
         </p:txBody>
@@ -8778,7 +9108,7 @@
                 </a:solidFill>
                 <a:latin typeface="Calibri"/>
               </a:rPr>
-              <a:t>Two details that are easy to miss</a:t>
+              <a:t>Where we are</a:t>
             </a:r>
           </a:p>
         </p:txBody>
@@ -8925,74 +9255,26 @@
       </p:sp>
       <p:sp>
         <p:nvSpPr>
-          <p:cNvPr id="6" name="TextBox 5"/>
-          <p:cNvSpPr txBox="1"/>
-          <p:nvPr/>
-        </p:nvSpPr>
-        <p:spPr>
-          <a:xfrm>
-            <a:off x="502920" y="1188720"/>
-            <a:ext cx="7047088" cy="274320"/>
-          </a:xfrm>
-          <a:prstGeom prst="rect">
-            <a:avLst/>
-          </a:prstGeom>
-          <a:noFill/>
-        </p:spPr>
-        <p:txBody>
-          <a:bodyPr wrap="square" lIns="0" tIns="0" rIns="0" bIns="0">
-            <a:spAutoFit/>
-          </a:bodyPr>
-          <a:lstStyle/>
-          <a:p>
-            <a:pPr algn="l">
-              <a:lnSpc>
-                <a:spcPct val="100000"/>
-              </a:lnSpc>
-              <a:spcAft>
-                <a:spcPts val="200"/>
-              </a:spcAft>
-              <a:defRPr sz="1200" b="1">
-                <a:solidFill>
-                  <a:srgbClr val="0E7C86"/>
-                </a:solidFill>
-                <a:latin typeface="Consolas"/>
-              </a:defRPr>
-            </a:pPr>
-            <a:r>
-              <a:rPr sz="1200" b="1">
-                <a:solidFill>
-                  <a:srgbClr val="0E7C86"/>
-                </a:solidFill>
-                <a:latin typeface="Consolas"/>
-              </a:rPr>
-              <a:t>Lighting.ino</a:t>
-            </a:r>
-          </a:p>
-        </p:txBody>
-      </p:sp>
-      <p:sp>
-        <p:nvSpPr>
-          <p:cNvPr id="7" name="CODE_PANEL"/>
+          <p:cNvPr id="6" name="Rounded Rectangle 5"/>
           <p:cNvSpPr/>
           <p:nvPr/>
         </p:nvSpPr>
         <p:spPr>
           <a:xfrm>
-            <a:off x="502920" y="1517904"/>
-            <a:ext cx="7047088" cy="4745736"/>
+            <a:off x="502920" y="2240280"/>
+            <a:ext cx="3631082" cy="1737360"/>
           </a:xfrm>
           <a:prstGeom prst="roundRect">
             <a:avLst>
-              <a:gd name="adj" fmla="val 4000"/>
+              <a:gd name="adj" fmla="val 8000"/>
             </a:avLst>
           </a:prstGeom>
           <a:solidFill>
-            <a:srgbClr val="F4F6F8"/>
+            <a:srgbClr val="EEF3F8"/>
           </a:solidFill>
           <a:ln w="12700">
             <a:solidFill>
-              <a:srgbClr val="C8D2DE"/>
+              <a:srgbClr val="0E7C86"/>
             </a:solidFill>
           </a:ln>
           <a:effectLst/>
@@ -9012,372 +9294,45 @@
           </a:fontRef>
         </p:style>
         <p:txBody>
-          <a:bodyPr rtlCol="0" anchor="t" wrap="square" lIns="146304" tIns="91440" bIns="73152"/>
-          <a:lstStyle/>
-          <a:p>
-            <a:pPr algn="l">
+          <a:bodyPr rtlCol="0" anchor="ctr" wrap="square" lIns="73152" rIns="73152"/>
+          <a:lstStyle/>
+          <a:p>
+            <a:pPr algn="ctr">
               <a:lnSpc>
                 <a:spcPct val="100000"/>
               </a:lnSpc>
               <a:spcAft>
                 <a:spcPts val="0"/>
               </a:spcAft>
-              <a:defRPr sz="1400">
-                <a:latin typeface="Consolas"/>
-              </a:defRPr>
-            </a:pPr>
-            <a:r>
-              <a:rPr sz="1400">
-                <a:solidFill>
-                  <a:srgbClr val="666666"/>
-                </a:solidFill>
-                <a:latin typeface="Consolas"/>
-              </a:rPr>
-              <a:t>// 1. Repaint the BASE lighting first, every frame.</a:t>
-            </a:r>
-          </a:p>
-          <a:p>
-            <a:pPr algn="l">
-              <a:lnSpc>
-                <a:spcPct val="100000"/>
-              </a:lnSpc>
-              <a:spcAft>
-                <a:spcPts val="0"/>
-              </a:spcAft>
-              <a:defRPr sz="1400">
-                <a:latin typeface="Consolas"/>
-              </a:defRPr>
-            </a:pPr>
-            <a:r>
-              <a:rPr sz="1400">
-                <a:solidFill>
-                  <a:srgbClr val="222222"/>
-                </a:solidFill>
-                <a:latin typeface="Consolas"/>
-              </a:rPr>
-              <a:t>strip.clear();</a:t>
-            </a:r>
-          </a:p>
-          <a:p>
-            <a:pPr algn="l">
-              <a:lnSpc>
-                <a:spcPct val="100000"/>
-              </a:lnSpc>
-              <a:spcAft>
-                <a:spcPts val="0"/>
-              </a:spcAft>
-              <a:defRPr sz="1400">
-                <a:latin typeface="Consolas"/>
-              </a:defRPr>
-            </a:pPr>
-            <a:r>
-              <a:rPr sz="1400">
-                <a:solidFill>
-                  <a:srgbClr val="222222"/>
-                </a:solidFill>
-                <a:latin typeface="Consolas"/>
-              </a:rPr>
-              <a:t>if (running_lights_on) {</a:t>
-            </a:r>
-          </a:p>
-          <a:p>
-            <a:pPr algn="l">
-              <a:lnSpc>
-                <a:spcPct val="100000"/>
-              </a:lnSpc>
-              <a:spcAft>
-                <a:spcPts val="0"/>
-              </a:spcAft>
-              <a:defRPr sz="1400">
-                <a:latin typeface="Consolas"/>
-              </a:defRPr>
-            </a:pPr>
-            <a:r>
-              <a:rPr sz="1400">
-                <a:solidFill>
-                  <a:srgbClr val="222222"/>
-                </a:solidFill>
-                <a:latin typeface="Consolas"/>
-              </a:rPr>
-              <a:t>  fill_range(LEFT_FRONT_START, CORNER_LEN * 2, headlights);</a:t>
-            </a:r>
-          </a:p>
-          <a:p>
-            <a:pPr algn="l">
-              <a:lnSpc>
-                <a:spcPct val="100000"/>
-              </a:lnSpc>
-              <a:spcAft>
-                <a:spcPts val="0"/>
-              </a:spcAft>
-              <a:defRPr sz="1400">
-                <a:latin typeface="Consolas"/>
-              </a:defRPr>
-            </a:pPr>
-            <a:r>
-              <a:rPr sz="1400">
-                <a:solidFill>
-                  <a:srgbClr val="222222"/>
-                </a:solidFill>
-                <a:latin typeface="Consolas"/>
-              </a:rPr>
-              <a:t>  fill_range(RIGHT_REAR_START, CORNER_LEN * 2, taillights);</a:t>
-            </a:r>
-          </a:p>
-          <a:p>
-            <a:pPr algn="l">
-              <a:lnSpc>
-                <a:spcPct val="100000"/>
-              </a:lnSpc>
-              <a:spcAft>
-                <a:spcPts val="0"/>
-              </a:spcAft>
-              <a:defRPr sz="1400">
-                <a:latin typeface="Consolas"/>
-              </a:defRPr>
-            </a:pPr>
-            <a:r>
-              <a:rPr sz="1400">
-                <a:solidFill>
-                  <a:srgbClr val="222222"/>
-                </a:solidFill>
-                <a:latin typeface="Consolas"/>
-              </a:rPr>
-              <a:t>}</a:t>
-            </a:r>
-          </a:p>
-          <a:p>
-            <a:pPr algn="l">
-              <a:lnSpc>
-                <a:spcPct val="100000"/>
-              </a:lnSpc>
-              <a:spcAft>
-                <a:spcPts val="0"/>
-              </a:spcAft>
-              <a:defRPr sz="1400">
-                <a:latin typeface="Consolas"/>
-              </a:defRPr>
-            </a:pPr>
-            <a:r>
-              <a:rPr sz="1400">
-                <a:solidFill>
-                  <a:srgbClr val="666666"/>
-                </a:solidFill>
-                <a:latin typeface="Consolas"/>
-              </a:rPr>
-              <a:t>// ...then blank the signaling side, then draw the amber over it.</a:t>
-            </a:r>
-          </a:p>
-          <a:p>
-            <a:pPr algn="l">
-              <a:lnSpc>
-                <a:spcPct val="100000"/>
-              </a:lnSpc>
-              <a:spcAft>
-                <a:spcPts val="0"/>
-              </a:spcAft>
-              <a:defRPr sz="1400">
-                <a:latin typeface="Consolas"/>
-              </a:defRPr>
-            </a:pPr>
-            <a:r>
-              <a:rPr sz="1400">
-                <a:solidFill>
-                  <a:srgbClr val="666666"/>
-                </a:solidFill>
-                <a:latin typeface="Consolas"/>
-              </a:rPr>
-              <a:t>// Painting only the amber would leave the last frame underneath.</a:t>
-            </a:r>
-          </a:p>
-          <a:p>
-            <a:pPr algn="l">
-              <a:lnSpc>
-                <a:spcPct val="100000"/>
-              </a:lnSpc>
-              <a:spcAft>
-                <a:spcPts val="0"/>
-              </a:spcAft>
-              <a:defRPr sz="1400">
-                <a:latin typeface="Consolas"/>
-              </a:defRPr>
-            </a:pPr>
-            <a:r>
-              <a:rPr sz="1400">
-                <a:solidFill>
-                  <a:srgbClr val="222222"/>
-                </a:solidFill>
-                <a:latin typeface="Consolas"/>
-              </a:rPr>
-              <a:t> </a:t>
-            </a:r>
-          </a:p>
-          <a:p>
-            <a:pPr algn="l">
-              <a:lnSpc>
-                <a:spcPct val="100000"/>
-              </a:lnSpc>
-              <a:spcAft>
-                <a:spcPts val="0"/>
-              </a:spcAft>
-              <a:defRPr sz="1400">
-                <a:latin typeface="Consolas"/>
-              </a:defRPr>
-            </a:pPr>
-            <a:r>
-              <a:rPr sz="1400">
-                <a:solidFill>
-                  <a:srgbClr val="666666"/>
-                </a:solidFill>
-                <a:latin typeface="Consolas"/>
-              </a:rPr>
-              <a:t>// 2. The animation finishes its own cycles.</a:t>
-            </a:r>
-          </a:p>
-          <a:p>
-            <a:pPr algn="l">
-              <a:lnSpc>
-                <a:spcPct val="100000"/>
-              </a:lnSpc>
-              <a:spcAft>
-                <a:spcPts val="0"/>
-              </a:spcAft>
-              <a:defRPr sz="1400">
-                <a:latin typeface="Consolas"/>
-              </a:defRPr>
-            </a:pPr>
-            <a:r>
-              <a:rPr sz="1400" b="1">
-                <a:solidFill>
-                  <a:srgbClr val="0E7C86"/>
-                </a:solidFill>
-                <a:latin typeface="Consolas"/>
-              </a:rPr>
-              <a:t>bool still_held = (led_mode == TURN_LEFT  &amp;&amp; (dpad &amp; DPAD_LEFT)) ||</a:t>
-            </a:r>
-          </a:p>
-          <a:p>
-            <a:pPr algn="l">
-              <a:lnSpc>
-                <a:spcPct val="100000"/>
-              </a:lnSpc>
-              <a:spcAft>
-                <a:spcPts val="0"/>
-              </a:spcAft>
-              <a:defRPr sz="1400">
-                <a:latin typeface="Consolas"/>
-              </a:defRPr>
-            </a:pPr>
-            <a:r>
-              <a:rPr sz="1400" b="1">
-                <a:solidFill>
-                  <a:srgbClr val="0E7C86"/>
-                </a:solidFill>
-                <a:latin typeface="Consolas"/>
-              </a:rPr>
-              <a:t>                  (led_mode == TURN_RIGHT &amp;&amp; (dpad &amp; DPAD_RIGHT));</a:t>
-            </a:r>
-          </a:p>
-          <a:p>
-            <a:pPr algn="l">
-              <a:lnSpc>
-                <a:spcPct val="100000"/>
-              </a:lnSpc>
-              <a:spcAft>
-                <a:spcPts val="0"/>
-              </a:spcAft>
-              <a:defRPr sz="1400">
-                <a:latin typeface="Consolas"/>
-              </a:defRPr>
-            </a:pPr>
-            <a:r>
-              <a:rPr sz="1400" b="1">
-                <a:solidFill>
-                  <a:srgbClr val="0E7C86"/>
-                </a:solidFill>
-                <a:latin typeface="Consolas"/>
-              </a:rPr>
-              <a:t>if (!still_held &amp;&amp; turn_signal_cycles &gt;= TURN_CYCLES) {</a:t>
-            </a:r>
-          </a:p>
-          <a:p>
-            <a:pPr algn="l">
-              <a:lnSpc>
-                <a:spcPct val="100000"/>
-              </a:lnSpc>
-              <a:spcAft>
-                <a:spcPts val="0"/>
-              </a:spcAft>
-              <a:defRPr sz="1400">
-                <a:latin typeface="Consolas"/>
-              </a:defRPr>
-            </a:pPr>
-            <a:r>
-              <a:rPr sz="1400">
-                <a:solidFill>
-                  <a:srgbClr val="222222"/>
-                </a:solidFill>
-                <a:latin typeface="Consolas"/>
-              </a:rPr>
-              <a:t>  led_mode = STANDBY;</a:t>
-            </a:r>
-          </a:p>
-          <a:p>
-            <a:pPr algn="l">
-              <a:lnSpc>
-                <a:spcPct val="100000"/>
-              </a:lnSpc>
-              <a:spcAft>
-                <a:spcPts val="0"/>
-              </a:spcAft>
-              <a:defRPr sz="1400">
-                <a:latin typeface="Consolas"/>
-              </a:defRPr>
-            </a:pPr>
-            <a:r>
-              <a:rPr sz="1400">
-                <a:solidFill>
-                  <a:srgbClr val="222222"/>
-                </a:solidFill>
-                <a:latin typeface="Consolas"/>
-              </a:rPr>
-              <a:t>  standby_dirty = true;</a:t>
-            </a:r>
-          </a:p>
-          <a:p>
-            <a:pPr algn="l">
-              <a:lnSpc>
-                <a:spcPct val="100000"/>
-              </a:lnSpc>
-              <a:spcAft>
-                <a:spcPts val="0"/>
-              </a:spcAft>
-              <a:defRPr sz="1400">
-                <a:latin typeface="Consolas"/>
-              </a:defRPr>
-            </a:pPr>
-            <a:r>
-              <a:rPr sz="1400">
-                <a:solidFill>
-                  <a:srgbClr val="222222"/>
-                </a:solidFill>
-                <a:latin typeface="Consolas"/>
-              </a:rPr>
-              <a:t>}</a:t>
-            </a:r>
-          </a:p>
-        </p:txBody>
-      </p:sp>
-      <p:sp>
-        <p:nvSpPr>
-          <p:cNvPr id="8" name="TextBox 7"/>
+              <a:defRPr sz="1700" b="0">
+                <a:solidFill>
+                  <a:srgbClr val="1F3A5F"/>
+                </a:solidFill>
+                <a:latin typeface="Calibri"/>
+              </a:defRPr>
+            </a:pPr>
+            <a:r>
+              <a:rPr sz="1700" b="0">
+                <a:solidFill>
+                  <a:srgbClr val="1F3A5F"/>
+                </a:solidFill>
+                <a:latin typeface="Calibri"/>
+              </a:rPr>
+              <a:t>State machines</a:t>
+            </a:r>
+          </a:p>
+        </p:txBody>
+      </p:sp>
+      <p:sp>
+        <p:nvSpPr>
+          <p:cNvPr id="7" name="TextBox 6"/>
           <p:cNvSpPr txBox="1"/>
           <p:nvPr/>
         </p:nvSpPr>
         <p:spPr>
           <a:xfrm>
-            <a:off x="7870048" y="1517904"/>
-            <a:ext cx="3818727" cy="4745736"/>
+            <a:off x="502920" y="1856232"/>
+            <a:ext cx="3631082" cy="347472"/>
           </a:xfrm>
           <a:prstGeom prst="rect">
             <a:avLst/>
@@ -9390,103 +9345,264 @@
           </a:bodyPr>
           <a:lstStyle/>
           <a:p>
-            <a:pPr algn="l">
-              <a:lnSpc>
-                <a:spcPct val="100000"/>
-              </a:lnSpc>
-              <a:spcAft>
-                <a:spcPts val="700"/>
-              </a:spcAft>
-              <a:defRPr sz="2000" b="0">
-                <a:solidFill>
-                  <a:srgbClr val="222222"/>
-                </a:solidFill>
-                <a:latin typeface="Calibri"/>
-              </a:defRPr>
-            </a:pPr>
-            <a:r>
-              <a:rPr sz="2000" b="0">
-                <a:solidFill>
-                  <a:srgbClr val="222222"/>
-                </a:solidFill>
-                <a:latin typeface="Calibri"/>
-              </a:rPr>
-              <a:t>The D-pad only ever STARTS the animation. It does not hold it on and it does not stop it.</a:t>
-            </a:r>
-          </a:p>
-          <a:p>
-            <a:pPr algn="l">
-              <a:lnSpc>
-                <a:spcPct val="100000"/>
-              </a:lnSpc>
-              <a:spcAft>
-                <a:spcPts val="700"/>
-              </a:spcAft>
-              <a:defRPr sz="2000" b="0">
-                <a:solidFill>
-                  <a:srgbClr val="222222"/>
-                </a:solidFill>
-                <a:latin typeface="Calibri"/>
-              </a:defRPr>
-            </a:pPr>
-            <a:r>
-              <a:rPr sz="2000" b="0">
-                <a:solidFill>
-                  <a:srgbClr val="222222"/>
-                </a:solidFill>
-                <a:latin typeface="Calibri"/>
-              </a:rPr>
-              <a:t>A real indicator does not stop mid-blink when you let go of the stalk. It finishes.</a:t>
-            </a:r>
-          </a:p>
-          <a:p>
-            <a:pPr algn="l">
-              <a:lnSpc>
-                <a:spcPct val="100000"/>
-              </a:lnSpc>
-              <a:spcAft>
-                <a:spcPts val="700"/>
-              </a:spcAft>
-              <a:defRPr sz="2000" b="0">
-                <a:solidFill>
-                  <a:srgbClr val="222222"/>
-                </a:solidFill>
-                <a:latin typeface="Calibri"/>
-              </a:defRPr>
-            </a:pPr>
-            <a:r>
-              <a:rPr sz="2000" b="0">
-                <a:solidFill>
-                  <a:srgbClr val="222222"/>
-                </a:solidFill>
-                <a:latin typeface="Calibri"/>
-              </a:rPr>
-              <a:t>Holding the D-pad keeps resetting the count, so it carries on for as long as you hold it and then finishes cleanly.</a:t>
-            </a:r>
-          </a:p>
-          <a:p>
-            <a:pPr algn="l">
-              <a:lnSpc>
-                <a:spcPct val="100000"/>
-              </a:lnSpc>
-              <a:spcAft>
-                <a:spcPts val="700"/>
-              </a:spcAft>
-              <a:defRPr sz="2000" b="0">
-                <a:solidFill>
-                  <a:srgbClr val="222222"/>
-                </a:solidFill>
-                <a:latin typeface="Calibri"/>
-              </a:defRPr>
-            </a:pPr>
-            <a:r>
-              <a:rPr sz="2000" b="0">
-                <a:solidFill>
-                  <a:srgbClr val="222222"/>
-                </a:solidFill>
-                <a:latin typeface="Calibri"/>
-              </a:rPr>
-              <a:t>This is a small thing that makes a machine feel considered rather than twitchy.</a:t>
+            <a:pPr algn="ctr">
+              <a:lnSpc>
+                <a:spcPct val="100000"/>
+              </a:lnSpc>
+              <a:spcAft>
+                <a:spcPts val="600"/>
+              </a:spcAft>
+              <a:defRPr sz="1200" b="1">
+                <a:solidFill>
+                  <a:srgbClr val="0E7C86"/>
+                </a:solidFill>
+                <a:latin typeface="Calibri"/>
+              </a:defRPr>
+            </a:pPr>
+            <a:r>
+              <a:rPr sz="1200" b="1">
+                <a:solidFill>
+                  <a:srgbClr val="0E7C86"/>
+                </a:solidFill>
+                <a:latin typeface="Calibri"/>
+              </a:rPr>
+              <a:t>done</a:t>
+            </a:r>
+          </a:p>
+        </p:txBody>
+      </p:sp>
+      <p:sp>
+        <p:nvSpPr>
+          <p:cNvPr id="8" name="Rounded Rectangle 7"/>
+          <p:cNvSpPr/>
+          <p:nvPr/>
+        </p:nvSpPr>
+        <p:spPr>
+          <a:xfrm>
+            <a:off x="4280306" y="2240280"/>
+            <a:ext cx="3631082" cy="1737360"/>
+          </a:xfrm>
+          <a:prstGeom prst="roundRect">
+            <a:avLst>
+              <a:gd name="adj" fmla="val 8000"/>
+            </a:avLst>
+          </a:prstGeom>
+          <a:solidFill>
+            <a:srgbClr val="EEF3F8"/>
+          </a:solidFill>
+          <a:ln w="12700">
+            <a:solidFill>
+              <a:srgbClr val="0E7C86"/>
+            </a:solidFill>
+          </a:ln>
+          <a:effectLst/>
+        </p:spPr>
+        <p:style>
+          <a:lnRef idx="1">
+            <a:schemeClr val="accent1"/>
+          </a:lnRef>
+          <a:fillRef idx="3">
+            <a:schemeClr val="accent1"/>
+          </a:fillRef>
+          <a:effectRef idx="2">
+            <a:schemeClr val="accent1"/>
+          </a:effectRef>
+          <a:fontRef idx="minor">
+            <a:schemeClr val="lt1"/>
+          </a:fontRef>
+        </p:style>
+        <p:txBody>
+          <a:bodyPr rtlCol="0" anchor="ctr" wrap="square" lIns="73152" rIns="73152"/>
+          <a:lstStyle/>
+          <a:p>
+            <a:pPr algn="ctr">
+              <a:lnSpc>
+                <a:spcPct val="100000"/>
+              </a:lnSpc>
+              <a:spcAft>
+                <a:spcPts val="0"/>
+              </a:spcAft>
+              <a:defRPr sz="1700" b="0">
+                <a:solidFill>
+                  <a:srgbClr val="1F3A5F"/>
+                </a:solidFill>
+                <a:latin typeface="Calibri"/>
+              </a:defRPr>
+            </a:pPr>
+            <a:r>
+              <a:rPr sz="1700" b="0">
+                <a:solidFill>
+                  <a:srgbClr val="1F3A5F"/>
+                </a:solidFill>
+                <a:latin typeface="Calibri"/>
+              </a:rPr>
+              <a:t>Measuring a redraw</a:t>
+            </a:r>
+          </a:p>
+        </p:txBody>
+      </p:sp>
+      <p:sp>
+        <p:nvSpPr>
+          <p:cNvPr id="9" name="TextBox 8"/>
+          <p:cNvSpPr txBox="1"/>
+          <p:nvPr/>
+        </p:nvSpPr>
+        <p:spPr>
+          <a:xfrm>
+            <a:off x="4280306" y="1856232"/>
+            <a:ext cx="3631082" cy="347472"/>
+          </a:xfrm>
+          <a:prstGeom prst="rect">
+            <a:avLst/>
+          </a:prstGeom>
+          <a:noFill/>
+        </p:spPr>
+        <p:txBody>
+          <a:bodyPr wrap="square" lIns="0" tIns="0" rIns="0" bIns="0">
+            <a:spAutoFit/>
+          </a:bodyPr>
+          <a:lstStyle/>
+          <a:p>
+            <a:pPr algn="ctr">
+              <a:lnSpc>
+                <a:spcPct val="100000"/>
+              </a:lnSpc>
+              <a:spcAft>
+                <a:spcPts val="600"/>
+              </a:spcAft>
+              <a:defRPr sz="1200" b="1">
+                <a:solidFill>
+                  <a:srgbClr val="0E7C86"/>
+                </a:solidFill>
+                <a:latin typeface="Calibri"/>
+              </a:defRPr>
+            </a:pPr>
+            <a:r>
+              <a:rPr sz="1200" b="1">
+                <a:solidFill>
+                  <a:srgbClr val="0E7C86"/>
+                </a:solidFill>
+                <a:latin typeface="Calibri"/>
+              </a:rPr>
+              <a:t>done</a:t>
+            </a:r>
+          </a:p>
+        </p:txBody>
+      </p:sp>
+      <p:sp>
+        <p:nvSpPr>
+          <p:cNvPr id="10" name="Rounded Rectangle 9"/>
+          <p:cNvSpPr/>
+          <p:nvPr/>
+        </p:nvSpPr>
+        <p:spPr>
+          <a:xfrm>
+            <a:off x="8057692" y="2240280"/>
+            <a:ext cx="3631082" cy="1737360"/>
+          </a:xfrm>
+          <a:prstGeom prst="roundRect">
+            <a:avLst>
+              <a:gd name="adj" fmla="val 8000"/>
+            </a:avLst>
+          </a:prstGeom>
+          <a:solidFill>
+            <a:srgbClr val="D6ECEE"/>
+          </a:solidFill>
+          <a:ln w="25400">
+            <a:solidFill>
+              <a:srgbClr val="0E7C86"/>
+            </a:solidFill>
+          </a:ln>
+          <a:effectLst/>
+        </p:spPr>
+        <p:style>
+          <a:lnRef idx="1">
+            <a:schemeClr val="accent1"/>
+          </a:lnRef>
+          <a:fillRef idx="3">
+            <a:schemeClr val="accent1"/>
+          </a:fillRef>
+          <a:effectRef idx="2">
+            <a:schemeClr val="accent1"/>
+          </a:effectRef>
+          <a:fontRef idx="minor">
+            <a:schemeClr val="lt1"/>
+          </a:fontRef>
+        </p:style>
+        <p:txBody>
+          <a:bodyPr rtlCol="0" anchor="ctr" wrap="square" lIns="73152" rIns="73152"/>
+          <a:lstStyle/>
+          <a:p>
+            <a:pPr algn="ctr">
+              <a:lnSpc>
+                <a:spcPct val="100000"/>
+              </a:lnSpc>
+              <a:spcAft>
+                <a:spcPts val="0"/>
+              </a:spcAft>
+              <a:defRPr sz="1700" b="1">
+                <a:solidFill>
+                  <a:srgbClr val="1F3A5F"/>
+                </a:solidFill>
+                <a:latin typeface="Calibri"/>
+              </a:defRPr>
+            </a:pPr>
+            <a:r>
+              <a:rPr sz="1700" b="1">
+                <a:solidFill>
+                  <a:srgbClr val="1F3A5F"/>
+                </a:solidFill>
+                <a:latin typeface="Calibri"/>
+              </a:rPr>
+              <a:t>Turn signal geometry</a:t>
+            </a:r>
+          </a:p>
+        </p:txBody>
+      </p:sp>
+      <p:sp>
+        <p:nvSpPr>
+          <p:cNvPr id="11" name="TextBox 10"/>
+          <p:cNvSpPr txBox="1"/>
+          <p:nvPr/>
+        </p:nvSpPr>
+        <p:spPr>
+          <a:xfrm>
+            <a:off x="8057692" y="1856232"/>
+            <a:ext cx="3631082" cy="347472"/>
+          </a:xfrm>
+          <a:prstGeom prst="rect">
+            <a:avLst/>
+          </a:prstGeom>
+          <a:noFill/>
+        </p:spPr>
+        <p:txBody>
+          <a:bodyPr wrap="square" lIns="0" tIns="0" rIns="0" bIns="0">
+            <a:spAutoFit/>
+          </a:bodyPr>
+          <a:lstStyle/>
+          <a:p>
+            <a:pPr algn="ctr">
+              <a:lnSpc>
+                <a:spcPct val="100000"/>
+              </a:lnSpc>
+              <a:spcAft>
+                <a:spcPts val="600"/>
+              </a:spcAft>
+              <a:defRPr sz="1200" b="1">
+                <a:solidFill>
+                  <a:srgbClr val="0E7C86"/>
+                </a:solidFill>
+                <a:latin typeface="Calibri"/>
+              </a:defRPr>
+            </a:pPr>
+            <a:r>
+              <a:rPr sz="1200" b="1">
+                <a:solidFill>
+                  <a:srgbClr val="0E7C86"/>
+                </a:solidFill>
+                <a:latin typeface="Calibri"/>
+              </a:rPr>
+              <a:t>NOW</a:t>
             </a:r>
           </a:p>
         </p:txBody>
@@ -9550,7 +9666,7 @@
                 </a:solidFill>
                 <a:latin typeface="Calibri"/>
               </a:rPr>
-              <a:t>Where we are</a:t>
+              <a:t>Do it now  -  step through the geometry</a:t>
             </a:r>
           </a:p>
         </p:txBody>
@@ -9703,21 +9819,19 @@
         </p:nvSpPr>
         <p:spPr>
           <a:xfrm>
-            <a:off x="502920" y="2240280"/>
-            <a:ext cx="3631082" cy="1737360"/>
+            <a:off x="502920" y="1188720"/>
+            <a:ext cx="11185855" cy="530352"/>
           </a:xfrm>
           <a:prstGeom prst="roundRect">
             <a:avLst>
-              <a:gd name="adj" fmla="val 8000"/>
+              <a:gd name="adj" fmla="val 4000"/>
             </a:avLst>
           </a:prstGeom>
           <a:solidFill>
-            <a:srgbClr val="EEF3F8"/>
+            <a:srgbClr val="0E7C86"/>
           </a:solidFill>
-          <a:ln w="12700">
-            <a:solidFill>
-              <a:srgbClr val="0E7C86"/>
-            </a:solidFill>
+          <a:ln>
+            <a:noFill/>
           </a:ln>
           <a:effectLst/>
         </p:spPr>
@@ -9736,31 +9850,36 @@
           </a:fontRef>
         </p:style>
         <p:txBody>
-          <a:bodyPr rtlCol="0" anchor="ctr" wrap="square" lIns="73152" rIns="73152"/>
-          <a:lstStyle/>
-          <a:p>
-            <a:pPr algn="ctr">
-              <a:lnSpc>
-                <a:spcPct val="100000"/>
-              </a:lnSpc>
-              <a:spcAft>
-                <a:spcPts val="0"/>
-              </a:spcAft>
-              <a:defRPr sz="1700" b="0">
-                <a:solidFill>
-                  <a:srgbClr val="1F3A5F"/>
-                </a:solidFill>
-                <a:latin typeface="Calibri"/>
-              </a:defRPr>
-            </a:pPr>
-            <a:r>
-              <a:rPr sz="1700" b="0">
-                <a:solidFill>
-                  <a:srgbClr val="1F3A5F"/>
-                </a:solidFill>
-                <a:latin typeface="Calibri"/>
-              </a:rPr>
-              <a:t>State machines</a:t>
+          <a:bodyPr rtlCol="0" anchor="ctr" wrap="square" lIns="182880"/>
+          <a:lstStyle/>
+          <a:p>
+            <a:pPr algn="l"/>
+            <a:r>
+              <a:rPr sz="1300" b="1">
+                <a:solidFill>
+                  <a:srgbClr val="FFFFFF"/>
+                </a:solidFill>
+                <a:latin typeface="Calibri"/>
+              </a:rPr>
+              <a:t>UPLOAD AND RUN:   </a:t>
+            </a:r>
+            <a:r>
+              <a:rPr sz="1500" b="1">
+                <a:solidFill>
+                  <a:srgbClr val="FFFFFF"/>
+                </a:solidFill>
+                <a:latin typeface="Consolas"/>
+              </a:rPr>
+              <a:t>a4b_turn_signal_larson</a:t>
+            </a:r>
+            <a:r>
+              <a:rPr sz="1200">
+                <a:solidFill>
+                  <a:srgbClr val="FFFFFF"/>
+                </a:solidFill>
+                <a:latin typeface="Calibri"/>
+              </a:rPr>
+              <a:t>     (35 minutes)</a:t>
             </a:r>
           </a:p>
         </p:txBody>
@@ -9773,8 +9892,8 @@
         </p:nvSpPr>
         <p:spPr>
           <a:xfrm>
-            <a:off x="502920" y="1856232"/>
-            <a:ext cx="3631082" cy="347472"/>
+            <a:off x="502920" y="1901952"/>
+            <a:ext cx="6249137" cy="4361688"/>
           </a:xfrm>
           <a:prstGeom prst="rect">
             <a:avLst/>
@@ -9787,112 +9906,167 @@
           </a:bodyPr>
           <a:lstStyle/>
           <a:p>
-            <a:pPr algn="ctr">
-              <a:lnSpc>
-                <a:spcPct val="100000"/>
-              </a:lnSpc>
-              <a:spcAft>
-                <a:spcPts val="600"/>
-              </a:spcAft>
-              <a:defRPr sz="1200" b="1">
-                <a:solidFill>
-                  <a:srgbClr val="0E7C86"/>
-                </a:solidFill>
-                <a:latin typeface="Calibri"/>
-              </a:defRPr>
-            </a:pPr>
-            <a:r>
-              <a:rPr sz="1200" b="1">
-                <a:solidFill>
-                  <a:srgbClr val="0E7C86"/>
-                </a:solidFill>
-                <a:latin typeface="Calibri"/>
-              </a:rPr>
-              <a:t>done</a:t>
-            </a:r>
-          </a:p>
-        </p:txBody>
-      </p:sp>
-      <p:sp>
-        <p:nvSpPr>
-          <p:cNvPr id="8" name="Rounded Rectangle 7"/>
-          <p:cNvSpPr/>
-          <p:nvPr/>
-        </p:nvSpPr>
-        <p:spPr>
-          <a:xfrm>
-            <a:off x="4280306" y="2240280"/>
-            <a:ext cx="3631082" cy="1737360"/>
-          </a:xfrm>
-          <a:prstGeom prst="roundRect">
-            <a:avLst>
-              <a:gd name="adj" fmla="val 8000"/>
-            </a:avLst>
-          </a:prstGeom>
-          <a:solidFill>
-            <a:srgbClr val="EEF3F8"/>
-          </a:solidFill>
-          <a:ln w="12700">
-            <a:solidFill>
-              <a:srgbClr val="0E7C86"/>
-            </a:solidFill>
-          </a:ln>
-          <a:effectLst/>
-        </p:spPr>
-        <p:style>
-          <a:lnRef idx="1">
-            <a:schemeClr val="accent1"/>
-          </a:lnRef>
-          <a:fillRef idx="3">
-            <a:schemeClr val="accent1"/>
-          </a:fillRef>
-          <a:effectRef idx="2">
-            <a:schemeClr val="accent1"/>
-          </a:effectRef>
-          <a:fontRef idx="minor">
-            <a:schemeClr val="lt1"/>
-          </a:fontRef>
-        </p:style>
-        <p:txBody>
-          <a:bodyPr rtlCol="0" anchor="ctr" wrap="square" lIns="73152" rIns="73152"/>
-          <a:lstStyle/>
-          <a:p>
-            <a:pPr algn="ctr">
-              <a:lnSpc>
-                <a:spcPct val="100000"/>
-              </a:lnSpc>
-              <a:spcAft>
-                <a:spcPts val="0"/>
-              </a:spcAft>
-              <a:defRPr sz="1700" b="0">
-                <a:solidFill>
-                  <a:srgbClr val="1F3A5F"/>
-                </a:solidFill>
-                <a:latin typeface="Calibri"/>
-              </a:defRPr>
-            </a:pPr>
-            <a:r>
-              <a:rPr sz="1700" b="0">
-                <a:solidFill>
-                  <a:srgbClr val="1F3A5F"/>
-                </a:solidFill>
-                <a:latin typeface="Calibri"/>
-              </a:rPr>
-              <a:t>Measuring a redraw</a:t>
-            </a:r>
-          </a:p>
-        </p:txBody>
-      </p:sp>
-      <p:sp>
-        <p:nvSpPr>
-          <p:cNvPr id="9" name="TextBox 8"/>
+            <a:pPr algn="l">
+              <a:lnSpc>
+                <a:spcPct val="100000"/>
+              </a:lnSpc>
+              <a:spcAft>
+                <a:spcPts val="800"/>
+              </a:spcAft>
+              <a:defRPr sz="2100" b="0">
+                <a:solidFill>
+                  <a:srgbClr val="222222"/>
+                </a:solidFill>
+                <a:latin typeface="Calibri"/>
+              </a:defRPr>
+            </a:pPr>
+            <a:r>
+              <a:rPr sz="2100" b="0">
+                <a:solidFill>
+                  <a:srgbClr val="222222"/>
+                </a:solidFill>
+                <a:latin typeface="Calibri"/>
+              </a:rPr>
+              <a:t>1.  Upload. Type  left, then  right.</a:t>
+            </a:r>
+          </a:p>
+          <a:p>
+            <a:pPr algn="l">
+              <a:lnSpc>
+                <a:spcPct val="100000"/>
+              </a:lnSpc>
+              <a:spcAft>
+                <a:spcPts val="800"/>
+              </a:spcAft>
+              <a:defRPr sz="2100" b="0">
+                <a:solidFill>
+                  <a:srgbClr val="222222"/>
+                </a:solidFill>
+                <a:latin typeface="Calibri"/>
+              </a:defRPr>
+            </a:pPr>
+            <a:r>
+              <a:rPr sz="2100" b="0">
+                <a:solidFill>
+                  <a:srgbClr val="222222"/>
+                </a:solidFill>
+                <a:latin typeface="Calibri"/>
+              </a:rPr>
+              <a:t>2.  Type  speed 0  to freeze it, then  step  repeatedly. READ the indices it prints and check them against the vehicle.</a:t>
+            </a:r>
+          </a:p>
+          <a:p>
+            <a:pPr algn="l">
+              <a:lnSpc>
+                <a:spcPct val="100000"/>
+              </a:lnSpc>
+              <a:spcAft>
+                <a:spcPts val="800"/>
+              </a:spcAft>
+              <a:defRPr sz="2100" b="0">
+                <a:solidFill>
+                  <a:srgbClr val="222222"/>
+                </a:solidFill>
+                <a:latin typeface="Calibri"/>
+              </a:defRPr>
+            </a:pPr>
+            <a:r>
+              <a:rPr sz="2100" b="0">
+                <a:solidFill>
+                  <a:srgbClr val="222222"/>
+                </a:solidFill>
+                <a:latin typeface="Calibri"/>
+              </a:rPr>
+              <a:t>3.  hold left, wait, then  release. Where exactly does it stop?</a:t>
+            </a:r>
+          </a:p>
+          <a:p>
+            <a:pPr algn="l">
+              <a:lnSpc>
+                <a:spcPct val="100000"/>
+              </a:lnSpc>
+              <a:spcAft>
+                <a:spcPts val="800"/>
+              </a:spcAft>
+              <a:defRPr sz="2100" b="0">
+                <a:solidFill>
+                  <a:srgbClr val="222222"/>
+                </a:solidFill>
+                <a:latin typeface="Calibri"/>
+              </a:defRPr>
+            </a:pPr>
+            <a:r>
+              <a:rPr sz="2100" b="0">
+                <a:solidFill>
+                  <a:srgbClr val="222222"/>
+                </a:solidFill>
+                <a:latin typeface="Calibri"/>
+              </a:rPr>
+              <a:t>4.  speed 200  and watch the bar build slowly.</a:t>
+            </a:r>
+          </a:p>
+          <a:p>
+            <a:pPr algn="l">
+              <a:lnSpc>
+                <a:spcPct val="100000"/>
+              </a:lnSpc>
+              <a:spcAft>
+                <a:spcPts val="800"/>
+              </a:spcAft>
+              <a:defRPr sz="2100" b="0">
+                <a:solidFill>
+                  <a:srgbClr val="222222"/>
+                </a:solidFill>
+                <a:latin typeface="Calibri"/>
+              </a:defRPr>
+            </a:pPr>
+            <a:r>
+              <a:rPr sz="2100" b="0">
+                <a:solidFill>
+                  <a:srgbClr val="222222"/>
+                </a:solidFill>
+                <a:latin typeface="Calibri"/>
+              </a:rPr>
+              <a:t>5.  Change the LEFT branch to use LEFT_FRONT_START + i and see what breaks. Explain it.</a:t>
+            </a:r>
+          </a:p>
+          <a:p>
+            <a:pPr algn="l">
+              <a:lnSpc>
+                <a:spcPct val="100000"/>
+              </a:lnSpc>
+              <a:spcAft>
+                <a:spcPts val="800"/>
+              </a:spcAft>
+              <a:defRPr sz="2100" b="0">
+                <a:solidFill>
+                  <a:srgbClr val="222222"/>
+                </a:solidFill>
+                <a:latin typeface="Calibri"/>
+              </a:defRPr>
+            </a:pPr>
+            <a:r>
+              <a:rPr sz="2100" b="0">
+                <a:solidFill>
+                  <a:srgbClr val="222222"/>
+                </a:solidFill>
+                <a:latin typeface="Calibri"/>
+              </a:rPr>
+              <a:t>6.  Make the trailing edge FADE rather than switch off abruptly.</a:t>
+            </a:r>
+          </a:p>
+        </p:txBody>
+      </p:sp>
+      <p:sp>
+        <p:nvSpPr>
+          <p:cNvPr id="8" name="TextBox 7"/>
           <p:cNvSpPr txBox="1"/>
           <p:nvPr/>
         </p:nvSpPr>
         <p:spPr>
           <a:xfrm>
-            <a:off x="4280306" y="1856232"/>
-            <a:ext cx="3631082" cy="347472"/>
+            <a:off x="7163537" y="1901952"/>
+            <a:ext cx="4525238" cy="365760"/>
           </a:xfrm>
           <a:prstGeom prst="rect">
             <a:avLst/>
@@ -9905,14 +10079,14 @@
           </a:bodyPr>
           <a:lstStyle/>
           <a:p>
-            <a:pPr algn="ctr">
-              <a:lnSpc>
-                <a:spcPct val="100000"/>
-              </a:lnSpc>
-              <a:spcAft>
-                <a:spcPts val="600"/>
-              </a:spcAft>
-              <a:defRPr sz="1200" b="1">
+            <a:pPr algn="l">
+              <a:lnSpc>
+                <a:spcPct val="100000"/>
+              </a:lnSpc>
+              <a:spcAft>
+                <a:spcPts val="200"/>
+              </a:spcAft>
+              <a:defRPr sz="1800" b="1">
                 <a:solidFill>
                   <a:srgbClr val="0E7C86"/>
                 </a:solidFill>
@@ -9920,97 +10094,27 @@
               </a:defRPr>
             </a:pPr>
             <a:r>
-              <a:rPr sz="1200" b="1">
+              <a:rPr sz="1800" b="1">
                 <a:solidFill>
                   <a:srgbClr val="0E7C86"/>
                 </a:solidFill>
                 <a:latin typeface="Calibri"/>
               </a:rPr>
-              <a:t>done</a:t>
-            </a:r>
-          </a:p>
-        </p:txBody>
-      </p:sp>
-      <p:sp>
-        <p:nvSpPr>
-          <p:cNvPr id="10" name="Rounded Rectangle 9"/>
-          <p:cNvSpPr/>
-          <p:nvPr/>
-        </p:nvSpPr>
-        <p:spPr>
-          <a:xfrm>
-            <a:off x="8057692" y="2240280"/>
-            <a:ext cx="3631082" cy="1737360"/>
-          </a:xfrm>
-          <a:prstGeom prst="roundRect">
-            <a:avLst>
-              <a:gd name="adj" fmla="val 8000"/>
-            </a:avLst>
-          </a:prstGeom>
-          <a:solidFill>
-            <a:srgbClr val="D6ECEE"/>
-          </a:solidFill>
-          <a:ln w="25400">
-            <a:solidFill>
-              <a:srgbClr val="0E7C86"/>
-            </a:solidFill>
-          </a:ln>
-          <a:effectLst/>
-        </p:spPr>
-        <p:style>
-          <a:lnRef idx="1">
-            <a:schemeClr val="accent1"/>
-          </a:lnRef>
-          <a:fillRef idx="3">
-            <a:schemeClr val="accent1"/>
-          </a:fillRef>
-          <a:effectRef idx="2">
-            <a:schemeClr val="accent1"/>
-          </a:effectRef>
-          <a:fontRef idx="minor">
-            <a:schemeClr val="lt1"/>
-          </a:fontRef>
-        </p:style>
-        <p:txBody>
-          <a:bodyPr rtlCol="0" anchor="ctr" wrap="square" lIns="73152" rIns="73152"/>
-          <a:lstStyle/>
-          <a:p>
-            <a:pPr algn="ctr">
-              <a:lnSpc>
-                <a:spcPct val="100000"/>
-              </a:lnSpc>
-              <a:spcAft>
-                <a:spcPts val="0"/>
-              </a:spcAft>
-              <a:defRPr sz="1700" b="1">
-                <a:solidFill>
-                  <a:srgbClr val="1F3A5F"/>
-                </a:solidFill>
-                <a:latin typeface="Calibri"/>
-              </a:defRPr>
-            </a:pPr>
-            <a:r>
-              <a:rPr sz="1700" b="1">
-                <a:solidFill>
-                  <a:srgbClr val="1F3A5F"/>
-                </a:solidFill>
-                <a:latin typeface="Calibri"/>
-              </a:rPr>
-              <a:t>Turn signal geometry</a:t>
-            </a:r>
-          </a:p>
-        </p:txBody>
-      </p:sp>
-      <p:sp>
-        <p:nvSpPr>
-          <p:cNvPr id="11" name="TextBox 10"/>
+              <a:t>What you should see</a:t>
+            </a:r>
+          </a:p>
+        </p:txBody>
+      </p:sp>
+      <p:sp>
+        <p:nvSpPr>
+          <p:cNvPr id="9" name="TextBox 8"/>
           <p:cNvSpPr txBox="1"/>
           <p:nvPr/>
         </p:nvSpPr>
         <p:spPr>
           <a:xfrm>
-            <a:off x="8057692" y="1856232"/>
-            <a:ext cx="3631082" cy="347472"/>
+            <a:off x="7163537" y="2304288"/>
+            <a:ext cx="4525238" cy="1458305"/>
           </a:xfrm>
           <a:prstGeom prst="rect">
             <a:avLst/>
@@ -10023,14 +10127,62 @@
           </a:bodyPr>
           <a:lstStyle/>
           <a:p>
-            <a:pPr algn="ctr">
-              <a:lnSpc>
-                <a:spcPct val="100000"/>
-              </a:lnSpc>
-              <a:spcAft>
-                <a:spcPts val="600"/>
-              </a:spcAft>
-              <a:defRPr sz="1200" b="1">
+            <a:pPr algn="l">
+              <a:lnSpc>
+                <a:spcPct val="100000"/>
+              </a:lnSpc>
+              <a:spcAft>
+                <a:spcPts val="300"/>
+              </a:spcAft>
+              <a:defRPr sz="2300" b="0">
+                <a:solidFill>
+                  <a:srgbClr val="222222"/>
+                </a:solidFill>
+                <a:latin typeface="Calibri"/>
+              </a:defRPr>
+            </a:pPr>
+            <a:r>
+              <a:rPr sz="2300" b="0">
+                <a:solidFill>
+                  <a:srgbClr val="222222"/>
+                </a:solidFill>
+                <a:latin typeface="Calibri"/>
+              </a:rPr>
+              <a:t>Amber growing outward from the center toward the turning corner, front and rear mirrored.</a:t>
+            </a:r>
+          </a:p>
+        </p:txBody>
+      </p:sp>
+      <p:sp>
+        <p:nvSpPr>
+          <p:cNvPr id="10" name="TextBox 9"/>
+          <p:cNvSpPr txBox="1"/>
+          <p:nvPr/>
+        </p:nvSpPr>
+        <p:spPr>
+          <a:xfrm>
+            <a:off x="7163537" y="3835745"/>
+            <a:ext cx="4525238" cy="365760"/>
+          </a:xfrm>
+          <a:prstGeom prst="rect">
+            <a:avLst/>
+          </a:prstGeom>
+          <a:noFill/>
+        </p:spPr>
+        <p:txBody>
+          <a:bodyPr wrap="square" lIns="0" tIns="0" rIns="0" bIns="0">
+            <a:spAutoFit/>
+          </a:bodyPr>
+          <a:lstStyle/>
+          <a:p>
+            <a:pPr algn="l">
+              <a:lnSpc>
+                <a:spcPct val="100000"/>
+              </a:lnSpc>
+              <a:spcAft>
+                <a:spcPts val="200"/>
+              </a:spcAft>
+              <a:defRPr sz="1800" b="1">
                 <a:solidFill>
                   <a:srgbClr val="0E7C86"/>
                 </a:solidFill>
@@ -10038,13 +10190,86 @@
               </a:defRPr>
             </a:pPr>
             <a:r>
-              <a:rPr sz="1200" b="1">
+              <a:rPr sz="1800" b="1">
                 <a:solidFill>
                   <a:srgbClr val="0E7C86"/>
                 </a:solidFill>
                 <a:latin typeface="Calibri"/>
               </a:rPr>
-              <a:t>NOW</a:t>
+              <a:t>Answer these</a:t>
+            </a:r>
+          </a:p>
+        </p:txBody>
+      </p:sp>
+      <p:sp>
+        <p:nvSpPr>
+          <p:cNvPr id="11" name="TextBox 10"/>
+          <p:cNvSpPr txBox="1"/>
+          <p:nvPr/>
+        </p:nvSpPr>
+        <p:spPr>
+          <a:xfrm>
+            <a:off x="7163537" y="4238081"/>
+            <a:ext cx="4525238" cy="2025558"/>
+          </a:xfrm>
+          <a:prstGeom prst="rect">
+            <a:avLst/>
+          </a:prstGeom>
+          <a:noFill/>
+        </p:spPr>
+        <p:txBody>
+          <a:bodyPr wrap="square" lIns="0" tIns="0" rIns="0" bIns="0">
+            <a:spAutoFit/>
+          </a:bodyPr>
+          <a:lstStyle/>
+          <a:p>
+            <a:pPr algn="l">
+              <a:lnSpc>
+                <a:spcPct val="100000"/>
+              </a:lnSpc>
+              <a:spcAft>
+                <a:spcPts val="300"/>
+              </a:spcAft>
+              <a:defRPr sz="2000" b="0">
+                <a:solidFill>
+                  <a:srgbClr val="222222"/>
+                </a:solidFill>
+                <a:latin typeface="Calibri"/>
+              </a:defRPr>
+            </a:pPr>
+            <a:r>
+              <a:rPr sz="2000" b="0">
+                <a:solidFill>
+                  <a:srgbClr val="222222"/>
+                </a:solidFill>
+                <a:latin typeface="Calibri"/>
+              </a:rPr>
+              <a:t>Why does the front index count down for a left signal but up for a right one?</a:t>
+            </a:r>
+          </a:p>
+          <a:p>
+            <a:pPr algn="l">
+              <a:lnSpc>
+                <a:spcPct val="100000"/>
+              </a:lnSpc>
+              <a:spcAft>
+                <a:spcPts val="300"/>
+              </a:spcAft>
+              <a:defRPr sz="2000" b="0">
+                <a:solidFill>
+                  <a:srgbClr val="222222"/>
+                </a:solidFill>
+                <a:latin typeface="Calibri"/>
+              </a:defRPr>
+            </a:pPr>
+            <a:r>
+              <a:rPr sz="2000" b="0">
+                <a:solidFill>
+                  <a:srgbClr val="222222"/>
+                </a:solidFill>
+                <a:latin typeface="Calibri"/>
+              </a:rPr>
+              <a:t>What would happen if the base lighting were not repainted each frame?</a:t>
             </a:r>
           </a:p>
         </p:txBody>
@@ -10108,7 +10333,7 @@
                 </a:solidFill>
                 <a:latin typeface="Calibri"/>
               </a:rPr>
-              <a:t>Do it now  -  step through the geometry</a:t>
+              <a:t>The state machine itself</a:t>
             </a:r>
           </a:p>
         </p:txBody>
@@ -10255,14 +10480,62 @@
       </p:sp>
       <p:sp>
         <p:nvSpPr>
-          <p:cNvPr id="6" name="Rounded Rectangle 5"/>
+          <p:cNvPr id="6" name="TextBox 5"/>
+          <p:cNvSpPr txBox="1"/>
+          <p:nvPr/>
+        </p:nvSpPr>
+        <p:spPr>
+          <a:xfrm>
+            <a:off x="502920" y="1188720"/>
+            <a:ext cx="7047088" cy="274320"/>
+          </a:xfrm>
+          <a:prstGeom prst="rect">
+            <a:avLst/>
+          </a:prstGeom>
+          <a:noFill/>
+        </p:spPr>
+        <p:txBody>
+          <a:bodyPr wrap="square" lIns="0" tIns="0" rIns="0" bIns="0">
+            <a:spAutoFit/>
+          </a:bodyPr>
+          <a:lstStyle/>
+          <a:p>
+            <a:pPr algn="l">
+              <a:lnSpc>
+                <a:spcPct val="100000"/>
+              </a:lnSpc>
+              <a:spcAft>
+                <a:spcPts val="200"/>
+              </a:spcAft>
+              <a:defRPr sz="1200" b="1">
+                <a:solidFill>
+                  <a:srgbClr val="0E7C86"/>
+                </a:solidFill>
+                <a:latin typeface="Consolas"/>
+              </a:defRPr>
+            </a:pPr>
+            <a:r>
+              <a:rPr sz="1200" b="1">
+                <a:solidFill>
+                  <a:srgbClr val="0E7C86"/>
+                </a:solidFill>
+                <a:latin typeface="Consolas"/>
+              </a:rPr>
+              <a:t>Lighting.ino</a:t>
+            </a:r>
+          </a:p>
+        </p:txBody>
+      </p:sp>
+      <p:sp>
+        <p:nvSpPr>
+          <p:cNvPr id="7" name="CODE_PANEL"/>
           <p:cNvSpPr/>
           <p:nvPr/>
         </p:nvSpPr>
         <p:spPr>
           <a:xfrm>
-            <a:off x="502920" y="1188720"/>
-            <a:ext cx="11185855" cy="530352"/>
+            <a:off x="502920" y="1517904"/>
+            <a:ext cx="7047088" cy="4745736"/>
           </a:xfrm>
           <a:prstGeom prst="roundRect">
             <a:avLst>
@@ -10270,10 +10543,12 @@
             </a:avLst>
           </a:prstGeom>
           <a:solidFill>
-            <a:srgbClr val="0E7C86"/>
+            <a:srgbClr val="F4F6F8"/>
           </a:solidFill>
-          <a:ln>
-            <a:noFill/>
+          <a:ln w="12700">
+            <a:solidFill>
+              <a:srgbClr val="C8D2DE"/>
+            </a:solidFill>
           </a:ln>
           <a:effectLst/>
         </p:spPr>
@@ -10292,50 +10567,482 @@
           </a:fontRef>
         </p:style>
         <p:txBody>
-          <a:bodyPr rtlCol="0" anchor="ctr" wrap="square" lIns="182880"/>
-          <a:lstStyle/>
-          <a:p>
-            <a:pPr algn="l"/>
-            <a:r>
-              <a:rPr sz="1300" b="1">
-                <a:solidFill>
-                  <a:srgbClr val="FFFFFF"/>
-                </a:solidFill>
-                <a:latin typeface="Calibri"/>
-              </a:rPr>
-              <a:t>UPLOAD AND RUN:   </a:t>
-            </a:r>
-            <a:r>
-              <a:rPr sz="1500" b="1">
-                <a:solidFill>
-                  <a:srgbClr val="FFFFFF"/>
-                </a:solidFill>
+          <a:bodyPr rtlCol="0" anchor="t" wrap="square" lIns="146304" tIns="91440" bIns="73152"/>
+          <a:lstStyle/>
+          <a:p>
+            <a:pPr algn="l">
+              <a:lnSpc>
+                <a:spcPct val="100000"/>
+              </a:lnSpc>
+              <a:spcAft>
+                <a:spcPts val="0"/>
+              </a:spcAft>
+              <a:defRPr sz="1400">
                 <a:latin typeface="Consolas"/>
-              </a:rPr>
-              <a:t>a4b_turn_signal_larson</a:t>
-            </a:r>
-            <a:r>
-              <a:rPr sz="1200">
-                <a:solidFill>
-                  <a:srgbClr val="FFFFFF"/>
-                </a:solidFill>
-                <a:latin typeface="Calibri"/>
-              </a:rPr>
-              <a:t>     (35 minutes)</a:t>
-            </a:r>
-          </a:p>
-        </p:txBody>
-      </p:sp>
-      <p:sp>
-        <p:nvSpPr>
-          <p:cNvPr id="7" name="TextBox 6"/>
+              </a:defRPr>
+            </a:pPr>
+            <a:r>
+              <a:rPr sz="1400">
+                <a:solidFill>
+                  <a:srgbClr val="222222"/>
+                </a:solidFill>
+                <a:latin typeface="Consolas"/>
+              </a:rPr>
+              <a:t>void update_lighting(unsigned long now, uint8_t dpad) {</a:t>
+            </a:r>
+          </a:p>
+          <a:p>
+            <a:pPr algn="l">
+              <a:lnSpc>
+                <a:spcPct val="100000"/>
+              </a:lnSpc>
+              <a:spcAft>
+                <a:spcPts val="0"/>
+              </a:spcAft>
+              <a:defRPr sz="1400">
+                <a:latin typeface="Consolas"/>
+              </a:defRPr>
+            </a:pPr>
+            <a:r>
+              <a:rPr sz="1400">
+                <a:solidFill>
+                  <a:srgbClr val="222222"/>
+                </a:solidFill>
+                <a:latin typeface="Consolas"/>
+              </a:rPr>
+              <a:t> </a:t>
+            </a:r>
+          </a:p>
+          <a:p>
+            <a:pPr algn="l">
+              <a:lnSpc>
+                <a:spcPct val="100000"/>
+              </a:lnSpc>
+              <a:spcAft>
+                <a:spcPts val="0"/>
+              </a:spcAft>
+              <a:defRPr sz="1400">
+                <a:latin typeface="Consolas"/>
+              </a:defRPr>
+            </a:pPr>
+            <a:r>
+              <a:rPr sz="1400">
+                <a:solidFill>
+                  <a:srgbClr val="222222"/>
+                </a:solidFill>
+                <a:latin typeface="Consolas"/>
+              </a:rPr>
+              <a:t>  if (led_mode == PAIRING) {</a:t>
+            </a:r>
+          </a:p>
+          <a:p>
+            <a:pPr algn="l">
+              <a:lnSpc>
+                <a:spcPct val="100000"/>
+              </a:lnSpc>
+              <a:spcAft>
+                <a:spcPts val="0"/>
+              </a:spcAft>
+              <a:defRPr sz="1400">
+                <a:latin typeface="Consolas"/>
+              </a:defRPr>
+            </a:pPr>
+            <a:r>
+              <a:rPr sz="1400">
+                <a:solidFill>
+                  <a:srgbClr val="222222"/>
+                </a:solidFill>
+                <a:latin typeface="Consolas"/>
+              </a:rPr>
+              <a:t>    update_pairing_breathing(now);</a:t>
+            </a:r>
+          </a:p>
+          <a:p>
+            <a:pPr algn="l">
+              <a:lnSpc>
+                <a:spcPct val="100000"/>
+              </a:lnSpc>
+              <a:spcAft>
+                <a:spcPts val="0"/>
+              </a:spcAft>
+              <a:defRPr sz="1400">
+                <a:latin typeface="Consolas"/>
+              </a:defRPr>
+            </a:pPr>
+            <a:r>
+              <a:rPr sz="1400">
+                <a:solidFill>
+                  <a:srgbClr val="222222"/>
+                </a:solidFill>
+                <a:latin typeface="Consolas"/>
+              </a:rPr>
+              <a:t>    return;</a:t>
+            </a:r>
+          </a:p>
+          <a:p>
+            <a:pPr algn="l">
+              <a:lnSpc>
+                <a:spcPct val="100000"/>
+              </a:lnSpc>
+              <a:spcAft>
+                <a:spcPts val="0"/>
+              </a:spcAft>
+              <a:defRPr sz="1400">
+                <a:latin typeface="Consolas"/>
+              </a:defRPr>
+            </a:pPr>
+            <a:r>
+              <a:rPr sz="1400">
+                <a:solidFill>
+                  <a:srgbClr val="222222"/>
+                </a:solidFill>
+                <a:latin typeface="Consolas"/>
+              </a:rPr>
+              <a:t>  }</a:t>
+            </a:r>
+          </a:p>
+          <a:p>
+            <a:pPr algn="l">
+              <a:lnSpc>
+                <a:spcPct val="100000"/>
+              </a:lnSpc>
+              <a:spcAft>
+                <a:spcPts val="0"/>
+              </a:spcAft>
+              <a:defRPr sz="1400">
+                <a:latin typeface="Consolas"/>
+              </a:defRPr>
+            </a:pPr>
+            <a:r>
+              <a:rPr sz="1400">
+                <a:solidFill>
+                  <a:srgbClr val="222222"/>
+                </a:solidFill>
+                <a:latin typeface="Consolas"/>
+              </a:rPr>
+              <a:t> </a:t>
+            </a:r>
+          </a:p>
+          <a:p>
+            <a:pPr algn="l">
+              <a:lnSpc>
+                <a:spcPct val="100000"/>
+              </a:lnSpc>
+              <a:spcAft>
+                <a:spcPts val="0"/>
+              </a:spcAft>
+              <a:defRPr sz="1400">
+                <a:latin typeface="Consolas"/>
+              </a:defRPr>
+            </a:pPr>
+            <a:r>
+              <a:rPr sz="1400">
+                <a:solidFill>
+                  <a:srgbClr val="222222"/>
+                </a:solidFill>
+                <a:latin typeface="Consolas"/>
+              </a:rPr>
+              <a:t>  if (led_mode == TURN_LEFT || led_mode == TURN_RIGHT) {</a:t>
+            </a:r>
+          </a:p>
+          <a:p>
+            <a:pPr algn="l">
+              <a:lnSpc>
+                <a:spcPct val="100000"/>
+              </a:lnSpc>
+              <a:spcAft>
+                <a:spcPts val="0"/>
+              </a:spcAft>
+              <a:defRPr sz="1400">
+                <a:latin typeface="Consolas"/>
+              </a:defRPr>
+            </a:pPr>
+            <a:r>
+              <a:rPr sz="1400" b="1">
+                <a:solidFill>
+                  <a:srgbClr val="0E7C86"/>
+                </a:solidFill>
+                <a:latin typeface="Consolas"/>
+              </a:rPr>
+              <a:t>    if (now - larson_time &lt; LARSON_DELAY_MS) return;</a:t>
+            </a:r>
+          </a:p>
+          <a:p>
+            <a:pPr algn="l">
+              <a:lnSpc>
+                <a:spcPct val="100000"/>
+              </a:lnSpc>
+              <a:spcAft>
+                <a:spcPts val="0"/>
+              </a:spcAft>
+              <a:defRPr sz="1400">
+                <a:latin typeface="Consolas"/>
+              </a:defRPr>
+            </a:pPr>
+            <a:r>
+              <a:rPr sz="1400">
+                <a:solidFill>
+                  <a:srgbClr val="222222"/>
+                </a:solidFill>
+                <a:latin typeface="Consolas"/>
+              </a:rPr>
+              <a:t>    larson_time = now;</a:t>
+            </a:r>
+          </a:p>
+          <a:p>
+            <a:pPr algn="l">
+              <a:lnSpc>
+                <a:spcPct val="100000"/>
+              </a:lnSpc>
+              <a:spcAft>
+                <a:spcPts val="0"/>
+              </a:spcAft>
+              <a:defRPr sz="1400">
+                <a:latin typeface="Consolas"/>
+              </a:defRPr>
+            </a:pPr>
+            <a:r>
+              <a:rPr sz="1400">
+                <a:solidFill>
+                  <a:srgbClr val="666666"/>
+                </a:solidFill>
+                <a:latin typeface="Consolas"/>
+              </a:rPr>
+              <a:t>    // ...advance one phase, count cycles, maybe hand back...</a:t>
+            </a:r>
+          </a:p>
+          <a:p>
+            <a:pPr algn="l">
+              <a:lnSpc>
+                <a:spcPct val="100000"/>
+              </a:lnSpc>
+              <a:spcAft>
+                <a:spcPts val="0"/>
+              </a:spcAft>
+              <a:defRPr sz="1400">
+                <a:latin typeface="Consolas"/>
+              </a:defRPr>
+            </a:pPr>
+            <a:r>
+              <a:rPr sz="1400">
+                <a:solidFill>
+                  <a:srgbClr val="222222"/>
+                </a:solidFill>
+                <a:latin typeface="Consolas"/>
+              </a:rPr>
+              <a:t>    update_larson_scanner();</a:t>
+            </a:r>
+          </a:p>
+          <a:p>
+            <a:pPr algn="l">
+              <a:lnSpc>
+                <a:spcPct val="100000"/>
+              </a:lnSpc>
+              <a:spcAft>
+                <a:spcPts val="0"/>
+              </a:spcAft>
+              <a:defRPr sz="1400">
+                <a:latin typeface="Consolas"/>
+              </a:defRPr>
+            </a:pPr>
+            <a:r>
+              <a:rPr sz="1400">
+                <a:solidFill>
+                  <a:srgbClr val="222222"/>
+                </a:solidFill>
+                <a:latin typeface="Consolas"/>
+              </a:rPr>
+              <a:t>    return;</a:t>
+            </a:r>
+          </a:p>
+          <a:p>
+            <a:pPr algn="l">
+              <a:lnSpc>
+                <a:spcPct val="100000"/>
+              </a:lnSpc>
+              <a:spcAft>
+                <a:spcPts val="0"/>
+              </a:spcAft>
+              <a:defRPr sz="1400">
+                <a:latin typeface="Consolas"/>
+              </a:defRPr>
+            </a:pPr>
+            <a:r>
+              <a:rPr sz="1400">
+                <a:solidFill>
+                  <a:srgbClr val="222222"/>
+                </a:solidFill>
+                <a:latin typeface="Consolas"/>
+              </a:rPr>
+              <a:t>  }</a:t>
+            </a:r>
+          </a:p>
+          <a:p>
+            <a:pPr algn="l">
+              <a:lnSpc>
+                <a:spcPct val="100000"/>
+              </a:lnSpc>
+              <a:spcAft>
+                <a:spcPts val="0"/>
+              </a:spcAft>
+              <a:defRPr sz="1400">
+                <a:latin typeface="Consolas"/>
+              </a:defRPr>
+            </a:pPr>
+            <a:r>
+              <a:rPr sz="1400">
+                <a:solidFill>
+                  <a:srgbClr val="222222"/>
+                </a:solidFill>
+                <a:latin typeface="Consolas"/>
+              </a:rPr>
+              <a:t> </a:t>
+            </a:r>
+          </a:p>
+          <a:p>
+            <a:pPr algn="l">
+              <a:lnSpc>
+                <a:spcPct val="100000"/>
+              </a:lnSpc>
+              <a:spcAft>
+                <a:spcPts val="0"/>
+              </a:spcAft>
+              <a:defRPr sz="1400">
+                <a:latin typeface="Consolas"/>
+              </a:defRPr>
+            </a:pPr>
+            <a:r>
+              <a:rPr sz="1400">
+                <a:solidFill>
+                  <a:srgbClr val="222222"/>
+                </a:solidFill>
+                <a:latin typeface="Consolas"/>
+              </a:rPr>
+              <a:t>  if (led_mode == KITT_SCANNER) {</a:t>
+            </a:r>
+          </a:p>
+          <a:p>
+            <a:pPr algn="l">
+              <a:lnSpc>
+                <a:spcPct val="100000"/>
+              </a:lnSpc>
+              <a:spcAft>
+                <a:spcPts val="0"/>
+              </a:spcAft>
+              <a:defRPr sz="1400">
+                <a:latin typeface="Consolas"/>
+              </a:defRPr>
+            </a:pPr>
+            <a:r>
+              <a:rPr sz="1400" b="1">
+                <a:solidFill>
+                  <a:srgbClr val="0E7C86"/>
+                </a:solidFill>
+                <a:latin typeface="Consolas"/>
+              </a:rPr>
+              <a:t>    if (now - kitt_time &lt; (unsigned long)KITT_SPEED_MS) return;</a:t>
+            </a:r>
+          </a:p>
+          <a:p>
+            <a:pPr algn="l">
+              <a:lnSpc>
+                <a:spcPct val="100000"/>
+              </a:lnSpc>
+              <a:spcAft>
+                <a:spcPts val="0"/>
+              </a:spcAft>
+              <a:defRPr sz="1400">
+                <a:latin typeface="Consolas"/>
+              </a:defRPr>
+            </a:pPr>
+            <a:r>
+              <a:rPr sz="1400">
+                <a:solidFill>
+                  <a:srgbClr val="222222"/>
+                </a:solidFill>
+                <a:latin typeface="Consolas"/>
+              </a:rPr>
+              <a:t>    kitt_time = now;</a:t>
+            </a:r>
+          </a:p>
+          <a:p>
+            <a:pPr algn="l">
+              <a:lnSpc>
+                <a:spcPct val="100000"/>
+              </a:lnSpc>
+              <a:spcAft>
+                <a:spcPts val="0"/>
+              </a:spcAft>
+              <a:defRPr sz="1400">
+                <a:latin typeface="Consolas"/>
+              </a:defRPr>
+            </a:pPr>
+            <a:r>
+              <a:rPr sz="1400">
+                <a:solidFill>
+                  <a:srgbClr val="666666"/>
+                </a:solidFill>
+                <a:latin typeface="Consolas"/>
+              </a:rPr>
+              <a:t>    // ...draw one frame, step the dot, maybe hand back...</a:t>
+            </a:r>
+          </a:p>
+          <a:p>
+            <a:pPr algn="l">
+              <a:lnSpc>
+                <a:spcPct val="100000"/>
+              </a:lnSpc>
+              <a:spcAft>
+                <a:spcPts val="0"/>
+              </a:spcAft>
+              <a:defRPr sz="1400">
+                <a:latin typeface="Consolas"/>
+              </a:defRPr>
+            </a:pPr>
+            <a:r>
+              <a:rPr sz="1400">
+                <a:solidFill>
+                  <a:srgbClr val="222222"/>
+                </a:solidFill>
+                <a:latin typeface="Consolas"/>
+              </a:rPr>
+              <a:t>    return;</a:t>
+            </a:r>
+          </a:p>
+          <a:p>
+            <a:pPr algn="l">
+              <a:lnSpc>
+                <a:spcPct val="100000"/>
+              </a:lnSpc>
+              <a:spcAft>
+                <a:spcPts val="0"/>
+              </a:spcAft>
+              <a:defRPr sz="1400">
+                <a:latin typeface="Consolas"/>
+              </a:defRPr>
+            </a:pPr>
+            <a:r>
+              <a:rPr sz="1400">
+                <a:solidFill>
+                  <a:srgbClr val="222222"/>
+                </a:solidFill>
+                <a:latin typeface="Consolas"/>
+              </a:rPr>
+              <a:t>  }</a:t>
+            </a:r>
+          </a:p>
+        </p:txBody>
+      </p:sp>
+      <p:sp>
+        <p:nvSpPr>
+          <p:cNvPr id="8" name="TextBox 7"/>
           <p:cNvSpPr txBox="1"/>
           <p:nvPr/>
         </p:nvSpPr>
         <p:spPr>
           <a:xfrm>
-            <a:off x="502920" y="1901952"/>
-            <a:ext cx="6249137" cy="4361688"/>
+            <a:off x="7870048" y="1517904"/>
+            <a:ext cx="3818727" cy="4745736"/>
           </a:xfrm>
           <a:prstGeom prst="rect">
             <a:avLst/>
@@ -10353,365 +11060,98 @@
                 <a:spcPct val="100000"/>
               </a:lnSpc>
               <a:spcAft>
-                <a:spcPts val="800"/>
-              </a:spcAft>
-              <a:defRPr sz="2100" b="0">
-                <a:solidFill>
-                  <a:srgbClr val="222222"/>
-                </a:solidFill>
-                <a:latin typeface="Calibri"/>
-              </a:defRPr>
-            </a:pPr>
-            <a:r>
-              <a:rPr sz="2100" b="0">
-                <a:solidFill>
-                  <a:srgbClr val="222222"/>
-                </a:solidFill>
-                <a:latin typeface="Calibri"/>
-              </a:rPr>
-              <a:t>1.  Upload. Type  left, then  right.</a:t>
-            </a:r>
-          </a:p>
-          <a:p>
-            <a:pPr algn="l">
-              <a:lnSpc>
-                <a:spcPct val="100000"/>
-              </a:lnSpc>
-              <a:spcAft>
-                <a:spcPts val="800"/>
-              </a:spcAft>
-              <a:defRPr sz="2100" b="0">
-                <a:solidFill>
-                  <a:srgbClr val="222222"/>
-                </a:solidFill>
-                <a:latin typeface="Calibri"/>
-              </a:defRPr>
-            </a:pPr>
-            <a:r>
-              <a:rPr sz="2100" b="0">
-                <a:solidFill>
-                  <a:srgbClr val="222222"/>
-                </a:solidFill>
-                <a:latin typeface="Calibri"/>
-              </a:rPr>
-              <a:t>2.  Type  speed 0  to freeze it, then  step  repeatedly. READ the indices it prints and check them against the vehicle.</a:t>
-            </a:r>
-          </a:p>
-          <a:p>
-            <a:pPr algn="l">
-              <a:lnSpc>
-                <a:spcPct val="100000"/>
-              </a:lnSpc>
-              <a:spcAft>
-                <a:spcPts val="800"/>
-              </a:spcAft>
-              <a:defRPr sz="2100" b="0">
-                <a:solidFill>
-                  <a:srgbClr val="222222"/>
-                </a:solidFill>
-                <a:latin typeface="Calibri"/>
-              </a:defRPr>
-            </a:pPr>
-            <a:r>
-              <a:rPr sz="2100" b="0">
-                <a:solidFill>
-                  <a:srgbClr val="222222"/>
-                </a:solidFill>
-                <a:latin typeface="Calibri"/>
-              </a:rPr>
-              <a:t>3.  hold left, wait, then  release. Where exactly does it stop?</a:t>
-            </a:r>
-          </a:p>
-          <a:p>
-            <a:pPr algn="l">
-              <a:lnSpc>
-                <a:spcPct val="100000"/>
-              </a:lnSpc>
-              <a:spcAft>
-                <a:spcPts val="800"/>
-              </a:spcAft>
-              <a:defRPr sz="2100" b="0">
-                <a:solidFill>
-                  <a:srgbClr val="222222"/>
-                </a:solidFill>
-                <a:latin typeface="Calibri"/>
-              </a:defRPr>
-            </a:pPr>
-            <a:r>
-              <a:rPr sz="2100" b="0">
-                <a:solidFill>
-                  <a:srgbClr val="222222"/>
-                </a:solidFill>
-                <a:latin typeface="Calibri"/>
-              </a:rPr>
-              <a:t>4.  speed 200  and watch the bar build slowly.</a:t>
-            </a:r>
-          </a:p>
-          <a:p>
-            <a:pPr algn="l">
-              <a:lnSpc>
-                <a:spcPct val="100000"/>
-              </a:lnSpc>
-              <a:spcAft>
-                <a:spcPts val="800"/>
-              </a:spcAft>
-              <a:defRPr sz="2100" b="0">
-                <a:solidFill>
-                  <a:srgbClr val="222222"/>
-                </a:solidFill>
-                <a:latin typeface="Calibri"/>
-              </a:defRPr>
-            </a:pPr>
-            <a:r>
-              <a:rPr sz="2100" b="0">
-                <a:solidFill>
-                  <a:srgbClr val="222222"/>
-                </a:solidFill>
-                <a:latin typeface="Calibri"/>
-              </a:rPr>
-              <a:t>5.  Change the LEFT branch to use LEFT_FRONT_START + i and see what breaks. Explain it.</a:t>
-            </a:r>
-          </a:p>
-          <a:p>
-            <a:pPr algn="l">
-              <a:lnSpc>
-                <a:spcPct val="100000"/>
-              </a:lnSpc>
-              <a:spcAft>
-                <a:spcPts val="800"/>
-              </a:spcAft>
-              <a:defRPr sz="2100" b="0">
-                <a:solidFill>
-                  <a:srgbClr val="222222"/>
-                </a:solidFill>
-                <a:latin typeface="Calibri"/>
-              </a:defRPr>
-            </a:pPr>
-            <a:r>
-              <a:rPr sz="2100" b="0">
-                <a:solidFill>
-                  <a:srgbClr val="222222"/>
-                </a:solidFill>
-                <a:latin typeface="Calibri"/>
-              </a:rPr>
-              <a:t>6.  Make the trailing edge FADE rather than switch off abruptly.</a:t>
-            </a:r>
-          </a:p>
-        </p:txBody>
-      </p:sp>
-      <p:sp>
-        <p:nvSpPr>
-          <p:cNvPr id="8" name="TextBox 7"/>
-          <p:cNvSpPr txBox="1"/>
-          <p:nvPr/>
-        </p:nvSpPr>
-        <p:spPr>
-          <a:xfrm>
-            <a:off x="7163537" y="1901952"/>
-            <a:ext cx="4525238" cy="365760"/>
-          </a:xfrm>
-          <a:prstGeom prst="rect">
-            <a:avLst/>
-          </a:prstGeom>
-          <a:noFill/>
-        </p:spPr>
-        <p:txBody>
-          <a:bodyPr wrap="square" lIns="0" tIns="0" rIns="0" bIns="0">
-            <a:spAutoFit/>
-          </a:bodyPr>
-          <a:lstStyle/>
-          <a:p>
-            <a:pPr algn="l">
-              <a:lnSpc>
-                <a:spcPct val="100000"/>
-              </a:lnSpc>
-              <a:spcAft>
-                <a:spcPts val="200"/>
-              </a:spcAft>
-              <a:defRPr sz="1800" b="1">
-                <a:solidFill>
-                  <a:srgbClr val="0E7C86"/>
-                </a:solidFill>
-                <a:latin typeface="Calibri"/>
-              </a:defRPr>
-            </a:pPr>
-            <a:r>
-              <a:rPr sz="1800" b="1">
-                <a:solidFill>
-                  <a:srgbClr val="0E7C86"/>
-                </a:solidFill>
-                <a:latin typeface="Calibri"/>
-              </a:rPr>
-              <a:t>What you should see</a:t>
-            </a:r>
-          </a:p>
-        </p:txBody>
-      </p:sp>
-      <p:sp>
-        <p:nvSpPr>
-          <p:cNvPr id="9" name="TextBox 8"/>
-          <p:cNvSpPr txBox="1"/>
-          <p:nvPr/>
-        </p:nvSpPr>
-        <p:spPr>
-          <a:xfrm>
-            <a:off x="7163537" y="2304288"/>
-            <a:ext cx="4525238" cy="1458305"/>
-          </a:xfrm>
-          <a:prstGeom prst="rect">
-            <a:avLst/>
-          </a:prstGeom>
-          <a:noFill/>
-        </p:spPr>
-        <p:txBody>
-          <a:bodyPr wrap="square" lIns="0" tIns="0" rIns="0" bIns="0">
-            <a:spAutoFit/>
-          </a:bodyPr>
-          <a:lstStyle/>
-          <a:p>
-            <a:pPr algn="l">
-              <a:lnSpc>
-                <a:spcPct val="100000"/>
-              </a:lnSpc>
-              <a:spcAft>
-                <a:spcPts val="300"/>
-              </a:spcAft>
-              <a:defRPr sz="2300" b="0">
-                <a:solidFill>
-                  <a:srgbClr val="222222"/>
-                </a:solidFill>
-                <a:latin typeface="Calibri"/>
-              </a:defRPr>
-            </a:pPr>
-            <a:r>
-              <a:rPr sz="2300" b="0">
-                <a:solidFill>
-                  <a:srgbClr val="222222"/>
-                </a:solidFill>
-                <a:latin typeface="Calibri"/>
-              </a:rPr>
-              <a:t>Amber growing outward from the center toward the turning corner, front and rear mirrored.</a:t>
-            </a:r>
-          </a:p>
-        </p:txBody>
-      </p:sp>
-      <p:sp>
-        <p:nvSpPr>
-          <p:cNvPr id="10" name="TextBox 9"/>
-          <p:cNvSpPr txBox="1"/>
-          <p:nvPr/>
-        </p:nvSpPr>
-        <p:spPr>
-          <a:xfrm>
-            <a:off x="7163537" y="3835745"/>
-            <a:ext cx="4525238" cy="365760"/>
-          </a:xfrm>
-          <a:prstGeom prst="rect">
-            <a:avLst/>
-          </a:prstGeom>
-          <a:noFill/>
-        </p:spPr>
-        <p:txBody>
-          <a:bodyPr wrap="square" lIns="0" tIns="0" rIns="0" bIns="0">
-            <a:spAutoFit/>
-          </a:bodyPr>
-          <a:lstStyle/>
-          <a:p>
-            <a:pPr algn="l">
-              <a:lnSpc>
-                <a:spcPct val="100000"/>
-              </a:lnSpc>
-              <a:spcAft>
-                <a:spcPts val="200"/>
-              </a:spcAft>
-              <a:defRPr sz="1800" b="1">
-                <a:solidFill>
-                  <a:srgbClr val="0E7C86"/>
-                </a:solidFill>
-                <a:latin typeface="Calibri"/>
-              </a:defRPr>
-            </a:pPr>
-            <a:r>
-              <a:rPr sz="1800" b="1">
-                <a:solidFill>
-                  <a:srgbClr val="0E7C86"/>
-                </a:solidFill>
-                <a:latin typeface="Calibri"/>
-              </a:rPr>
-              <a:t>Answer these</a:t>
-            </a:r>
-          </a:p>
-        </p:txBody>
-      </p:sp>
-      <p:sp>
-        <p:nvSpPr>
-          <p:cNvPr id="11" name="TextBox 10"/>
-          <p:cNvSpPr txBox="1"/>
-          <p:nvPr/>
-        </p:nvSpPr>
-        <p:spPr>
-          <a:xfrm>
-            <a:off x="7163537" y="4238081"/>
-            <a:ext cx="4525238" cy="2025558"/>
-          </a:xfrm>
-          <a:prstGeom prst="rect">
-            <a:avLst/>
-          </a:prstGeom>
-          <a:noFill/>
-        </p:spPr>
-        <p:txBody>
-          <a:bodyPr wrap="square" lIns="0" tIns="0" rIns="0" bIns="0">
-            <a:spAutoFit/>
-          </a:bodyPr>
-          <a:lstStyle/>
-          <a:p>
-            <a:pPr algn="l">
-              <a:lnSpc>
-                <a:spcPct val="100000"/>
-              </a:lnSpc>
-              <a:spcAft>
-                <a:spcPts val="300"/>
-              </a:spcAft>
-              <a:defRPr sz="2000" b="0">
-                <a:solidFill>
-                  <a:srgbClr val="222222"/>
-                </a:solidFill>
-                <a:latin typeface="Calibri"/>
-              </a:defRPr>
-            </a:pPr>
-            <a:r>
-              <a:rPr sz="2000" b="0">
-                <a:solidFill>
-                  <a:srgbClr val="222222"/>
-                </a:solidFill>
-                <a:latin typeface="Calibri"/>
-              </a:rPr>
-              <a:t>Why does the front index count down for a left signal but up for a right one?</a:t>
-            </a:r>
-          </a:p>
-          <a:p>
-            <a:pPr algn="l">
-              <a:lnSpc>
-                <a:spcPct val="100000"/>
-              </a:lnSpc>
-              <a:spcAft>
-                <a:spcPts val="300"/>
-              </a:spcAft>
-              <a:defRPr sz="2000" b="0">
-                <a:solidFill>
-                  <a:srgbClr val="222222"/>
-                </a:solidFill>
-                <a:latin typeface="Calibri"/>
-              </a:defRPr>
-            </a:pPr>
-            <a:r>
-              <a:rPr sz="2000" b="0">
-                <a:solidFill>
-                  <a:srgbClr val="222222"/>
-                </a:solidFill>
-                <a:latin typeface="Calibri"/>
-              </a:rPr>
-              <a:t>What would happen if the base lighting were not repainted each frame?</a:t>
+                <a:spcPts val="700"/>
+              </a:spcAft>
+              <a:defRPr sz="1900" b="0">
+                <a:solidFill>
+                  <a:srgbClr val="222222"/>
+                </a:solidFill>
+                <a:latin typeface="Calibri"/>
+              </a:defRPr>
+            </a:pPr>
+            <a:r>
+              <a:rPr sz="1900" b="0">
+                <a:solidFill>
+                  <a:srgbClr val="222222"/>
+                </a:solidFill>
+                <a:latin typeface="Calibri"/>
+              </a:rPr>
+              <a:t>Every branch does the same three things: is it my turn, is it time yet, draw ONE frame.</a:t>
+            </a:r>
+          </a:p>
+          <a:p>
+            <a:pPr algn="l">
+              <a:lnSpc>
+                <a:spcPct val="100000"/>
+              </a:lnSpc>
+              <a:spcAft>
+                <a:spcPts val="700"/>
+              </a:spcAft>
+              <a:defRPr sz="1900" b="0">
+                <a:solidFill>
+                  <a:srgbClr val="222222"/>
+                </a:solidFill>
+                <a:latin typeface="Calibri"/>
+              </a:defRPr>
+            </a:pPr>
+            <a:r>
+              <a:rPr sz="1900" b="0">
+                <a:solidFill>
+                  <a:srgbClr val="222222"/>
+                </a:solidFill>
+                <a:latin typeface="Calibri"/>
+              </a:rPr>
+              <a:t>Every branch returns. Exactly one mode runs per pass, and none of them can run into another.</a:t>
+            </a:r>
+          </a:p>
+          <a:p>
+            <a:pPr algn="l">
+              <a:lnSpc>
+                <a:spcPct val="100000"/>
+              </a:lnSpc>
+              <a:spcAft>
+                <a:spcPts val="700"/>
+              </a:spcAft>
+              <a:defRPr sz="1900" b="0">
+                <a:solidFill>
+                  <a:srgbClr val="222222"/>
+                </a:solidFill>
+                <a:latin typeface="Calibri"/>
+              </a:defRPr>
+            </a:pPr>
+            <a:r>
+              <a:rPr sz="1900" b="0">
+                <a:solidFill>
+                  <a:srgbClr val="222222"/>
+                </a:solidFill>
+                <a:latin typeface="Calibri"/>
+              </a:rPr>
+              <a:t>The early return on the timer is what makes this cheap. Most passes through this function do almost nothing at all.</a:t>
+            </a:r>
+          </a:p>
+          <a:p>
+            <a:pPr algn="l">
+              <a:lnSpc>
+                <a:spcPct val="100000"/>
+              </a:lnSpc>
+              <a:spcAft>
+                <a:spcPts val="700"/>
+              </a:spcAft>
+              <a:defRPr sz="1900" b="0">
+                <a:solidFill>
+                  <a:srgbClr val="222222"/>
+                </a:solidFill>
+                <a:latin typeface="Calibri"/>
+              </a:defRPr>
+            </a:pPr>
+            <a:r>
+              <a:rPr sz="1900" b="0">
+                <a:solidFill>
+                  <a:srgbClr val="222222"/>
+                </a:solidFill>
+                <a:latin typeface="Calibri"/>
+              </a:rPr>
+              <a:t>Note that STANDBY is last and has no timer - it is the fall-through, and it only acts when the dirty flag says so.</a:t>
             </a:r>
           </a:p>
         </p:txBody>
@@ -10775,7 +11215,7 @@
                 </a:solidFill>
                 <a:latin typeface="Calibri"/>
               </a:rPr>
-              <a:t>The state machine itself</a:t>
+              <a:t>The state machine itself  (continued)</a:t>
             </a:r>
           </a:p>
         </p:txBody>
@@ -11030,7 +11470,7 @@
                 </a:solidFill>
                 <a:latin typeface="Consolas"/>
               </a:rPr>
-              <a:t>void update_lighting(unsigned long now, uint8_t dpad) {</a:t>
+              <a:t> </a:t>
             </a:r>
           </a:p>
           <a:p>
@@ -11052,7 +11492,7 @@
                 </a:solidFill>
                 <a:latin typeface="Consolas"/>
               </a:rPr>
-              <a:t> </a:t>
+              <a:t>  if (led_mode == STANDBY &amp;&amp; standby_dirty) {</a:t>
             </a:r>
           </a:p>
           <a:p>
@@ -11068,13 +11508,13 @@
               </a:defRPr>
             </a:pPr>
             <a:r>
-              <a:rPr sz="1400">
-                <a:solidFill>
-                  <a:srgbClr val="222222"/>
+              <a:rPr sz="1400" b="1">
+                <a:solidFill>
+                  <a:srgbClr val="0E7C86"/>
                 </a:solidFill>
                 <a:latin typeface="Consolas"/>
               </a:rPr>
-              <a:t>  if (led_mode == PAIRING) {</a:t>
+              <a:t>    set_standby_lighting();</a:t>
             </a:r>
           </a:p>
           <a:p>
@@ -11096,7 +11536,7 @@
                 </a:solidFill>
                 <a:latin typeface="Consolas"/>
               </a:rPr>
-              <a:t>    update_pairing_breathing(now);</a:t>
+              <a:t>  }</a:t>
             </a:r>
           </a:p>
           <a:p>
@@ -11118,482 +11558,7 @@
                 </a:solidFill>
                 <a:latin typeface="Consolas"/>
               </a:rPr>
-              <a:t>    return;</a:t>
-            </a:r>
-          </a:p>
-          <a:p>
-            <a:pPr algn="l">
-              <a:lnSpc>
-                <a:spcPct val="100000"/>
-              </a:lnSpc>
-              <a:spcAft>
-                <a:spcPts val="0"/>
-              </a:spcAft>
-              <a:defRPr sz="1400">
-                <a:latin typeface="Consolas"/>
-              </a:defRPr>
-            </a:pPr>
-            <a:r>
-              <a:rPr sz="1400">
-                <a:solidFill>
-                  <a:srgbClr val="222222"/>
-                </a:solidFill>
-                <a:latin typeface="Consolas"/>
-              </a:rPr>
-              <a:t>  }</a:t>
-            </a:r>
-          </a:p>
-          <a:p>
-            <a:pPr algn="l">
-              <a:lnSpc>
-                <a:spcPct val="100000"/>
-              </a:lnSpc>
-              <a:spcAft>
-                <a:spcPts val="0"/>
-              </a:spcAft>
-              <a:defRPr sz="1400">
-                <a:latin typeface="Consolas"/>
-              </a:defRPr>
-            </a:pPr>
-            <a:r>
-              <a:rPr sz="1400">
-                <a:solidFill>
-                  <a:srgbClr val="222222"/>
-                </a:solidFill>
-                <a:latin typeface="Consolas"/>
-              </a:rPr>
-              <a:t> </a:t>
-            </a:r>
-          </a:p>
-          <a:p>
-            <a:pPr algn="l">
-              <a:lnSpc>
-                <a:spcPct val="100000"/>
-              </a:lnSpc>
-              <a:spcAft>
-                <a:spcPts val="0"/>
-              </a:spcAft>
-              <a:defRPr sz="1400">
-                <a:latin typeface="Consolas"/>
-              </a:defRPr>
-            </a:pPr>
-            <a:r>
-              <a:rPr sz="1400">
-                <a:solidFill>
-                  <a:srgbClr val="222222"/>
-                </a:solidFill>
-                <a:latin typeface="Consolas"/>
-              </a:rPr>
-              <a:t>  if (led_mode == TURN_LEFT || led_mode == TURN_RIGHT) {</a:t>
-            </a:r>
-          </a:p>
-          <a:p>
-            <a:pPr algn="l">
-              <a:lnSpc>
-                <a:spcPct val="100000"/>
-              </a:lnSpc>
-              <a:spcAft>
-                <a:spcPts val="0"/>
-              </a:spcAft>
-              <a:defRPr sz="1400">
-                <a:latin typeface="Consolas"/>
-              </a:defRPr>
-            </a:pPr>
-            <a:r>
-              <a:rPr sz="1400" b="1">
-                <a:solidFill>
-                  <a:srgbClr val="0E7C86"/>
-                </a:solidFill>
-                <a:latin typeface="Consolas"/>
-              </a:rPr>
-              <a:t>    if (now - larson_time &lt; LARSON_DELAY_MS) return;</a:t>
-            </a:r>
-          </a:p>
-          <a:p>
-            <a:pPr algn="l">
-              <a:lnSpc>
-                <a:spcPct val="100000"/>
-              </a:lnSpc>
-              <a:spcAft>
-                <a:spcPts val="0"/>
-              </a:spcAft>
-              <a:defRPr sz="1400">
-                <a:latin typeface="Consolas"/>
-              </a:defRPr>
-            </a:pPr>
-            <a:r>
-              <a:rPr sz="1400">
-                <a:solidFill>
-                  <a:srgbClr val="222222"/>
-                </a:solidFill>
-                <a:latin typeface="Consolas"/>
-              </a:rPr>
-              <a:t>    larson_time = now;</a:t>
-            </a:r>
-          </a:p>
-          <a:p>
-            <a:pPr algn="l">
-              <a:lnSpc>
-                <a:spcPct val="100000"/>
-              </a:lnSpc>
-              <a:spcAft>
-                <a:spcPts val="0"/>
-              </a:spcAft>
-              <a:defRPr sz="1400">
-                <a:latin typeface="Consolas"/>
-              </a:defRPr>
-            </a:pPr>
-            <a:r>
-              <a:rPr sz="1400">
-                <a:solidFill>
-                  <a:srgbClr val="666666"/>
-                </a:solidFill>
-                <a:latin typeface="Consolas"/>
-              </a:rPr>
-              <a:t>    // ...advance one phase, count cycles, maybe hand back...</a:t>
-            </a:r>
-          </a:p>
-          <a:p>
-            <a:pPr algn="l">
-              <a:lnSpc>
-                <a:spcPct val="100000"/>
-              </a:lnSpc>
-              <a:spcAft>
-                <a:spcPts val="0"/>
-              </a:spcAft>
-              <a:defRPr sz="1400">
-                <a:latin typeface="Consolas"/>
-              </a:defRPr>
-            </a:pPr>
-            <a:r>
-              <a:rPr sz="1400">
-                <a:solidFill>
-                  <a:srgbClr val="222222"/>
-                </a:solidFill>
-                <a:latin typeface="Consolas"/>
-              </a:rPr>
-              <a:t>    update_larson_scanner();</a:t>
-            </a:r>
-          </a:p>
-          <a:p>
-            <a:pPr algn="l">
-              <a:lnSpc>
-                <a:spcPct val="100000"/>
-              </a:lnSpc>
-              <a:spcAft>
-                <a:spcPts val="0"/>
-              </a:spcAft>
-              <a:defRPr sz="1400">
-                <a:latin typeface="Consolas"/>
-              </a:defRPr>
-            </a:pPr>
-            <a:r>
-              <a:rPr sz="1400">
-                <a:solidFill>
-                  <a:srgbClr val="222222"/>
-                </a:solidFill>
-                <a:latin typeface="Consolas"/>
-              </a:rPr>
-              <a:t>    return;</a:t>
-            </a:r>
-          </a:p>
-          <a:p>
-            <a:pPr algn="l">
-              <a:lnSpc>
-                <a:spcPct val="100000"/>
-              </a:lnSpc>
-              <a:spcAft>
-                <a:spcPts val="0"/>
-              </a:spcAft>
-              <a:defRPr sz="1400">
-                <a:latin typeface="Consolas"/>
-              </a:defRPr>
-            </a:pPr>
-            <a:r>
-              <a:rPr sz="1400">
-                <a:solidFill>
-                  <a:srgbClr val="222222"/>
-                </a:solidFill>
-                <a:latin typeface="Consolas"/>
-              </a:rPr>
-              <a:t>  }</a:t>
-            </a:r>
-          </a:p>
-          <a:p>
-            <a:pPr algn="l">
-              <a:lnSpc>
-                <a:spcPct val="100000"/>
-              </a:lnSpc>
-              <a:spcAft>
-                <a:spcPts val="0"/>
-              </a:spcAft>
-              <a:defRPr sz="1400">
-                <a:latin typeface="Consolas"/>
-              </a:defRPr>
-            </a:pPr>
-            <a:r>
-              <a:rPr sz="1400">
-                <a:solidFill>
-                  <a:srgbClr val="222222"/>
-                </a:solidFill>
-                <a:latin typeface="Consolas"/>
-              </a:rPr>
-              <a:t> </a:t>
-            </a:r>
-          </a:p>
-          <a:p>
-            <a:pPr algn="l">
-              <a:lnSpc>
-                <a:spcPct val="100000"/>
-              </a:lnSpc>
-              <a:spcAft>
-                <a:spcPts val="0"/>
-              </a:spcAft>
-              <a:defRPr sz="1400">
-                <a:latin typeface="Consolas"/>
-              </a:defRPr>
-            </a:pPr>
-            <a:r>
-              <a:rPr sz="1400">
-                <a:solidFill>
-                  <a:srgbClr val="222222"/>
-                </a:solidFill>
-                <a:latin typeface="Consolas"/>
-              </a:rPr>
-              <a:t>  if (led_mode == KITT_SCANNER) {</a:t>
-            </a:r>
-          </a:p>
-          <a:p>
-            <a:pPr algn="l">
-              <a:lnSpc>
-                <a:spcPct val="100000"/>
-              </a:lnSpc>
-              <a:spcAft>
-                <a:spcPts val="0"/>
-              </a:spcAft>
-              <a:defRPr sz="1400">
-                <a:latin typeface="Consolas"/>
-              </a:defRPr>
-            </a:pPr>
-            <a:r>
-              <a:rPr sz="1400" b="1">
-                <a:solidFill>
-                  <a:srgbClr val="0E7C86"/>
-                </a:solidFill>
-                <a:latin typeface="Consolas"/>
-              </a:rPr>
-              <a:t>    if (now - kitt_time &lt; (unsigned long)KITT_SPEED_MS) return;</a:t>
-            </a:r>
-          </a:p>
-          <a:p>
-            <a:pPr algn="l">
-              <a:lnSpc>
-                <a:spcPct val="100000"/>
-              </a:lnSpc>
-              <a:spcAft>
-                <a:spcPts val="0"/>
-              </a:spcAft>
-              <a:defRPr sz="1400">
-                <a:latin typeface="Consolas"/>
-              </a:defRPr>
-            </a:pPr>
-            <a:r>
-              <a:rPr sz="1400">
-                <a:solidFill>
-                  <a:srgbClr val="222222"/>
-                </a:solidFill>
-                <a:latin typeface="Consolas"/>
-              </a:rPr>
-              <a:t>    kitt_time = now;</a:t>
-            </a:r>
-          </a:p>
-          <a:p>
-            <a:pPr algn="l">
-              <a:lnSpc>
-                <a:spcPct val="100000"/>
-              </a:lnSpc>
-              <a:spcAft>
-                <a:spcPts val="0"/>
-              </a:spcAft>
-              <a:defRPr sz="1400">
-                <a:latin typeface="Consolas"/>
-              </a:defRPr>
-            </a:pPr>
-            <a:r>
-              <a:rPr sz="1400">
-                <a:solidFill>
-                  <a:srgbClr val="666666"/>
-                </a:solidFill>
-                <a:latin typeface="Consolas"/>
-              </a:rPr>
-              <a:t>    // ...draw one frame, step the dot, maybe hand back...</a:t>
-            </a:r>
-          </a:p>
-          <a:p>
-            <a:pPr algn="l">
-              <a:lnSpc>
-                <a:spcPct val="100000"/>
-              </a:lnSpc>
-              <a:spcAft>
-                <a:spcPts val="0"/>
-              </a:spcAft>
-              <a:defRPr sz="1400">
-                <a:latin typeface="Consolas"/>
-              </a:defRPr>
-            </a:pPr>
-            <a:r>
-              <a:rPr sz="1400">
-                <a:solidFill>
-                  <a:srgbClr val="222222"/>
-                </a:solidFill>
-                <a:latin typeface="Consolas"/>
-              </a:rPr>
-              <a:t>    return;</a:t>
-            </a:r>
-          </a:p>
-          <a:p>
-            <a:pPr algn="l">
-              <a:lnSpc>
-                <a:spcPct val="100000"/>
-              </a:lnSpc>
-              <a:spcAft>
-                <a:spcPts val="0"/>
-              </a:spcAft>
-              <a:defRPr sz="1400">
-                <a:latin typeface="Consolas"/>
-              </a:defRPr>
-            </a:pPr>
-            <a:r>
-              <a:rPr sz="1400">
-                <a:solidFill>
-                  <a:srgbClr val="222222"/>
-                </a:solidFill>
-                <a:latin typeface="Consolas"/>
-              </a:rPr>
-              <a:t>  }</a:t>
-            </a:r>
-          </a:p>
-        </p:txBody>
-      </p:sp>
-      <p:sp>
-        <p:nvSpPr>
-          <p:cNvPr id="8" name="TextBox 7"/>
-          <p:cNvSpPr txBox="1"/>
-          <p:nvPr/>
-        </p:nvSpPr>
-        <p:spPr>
-          <a:xfrm>
-            <a:off x="7870048" y="1517904"/>
-            <a:ext cx="3818727" cy="4745736"/>
-          </a:xfrm>
-          <a:prstGeom prst="rect">
-            <a:avLst/>
-          </a:prstGeom>
-          <a:noFill/>
-        </p:spPr>
-        <p:txBody>
-          <a:bodyPr wrap="square" lIns="0" tIns="0" rIns="0" bIns="0">
-            <a:spAutoFit/>
-          </a:bodyPr>
-          <a:lstStyle/>
-          <a:p>
-            <a:pPr algn="l">
-              <a:lnSpc>
-                <a:spcPct val="100000"/>
-              </a:lnSpc>
-              <a:spcAft>
-                <a:spcPts val="700"/>
-              </a:spcAft>
-              <a:defRPr sz="1900" b="0">
-                <a:solidFill>
-                  <a:srgbClr val="222222"/>
-                </a:solidFill>
-                <a:latin typeface="Calibri"/>
-              </a:defRPr>
-            </a:pPr>
-            <a:r>
-              <a:rPr sz="1900" b="0">
-                <a:solidFill>
-                  <a:srgbClr val="222222"/>
-                </a:solidFill>
-                <a:latin typeface="Calibri"/>
-              </a:rPr>
-              <a:t>Every branch does the same three things: is it my turn, is it time yet, draw ONE frame.</a:t>
-            </a:r>
-          </a:p>
-          <a:p>
-            <a:pPr algn="l">
-              <a:lnSpc>
-                <a:spcPct val="100000"/>
-              </a:lnSpc>
-              <a:spcAft>
-                <a:spcPts val="700"/>
-              </a:spcAft>
-              <a:defRPr sz="1900" b="0">
-                <a:solidFill>
-                  <a:srgbClr val="222222"/>
-                </a:solidFill>
-                <a:latin typeface="Calibri"/>
-              </a:defRPr>
-            </a:pPr>
-            <a:r>
-              <a:rPr sz="1900" b="0">
-                <a:solidFill>
-                  <a:srgbClr val="222222"/>
-                </a:solidFill>
-                <a:latin typeface="Calibri"/>
-              </a:rPr>
-              <a:t>Every branch returns. Exactly one mode runs per pass, and none of them can run into another.</a:t>
-            </a:r>
-          </a:p>
-          <a:p>
-            <a:pPr algn="l">
-              <a:lnSpc>
-                <a:spcPct val="100000"/>
-              </a:lnSpc>
-              <a:spcAft>
-                <a:spcPts val="700"/>
-              </a:spcAft>
-              <a:defRPr sz="1900" b="0">
-                <a:solidFill>
-                  <a:srgbClr val="222222"/>
-                </a:solidFill>
-                <a:latin typeface="Calibri"/>
-              </a:defRPr>
-            </a:pPr>
-            <a:r>
-              <a:rPr sz="1900" b="0">
-                <a:solidFill>
-                  <a:srgbClr val="222222"/>
-                </a:solidFill>
-                <a:latin typeface="Calibri"/>
-              </a:rPr>
-              <a:t>The early return on the timer is what makes this cheap. Most passes through this function do almost nothing at all.</a:t>
-            </a:r>
-          </a:p>
-          <a:p>
-            <a:pPr algn="l">
-              <a:lnSpc>
-                <a:spcPct val="100000"/>
-              </a:lnSpc>
-              <a:spcAft>
-                <a:spcPts val="700"/>
-              </a:spcAft>
-              <a:defRPr sz="1900" b="0">
-                <a:solidFill>
-                  <a:srgbClr val="222222"/>
-                </a:solidFill>
-                <a:latin typeface="Calibri"/>
-              </a:defRPr>
-            </a:pPr>
-            <a:r>
-              <a:rPr sz="1900" b="0">
-                <a:solidFill>
-                  <a:srgbClr val="222222"/>
-                </a:solidFill>
-                <a:latin typeface="Calibri"/>
-              </a:rPr>
-              <a:t>Note that STANDBY is last and has no timer - it is the fall-through, and it only acts when the dirty flag says so.</a:t>
+              <a:t>}</a:t>
             </a:r>
           </a:p>
         </p:txBody>
@@ -11657,7 +11622,7 @@
                 </a:solidFill>
                 <a:latin typeface="Calibri"/>
               </a:rPr>
-              <a:t>The state machine itself  (continued)</a:t>
+              <a:t>Breathing, and an 8-bit sine</a:t>
             </a:r>
           </a:p>
         </p:txBody>
@@ -11811,7 +11776,7 @@
         <p:spPr>
           <a:xfrm>
             <a:off x="502920" y="1188720"/>
-            <a:ext cx="7047088" cy="274320"/>
+            <a:ext cx="11185855" cy="530352"/>
           </a:xfrm>
           <a:prstGeom prst="rect">
             <a:avLst/>
@@ -11829,176 +11794,210 @@
                 <a:spcPct val="100000"/>
               </a:lnSpc>
               <a:spcAft>
-                <a:spcPts val="200"/>
-              </a:spcAft>
-              <a:defRPr sz="1200" b="1">
+                <a:spcPts val="600"/>
+              </a:spcAft>
+              <a:defRPr sz="1900" b="1">
                 <a:solidFill>
                   <a:srgbClr val="0E7C86"/>
                 </a:solidFill>
-                <a:latin typeface="Consolas"/>
-              </a:defRPr>
-            </a:pPr>
-            <a:r>
-              <a:rPr sz="1200" b="1">
+                <a:latin typeface="Calibri"/>
+              </a:defRPr>
+            </a:pPr>
+            <a:r>
+              <a:rPr sz="1900" b="1">
                 <a:solidFill>
                   <a:srgbClr val="0E7C86"/>
                 </a:solidFill>
-                <a:latin typeface="Consolas"/>
-              </a:rPr>
-              <a:t>Lighting.ino</a:t>
-            </a:r>
-          </a:p>
-        </p:txBody>
-      </p:sp>
-      <p:sp>
-        <p:nvSpPr>
-          <p:cNvPr id="7" name="CODE_PANEL"/>
-          <p:cNvSpPr/>
+                <a:latin typeface="Calibri"/>
+              </a:rPr>
+              <a:t>Why the fade is a sine and not a ramp</a:t>
+            </a:r>
+          </a:p>
+        </p:txBody>
+      </p:sp>
+      <p:sp>
+        <p:nvSpPr>
+          <p:cNvPr id="7" name="TextBox 6"/>
+          <p:cNvSpPr txBox="1"/>
           <p:nvPr/>
         </p:nvSpPr>
         <p:spPr>
           <a:xfrm>
-            <a:off x="502920" y="1517904"/>
-            <a:ext cx="7047088" cy="4745736"/>
-          </a:xfrm>
-          <a:prstGeom prst="roundRect">
-            <a:avLst>
-              <a:gd name="adj" fmla="val 4000"/>
-            </a:avLst>
+            <a:off x="502920" y="1755648"/>
+            <a:ext cx="11185855" cy="4507992"/>
+          </a:xfrm>
+          <a:prstGeom prst="rect">
+            <a:avLst/>
           </a:prstGeom>
-          <a:solidFill>
-            <a:srgbClr val="F4F6F8"/>
-          </a:solidFill>
-          <a:ln w="12700">
-            <a:solidFill>
-              <a:srgbClr val="C8D2DE"/>
-            </a:solidFill>
-          </a:ln>
-          <a:effectLst/>
-        </p:spPr>
-        <p:style>
-          <a:lnRef idx="1">
-            <a:schemeClr val="accent1"/>
-          </a:lnRef>
-          <a:fillRef idx="3">
-            <a:schemeClr val="accent1"/>
-          </a:fillRef>
-          <a:effectRef idx="2">
-            <a:schemeClr val="accent1"/>
-          </a:effectRef>
-          <a:fontRef idx="minor">
-            <a:schemeClr val="lt1"/>
-          </a:fontRef>
-        </p:style>
-        <p:txBody>
-          <a:bodyPr rtlCol="0" anchor="t" wrap="square" lIns="146304" tIns="91440" bIns="73152"/>
-          <a:lstStyle/>
-          <a:p>
-            <a:pPr algn="l">
-              <a:lnSpc>
-                <a:spcPct val="100000"/>
-              </a:lnSpc>
-              <a:spcAft>
-                <a:spcPts val="0"/>
-              </a:spcAft>
-              <a:defRPr sz="1400">
-                <a:latin typeface="Consolas"/>
-              </a:defRPr>
-            </a:pPr>
-            <a:r>
-              <a:rPr sz="1400">
-                <a:solidFill>
-                  <a:srgbClr val="222222"/>
-                </a:solidFill>
-                <a:latin typeface="Consolas"/>
-              </a:rPr>
-              <a:t> </a:t>
-            </a:r>
-          </a:p>
-          <a:p>
-            <a:pPr algn="l">
-              <a:lnSpc>
-                <a:spcPct val="100000"/>
-              </a:lnSpc>
-              <a:spcAft>
-                <a:spcPts val="0"/>
-              </a:spcAft>
-              <a:defRPr sz="1400">
-                <a:latin typeface="Consolas"/>
-              </a:defRPr>
-            </a:pPr>
-            <a:r>
-              <a:rPr sz="1400">
-                <a:solidFill>
-                  <a:srgbClr val="222222"/>
-                </a:solidFill>
-                <a:latin typeface="Consolas"/>
-              </a:rPr>
-              <a:t>  if (led_mode == STANDBY &amp;&amp; standby_dirty) {</a:t>
-            </a:r>
-          </a:p>
-          <a:p>
-            <a:pPr algn="l">
-              <a:lnSpc>
-                <a:spcPct val="100000"/>
-              </a:lnSpc>
-              <a:spcAft>
-                <a:spcPts val="0"/>
-              </a:spcAft>
-              <a:defRPr sz="1400">
-                <a:latin typeface="Consolas"/>
-              </a:defRPr>
-            </a:pPr>
-            <a:r>
-              <a:rPr sz="1400" b="1">
-                <a:solidFill>
-                  <a:srgbClr val="0E7C86"/>
-                </a:solidFill>
-                <a:latin typeface="Consolas"/>
-              </a:rPr>
-              <a:t>    set_standby_lighting();</a:t>
-            </a:r>
-          </a:p>
-          <a:p>
-            <a:pPr algn="l">
-              <a:lnSpc>
-                <a:spcPct val="100000"/>
-              </a:lnSpc>
-              <a:spcAft>
-                <a:spcPts val="0"/>
-              </a:spcAft>
-              <a:defRPr sz="1400">
-                <a:latin typeface="Consolas"/>
-              </a:defRPr>
-            </a:pPr>
-            <a:r>
-              <a:rPr sz="1400">
-                <a:solidFill>
-                  <a:srgbClr val="222222"/>
-                </a:solidFill>
-                <a:latin typeface="Consolas"/>
-              </a:rPr>
-              <a:t>  }</a:t>
-            </a:r>
-          </a:p>
-          <a:p>
-            <a:pPr algn="l">
-              <a:lnSpc>
-                <a:spcPct val="100000"/>
-              </a:lnSpc>
-              <a:spcAft>
-                <a:spcPts val="0"/>
-              </a:spcAft>
-              <a:defRPr sz="1400">
-                <a:latin typeface="Consolas"/>
-              </a:defRPr>
-            </a:pPr>
-            <a:r>
-              <a:rPr sz="1400">
-                <a:solidFill>
-                  <a:srgbClr val="222222"/>
-                </a:solidFill>
-                <a:latin typeface="Consolas"/>
+          <a:noFill/>
+        </p:spPr>
+        <p:txBody>
+          <a:bodyPr wrap="square" lIns="0" tIns="0" rIns="0" bIns="0">
+            <a:spAutoFit/>
+          </a:bodyPr>
+          <a:lstStyle/>
+          <a:p>
+            <a:pPr algn="l">
+              <a:lnSpc>
+                <a:spcPct val="100000"/>
+              </a:lnSpc>
+              <a:spcAft>
+                <a:spcPts val="600"/>
+              </a:spcAft>
+              <a:defRPr sz="2600" b="0">
+                <a:solidFill>
+                  <a:srgbClr val="222222"/>
+                </a:solidFill>
+                <a:latin typeface="Calibri"/>
+              </a:defRPr>
+            </a:pPr>
+            <a:r>
+              <a:rPr sz="2600" b="0">
+                <a:solidFill>
+                  <a:srgbClr val="222222"/>
+                </a:solidFill>
+                <a:latin typeface="Calibri"/>
+              </a:rPr>
+              <a:t>The pairing animation fades the whole strip up and down smoothly. Doing that with a straight line looks wrong - it appears to hover at the ends and rush through the middle.</a:t>
+            </a:r>
+          </a:p>
+          <a:p>
+            <a:pPr algn="l">
+              <a:lnSpc>
+                <a:spcPct val="100000"/>
+              </a:lnSpc>
+              <a:spcAft>
+                <a:spcPts val="600"/>
+              </a:spcAft>
+              <a:defRPr sz="1300" b="0">
+                <a:solidFill>
+                  <a:srgbClr val="222222"/>
+                </a:solidFill>
+                <a:latin typeface="Calibri"/>
+              </a:defRPr>
+            </a:pPr>
+          </a:p>
+          <a:p>
+            <a:pPr algn="l">
+              <a:lnSpc>
+                <a:spcPct val="100000"/>
+              </a:lnSpc>
+              <a:spcAft>
+                <a:spcPts val="600"/>
+              </a:spcAft>
+              <a:defRPr sz="2600" b="0">
+                <a:solidFill>
+                  <a:srgbClr val="222222"/>
+                </a:solidFill>
+                <a:latin typeface="Calibri"/>
+              </a:defRPr>
+            </a:pPr>
+            <a:r>
+              <a:rPr sz="2600" b="0">
+                <a:solidFill>
+                  <a:srgbClr val="222222"/>
+                </a:solidFill>
+                <a:latin typeface="Calibri"/>
+              </a:rPr>
+              <a:t>A sine wave is what looks natural, because it slows at the extremes. FastLED gave 11.2 a sin8() for this. Op 12 writes it out:</a:t>
+            </a:r>
+          </a:p>
+          <a:p>
+            <a:pPr lvl="1" algn="l">
+              <a:lnSpc>
+                <a:spcPct val="100000"/>
+              </a:lnSpc>
+              <a:spcAft>
+                <a:spcPts val="600"/>
+              </a:spcAft>
+              <a:defRPr sz="2600" b="0">
+                <a:solidFill>
+                  <a:srgbClr val="222222"/>
+                </a:solidFill>
+                <a:latin typeface="Calibri"/>
+              </a:defRPr>
+            </a:pPr>
+            <a:r>
+              <a:rPr sz="2600" b="0">
+                <a:solidFill>
+                  <a:srgbClr val="222222"/>
+                </a:solidFill>
+                <a:latin typeface="Calibri"/>
+              </a:rPr>
+              <a:t>uint8_t sine8(uint8_t theta) {</a:t>
+            </a:r>
+          </a:p>
+          <a:p>
+            <a:pPr lvl="1" algn="l">
+              <a:lnSpc>
+                <a:spcPct val="100000"/>
+              </a:lnSpc>
+              <a:spcAft>
+                <a:spcPts val="600"/>
+              </a:spcAft>
+              <a:defRPr sz="2600" b="0">
+                <a:solidFill>
+                  <a:srgbClr val="222222"/>
+                </a:solidFill>
+                <a:latin typeface="Calibri"/>
+              </a:defRPr>
+            </a:pPr>
+            <a:r>
+              <a:rPr sz="2600" b="0">
+                <a:solidFill>
+                  <a:srgbClr val="222222"/>
+                </a:solidFill>
+                <a:latin typeface="Calibri"/>
+              </a:rPr>
+              <a:t>  float radians = (theta / 256.0f) * 2.0f * PI;</a:t>
+            </a:r>
+          </a:p>
+          <a:p>
+            <a:pPr lvl="1" algn="l">
+              <a:lnSpc>
+                <a:spcPct val="100000"/>
+              </a:lnSpc>
+              <a:spcAft>
+                <a:spcPts val="600"/>
+              </a:spcAft>
+              <a:defRPr sz="2600" b="0">
+                <a:solidFill>
+                  <a:srgbClr val="222222"/>
+                </a:solidFill>
+                <a:latin typeface="Calibri"/>
+              </a:defRPr>
+            </a:pPr>
+            <a:r>
+              <a:rPr sz="2600" b="0">
+                <a:solidFill>
+                  <a:srgbClr val="222222"/>
+                </a:solidFill>
+                <a:latin typeface="Calibri"/>
+              </a:rPr>
+              <a:t>  return (uint8_t)(128.0f + 127.0f * sinf(radians));</a:t>
+            </a:r>
+          </a:p>
+          <a:p>
+            <a:pPr lvl="1" algn="l">
+              <a:lnSpc>
+                <a:spcPct val="100000"/>
+              </a:lnSpc>
+              <a:spcAft>
+                <a:spcPts val="600"/>
+              </a:spcAft>
+              <a:defRPr sz="2600" b="0">
+                <a:solidFill>
+                  <a:srgbClr val="222222"/>
+                </a:solidFill>
+                <a:latin typeface="Calibri"/>
+              </a:defRPr>
+            </a:pPr>
+            <a:r>
+              <a:rPr sz="2600" b="0">
+                <a:solidFill>
+                  <a:srgbClr val="222222"/>
+                </a:solidFill>
+                <a:latin typeface="Calibri"/>
               </a:rPr>
               <a:t>}</a:t>
             </a:r>
@@ -12464,7 +12463,7 @@
                 </a:solidFill>
                 <a:latin typeface="Calibri"/>
               </a:rPr>
-              <a:t>Breathing, and an 8-bit sine</a:t>
+              <a:t>Breathing, and an 8-bit sine  (continued)</a:t>
             </a:r>
           </a:p>
         </p:txBody>
@@ -12618,7 +12617,7 @@
         <p:spPr>
           <a:xfrm>
             <a:off x="502920" y="1188720"/>
-            <a:ext cx="11185855" cy="530352"/>
+            <a:ext cx="11185855" cy="3986784"/>
           </a:xfrm>
           <a:prstGeom prst="rect">
             <a:avLst/>
@@ -12638,210 +12637,210 @@
               <a:spcAft>
                 <a:spcPts val="600"/>
               </a:spcAft>
-              <a:defRPr sz="1900" b="1">
+              <a:defRPr sz="1250" b="0">
+                <a:solidFill>
+                  <a:srgbClr val="222222"/>
+                </a:solidFill>
+                <a:latin typeface="Calibri"/>
+              </a:defRPr>
+            </a:pPr>
+          </a:p>
+          <a:p>
+            <a:pPr algn="l">
+              <a:lnSpc>
+                <a:spcPct val="100000"/>
+              </a:lnSpc>
+              <a:spcAft>
+                <a:spcPts val="600"/>
+              </a:spcAft>
+              <a:defRPr sz="2500" b="0">
+                <a:solidFill>
+                  <a:srgbClr val="222222"/>
+                </a:solidFill>
+                <a:latin typeface="Calibri"/>
+              </a:defRPr>
+            </a:pPr>
+            <a:r>
+              <a:rPr sz="2500" b="0">
+                <a:solidFill>
+                  <a:srgbClr val="222222"/>
+                </a:solidFill>
+                <a:latin typeface="Calibri"/>
+              </a:rPr>
+              <a:t>Feed it 0..255 for one full turn, get 0..255 back with 128 as the midpoint. No angles in degrees, no floating point in the caller.</a:t>
+            </a:r>
+          </a:p>
+          <a:p>
+            <a:pPr algn="l">
+              <a:lnSpc>
+                <a:spcPct val="100000"/>
+              </a:lnSpc>
+              <a:spcAft>
+                <a:spcPts val="600"/>
+              </a:spcAft>
+              <a:defRPr sz="1250" b="0">
+                <a:solidFill>
+                  <a:srgbClr val="222222"/>
+                </a:solidFill>
+                <a:latin typeface="Calibri"/>
+              </a:defRPr>
+            </a:pPr>
+          </a:p>
+          <a:p>
+            <a:pPr algn="l">
+              <a:lnSpc>
+                <a:spcPct val="100000"/>
+              </a:lnSpc>
+              <a:spcAft>
+                <a:spcPts val="600"/>
+              </a:spcAft>
+              <a:defRPr sz="2500" b="0">
+                <a:solidFill>
+                  <a:srgbClr val="222222"/>
+                </a:solidFill>
+                <a:latin typeface="Calibri"/>
+              </a:defRPr>
+            </a:pPr>
+            <a:r>
+              <a:rPr sz="2500" b="0">
+                <a:solidFill>
+                  <a:srgbClr val="222222"/>
+                </a:solidFill>
+                <a:latin typeface="Calibri"/>
+              </a:rPr>
+              <a:t>Then the phase comes from the clock rather than from a counter:</a:t>
+            </a:r>
+          </a:p>
+          <a:p>
+            <a:pPr lvl="1" algn="l">
+              <a:lnSpc>
+                <a:spcPct val="100000"/>
+              </a:lnSpc>
+              <a:spcAft>
+                <a:spcPts val="600"/>
+              </a:spcAft>
+              <a:defRPr sz="2500" b="0">
+                <a:solidFill>
+                  <a:srgbClr val="222222"/>
+                </a:solidFill>
+                <a:latin typeface="Calibri"/>
+              </a:defRPr>
+            </a:pPr>
+            <a:r>
+              <a:rPr sz="2500" b="0">
+                <a:solidFill>
+                  <a:srgbClr val="222222"/>
+                </a:solidFill>
+                <a:latin typeface="Calibri"/>
+              </a:rPr>
+              <a:t>phase = (now % BREATHE_PERIOD_MS) * 255 / BREATHE_PERIOD_MS;</a:t>
+            </a:r>
+          </a:p>
+          <a:p>
+            <a:pPr algn="l">
+              <a:lnSpc>
+                <a:spcPct val="100000"/>
+              </a:lnSpc>
+              <a:spcAft>
+                <a:spcPts val="600"/>
+              </a:spcAft>
+              <a:defRPr sz="1250" b="0">
+                <a:solidFill>
+                  <a:srgbClr val="222222"/>
+                </a:solidFill>
+                <a:latin typeface="Calibri"/>
+              </a:defRPr>
+            </a:pPr>
+          </a:p>
+          <a:p>
+            <a:pPr algn="l">
+              <a:lnSpc>
+                <a:spcPct val="100000"/>
+              </a:lnSpc>
+              <a:spcAft>
+                <a:spcPts val="600"/>
+              </a:spcAft>
+              <a:defRPr sz="2500" b="0">
+                <a:solidFill>
+                  <a:srgbClr val="222222"/>
+                </a:solidFill>
+                <a:latin typeface="Calibri"/>
+              </a:defRPr>
+            </a:pPr>
+            <a:r>
+              <a:rPr sz="2500" b="0">
+                <a:solidFill>
+                  <a:srgbClr val="222222"/>
+                </a:solidFill>
+                <a:latin typeface="Calibri"/>
+              </a:rPr>
+              <a:t>Deriving the phase from millis() rather than incrementing a variable means the animation runs at the same speed no matter how often the function gets called, and it cannot drift.</a:t>
+            </a:r>
+          </a:p>
+        </p:txBody>
+      </p:sp>
+      <p:sp>
+        <p:nvSpPr>
+          <p:cNvPr id="7" name="Rounded Rectangle 6"/>
+          <p:cNvSpPr/>
+          <p:nvPr/>
+        </p:nvSpPr>
+        <p:spPr>
+          <a:xfrm>
+            <a:off x="502920" y="5303520"/>
+            <a:ext cx="11185855" cy="960120"/>
+          </a:xfrm>
+          <a:prstGeom prst="roundRect">
+            <a:avLst>
+              <a:gd name="adj" fmla="val 4000"/>
+            </a:avLst>
+          </a:prstGeom>
+          <a:solidFill>
+            <a:srgbClr val="EEF3F8"/>
+          </a:solidFill>
+          <a:ln w="12700">
+            <a:solidFill>
+              <a:srgbClr val="0E7C86"/>
+            </a:solidFill>
+          </a:ln>
+          <a:effectLst/>
+        </p:spPr>
+        <p:style>
+          <a:lnRef idx="1">
+            <a:schemeClr val="accent1"/>
+          </a:lnRef>
+          <a:fillRef idx="3">
+            <a:schemeClr val="accent1"/>
+          </a:fillRef>
+          <a:effectRef idx="2">
+            <a:schemeClr val="accent1"/>
+          </a:effectRef>
+          <a:fontRef idx="minor">
+            <a:schemeClr val="lt1"/>
+          </a:fontRef>
+        </p:style>
+        <p:txBody>
+          <a:bodyPr rtlCol="0" anchor="ctr" wrap="square" lIns="164592" rIns="164592" tIns="73152" bIns="73152"/>
+          <a:lstStyle/>
+          <a:p>
+            <a:pPr algn="l"/>
+            <a:r>
+              <a:rPr sz="1300" b="1">
                 <a:solidFill>
                   <a:srgbClr val="0E7C86"/>
                 </a:solidFill>
                 <a:latin typeface="Calibri"/>
-              </a:defRPr>
-            </a:pPr>
-            <a:r>
-              <a:rPr sz="1900" b="1">
-                <a:solidFill>
-                  <a:srgbClr val="0E7C86"/>
-                </a:solidFill>
-                <a:latin typeface="Calibri"/>
-              </a:rPr>
-              <a:t>Why the fade is a sine and not a ramp</a:t>
-            </a:r>
-          </a:p>
-        </p:txBody>
-      </p:sp>
-      <p:sp>
-        <p:nvSpPr>
-          <p:cNvPr id="7" name="TextBox 6"/>
-          <p:cNvSpPr txBox="1"/>
-          <p:nvPr/>
-        </p:nvSpPr>
-        <p:spPr>
-          <a:xfrm>
-            <a:off x="502920" y="1755648"/>
-            <a:ext cx="11185855" cy="4507992"/>
-          </a:xfrm>
-          <a:prstGeom prst="rect">
-            <a:avLst/>
-          </a:prstGeom>
-          <a:noFill/>
-        </p:spPr>
-        <p:txBody>
-          <a:bodyPr wrap="square" lIns="0" tIns="0" rIns="0" bIns="0">
-            <a:spAutoFit/>
-          </a:bodyPr>
-          <a:lstStyle/>
-          <a:p>
-            <a:pPr algn="l">
-              <a:lnSpc>
-                <a:spcPct val="100000"/>
-              </a:lnSpc>
-              <a:spcAft>
-                <a:spcPts val="600"/>
-              </a:spcAft>
-              <a:defRPr sz="2500" b="0">
-                <a:solidFill>
-                  <a:srgbClr val="222222"/>
-                </a:solidFill>
-                <a:latin typeface="Calibri"/>
-              </a:defRPr>
-            </a:pPr>
-            <a:r>
-              <a:rPr sz="2500" b="0">
-                <a:solidFill>
-                  <a:srgbClr val="222222"/>
-                </a:solidFill>
-                <a:latin typeface="Calibri"/>
-              </a:rPr>
-              <a:t>The pairing animation fades the whole strip up and down smoothly. Doing that with a straight line looks wrong - it appears to hover at the ends and rush through the middle.</a:t>
-            </a:r>
-          </a:p>
-          <a:p>
-            <a:pPr algn="l">
-              <a:lnSpc>
-                <a:spcPct val="100000"/>
-              </a:lnSpc>
-              <a:spcAft>
-                <a:spcPts val="600"/>
-              </a:spcAft>
-              <a:defRPr sz="2500" b="0">
-                <a:solidFill>
-                  <a:srgbClr val="222222"/>
-                </a:solidFill>
-                <a:latin typeface="Calibri"/>
-              </a:defRPr>
-            </a:pPr>
-          </a:p>
-          <a:p>
-            <a:pPr algn="l">
-              <a:lnSpc>
-                <a:spcPct val="100000"/>
-              </a:lnSpc>
-              <a:spcAft>
-                <a:spcPts val="600"/>
-              </a:spcAft>
-              <a:defRPr sz="2500" b="0">
-                <a:solidFill>
-                  <a:srgbClr val="222222"/>
-                </a:solidFill>
-                <a:latin typeface="Calibri"/>
-              </a:defRPr>
-            </a:pPr>
-            <a:r>
-              <a:rPr sz="2500" b="0">
-                <a:solidFill>
-                  <a:srgbClr val="222222"/>
-                </a:solidFill>
-                <a:latin typeface="Calibri"/>
-              </a:rPr>
-              <a:t>A sine wave is what looks natural, because it slows at the extremes. FastLED gave 11.2 a sin8() for this. Op 12 writes it out:</a:t>
-            </a:r>
-          </a:p>
-          <a:p>
-            <a:pPr lvl="1" algn="l">
-              <a:lnSpc>
-                <a:spcPct val="100000"/>
-              </a:lnSpc>
-              <a:spcAft>
-                <a:spcPts val="600"/>
-              </a:spcAft>
-              <a:defRPr sz="2500" b="0">
-                <a:solidFill>
-                  <a:srgbClr val="222222"/>
-                </a:solidFill>
-                <a:latin typeface="Calibri"/>
-              </a:defRPr>
-            </a:pPr>
-            <a:r>
-              <a:rPr sz="2500" b="0">
-                <a:solidFill>
-                  <a:srgbClr val="222222"/>
-                </a:solidFill>
-                <a:latin typeface="Calibri"/>
-              </a:rPr>
-              <a:t>uint8_t sine8(uint8_t theta) {</a:t>
-            </a:r>
-          </a:p>
-          <a:p>
-            <a:pPr lvl="1" algn="l">
-              <a:lnSpc>
-                <a:spcPct val="100000"/>
-              </a:lnSpc>
-              <a:spcAft>
-                <a:spcPts val="600"/>
-              </a:spcAft>
-              <a:defRPr sz="2500" b="0">
-                <a:solidFill>
-                  <a:srgbClr val="222222"/>
-                </a:solidFill>
-                <a:latin typeface="Calibri"/>
-              </a:defRPr>
-            </a:pPr>
-            <a:r>
-              <a:rPr sz="2500" b="0">
-                <a:solidFill>
-                  <a:srgbClr val="222222"/>
-                </a:solidFill>
-                <a:latin typeface="Calibri"/>
-              </a:rPr>
-              <a:t>  float radians = (theta / 256.0f) * 2.0f * PI;</a:t>
-            </a:r>
-          </a:p>
-          <a:p>
-            <a:pPr lvl="1" algn="l">
-              <a:lnSpc>
-                <a:spcPct val="100000"/>
-              </a:lnSpc>
-              <a:spcAft>
-                <a:spcPts val="600"/>
-              </a:spcAft>
-              <a:defRPr sz="2500" b="0">
-                <a:solidFill>
-                  <a:srgbClr val="222222"/>
-                </a:solidFill>
-                <a:latin typeface="Calibri"/>
-              </a:defRPr>
-            </a:pPr>
-            <a:r>
-              <a:rPr sz="2500" b="0">
-                <a:solidFill>
-                  <a:srgbClr val="222222"/>
-                </a:solidFill>
-                <a:latin typeface="Calibri"/>
-              </a:rPr>
-              <a:t>  return (uint8_t)(128.0f + 127.0f * sinf(radians));</a:t>
-            </a:r>
-          </a:p>
-          <a:p>
-            <a:pPr lvl="1" algn="l">
-              <a:lnSpc>
-                <a:spcPct val="100000"/>
-              </a:lnSpc>
-              <a:spcAft>
-                <a:spcPts val="600"/>
-              </a:spcAft>
-              <a:defRPr sz="2500" b="0">
-                <a:solidFill>
-                  <a:srgbClr val="222222"/>
-                </a:solidFill>
-                <a:latin typeface="Calibri"/>
-              </a:defRPr>
-            </a:pPr>
-            <a:r>
-              <a:rPr sz="2500" b="0">
-                <a:solidFill>
-                  <a:srgbClr val="222222"/>
-                </a:solidFill>
-                <a:latin typeface="Calibri"/>
-              </a:rPr>
-              <a:t>}</a:t>
+              </a:rPr>
+              <a:t>KEY POINT   </a:t>
+            </a:r>
+            <a:r>
+              <a:rPr sz="1500">
+                <a:solidFill>
+                  <a:srgbClr val="222222"/>
+                </a:solidFill>
+                <a:latin typeface="Calibri"/>
+              </a:rPr>
+              <a:t>Compute animation state FROM the clock rather than stepping a counter. It is self-correcting, and it survives a slow pass of loop() without stuttering.</a:t>
             </a:r>
           </a:p>
         </p:txBody>
@@ -12905,7 +12904,7 @@
                 </a:solidFill>
                 <a:latin typeface="Calibri"/>
               </a:rPr>
-              <a:t>Breathing, and an 8-bit sine  (continued)</a:t>
+              <a:t>Add a mode  -  thirty minutes, in your groups</a:t>
             </a:r>
           </a:p>
         </p:txBody>
@@ -13059,7 +13058,7 @@
         <p:spPr>
           <a:xfrm>
             <a:off x="502920" y="1188720"/>
-            <a:ext cx="11185855" cy="3986784"/>
+            <a:ext cx="11185855" cy="530352"/>
           </a:xfrm>
           <a:prstGeom prst="rect">
             <a:avLst/>
@@ -13079,78 +13078,110 @@
               <a:spcAft>
                 <a:spcPts val="600"/>
               </a:spcAft>
-              <a:defRPr sz="2100" b="0">
-                <a:solidFill>
-                  <a:srgbClr val="222222"/>
-                </a:solidFill>
-                <a:latin typeface="Calibri"/>
-              </a:defRPr>
-            </a:pPr>
-          </a:p>
-          <a:p>
-            <a:pPr algn="l">
-              <a:lnSpc>
-                <a:spcPct val="100000"/>
-              </a:lnSpc>
-              <a:spcAft>
-                <a:spcPts val="600"/>
-              </a:spcAft>
-              <a:defRPr sz="2100" b="0">
-                <a:solidFill>
-                  <a:srgbClr val="222222"/>
-                </a:solidFill>
-                <a:latin typeface="Calibri"/>
-              </a:defRPr>
-            </a:pPr>
-            <a:r>
-              <a:rPr sz="2100" b="0">
-                <a:solidFill>
-                  <a:srgbClr val="222222"/>
-                </a:solidFill>
-                <a:latin typeface="Calibri"/>
-              </a:rPr>
-              <a:t>Feed it 0..255 for one full turn, get 0..255 back with 128 as the midpoint. No angles in degrees, no floating point in the caller.</a:t>
-            </a:r>
-          </a:p>
-          <a:p>
-            <a:pPr algn="l">
-              <a:lnSpc>
-                <a:spcPct val="100000"/>
-              </a:lnSpc>
-              <a:spcAft>
-                <a:spcPts val="600"/>
-              </a:spcAft>
-              <a:defRPr sz="2100" b="0">
-                <a:solidFill>
-                  <a:srgbClr val="222222"/>
-                </a:solidFill>
-                <a:latin typeface="Calibri"/>
-              </a:defRPr>
-            </a:pPr>
-          </a:p>
-          <a:p>
-            <a:pPr algn="l">
-              <a:lnSpc>
-                <a:spcPct val="100000"/>
-              </a:lnSpc>
-              <a:spcAft>
-                <a:spcPts val="600"/>
-              </a:spcAft>
-              <a:defRPr sz="2100" b="0">
-                <a:solidFill>
-                  <a:srgbClr val="222222"/>
-                </a:solidFill>
-                <a:latin typeface="Calibri"/>
-              </a:defRPr>
-            </a:pPr>
-            <a:r>
-              <a:rPr sz="2100" b="0">
-                <a:solidFill>
-                  <a:srgbClr val="222222"/>
-                </a:solidFill>
-                <a:latin typeface="Calibri"/>
-              </a:rPr>
-              <a:t>Then the phase comes from the clock rather than from a counter:</a:t>
+              <a:defRPr sz="1900" b="1">
+                <a:solidFill>
+                  <a:srgbClr val="0E7C86"/>
+                </a:solidFill>
+                <a:latin typeface="Calibri"/>
+              </a:defRPr>
+            </a:pPr>
+            <a:r>
+              <a:rPr sz="1900" b="1">
+                <a:solidFill>
+                  <a:srgbClr val="0E7C86"/>
+                </a:solidFill>
+                <a:latin typeface="Calibri"/>
+              </a:rPr>
+              <a:t>The real test of a design is what it costs to extend</a:t>
+            </a:r>
+          </a:p>
+        </p:txBody>
+      </p:sp>
+      <p:sp>
+        <p:nvSpPr>
+          <p:cNvPr id="7" name="TextBox 6"/>
+          <p:cNvSpPr txBox="1"/>
+          <p:nvPr/>
+        </p:nvSpPr>
+        <p:spPr>
+          <a:xfrm>
+            <a:off x="502920" y="1755648"/>
+            <a:ext cx="5364327" cy="4507992"/>
+          </a:xfrm>
+          <a:prstGeom prst="rect">
+            <a:avLst/>
+          </a:prstGeom>
+          <a:noFill/>
+        </p:spPr>
+        <p:txBody>
+          <a:bodyPr wrap="square" lIns="0" tIns="0" rIns="0" bIns="0">
+            <a:spAutoFit/>
+          </a:bodyPr>
+          <a:lstStyle/>
+          <a:p>
+            <a:pPr algn="l">
+              <a:lnSpc>
+                <a:spcPct val="100000"/>
+              </a:lnSpc>
+              <a:spcAft>
+                <a:spcPts val="500"/>
+              </a:spcAft>
+              <a:defRPr sz="1800" b="0">
+                <a:solidFill>
+                  <a:srgbClr val="222222"/>
+                </a:solidFill>
+                <a:latin typeface="Calibri"/>
+              </a:defRPr>
+            </a:pPr>
+            <a:r>
+              <a:rPr sz="1800" b="0">
+                <a:solidFill>
+                  <a:srgbClr val="222222"/>
+                </a:solidFill>
+                <a:latin typeface="Calibri"/>
+              </a:rPr>
+              <a:t>Add a HAZARD mode to a4a_led_state_machine: all four corners flashing amber together, running until it is switched off.</a:t>
+            </a:r>
+          </a:p>
+          <a:p>
+            <a:pPr algn="l">
+              <a:lnSpc>
+                <a:spcPct val="100000"/>
+              </a:lnSpc>
+              <a:spcAft>
+                <a:spcPts val="500"/>
+              </a:spcAft>
+              <a:defRPr sz="900" b="0">
+                <a:solidFill>
+                  <a:srgbClr val="222222"/>
+                </a:solidFill>
+                <a:latin typeface="Calibri"/>
+              </a:defRPr>
+            </a:pPr>
+          </a:p>
+          <a:p>
+            <a:pPr algn="l">
+              <a:lnSpc>
+                <a:spcPct val="100000"/>
+              </a:lnSpc>
+              <a:spcAft>
+                <a:spcPts val="500"/>
+              </a:spcAft>
+              <a:defRPr sz="1800" b="0">
+                <a:solidFill>
+                  <a:srgbClr val="222222"/>
+                </a:solidFill>
+                <a:latin typeface="Calibri"/>
+              </a:defRPr>
+            </a:pPr>
+            <a:r>
+              <a:rPr sz="1800" b="0">
+                <a:solidFill>
+                  <a:srgbClr val="222222"/>
+                </a:solidFill>
+                <a:latin typeface="Calibri"/>
+              </a:rPr>
+              <a:t>Do it the way the program is built:</a:t>
             </a:r>
           </a:p>
           <a:p>
@@ -13159,130 +13190,287 @@
                 <a:spcPct val="100000"/>
               </a:lnSpc>
               <a:spcAft>
-                <a:spcPts val="600"/>
-              </a:spcAft>
-              <a:defRPr sz="2100" b="0">
-                <a:solidFill>
-                  <a:srgbClr val="222222"/>
-                </a:solidFill>
-                <a:latin typeface="Calibri"/>
-              </a:defRPr>
-            </a:pPr>
-            <a:r>
-              <a:rPr sz="2100" b="0">
-                <a:solidFill>
-                  <a:srgbClr val="222222"/>
-                </a:solidFill>
-                <a:latin typeface="Calibri"/>
-              </a:rPr>
-              <a:t>phase = (now % BREATHE_PERIOD_MS) * 255 / BREATHE_PERIOD_MS;</a:t>
-            </a:r>
-          </a:p>
-          <a:p>
-            <a:pPr algn="l">
-              <a:lnSpc>
-                <a:spcPct val="100000"/>
-              </a:lnSpc>
-              <a:spcAft>
-                <a:spcPts val="600"/>
-              </a:spcAft>
-              <a:defRPr sz="2100" b="0">
-                <a:solidFill>
-                  <a:srgbClr val="222222"/>
-                </a:solidFill>
-                <a:latin typeface="Calibri"/>
-              </a:defRPr>
-            </a:pPr>
-          </a:p>
-          <a:p>
-            <a:pPr algn="l">
-              <a:lnSpc>
-                <a:spcPct val="100000"/>
-              </a:lnSpc>
-              <a:spcAft>
-                <a:spcPts val="600"/>
-              </a:spcAft>
-              <a:defRPr sz="2100" b="0">
-                <a:solidFill>
-                  <a:srgbClr val="222222"/>
-                </a:solidFill>
-                <a:latin typeface="Calibri"/>
-              </a:defRPr>
-            </a:pPr>
-            <a:r>
-              <a:rPr sz="2100" b="0">
-                <a:solidFill>
-                  <a:srgbClr val="222222"/>
-                </a:solidFill>
-                <a:latin typeface="Calibri"/>
-              </a:rPr>
-              <a:t>Deriving the phase from millis() rather than incrementing a variable means the animation runs at the same speed no matter how often the function gets called, and it cannot drift.</a:t>
-            </a:r>
-          </a:p>
-        </p:txBody>
-      </p:sp>
-      <p:sp>
-        <p:nvSpPr>
-          <p:cNvPr id="7" name="Rounded Rectangle 6"/>
-          <p:cNvSpPr/>
+                <a:spcPts val="500"/>
+              </a:spcAft>
+              <a:defRPr sz="1800" b="0">
+                <a:solidFill>
+                  <a:srgbClr val="222222"/>
+                </a:solidFill>
+                <a:latin typeface="Calibri"/>
+              </a:defRPr>
+            </a:pPr>
+            <a:r>
+              <a:rPr sz="1800" b="0">
+                <a:solidFill>
+                  <a:srgbClr val="222222"/>
+                </a:solidFill>
+                <a:latin typeface="Calibri"/>
+              </a:rPr>
+              <a:t>1.  Add HAZARD to the LEDMode enum.</a:t>
+            </a:r>
+          </a:p>
+          <a:p>
+            <a:pPr lvl="1" algn="l">
+              <a:lnSpc>
+                <a:spcPct val="100000"/>
+              </a:lnSpc>
+              <a:spcAft>
+                <a:spcPts val="500"/>
+              </a:spcAft>
+              <a:defRPr sz="1800" b="0">
+                <a:solidFill>
+                  <a:srgbClr val="222222"/>
+                </a:solidFill>
+                <a:latin typeface="Calibri"/>
+              </a:defRPr>
+            </a:pPr>
+            <a:r>
+              <a:rPr sz="1800" b="0">
+                <a:solidFill>
+                  <a:srgbClr val="222222"/>
+                </a:solidFill>
+                <a:latin typeface="Calibri"/>
+              </a:rPr>
+              <a:t>2.  Add its timing constants to the configuration block at the top - not buried in the function.</a:t>
+            </a:r>
+          </a:p>
+          <a:p>
+            <a:pPr lvl="1" algn="l">
+              <a:lnSpc>
+                <a:spcPct val="100000"/>
+              </a:lnSpc>
+              <a:spcAft>
+                <a:spcPts val="500"/>
+              </a:spcAft>
+              <a:defRPr sz="1800" b="0">
+                <a:solidFill>
+                  <a:srgbClr val="222222"/>
+                </a:solidFill>
+                <a:latin typeface="Calibri"/>
+              </a:defRPr>
+            </a:pPr>
+            <a:r>
+              <a:rPr sz="1800" b="0">
+                <a:solidFill>
+                  <a:srgbClr val="222222"/>
+                </a:solidFill>
+                <a:latin typeface="Calibri"/>
+              </a:rPr>
+              <a:t>3.  Write update_hazard(now) so it draws ONE frame and returns.</a:t>
+            </a:r>
+          </a:p>
+          <a:p>
+            <a:pPr lvl="1" algn="l">
+              <a:lnSpc>
+                <a:spcPct val="100000"/>
+              </a:lnSpc>
+              <a:spcAft>
+                <a:spcPts val="500"/>
+              </a:spcAft>
+              <a:defRPr sz="1800" b="0">
+                <a:solidFill>
+                  <a:srgbClr val="222222"/>
+                </a:solidFill>
+                <a:latin typeface="Calibri"/>
+              </a:defRPr>
+            </a:pPr>
+            <a:r>
+              <a:rPr sz="1800" b="0">
+                <a:solidFill>
+                  <a:srgbClr val="222222"/>
+                </a:solidFill>
+                <a:latin typeface="Calibri"/>
+              </a:rPr>
+              <a:t>4.  Add one branch to the state machine.</a:t>
+            </a:r>
+          </a:p>
+          <a:p>
+            <a:pPr lvl="1" algn="l">
+              <a:lnSpc>
+                <a:spcPct val="100000"/>
+              </a:lnSpc>
+              <a:spcAft>
+                <a:spcPts val="500"/>
+              </a:spcAft>
+              <a:defRPr sz="1800" b="0">
+                <a:solidFill>
+                  <a:srgbClr val="222222"/>
+                </a:solidFill>
+                <a:latin typeface="Calibri"/>
+              </a:defRPr>
+            </a:pPr>
+            <a:r>
+              <a:rPr sz="1800" b="0">
+                <a:solidFill>
+                  <a:srgbClr val="222222"/>
+                </a:solidFill>
+                <a:latin typeface="Calibri"/>
+              </a:rPr>
+              <a:t>5.  Add a console command to enter and leave it.</a:t>
+            </a:r>
+          </a:p>
+        </p:txBody>
+      </p:sp>
+      <p:sp>
+        <p:nvSpPr>
+          <p:cNvPr id="8" name="TextBox 7"/>
+          <p:cNvSpPr txBox="1"/>
           <p:nvPr/>
         </p:nvSpPr>
         <p:spPr>
           <a:xfrm>
-            <a:off x="502920" y="5303520"/>
-            <a:ext cx="11185855" cy="960120"/>
-          </a:xfrm>
-          <a:prstGeom prst="roundRect">
-            <a:avLst>
-              <a:gd name="adj" fmla="val 4000"/>
-            </a:avLst>
+            <a:off x="6324447" y="1755648"/>
+            <a:ext cx="5364327" cy="4507992"/>
+          </a:xfrm>
+          <a:prstGeom prst="rect">
+            <a:avLst/>
           </a:prstGeom>
-          <a:solidFill>
-            <a:srgbClr val="EEF3F8"/>
-          </a:solidFill>
-          <a:ln w="12700">
-            <a:solidFill>
-              <a:srgbClr val="0E7C86"/>
-            </a:solidFill>
-          </a:ln>
-          <a:effectLst/>
-        </p:spPr>
-        <p:style>
-          <a:lnRef idx="1">
-            <a:schemeClr val="accent1"/>
-          </a:lnRef>
-          <a:fillRef idx="3">
-            <a:schemeClr val="accent1"/>
-          </a:fillRef>
-          <a:effectRef idx="2">
-            <a:schemeClr val="accent1"/>
-          </a:effectRef>
-          <a:fontRef idx="minor">
-            <a:schemeClr val="lt1"/>
-          </a:fontRef>
-        </p:style>
-        <p:txBody>
-          <a:bodyPr rtlCol="0" anchor="ctr" wrap="square" lIns="164592" rIns="164592" tIns="73152" bIns="73152"/>
-          <a:lstStyle/>
-          <a:p>
-            <a:pPr algn="l"/>
-            <a:r>
-              <a:rPr sz="1300" b="1">
-                <a:solidFill>
-                  <a:srgbClr val="0E7C86"/>
-                </a:solidFill>
-                <a:latin typeface="Calibri"/>
-              </a:rPr>
-              <a:t>KEY POINT   </a:t>
-            </a:r>
-            <a:r>
-              <a:rPr sz="1500">
-                <a:solidFill>
-                  <a:srgbClr val="222222"/>
-                </a:solidFill>
-                <a:latin typeface="Calibri"/>
-              </a:rPr>
-              <a:t>Compute animation state FROM the clock rather than stepping a counter. It is self-correcting, and it survives a slow pass of loop() without stuttering.</a:t>
+          <a:noFill/>
+        </p:spPr>
+        <p:txBody>
+          <a:bodyPr wrap="square" lIns="0" tIns="0" rIns="0" bIns="0">
+            <a:spAutoFit/>
+          </a:bodyPr>
+          <a:lstStyle/>
+          <a:p>
+            <a:pPr algn="l">
+              <a:lnSpc>
+                <a:spcPct val="100000"/>
+              </a:lnSpc>
+              <a:spcAft>
+                <a:spcPts val="900"/>
+              </a:spcAft>
+              <a:defRPr sz="1800" b="0">
+                <a:solidFill>
+                  <a:srgbClr val="222222"/>
+                </a:solidFill>
+                <a:latin typeface="Calibri"/>
+              </a:defRPr>
+            </a:pPr>
+            <a:r>
+              <a:rPr sz="1800" b="0">
+                <a:solidFill>
+                  <a:srgbClr val="222222"/>
+                </a:solidFill>
+                <a:latin typeface="Calibri"/>
+              </a:rPr>
+              <a:t>Then answer these:</a:t>
+            </a:r>
+          </a:p>
+          <a:p>
+            <a:pPr lvl="1" algn="l">
+              <a:lnSpc>
+                <a:spcPct val="100000"/>
+              </a:lnSpc>
+              <a:spcAft>
+                <a:spcPts val="900"/>
+              </a:spcAft>
+              <a:defRPr sz="1800" b="0">
+                <a:solidFill>
+                  <a:srgbClr val="222222"/>
+                </a:solidFill>
+                <a:latin typeface="Calibri"/>
+              </a:defRPr>
+            </a:pPr>
+            <a:r>
+              <a:rPr sz="1800" b="0">
+                <a:solidFill>
+                  <a:srgbClr val="222222"/>
+                </a:solidFill>
+                <a:latin typeface="Calibri"/>
+              </a:rPr>
+              <a:t>How many existing lines did you have to change?</a:t>
+            </a:r>
+          </a:p>
+          <a:p>
+            <a:pPr lvl="1" algn="l">
+              <a:lnSpc>
+                <a:spcPct val="100000"/>
+              </a:lnSpc>
+              <a:spcAft>
+                <a:spcPts val="900"/>
+              </a:spcAft>
+              <a:defRPr sz="1800" b="0">
+                <a:solidFill>
+                  <a:srgbClr val="222222"/>
+                </a:solidFill>
+                <a:latin typeface="Calibri"/>
+              </a:defRPr>
+            </a:pPr>
+            <a:r>
+              <a:rPr sz="1800" b="0">
+                <a:solidFill>
+                  <a:srgbClr val="222222"/>
+                </a:solidFill>
+                <a:latin typeface="Calibri"/>
+              </a:rPr>
+              <a:t>Could HAZARD and TURN_LEFT ever be on at the same time? Why not?</a:t>
+            </a:r>
+          </a:p>
+          <a:p>
+            <a:pPr lvl="1" algn="l">
+              <a:lnSpc>
+                <a:spcPct val="100000"/>
+              </a:lnSpc>
+              <a:spcAft>
+                <a:spcPts val="900"/>
+              </a:spcAft>
+              <a:defRPr sz="1800" b="0">
+                <a:solidFill>
+                  <a:srgbClr val="222222"/>
+                </a:solidFill>
+                <a:latin typeface="Calibri"/>
+              </a:defRPr>
+            </a:pPr>
+            <a:r>
+              <a:rPr sz="1800" b="0">
+                <a:solidFill>
+                  <a:srgbClr val="222222"/>
+                </a:solidFill>
+                <a:latin typeface="Calibri"/>
+              </a:rPr>
+              <a:t>What does  load  say while it is running?</a:t>
+            </a:r>
+          </a:p>
+          <a:p>
+            <a:pPr algn="l">
+              <a:lnSpc>
+                <a:spcPct val="100000"/>
+              </a:lnSpc>
+              <a:spcAft>
+                <a:spcPts val="900"/>
+              </a:spcAft>
+              <a:defRPr sz="900" b="0">
+                <a:solidFill>
+                  <a:srgbClr val="222222"/>
+                </a:solidFill>
+                <a:latin typeface="Calibri"/>
+              </a:defRPr>
+            </a:pPr>
+          </a:p>
+          <a:p>
+            <a:pPr algn="l">
+              <a:lnSpc>
+                <a:spcPct val="100000"/>
+              </a:lnSpc>
+              <a:spcAft>
+                <a:spcPts val="900"/>
+              </a:spcAft>
+              <a:defRPr sz="1800" b="0">
+                <a:solidFill>
+                  <a:srgbClr val="222222"/>
+                </a:solidFill>
+                <a:latin typeface="Calibri"/>
+              </a:defRPr>
+            </a:pPr>
+            <a:r>
+              <a:rPr sz="1800" b="0">
+                <a:solidFill>
+                  <a:srgbClr val="222222"/>
+                </a:solidFill>
+                <a:latin typeface="Calibri"/>
+              </a:rPr>
+              <a:t>The point of the exercise is the first question. If a new mode costs you one enum value and one branch, the design is doing its job.</a:t>
             </a:r>
           </a:p>
         </p:txBody>
@@ -13346,7 +13534,7 @@
                 </a:solidFill>
                 <a:latin typeface="Calibri"/>
               </a:rPr>
-              <a:t>Add a mode  -  thirty minutes, in your groups</a:t>
+              <a:t>Check yourself</a:t>
             </a:r>
           </a:p>
         </p:txBody>
@@ -13487,856 +13675,6 @@
                 <a:latin typeface="Calibri"/>
               </a:rPr>
               <a:t>21</a:t>
-            </a:r>
-          </a:p>
-        </p:txBody>
-      </p:sp>
-      <p:sp>
-        <p:nvSpPr>
-          <p:cNvPr id="6" name="TextBox 5"/>
-          <p:cNvSpPr txBox="1"/>
-          <p:nvPr/>
-        </p:nvSpPr>
-        <p:spPr>
-          <a:xfrm>
-            <a:off x="502920" y="1188720"/>
-            <a:ext cx="11185855" cy="530352"/>
-          </a:xfrm>
-          <a:prstGeom prst="rect">
-            <a:avLst/>
-          </a:prstGeom>
-          <a:noFill/>
-        </p:spPr>
-        <p:txBody>
-          <a:bodyPr wrap="square" lIns="0" tIns="0" rIns="0" bIns="0">
-            <a:spAutoFit/>
-          </a:bodyPr>
-          <a:lstStyle/>
-          <a:p>
-            <a:pPr algn="l">
-              <a:lnSpc>
-                <a:spcPct val="100000"/>
-              </a:lnSpc>
-              <a:spcAft>
-                <a:spcPts val="600"/>
-              </a:spcAft>
-              <a:defRPr sz="1900" b="1">
-                <a:solidFill>
-                  <a:srgbClr val="0E7C86"/>
-                </a:solidFill>
-                <a:latin typeface="Calibri"/>
-              </a:defRPr>
-            </a:pPr>
-            <a:r>
-              <a:rPr sz="1900" b="1">
-                <a:solidFill>
-                  <a:srgbClr val="0E7C86"/>
-                </a:solidFill>
-                <a:latin typeface="Calibri"/>
-              </a:rPr>
-              <a:t>The real test of a design is what it costs to extend</a:t>
-            </a:r>
-          </a:p>
-        </p:txBody>
-      </p:sp>
-      <p:sp>
-        <p:nvSpPr>
-          <p:cNvPr id="7" name="TextBox 6"/>
-          <p:cNvSpPr txBox="1"/>
-          <p:nvPr/>
-        </p:nvSpPr>
-        <p:spPr>
-          <a:xfrm>
-            <a:off x="502920" y="1755648"/>
-            <a:ext cx="11185855" cy="4507992"/>
-          </a:xfrm>
-          <a:prstGeom prst="rect">
-            <a:avLst/>
-          </a:prstGeom>
-          <a:noFill/>
-        </p:spPr>
-        <p:txBody>
-          <a:bodyPr wrap="square" lIns="0" tIns="0" rIns="0" bIns="0">
-            <a:spAutoFit/>
-          </a:bodyPr>
-          <a:lstStyle/>
-          <a:p>
-            <a:pPr algn="l">
-              <a:lnSpc>
-                <a:spcPct val="100000"/>
-              </a:lnSpc>
-              <a:spcAft>
-                <a:spcPts val="600"/>
-              </a:spcAft>
-              <a:defRPr sz="2400" b="0">
-                <a:solidFill>
-                  <a:srgbClr val="222222"/>
-                </a:solidFill>
-                <a:latin typeface="Calibri"/>
-              </a:defRPr>
-            </a:pPr>
-            <a:r>
-              <a:rPr sz="2400" b="0">
-                <a:solidFill>
-                  <a:srgbClr val="222222"/>
-                </a:solidFill>
-                <a:latin typeface="Calibri"/>
-              </a:rPr>
-              <a:t>Add a HAZARD mode to a4a_led_state_machine: all four corners flashing amber together, running until it is switched off.</a:t>
-            </a:r>
-          </a:p>
-          <a:p>
-            <a:pPr algn="l">
-              <a:lnSpc>
-                <a:spcPct val="100000"/>
-              </a:lnSpc>
-              <a:spcAft>
-                <a:spcPts val="600"/>
-              </a:spcAft>
-              <a:defRPr sz="2400" b="0">
-                <a:solidFill>
-                  <a:srgbClr val="222222"/>
-                </a:solidFill>
-                <a:latin typeface="Calibri"/>
-              </a:defRPr>
-            </a:pPr>
-          </a:p>
-          <a:p>
-            <a:pPr algn="l">
-              <a:lnSpc>
-                <a:spcPct val="100000"/>
-              </a:lnSpc>
-              <a:spcAft>
-                <a:spcPts val="600"/>
-              </a:spcAft>
-              <a:defRPr sz="2400" b="0">
-                <a:solidFill>
-                  <a:srgbClr val="222222"/>
-                </a:solidFill>
-                <a:latin typeface="Calibri"/>
-              </a:defRPr>
-            </a:pPr>
-            <a:r>
-              <a:rPr sz="2400" b="0">
-                <a:solidFill>
-                  <a:srgbClr val="222222"/>
-                </a:solidFill>
-                <a:latin typeface="Calibri"/>
-              </a:rPr>
-              <a:t>Do it the way the program is built:</a:t>
-            </a:r>
-          </a:p>
-          <a:p>
-            <a:pPr lvl="1" algn="l">
-              <a:lnSpc>
-                <a:spcPct val="100000"/>
-              </a:lnSpc>
-              <a:spcAft>
-                <a:spcPts val="600"/>
-              </a:spcAft>
-              <a:defRPr sz="2400" b="0">
-                <a:solidFill>
-                  <a:srgbClr val="222222"/>
-                </a:solidFill>
-                <a:latin typeface="Calibri"/>
-              </a:defRPr>
-            </a:pPr>
-            <a:r>
-              <a:rPr sz="2400" b="0">
-                <a:solidFill>
-                  <a:srgbClr val="222222"/>
-                </a:solidFill>
-                <a:latin typeface="Calibri"/>
-              </a:rPr>
-              <a:t>1.  Add HAZARD to the LEDMode enum.</a:t>
-            </a:r>
-          </a:p>
-          <a:p>
-            <a:pPr lvl="1" algn="l">
-              <a:lnSpc>
-                <a:spcPct val="100000"/>
-              </a:lnSpc>
-              <a:spcAft>
-                <a:spcPts val="600"/>
-              </a:spcAft>
-              <a:defRPr sz="2400" b="0">
-                <a:solidFill>
-                  <a:srgbClr val="222222"/>
-                </a:solidFill>
-                <a:latin typeface="Calibri"/>
-              </a:defRPr>
-            </a:pPr>
-            <a:r>
-              <a:rPr sz="2400" b="0">
-                <a:solidFill>
-                  <a:srgbClr val="222222"/>
-                </a:solidFill>
-                <a:latin typeface="Calibri"/>
-              </a:rPr>
-              <a:t>2.  Add its timing constants to the configuration block at the top - not buried in the function.</a:t>
-            </a:r>
-          </a:p>
-          <a:p>
-            <a:pPr lvl="1" algn="l">
-              <a:lnSpc>
-                <a:spcPct val="100000"/>
-              </a:lnSpc>
-              <a:spcAft>
-                <a:spcPts val="600"/>
-              </a:spcAft>
-              <a:defRPr sz="2400" b="0">
-                <a:solidFill>
-                  <a:srgbClr val="222222"/>
-                </a:solidFill>
-                <a:latin typeface="Calibri"/>
-              </a:defRPr>
-            </a:pPr>
-            <a:r>
-              <a:rPr sz="2400" b="0">
-                <a:solidFill>
-                  <a:srgbClr val="222222"/>
-                </a:solidFill>
-                <a:latin typeface="Calibri"/>
-              </a:rPr>
-              <a:t>3.  Write update_hazard(now) so it draws ONE frame and returns.</a:t>
-            </a:r>
-          </a:p>
-          <a:p>
-            <a:pPr lvl="1" algn="l">
-              <a:lnSpc>
-                <a:spcPct val="100000"/>
-              </a:lnSpc>
-              <a:spcAft>
-                <a:spcPts val="600"/>
-              </a:spcAft>
-              <a:defRPr sz="2400" b="0">
-                <a:solidFill>
-                  <a:srgbClr val="222222"/>
-                </a:solidFill>
-                <a:latin typeface="Calibri"/>
-              </a:defRPr>
-            </a:pPr>
-            <a:r>
-              <a:rPr sz="2400" b="0">
-                <a:solidFill>
-                  <a:srgbClr val="222222"/>
-                </a:solidFill>
-                <a:latin typeface="Calibri"/>
-              </a:rPr>
-              <a:t>4.  Add one branch to the state machine.</a:t>
-            </a:r>
-          </a:p>
-          <a:p>
-            <a:pPr lvl="1" algn="l">
-              <a:lnSpc>
-                <a:spcPct val="100000"/>
-              </a:lnSpc>
-              <a:spcAft>
-                <a:spcPts val="600"/>
-              </a:spcAft>
-              <a:defRPr sz="2400" b="0">
-                <a:solidFill>
-                  <a:srgbClr val="222222"/>
-                </a:solidFill>
-                <a:latin typeface="Calibri"/>
-              </a:defRPr>
-            </a:pPr>
-            <a:r>
-              <a:rPr sz="2400" b="0">
-                <a:solidFill>
-                  <a:srgbClr val="222222"/>
-                </a:solidFill>
-                <a:latin typeface="Calibri"/>
-              </a:rPr>
-              <a:t>5.  Add a console command to enter and leave it.</a:t>
-            </a:r>
-          </a:p>
-        </p:txBody>
-      </p:sp>
-    </p:spTree>
-  </p:cSld>
-  <p:clrMapOvr>
-    <a:masterClrMapping/>
-  </p:clrMapOvr>
-</p:sld>
-</file>
-
-<file path=ppt/slides/slide23.xml><?xml version="1.0" encoding="utf-8"?>
-<p:sld xmlns:a="http://schemas.openxmlformats.org/drawingml/2006/main" xmlns:p="http://schemas.openxmlformats.org/presentationml/2006/main" xmlns:r="http://schemas.openxmlformats.org/officeDocument/2006/relationships">
-  <p:cSld>
-    <p:spTree>
-      <p:nvGrpSpPr>
-        <p:cNvPr id="1" name=""/>
-        <p:cNvGrpSpPr/>
-        <p:nvPr/>
-      </p:nvGrpSpPr>
-      <p:grpSpPr/>
-      <p:sp>
-        <p:nvSpPr>
-          <p:cNvPr id="2" name="Title 1"/>
-          <p:cNvSpPr>
-            <a:spLocks noGrp="1"/>
-          </p:cNvSpPr>
-          <p:nvPr>
-            <p:ph type="title"/>
-          </p:nvPr>
-        </p:nvSpPr>
-        <p:spPr>
-          <a:xfrm>
-            <a:off x="502920" y="274320"/>
-            <a:ext cx="11185855" cy="777240"/>
-          </a:xfrm>
-        </p:spPr>
-        <p:txBody>
-          <a:bodyPr wrap="square" anchor="b"/>
-          <a:lstStyle/>
-          <a:p>
-            <a:pPr algn="l">
-              <a:lnSpc>
-                <a:spcPct val="100000"/>
-              </a:lnSpc>
-              <a:spcAft>
-                <a:spcPts val="0"/>
-              </a:spcAft>
-              <a:defRPr sz="2800" b="1">
-                <a:solidFill>
-                  <a:srgbClr val="1F3A5F"/>
-                </a:solidFill>
-                <a:latin typeface="Calibri"/>
-              </a:defRPr>
-            </a:pPr>
-            <a:r>
-              <a:rPr sz="2800" b="1">
-                <a:solidFill>
-                  <a:srgbClr val="1F3A5F"/>
-                </a:solidFill>
-                <a:latin typeface="Calibri"/>
-              </a:rPr>
-              <a:t>Add a mode  -  thirty minutes, in your groups  (continued)</a:t>
-            </a:r>
-          </a:p>
-        </p:txBody>
-      </p:sp>
-      <p:sp>
-        <p:nvSpPr>
-          <p:cNvPr id="3" name="Rectangle 2"/>
-          <p:cNvSpPr/>
-          <p:nvPr/>
-        </p:nvSpPr>
-        <p:spPr>
-          <a:xfrm>
-            <a:off x="502920" y="1097280"/>
-            <a:ext cx="11185855" cy="19050"/>
-          </a:xfrm>
-          <a:prstGeom prst="rect">
-            <a:avLst/>
-          </a:prstGeom>
-          <a:solidFill>
-            <a:srgbClr val="C8D2DE"/>
-          </a:solidFill>
-          <a:ln>
-            <a:noFill/>
-          </a:ln>
-          <a:effectLst/>
-        </p:spPr>
-        <p:style>
-          <a:lnRef idx="1">
-            <a:schemeClr val="accent1"/>
-          </a:lnRef>
-          <a:fillRef idx="3">
-            <a:schemeClr val="accent1"/>
-          </a:fillRef>
-          <a:effectRef idx="2">
-            <a:schemeClr val="accent1"/>
-          </a:effectRef>
-          <a:fontRef idx="minor">
-            <a:schemeClr val="lt1"/>
-          </a:fontRef>
-        </p:style>
-        <p:txBody>
-          <a:bodyPr rtlCol="0" anchor="ctr"/>
-          <a:lstStyle/>
-          <a:p>
-            <a:pPr algn="ctr"/>
-          </a:p>
-        </p:txBody>
-      </p:sp>
-      <p:sp>
-        <p:nvSpPr>
-          <p:cNvPr id="4" name="TextBox 3"/>
-          <p:cNvSpPr txBox="1"/>
-          <p:nvPr/>
-        </p:nvSpPr>
-        <p:spPr>
-          <a:xfrm>
-            <a:off x="502920" y="6382512"/>
-            <a:ext cx="10545775" cy="274320"/>
-          </a:xfrm>
-          <a:prstGeom prst="rect">
-            <a:avLst/>
-          </a:prstGeom>
-          <a:noFill/>
-        </p:spPr>
-        <p:txBody>
-          <a:bodyPr wrap="square" lIns="0" tIns="0">
-            <a:spAutoFit/>
-          </a:bodyPr>
-          <a:lstStyle/>
-          <a:p>
-            <a:pPr algn="l">
-              <a:lnSpc>
-                <a:spcPct val="100000"/>
-              </a:lnSpc>
-              <a:spcAft>
-                <a:spcPts val="0"/>
-              </a:spcAft>
-              <a:defRPr sz="1000" b="0">
-                <a:solidFill>
-                  <a:srgbClr val="666666"/>
-                </a:solidFill>
-                <a:latin typeface="Calibri"/>
-              </a:defRPr>
-            </a:pPr>
-            <a:r>
-              <a:rPr sz="1000" b="0">
-                <a:solidFill>
-                  <a:srgbClr val="666666"/>
-                </a:solidFill>
-                <a:latin typeface="Calibri"/>
-              </a:rPr>
-              <a:t>Pathfinder Advanced - Op Program 12  |  Lesson 4</a:t>
-            </a:r>
-          </a:p>
-        </p:txBody>
-      </p:sp>
-      <p:sp>
-        <p:nvSpPr>
-          <p:cNvPr id="5" name="TextBox 4"/>
-          <p:cNvSpPr txBox="1"/>
-          <p:nvPr/>
-        </p:nvSpPr>
-        <p:spPr>
-          <a:xfrm>
-            <a:off x="11231575" y="6382512"/>
-            <a:ext cx="457200" cy="274320"/>
-          </a:xfrm>
-          <a:prstGeom prst="rect">
-            <a:avLst/>
-          </a:prstGeom>
-          <a:noFill/>
-        </p:spPr>
-        <p:txBody>
-          <a:bodyPr wrap="square" lIns="0" tIns="0">
-            <a:spAutoFit/>
-          </a:bodyPr>
-          <a:lstStyle/>
-          <a:p>
-            <a:pPr algn="r">
-              <a:lnSpc>
-                <a:spcPct val="100000"/>
-              </a:lnSpc>
-              <a:spcAft>
-                <a:spcPts val="0"/>
-              </a:spcAft>
-              <a:defRPr sz="1000" b="0">
-                <a:solidFill>
-                  <a:srgbClr val="666666"/>
-                </a:solidFill>
-                <a:latin typeface="Calibri"/>
-              </a:defRPr>
-            </a:pPr>
-            <a:r>
-              <a:rPr sz="1000" b="0">
-                <a:solidFill>
-                  <a:srgbClr val="666666"/>
-                </a:solidFill>
-                <a:latin typeface="Calibri"/>
-              </a:rPr>
-              <a:t>22</a:t>
-            </a:r>
-          </a:p>
-        </p:txBody>
-      </p:sp>
-      <p:sp>
-        <p:nvSpPr>
-          <p:cNvPr id="6" name="TextBox 5"/>
-          <p:cNvSpPr txBox="1"/>
-          <p:nvPr/>
-        </p:nvSpPr>
-        <p:spPr>
-          <a:xfrm>
-            <a:off x="502920" y="1188720"/>
-            <a:ext cx="11185855" cy="5074920"/>
-          </a:xfrm>
-          <a:prstGeom prst="rect">
-            <a:avLst/>
-          </a:prstGeom>
-          <a:noFill/>
-        </p:spPr>
-        <p:txBody>
-          <a:bodyPr wrap="square" lIns="0" tIns="0" rIns="0" bIns="0">
-            <a:spAutoFit/>
-          </a:bodyPr>
-          <a:lstStyle/>
-          <a:p>
-            <a:pPr algn="l">
-              <a:lnSpc>
-                <a:spcPct val="100000"/>
-              </a:lnSpc>
-              <a:spcAft>
-                <a:spcPts val="600"/>
-              </a:spcAft>
-              <a:defRPr sz="2700" b="0">
-                <a:solidFill>
-                  <a:srgbClr val="222222"/>
-                </a:solidFill>
-                <a:latin typeface="Calibri"/>
-              </a:defRPr>
-            </a:pPr>
-          </a:p>
-          <a:p>
-            <a:pPr algn="l">
-              <a:lnSpc>
-                <a:spcPct val="100000"/>
-              </a:lnSpc>
-              <a:spcAft>
-                <a:spcPts val="600"/>
-              </a:spcAft>
-              <a:defRPr sz="2700" b="0">
-                <a:solidFill>
-                  <a:srgbClr val="222222"/>
-                </a:solidFill>
-                <a:latin typeface="Calibri"/>
-              </a:defRPr>
-            </a:pPr>
-            <a:r>
-              <a:rPr sz="2700" b="0">
-                <a:solidFill>
-                  <a:srgbClr val="222222"/>
-                </a:solidFill>
-                <a:latin typeface="Calibri"/>
-              </a:rPr>
-              <a:t>Then answer these:</a:t>
-            </a:r>
-          </a:p>
-          <a:p>
-            <a:pPr lvl="1" algn="l">
-              <a:lnSpc>
-                <a:spcPct val="100000"/>
-              </a:lnSpc>
-              <a:spcAft>
-                <a:spcPts val="600"/>
-              </a:spcAft>
-              <a:defRPr sz="2700" b="0">
-                <a:solidFill>
-                  <a:srgbClr val="222222"/>
-                </a:solidFill>
-                <a:latin typeface="Calibri"/>
-              </a:defRPr>
-            </a:pPr>
-            <a:r>
-              <a:rPr sz="2700" b="0">
-                <a:solidFill>
-                  <a:srgbClr val="222222"/>
-                </a:solidFill>
-                <a:latin typeface="Calibri"/>
-              </a:rPr>
-              <a:t>How many existing lines did you have to change?</a:t>
-            </a:r>
-          </a:p>
-          <a:p>
-            <a:pPr lvl="1" algn="l">
-              <a:lnSpc>
-                <a:spcPct val="100000"/>
-              </a:lnSpc>
-              <a:spcAft>
-                <a:spcPts val="600"/>
-              </a:spcAft>
-              <a:defRPr sz="2700" b="0">
-                <a:solidFill>
-                  <a:srgbClr val="222222"/>
-                </a:solidFill>
-                <a:latin typeface="Calibri"/>
-              </a:defRPr>
-            </a:pPr>
-            <a:r>
-              <a:rPr sz="2700" b="0">
-                <a:solidFill>
-                  <a:srgbClr val="222222"/>
-                </a:solidFill>
-                <a:latin typeface="Calibri"/>
-              </a:rPr>
-              <a:t>Could HAZARD and TURN_LEFT ever be on at the same time? Why not?</a:t>
-            </a:r>
-          </a:p>
-          <a:p>
-            <a:pPr lvl="1" algn="l">
-              <a:lnSpc>
-                <a:spcPct val="100000"/>
-              </a:lnSpc>
-              <a:spcAft>
-                <a:spcPts val="600"/>
-              </a:spcAft>
-              <a:defRPr sz="2700" b="0">
-                <a:solidFill>
-                  <a:srgbClr val="222222"/>
-                </a:solidFill>
-                <a:latin typeface="Calibri"/>
-              </a:defRPr>
-            </a:pPr>
-            <a:r>
-              <a:rPr sz="2700" b="0">
-                <a:solidFill>
-                  <a:srgbClr val="222222"/>
-                </a:solidFill>
-                <a:latin typeface="Calibri"/>
-              </a:rPr>
-              <a:t>What does  load  say while it is running?</a:t>
-            </a:r>
-          </a:p>
-          <a:p>
-            <a:pPr algn="l">
-              <a:lnSpc>
-                <a:spcPct val="100000"/>
-              </a:lnSpc>
-              <a:spcAft>
-                <a:spcPts val="600"/>
-              </a:spcAft>
-              <a:defRPr sz="2700" b="0">
-                <a:solidFill>
-                  <a:srgbClr val="222222"/>
-                </a:solidFill>
-                <a:latin typeface="Calibri"/>
-              </a:defRPr>
-            </a:pPr>
-          </a:p>
-          <a:p>
-            <a:pPr algn="l">
-              <a:lnSpc>
-                <a:spcPct val="100000"/>
-              </a:lnSpc>
-              <a:spcAft>
-                <a:spcPts val="600"/>
-              </a:spcAft>
-              <a:defRPr sz="2700" b="0">
-                <a:solidFill>
-                  <a:srgbClr val="222222"/>
-                </a:solidFill>
-                <a:latin typeface="Calibri"/>
-              </a:defRPr>
-            </a:pPr>
-            <a:r>
-              <a:rPr sz="2700" b="0">
-                <a:solidFill>
-                  <a:srgbClr val="222222"/>
-                </a:solidFill>
-                <a:latin typeface="Calibri"/>
-              </a:rPr>
-              <a:t>The point of the exercise is the first question. If a new mode costs you one enum value and one branch, the design is doing its job.</a:t>
-            </a:r>
-          </a:p>
-        </p:txBody>
-      </p:sp>
-    </p:spTree>
-  </p:cSld>
-  <p:clrMapOvr>
-    <a:masterClrMapping/>
-  </p:clrMapOvr>
-</p:sld>
-</file>
-
-<file path=ppt/slides/slide24.xml><?xml version="1.0" encoding="utf-8"?>
-<p:sld xmlns:a="http://schemas.openxmlformats.org/drawingml/2006/main" xmlns:p="http://schemas.openxmlformats.org/presentationml/2006/main" xmlns:r="http://schemas.openxmlformats.org/officeDocument/2006/relationships">
-  <p:cSld>
-    <p:spTree>
-      <p:nvGrpSpPr>
-        <p:cNvPr id="1" name=""/>
-        <p:cNvGrpSpPr/>
-        <p:nvPr/>
-      </p:nvGrpSpPr>
-      <p:grpSpPr/>
-      <p:sp>
-        <p:nvSpPr>
-          <p:cNvPr id="2" name="Title 1"/>
-          <p:cNvSpPr>
-            <a:spLocks noGrp="1"/>
-          </p:cNvSpPr>
-          <p:nvPr>
-            <p:ph type="title"/>
-          </p:nvPr>
-        </p:nvSpPr>
-        <p:spPr>
-          <a:xfrm>
-            <a:off x="502920" y="274320"/>
-            <a:ext cx="11185855" cy="777240"/>
-          </a:xfrm>
-        </p:spPr>
-        <p:txBody>
-          <a:bodyPr wrap="square" anchor="b"/>
-          <a:lstStyle/>
-          <a:p>
-            <a:pPr algn="l">
-              <a:lnSpc>
-                <a:spcPct val="100000"/>
-              </a:lnSpc>
-              <a:spcAft>
-                <a:spcPts val="0"/>
-              </a:spcAft>
-              <a:defRPr sz="2800" b="1">
-                <a:solidFill>
-                  <a:srgbClr val="1F3A5F"/>
-                </a:solidFill>
-                <a:latin typeface="Calibri"/>
-              </a:defRPr>
-            </a:pPr>
-            <a:r>
-              <a:rPr sz="2800" b="1">
-                <a:solidFill>
-                  <a:srgbClr val="1F3A5F"/>
-                </a:solidFill>
-                <a:latin typeface="Calibri"/>
-              </a:rPr>
-              <a:t>Check yourself</a:t>
-            </a:r>
-          </a:p>
-        </p:txBody>
-      </p:sp>
-      <p:sp>
-        <p:nvSpPr>
-          <p:cNvPr id="3" name="Rectangle 2"/>
-          <p:cNvSpPr/>
-          <p:nvPr/>
-        </p:nvSpPr>
-        <p:spPr>
-          <a:xfrm>
-            <a:off x="502920" y="1097280"/>
-            <a:ext cx="11185855" cy="19050"/>
-          </a:xfrm>
-          <a:prstGeom prst="rect">
-            <a:avLst/>
-          </a:prstGeom>
-          <a:solidFill>
-            <a:srgbClr val="C8D2DE"/>
-          </a:solidFill>
-          <a:ln>
-            <a:noFill/>
-          </a:ln>
-          <a:effectLst/>
-        </p:spPr>
-        <p:style>
-          <a:lnRef idx="1">
-            <a:schemeClr val="accent1"/>
-          </a:lnRef>
-          <a:fillRef idx="3">
-            <a:schemeClr val="accent1"/>
-          </a:fillRef>
-          <a:effectRef idx="2">
-            <a:schemeClr val="accent1"/>
-          </a:effectRef>
-          <a:fontRef idx="minor">
-            <a:schemeClr val="lt1"/>
-          </a:fontRef>
-        </p:style>
-        <p:txBody>
-          <a:bodyPr rtlCol="0" anchor="ctr"/>
-          <a:lstStyle/>
-          <a:p>
-            <a:pPr algn="ctr"/>
-          </a:p>
-        </p:txBody>
-      </p:sp>
-      <p:sp>
-        <p:nvSpPr>
-          <p:cNvPr id="4" name="TextBox 3"/>
-          <p:cNvSpPr txBox="1"/>
-          <p:nvPr/>
-        </p:nvSpPr>
-        <p:spPr>
-          <a:xfrm>
-            <a:off x="502920" y="6382512"/>
-            <a:ext cx="10545775" cy="274320"/>
-          </a:xfrm>
-          <a:prstGeom prst="rect">
-            <a:avLst/>
-          </a:prstGeom>
-          <a:noFill/>
-        </p:spPr>
-        <p:txBody>
-          <a:bodyPr wrap="square" lIns="0" tIns="0">
-            <a:spAutoFit/>
-          </a:bodyPr>
-          <a:lstStyle/>
-          <a:p>
-            <a:pPr algn="l">
-              <a:lnSpc>
-                <a:spcPct val="100000"/>
-              </a:lnSpc>
-              <a:spcAft>
-                <a:spcPts val="0"/>
-              </a:spcAft>
-              <a:defRPr sz="1000" b="0">
-                <a:solidFill>
-                  <a:srgbClr val="666666"/>
-                </a:solidFill>
-                <a:latin typeface="Calibri"/>
-              </a:defRPr>
-            </a:pPr>
-            <a:r>
-              <a:rPr sz="1000" b="0">
-                <a:solidFill>
-                  <a:srgbClr val="666666"/>
-                </a:solidFill>
-                <a:latin typeface="Calibri"/>
-              </a:rPr>
-              <a:t>Pathfinder Advanced - Op Program 12  |  Lesson 4</a:t>
-            </a:r>
-          </a:p>
-        </p:txBody>
-      </p:sp>
-      <p:sp>
-        <p:nvSpPr>
-          <p:cNvPr id="5" name="TextBox 4"/>
-          <p:cNvSpPr txBox="1"/>
-          <p:nvPr/>
-        </p:nvSpPr>
-        <p:spPr>
-          <a:xfrm>
-            <a:off x="11231575" y="6382512"/>
-            <a:ext cx="457200" cy="274320"/>
-          </a:xfrm>
-          <a:prstGeom prst="rect">
-            <a:avLst/>
-          </a:prstGeom>
-          <a:noFill/>
-        </p:spPr>
-        <p:txBody>
-          <a:bodyPr wrap="square" lIns="0" tIns="0">
-            <a:spAutoFit/>
-          </a:bodyPr>
-          <a:lstStyle/>
-          <a:p>
-            <a:pPr algn="r">
-              <a:lnSpc>
-                <a:spcPct val="100000"/>
-              </a:lnSpc>
-              <a:spcAft>
-                <a:spcPts val="0"/>
-              </a:spcAft>
-              <a:defRPr sz="1000" b="0">
-                <a:solidFill>
-                  <a:srgbClr val="666666"/>
-                </a:solidFill>
-                <a:latin typeface="Calibri"/>
-              </a:defRPr>
-            </a:pPr>
-            <a:r>
-              <a:rPr sz="1000" b="0">
-                <a:solidFill>
-                  <a:srgbClr val="666666"/>
-                </a:solidFill>
-                <a:latin typeface="Calibri"/>
-              </a:rPr>
-              <a:t>23</a:t>
             </a:r>
           </a:p>
         </p:txBody>
@@ -15583,15 +14921,15 @@
               <a:spcAft>
                 <a:spcPts val="900"/>
               </a:spcAft>
-              <a:defRPr sz="1900" b="0">
-                <a:solidFill>
-                  <a:srgbClr val="222222"/>
-                </a:solidFill>
-                <a:latin typeface="Calibri"/>
-              </a:defRPr>
-            </a:pPr>
-            <a:r>
-              <a:rPr sz="1900" b="0">
+              <a:defRPr sz="2000" b="0">
+                <a:solidFill>
+                  <a:srgbClr val="222222"/>
+                </a:solidFill>
+                <a:latin typeface="Calibri"/>
+              </a:defRPr>
+            </a:pPr>
+            <a:r>
+              <a:rPr sz="2000" b="0">
                 <a:solidFill>
                   <a:srgbClr val="222222"/>
                 </a:solidFill>
@@ -15608,7 +14946,7 @@
               <a:spcAft>
                 <a:spcPts val="900"/>
               </a:spcAft>
-              <a:defRPr sz="1900" b="0">
+              <a:defRPr sz="1000" b="0">
                 <a:solidFill>
                   <a:srgbClr val="222222"/>
                 </a:solidFill>
@@ -15624,15 +14962,15 @@
               <a:spcAft>
                 <a:spcPts val="900"/>
               </a:spcAft>
-              <a:defRPr sz="1900" b="0">
-                <a:solidFill>
-                  <a:srgbClr val="222222"/>
-                </a:solidFill>
-                <a:latin typeface="Calibri"/>
-              </a:defRPr>
-            </a:pPr>
-            <a:r>
-              <a:rPr sz="1900" b="0">
+              <a:defRPr sz="2000" b="0">
+                <a:solidFill>
+                  <a:srgbClr val="222222"/>
+                </a:solidFill>
+                <a:latin typeface="Calibri"/>
+              </a:defRPr>
+            </a:pPr>
+            <a:r>
+              <a:rPr sz="2000" b="0">
                 <a:solidFill>
                   <a:srgbClr val="222222"/>
                 </a:solidFill>
@@ -15649,7 +14987,7 @@
               <a:spcAft>
                 <a:spcPts val="900"/>
               </a:spcAft>
-              <a:defRPr sz="1900" b="0">
+              <a:defRPr sz="1000" b="0">
                 <a:solidFill>
                   <a:srgbClr val="222222"/>
                 </a:solidFill>
@@ -15665,15 +15003,15 @@
               <a:spcAft>
                 <a:spcPts val="900"/>
               </a:spcAft>
-              <a:defRPr sz="1900" b="0">
-                <a:solidFill>
-                  <a:srgbClr val="222222"/>
-                </a:solidFill>
-                <a:latin typeface="Calibri"/>
-              </a:defRPr>
-            </a:pPr>
-            <a:r>
-              <a:rPr sz="1900" b="0">
+              <a:defRPr sz="2000" b="0">
+                <a:solidFill>
+                  <a:srgbClr val="222222"/>
+                </a:solidFill>
+                <a:latin typeface="Calibri"/>
+              </a:defRPr>
+            </a:pPr>
+            <a:r>
+              <a:rPr sz="2000" b="0">
                 <a:solidFill>
                   <a:srgbClr val="222222"/>
                 </a:solidFill>
@@ -15713,15 +15051,15 @@
               <a:spcAft>
                 <a:spcPts val="900"/>
               </a:spcAft>
-              <a:defRPr sz="1900" b="0">
-                <a:solidFill>
-                  <a:srgbClr val="222222"/>
-                </a:solidFill>
-                <a:latin typeface="Calibri"/>
-              </a:defRPr>
-            </a:pPr>
-            <a:r>
-              <a:rPr sz="1900" b="0">
+              <a:defRPr sz="2100" b="0">
+                <a:solidFill>
+                  <a:srgbClr val="222222"/>
+                </a:solidFill>
+                <a:latin typeface="Calibri"/>
+              </a:defRPr>
+            </a:pPr>
+            <a:r>
+              <a:rPr sz="2100" b="0">
                 <a:solidFill>
                   <a:srgbClr val="222222"/>
                 </a:solidFill>
@@ -15738,15 +15076,15 @@
               <a:spcAft>
                 <a:spcPts val="900"/>
               </a:spcAft>
-              <a:defRPr sz="1900" b="0">
-                <a:solidFill>
-                  <a:srgbClr val="222222"/>
-                </a:solidFill>
-                <a:latin typeface="Calibri"/>
-              </a:defRPr>
-            </a:pPr>
-            <a:r>
-              <a:rPr sz="1900" b="0">
+              <a:defRPr sz="2100" b="0">
+                <a:solidFill>
+                  <a:srgbClr val="222222"/>
+                </a:solidFill>
+                <a:latin typeface="Calibri"/>
+              </a:defRPr>
+            </a:pPr>
+            <a:r>
+              <a:rPr sz="2100" b="0">
                 <a:solidFill>
                   <a:srgbClr val="222222"/>
                 </a:solidFill>
@@ -15763,15 +15101,15 @@
               <a:spcAft>
                 <a:spcPts val="900"/>
               </a:spcAft>
-              <a:defRPr sz="1900" b="0">
-                <a:solidFill>
-                  <a:srgbClr val="222222"/>
-                </a:solidFill>
-                <a:latin typeface="Calibri"/>
-              </a:defRPr>
-            </a:pPr>
-            <a:r>
-              <a:rPr sz="1900" b="0">
+              <a:defRPr sz="2100" b="0">
+                <a:solidFill>
+                  <a:srgbClr val="222222"/>
+                </a:solidFill>
+                <a:latin typeface="Calibri"/>
+              </a:defRPr>
+            </a:pPr>
+            <a:r>
+              <a:rPr sz="2100" b="0">
                 <a:solidFill>
                   <a:srgbClr val="222222"/>
                 </a:solidFill>
@@ -15788,7 +15126,7 @@
               <a:spcAft>
                 <a:spcPts val="900"/>
               </a:spcAft>
-              <a:defRPr sz="1900" b="0">
+              <a:defRPr sz="1050" b="0">
                 <a:solidFill>
                   <a:srgbClr val="222222"/>
                 </a:solidFill>
@@ -15804,15 +15142,15 @@
               <a:spcAft>
                 <a:spcPts val="900"/>
               </a:spcAft>
-              <a:defRPr sz="1900" b="0">
-                <a:solidFill>
-                  <a:srgbClr val="222222"/>
-                </a:solidFill>
-                <a:latin typeface="Calibri"/>
-              </a:defRPr>
-            </a:pPr>
-            <a:r>
-              <a:rPr sz="1900" b="0">
+              <a:defRPr sz="2100" b="0">
+                <a:solidFill>
+                  <a:srgbClr val="222222"/>
+                </a:solidFill>
+                <a:latin typeface="Calibri"/>
+              </a:defRPr>
+            </a:pPr>
+            <a:r>
+              <a:rPr sz="2100" b="0">
                 <a:solidFill>
                   <a:srgbClr val="222222"/>
                 </a:solidFill>
@@ -15829,15 +15167,15 @@
               <a:spcAft>
                 <a:spcPts val="900"/>
               </a:spcAft>
-              <a:defRPr sz="1900" b="0">
-                <a:solidFill>
-                  <a:srgbClr val="222222"/>
-                </a:solidFill>
-                <a:latin typeface="Calibri"/>
-              </a:defRPr>
-            </a:pPr>
-            <a:r>
-              <a:rPr sz="1900" b="0">
+              <a:defRPr sz="2100" b="0">
+                <a:solidFill>
+                  <a:srgbClr val="222222"/>
+                </a:solidFill>
+                <a:latin typeface="Calibri"/>
+              </a:defRPr>
+            </a:pPr>
+            <a:r>
+              <a:rPr sz="2100" b="0">
                 <a:solidFill>
                   <a:srgbClr val="222222"/>
                 </a:solidFill>
@@ -17549,17 +16887,17 @@
                 <a:spcPct val="100000"/>
               </a:lnSpc>
               <a:spcAft>
-                <a:spcPts val="600"/>
-              </a:spcAft>
-              <a:defRPr sz="2500" b="0">
-                <a:solidFill>
-                  <a:srgbClr val="222222"/>
-                </a:solidFill>
-                <a:latin typeface="Calibri"/>
-              </a:defRPr>
-            </a:pPr>
-            <a:r>
-              <a:rPr sz="2500" b="0">
+                <a:spcPts val="900"/>
+              </a:spcAft>
+              <a:defRPr sz="3000" b="0">
+                <a:solidFill>
+                  <a:srgbClr val="222222"/>
+                </a:solidFill>
+                <a:latin typeface="Calibri"/>
+              </a:defRPr>
+            </a:pPr>
+            <a:r>
+              <a:rPr sz="3000" b="0">
                 <a:solidFill>
                   <a:srgbClr val="222222"/>
                 </a:solidFill>
@@ -17574,9 +16912,9 @@
                 <a:spcPct val="100000"/>
               </a:lnSpc>
               <a:spcAft>
-                <a:spcPts val="600"/>
-              </a:spcAft>
-              <a:defRPr sz="2500" b="0">
+                <a:spcPts val="900"/>
+              </a:spcAft>
+              <a:defRPr sz="1500" b="0">
                 <a:solidFill>
                   <a:srgbClr val="222222"/>
                 </a:solidFill>
@@ -17590,17 +16928,17 @@
                 <a:spcPct val="100000"/>
               </a:lnSpc>
               <a:spcAft>
-                <a:spcPts val="600"/>
-              </a:spcAft>
-              <a:defRPr sz="2500" b="0">
-                <a:solidFill>
-                  <a:srgbClr val="222222"/>
-                </a:solidFill>
-                <a:latin typeface="Calibri"/>
-              </a:defRPr>
-            </a:pPr>
-            <a:r>
-              <a:rPr sz="2500" b="0">
+                <a:spcPts val="900"/>
+              </a:spcAft>
+              <a:defRPr sz="3000" b="0">
+                <a:solidFill>
+                  <a:srgbClr val="222222"/>
+                </a:solidFill>
+                <a:latin typeface="Calibri"/>
+              </a:defRPr>
+            </a:pPr>
+            <a:r>
+              <a:rPr sz="3000" b="0">
                 <a:solidFill>
                   <a:srgbClr val="222222"/>
                 </a:solidFill>
@@ -17615,17 +16953,17 @@
                 <a:spcPct val="100000"/>
               </a:lnSpc>
               <a:spcAft>
-                <a:spcPts val="600"/>
-              </a:spcAft>
-              <a:defRPr sz="2500" b="0">
-                <a:solidFill>
-                  <a:srgbClr val="222222"/>
-                </a:solidFill>
-                <a:latin typeface="Calibri"/>
-              </a:defRPr>
-            </a:pPr>
-            <a:r>
-              <a:rPr sz="2500" b="0">
+                <a:spcPts val="900"/>
+              </a:spcAft>
+              <a:defRPr sz="3000" b="0">
+                <a:solidFill>
+                  <a:srgbClr val="222222"/>
+                </a:solidFill>
+                <a:latin typeface="Calibri"/>
+              </a:defRPr>
+            </a:pPr>
+            <a:r>
+              <a:rPr sz="3000" b="0">
                 <a:solidFill>
                   <a:srgbClr val="222222"/>
                 </a:solidFill>
@@ -17640,64 +16978,23 @@
                 <a:spcPct val="100000"/>
               </a:lnSpc>
               <a:spcAft>
-                <a:spcPts val="600"/>
-              </a:spcAft>
-              <a:defRPr sz="2500" b="0">
-                <a:solidFill>
-                  <a:srgbClr val="222222"/>
-                </a:solidFill>
-                <a:latin typeface="Calibri"/>
-              </a:defRPr>
-            </a:pPr>
-            <a:r>
-              <a:rPr sz="2500" b="0">
+                <a:spcPts val="900"/>
+              </a:spcAft>
+              <a:defRPr sz="3000" b="0">
+                <a:solidFill>
+                  <a:srgbClr val="222222"/>
+                </a:solidFill>
+                <a:latin typeface="Calibri"/>
+              </a:defRPr>
+            </a:pPr>
+            <a:r>
+              <a:rPr sz="3000" b="0">
                 <a:solidFill>
                   <a:srgbClr val="222222"/>
                 </a:solidFill>
                 <a:latin typeface="Calibri"/>
               </a:rPr>
               <a:t>// ...draw one frame...</a:t>
-            </a:r>
-          </a:p>
-          <a:p>
-            <a:pPr algn="l">
-              <a:lnSpc>
-                <a:spcPct val="100000"/>
-              </a:lnSpc>
-              <a:spcAft>
-                <a:spcPts val="600"/>
-              </a:spcAft>
-              <a:defRPr sz="2500" b="0">
-                <a:solidFill>
-                  <a:srgbClr val="222222"/>
-                </a:solidFill>
-                <a:latin typeface="Calibri"/>
-              </a:defRPr>
-            </a:pPr>
-          </a:p>
-          <a:p>
-            <a:pPr algn="l">
-              <a:lnSpc>
-                <a:spcPct val="100000"/>
-              </a:lnSpc>
-              <a:spcAft>
-                <a:spcPts val="600"/>
-              </a:spcAft>
-              <a:defRPr sz="2500" b="0">
-                <a:solidFill>
-                  <a:srgbClr val="222222"/>
-                </a:solidFill>
-                <a:latin typeface="Calibri"/>
-              </a:defRPr>
-            </a:pPr>
-            <a:r>
-              <a:rPr sz="2500" b="0">
-                <a:solidFill>
-                  <a:srgbClr val="222222"/>
-                </a:solidFill>
-                <a:latin typeface="Calibri"/>
-              </a:rPr>
-              <a:t>That is what lets the vehicle drive, read its controller, watch its current and animate all at the same time.</a:t>
             </a:r>
           </a:p>
         </p:txBody>
@@ -17935,13 +17232,22 @@
               <a:spcAft>
                 <a:spcPts val="600"/>
               </a:spcAft>
-              <a:defRPr sz="2700" b="0">
-                <a:solidFill>
-                  <a:srgbClr val="222222"/>
-                </a:solidFill>
-                <a:latin typeface="Calibri"/>
-              </a:defRPr>
-            </a:pPr>
+              <a:defRPr sz="2500" b="0">
+                <a:solidFill>
+                  <a:srgbClr val="222222"/>
+                </a:solidFill>
+                <a:latin typeface="Calibri"/>
+              </a:defRPr>
+            </a:pPr>
+            <a:r>
+              <a:rPr sz="2500" b="0">
+                <a:solidFill>
+                  <a:srgbClr val="222222"/>
+                </a:solidFill>
+                <a:latin typeface="Calibri"/>
+              </a:rPr>
+              <a:t>That is what lets the vehicle drive, read its controller, watch its current and animate all at the same time.</a:t>
+            </a:r>
           </a:p>
           <a:p>
             <a:pPr algn="l">
@@ -17951,15 +17257,31 @@
               <a:spcAft>
                 <a:spcPts val="600"/>
               </a:spcAft>
-              <a:defRPr sz="2700" b="0">
-                <a:solidFill>
-                  <a:srgbClr val="222222"/>
-                </a:solidFill>
-                <a:latin typeface="Calibri"/>
-              </a:defRPr>
-            </a:pPr>
-            <a:r>
-              <a:rPr sz="2700" b="0">
+              <a:defRPr sz="1250" b="0">
+                <a:solidFill>
+                  <a:srgbClr val="222222"/>
+                </a:solidFill>
+                <a:latin typeface="Calibri"/>
+              </a:defRPr>
+            </a:pPr>
+          </a:p>
+          <a:p>
+            <a:pPr algn="l">
+              <a:lnSpc>
+                <a:spcPct val="100000"/>
+              </a:lnSpc>
+              <a:spcAft>
+                <a:spcPts val="600"/>
+              </a:spcAft>
+              <a:defRPr sz="2500" b="0">
+                <a:solidFill>
+                  <a:srgbClr val="222222"/>
+                </a:solidFill>
+                <a:latin typeface="Calibri"/>
+              </a:defRPr>
+            </a:pPr>
+            <a:r>
+              <a:rPr sz="2500" b="0">
                 <a:solidFill>
                   <a:srgbClr val="222222"/>
                 </a:solidFill>
@@ -17976,7 +17298,7 @@
               <a:spcAft>
                 <a:spcPts val="600"/>
               </a:spcAft>
-              <a:defRPr sz="2700" b="0">
+              <a:defRPr sz="1250" b="0">
                 <a:solidFill>
                   <a:srgbClr val="222222"/>
                 </a:solidFill>
@@ -17992,15 +17314,15 @@
               <a:spcAft>
                 <a:spcPts val="600"/>
               </a:spcAft>
-              <a:defRPr sz="2700" b="0">
-                <a:solidFill>
-                  <a:srgbClr val="222222"/>
-                </a:solidFill>
-                <a:latin typeface="Calibri"/>
-              </a:defRPr>
-            </a:pPr>
-            <a:r>
-              <a:rPr sz="2700" b="0">
+              <a:defRPr sz="2500" b="0">
+                <a:solidFill>
+                  <a:srgbClr val="222222"/>
+                </a:solidFill>
+                <a:latin typeface="Calibri"/>
+              </a:defRPr>
+            </a:pPr>
+            <a:r>
+              <a:rPr sz="2500" b="0">
                 <a:solidFill>
                   <a:srgbClr val="222222"/>
                 </a:solidFill>

--- a/ground-vehicle/docs/courses/advanced/l4_lighting_state_machine.pptx
+++ b/ground-vehicle/docs/courses/advanced/l4_lighting_state_machine.pptx
@@ -7806,22 +7806,24 @@
       <p:grpSpPr/>
       <p:sp>
         <p:nvSpPr>
-          <p:cNvPr id="2" name="Title 1"/>
-          <p:cNvSpPr>
-            <a:spLocks noGrp="1"/>
-          </p:cNvSpPr>
-          <p:nvPr>
-            <p:ph type="title"/>
-          </p:nvPr>
-        </p:nvSpPr>
-        <p:spPr>
-          <a:xfrm>
-            <a:off x="502920" y="274320"/>
-            <a:ext cx="11185855" cy="777240"/>
-          </a:xfrm>
-        </p:spPr>
-        <p:txBody>
-          <a:bodyPr wrap="square" anchor="b"/>
+          <p:cNvPr id="2" name="TextBox 1"/>
+          <p:cNvSpPr txBox="1"/>
+          <p:nvPr/>
+        </p:nvSpPr>
+        <p:spPr>
+          <a:xfrm>
+            <a:off x="502920" y="6382512"/>
+            <a:ext cx="10545775" cy="274320"/>
+          </a:xfrm>
+          <a:prstGeom prst="rect">
+            <a:avLst/>
+          </a:prstGeom>
+          <a:noFill/>
+        </p:spPr>
+        <p:txBody>
+          <a:bodyPr wrap="square" lIns="0" tIns="0">
+            <a:spAutoFit/>
+          </a:bodyPr>
           <a:lstStyle/>
           <a:p>
             <a:pPr algn="l">
@@ -7831,41 +7833,89 @@
               <a:spcAft>
                 <a:spcPts val="0"/>
               </a:spcAft>
-              <a:defRPr sz="2800" b="1">
-                <a:solidFill>
-                  <a:srgbClr val="1F3A5F"/>
-                </a:solidFill>
-                <a:latin typeface="Calibri"/>
-              </a:defRPr>
-            </a:pPr>
-            <a:r>
-              <a:rPr sz="2800" b="1">
-                <a:solidFill>
-                  <a:srgbClr val="1F3A5F"/>
-                </a:solidFill>
-                <a:latin typeface="Calibri"/>
-              </a:rPr>
-              <a:t>Where we are</a:t>
-            </a:r>
-          </a:p>
-        </p:txBody>
-      </p:sp>
-      <p:sp>
-        <p:nvSpPr>
-          <p:cNvPr id="3" name="Rectangle 2"/>
+              <a:defRPr sz="1000" b="0">
+                <a:solidFill>
+                  <a:srgbClr val="666666"/>
+                </a:solidFill>
+                <a:latin typeface="Calibri"/>
+              </a:defRPr>
+            </a:pPr>
+            <a:r>
+              <a:rPr sz="1000" b="0">
+                <a:solidFill>
+                  <a:srgbClr val="666666"/>
+                </a:solidFill>
+                <a:latin typeface="Calibri"/>
+              </a:rPr>
+              <a:t>Pathfinder Advanced - Op Program 12  |  Lesson 4</a:t>
+            </a:r>
+          </a:p>
+        </p:txBody>
+      </p:sp>
+      <p:sp>
+        <p:nvSpPr>
+          <p:cNvPr id="3" name="TextBox 2"/>
+          <p:cNvSpPr txBox="1"/>
+          <p:nvPr/>
+        </p:nvSpPr>
+        <p:spPr>
+          <a:xfrm>
+            <a:off x="11231575" y="6382512"/>
+            <a:ext cx="457200" cy="274320"/>
+          </a:xfrm>
+          <a:prstGeom prst="rect">
+            <a:avLst/>
+          </a:prstGeom>
+          <a:noFill/>
+        </p:spPr>
+        <p:txBody>
+          <a:bodyPr wrap="square" lIns="0" tIns="0">
+            <a:spAutoFit/>
+          </a:bodyPr>
+          <a:lstStyle/>
+          <a:p>
+            <a:pPr algn="r">
+              <a:lnSpc>
+                <a:spcPct val="100000"/>
+              </a:lnSpc>
+              <a:spcAft>
+                <a:spcPts val="0"/>
+              </a:spcAft>
+              <a:defRPr sz="1000" b="0">
+                <a:solidFill>
+                  <a:srgbClr val="666666"/>
+                </a:solidFill>
+                <a:latin typeface="Calibri"/>
+              </a:defRPr>
+            </a:pPr>
+            <a:r>
+              <a:rPr sz="1000" b="0">
+                <a:solidFill>
+                  <a:srgbClr val="666666"/>
+                </a:solidFill>
+                <a:latin typeface="Calibri"/>
+              </a:rPr>
+              <a:t>12</a:t>
+            </a:r>
+          </a:p>
+        </p:txBody>
+      </p:sp>
+      <p:sp>
+        <p:nvSpPr>
+          <p:cNvPr id="4" name="Rectangle 3"/>
           <p:cNvSpPr/>
           <p:nvPr/>
         </p:nvSpPr>
         <p:spPr>
           <a:xfrm>
-            <a:off x="502920" y="1097280"/>
-            <a:ext cx="11185855" cy="19050"/>
+            <a:off x="0" y="1234440"/>
+            <a:ext cx="256032" cy="1554480"/>
           </a:xfrm>
           <a:prstGeom prst="rect">
             <a:avLst/>
           </a:prstGeom>
           <a:solidFill>
-            <a:srgbClr val="C8D2DE"/>
+            <a:srgbClr val="0E7C86"/>
           </a:solidFill>
           <a:ln>
             <a:noFill/>
@@ -7896,14 +7946,14 @@
       </p:sp>
       <p:sp>
         <p:nvSpPr>
-          <p:cNvPr id="4" name="TextBox 3"/>
+          <p:cNvPr id="5" name="TextBox 4"/>
           <p:cNvSpPr txBox="1"/>
           <p:nvPr/>
         </p:nvSpPr>
         <p:spPr>
           <a:xfrm>
-            <a:off x="502920" y="6382512"/>
-            <a:ext cx="10545775" cy="274320"/>
+            <a:off x="777240" y="1325880"/>
+            <a:ext cx="10515600" cy="1051560"/>
           </a:xfrm>
           <a:prstGeom prst="rect">
             <a:avLst/>
@@ -7911,7 +7961,7 @@
           <a:noFill/>
         </p:spPr>
         <p:txBody>
-          <a:bodyPr wrap="square" lIns="0" tIns="0">
+          <a:bodyPr wrap="square" lIns="0" tIns="0" rIns="0" bIns="0">
             <a:spAutoFit/>
           </a:bodyPr>
           <a:lstStyle/>
@@ -7923,35 +7973,35 @@
               <a:spcAft>
                 <a:spcPts val="0"/>
               </a:spcAft>
-              <a:defRPr sz="1000" b="0">
-                <a:solidFill>
-                  <a:srgbClr val="666666"/>
-                </a:solidFill>
-                <a:latin typeface="Calibri"/>
-              </a:defRPr>
-            </a:pPr>
-            <a:r>
-              <a:rPr sz="1000" b="0">
-                <a:solidFill>
-                  <a:srgbClr val="666666"/>
-                </a:solidFill>
-                <a:latin typeface="Calibri"/>
-              </a:rPr>
-              <a:t>Pathfinder Advanced - Op Program 12  |  Lesson 4</a:t>
-            </a:r>
-          </a:p>
-        </p:txBody>
-      </p:sp>
-      <p:sp>
-        <p:nvSpPr>
-          <p:cNvPr id="5" name="TextBox 4"/>
+              <a:defRPr sz="3600" b="1">
+                <a:solidFill>
+                  <a:srgbClr val="1F3A5F"/>
+                </a:solidFill>
+                <a:latin typeface="Calibri"/>
+              </a:defRPr>
+            </a:pPr>
+            <a:r>
+              <a:rPr sz="3600" b="1">
+                <a:solidFill>
+                  <a:srgbClr val="1F3A5F"/>
+                </a:solidFill>
+                <a:latin typeface="Calibri"/>
+              </a:rPr>
+              <a:t>Turn signal geometry</a:t>
+            </a:r>
+          </a:p>
+        </p:txBody>
+      </p:sp>
+      <p:sp>
+        <p:nvSpPr>
+          <p:cNvPr id="6" name="TextBox 5"/>
           <p:cNvSpPr txBox="1"/>
           <p:nvPr/>
         </p:nvSpPr>
         <p:spPr>
           <a:xfrm>
-            <a:off x="11231575" y="6382512"/>
-            <a:ext cx="457200" cy="274320"/>
+            <a:off x="777240" y="2423160"/>
+            <a:ext cx="10515600" cy="685800"/>
           </a:xfrm>
           <a:prstGeom prst="rect">
             <a:avLst/>
@@ -7959,19 +8009,19 @@
           <a:noFill/>
         </p:spPr>
         <p:txBody>
-          <a:bodyPr wrap="square" lIns="0" tIns="0">
+          <a:bodyPr wrap="square" lIns="0" tIns="0" rIns="0" bIns="0">
             <a:spAutoFit/>
           </a:bodyPr>
           <a:lstStyle/>
           <a:p>
-            <a:pPr algn="r">
-              <a:lnSpc>
-                <a:spcPct val="100000"/>
-              </a:lnSpc>
-              <a:spcAft>
-                <a:spcPts val="0"/>
-              </a:spcAft>
-              <a:defRPr sz="1000" b="0">
+            <a:pPr algn="l">
+              <a:lnSpc>
+                <a:spcPct val="100000"/>
+              </a:lnSpc>
+              <a:spcAft>
+                <a:spcPts val="400"/>
+              </a:spcAft>
+              <a:defRPr sz="1600" b="0">
                 <a:solidFill>
                   <a:srgbClr val="666666"/>
                 </a:solidFill>
@@ -7979,27 +8029,27 @@
               </a:defRPr>
             </a:pPr>
             <a:r>
-              <a:rPr sz="1000" b="0">
+              <a:rPr sz="1600" b="0">
                 <a:solidFill>
                   <a:srgbClr val="666666"/>
                 </a:solidFill>
                 <a:latin typeface="Calibri"/>
               </a:rPr>
-              <a:t>12</a:t>
-            </a:r>
-          </a:p>
-        </p:txBody>
-      </p:sp>
-      <p:sp>
-        <p:nvSpPr>
-          <p:cNvPr id="6" name="Rounded Rectangle 5"/>
+              <a:t>About 35 minutes</a:t>
+            </a:r>
+          </a:p>
+        </p:txBody>
+      </p:sp>
+      <p:sp>
+        <p:nvSpPr>
+          <p:cNvPr id="7" name="Rounded Rectangle 6"/>
           <p:cNvSpPr/>
           <p:nvPr/>
         </p:nvSpPr>
         <p:spPr>
           <a:xfrm>
-            <a:off x="502920" y="2240280"/>
-            <a:ext cx="3631082" cy="1737360"/>
+            <a:off x="502920" y="3886200"/>
+            <a:ext cx="3631082" cy="1325880"/>
           </a:xfrm>
           <a:prstGeom prst="roundRect">
             <a:avLst>
@@ -8062,14 +8112,14 @@
       </p:sp>
       <p:sp>
         <p:nvSpPr>
-          <p:cNvPr id="7" name="TextBox 6"/>
+          <p:cNvPr id="8" name="TextBox 7"/>
           <p:cNvSpPr txBox="1"/>
           <p:nvPr/>
         </p:nvSpPr>
         <p:spPr>
           <a:xfrm>
-            <a:off x="502920" y="1856232"/>
-            <a:ext cx="3631082" cy="347472"/>
+            <a:off x="502920" y="3520440"/>
+            <a:ext cx="3631082" cy="310896"/>
           </a:xfrm>
           <a:prstGeom prst="rect">
             <a:avLst/>
@@ -8087,9 +8137,9 @@
                 <a:spcPct val="100000"/>
               </a:lnSpc>
               <a:spcAft>
-                <a:spcPts val="600"/>
-              </a:spcAft>
-              <a:defRPr sz="1200" b="1">
+                <a:spcPts val="200"/>
+              </a:spcAft>
+              <a:defRPr sz="1100" b="1">
                 <a:solidFill>
                   <a:srgbClr val="0E7C86"/>
                 </a:solidFill>
@@ -8097,7 +8147,7 @@
               </a:defRPr>
             </a:pPr>
             <a:r>
-              <a:rPr sz="1200" b="1">
+              <a:rPr sz="1100" b="1">
                 <a:solidFill>
                   <a:srgbClr val="0E7C86"/>
                 </a:solidFill>
@@ -8110,14 +8160,14 @@
       </p:sp>
       <p:sp>
         <p:nvSpPr>
-          <p:cNvPr id="8" name="Rounded Rectangle 7"/>
+          <p:cNvPr id="9" name="Rounded Rectangle 8"/>
           <p:cNvSpPr/>
           <p:nvPr/>
         </p:nvSpPr>
         <p:spPr>
           <a:xfrm>
-            <a:off x="4280306" y="2240280"/>
-            <a:ext cx="3631082" cy="1737360"/>
+            <a:off x="4280306" y="3886200"/>
+            <a:ext cx="3631082" cy="1325880"/>
           </a:xfrm>
           <a:prstGeom prst="roundRect">
             <a:avLst>
@@ -8180,14 +8230,14 @@
       </p:sp>
       <p:sp>
         <p:nvSpPr>
-          <p:cNvPr id="9" name="TextBox 8"/>
+          <p:cNvPr id="10" name="TextBox 9"/>
           <p:cNvSpPr txBox="1"/>
           <p:nvPr/>
         </p:nvSpPr>
         <p:spPr>
           <a:xfrm>
-            <a:off x="4280306" y="1856232"/>
-            <a:ext cx="3631082" cy="347472"/>
+            <a:off x="4280306" y="3520440"/>
+            <a:ext cx="3631082" cy="310896"/>
           </a:xfrm>
           <a:prstGeom prst="rect">
             <a:avLst/>
@@ -8205,9 +8255,9 @@
                 <a:spcPct val="100000"/>
               </a:lnSpc>
               <a:spcAft>
-                <a:spcPts val="600"/>
-              </a:spcAft>
-              <a:defRPr sz="1200" b="1">
+                <a:spcPts val="200"/>
+              </a:spcAft>
+              <a:defRPr sz="1100" b="1">
                 <a:solidFill>
                   <a:srgbClr val="0E7C86"/>
                 </a:solidFill>
@@ -8215,7 +8265,7 @@
               </a:defRPr>
             </a:pPr>
             <a:r>
-              <a:rPr sz="1200" b="1">
+              <a:rPr sz="1100" b="1">
                 <a:solidFill>
                   <a:srgbClr val="0E7C86"/>
                 </a:solidFill>
@@ -8228,14 +8278,14 @@
       </p:sp>
       <p:sp>
         <p:nvSpPr>
-          <p:cNvPr id="10" name="Rounded Rectangle 9"/>
+          <p:cNvPr id="11" name="Rounded Rectangle 10"/>
           <p:cNvSpPr/>
           <p:nvPr/>
         </p:nvSpPr>
         <p:spPr>
           <a:xfrm>
-            <a:off x="8057692" y="2240280"/>
-            <a:ext cx="3631082" cy="1737360"/>
+            <a:off x="8057692" y="3886200"/>
+            <a:ext cx="3631082" cy="1325880"/>
           </a:xfrm>
           <a:prstGeom prst="roundRect">
             <a:avLst>
@@ -8298,14 +8348,14 @@
       </p:sp>
       <p:sp>
         <p:nvSpPr>
-          <p:cNvPr id="11" name="TextBox 10"/>
+          <p:cNvPr id="12" name="TextBox 11"/>
           <p:cNvSpPr txBox="1"/>
           <p:nvPr/>
         </p:nvSpPr>
         <p:spPr>
           <a:xfrm>
-            <a:off x="8057692" y="1856232"/>
-            <a:ext cx="3631082" cy="347472"/>
+            <a:off x="8057692" y="3520440"/>
+            <a:ext cx="3631082" cy="310896"/>
           </a:xfrm>
           <a:prstGeom prst="rect">
             <a:avLst/>
@@ -8323,9 +8373,9 @@
                 <a:spcPct val="100000"/>
               </a:lnSpc>
               <a:spcAft>
-                <a:spcPts val="600"/>
-              </a:spcAft>
-              <a:defRPr sz="1200" b="1">
+                <a:spcPts val="200"/>
+              </a:spcAft>
+              <a:defRPr sz="1100" b="1">
                 <a:solidFill>
                   <a:srgbClr val="0E7C86"/>
                 </a:solidFill>
@@ -8333,7 +8383,7 @@
               </a:defRPr>
             </a:pPr>
             <a:r>
-              <a:rPr sz="1200" b="1">
+              <a:rPr sz="1100" b="1">
                 <a:solidFill>
                   <a:srgbClr val="0E7C86"/>
                 </a:solidFill>
@@ -16522,22 +16572,24 @@
       <p:grpSpPr/>
       <p:sp>
         <p:nvSpPr>
-          <p:cNvPr id="2" name="Title 1"/>
-          <p:cNvSpPr>
-            <a:spLocks noGrp="1"/>
-          </p:cNvSpPr>
-          <p:nvPr>
-            <p:ph type="title"/>
-          </p:nvPr>
-        </p:nvSpPr>
-        <p:spPr>
-          <a:xfrm>
-            <a:off x="502920" y="274320"/>
-            <a:ext cx="11185855" cy="777240"/>
-          </a:xfrm>
-        </p:spPr>
-        <p:txBody>
-          <a:bodyPr wrap="square" anchor="b"/>
+          <p:cNvPr id="2" name="TextBox 1"/>
+          <p:cNvSpPr txBox="1"/>
+          <p:nvPr/>
+        </p:nvSpPr>
+        <p:spPr>
+          <a:xfrm>
+            <a:off x="502920" y="6382512"/>
+            <a:ext cx="10545775" cy="274320"/>
+          </a:xfrm>
+          <a:prstGeom prst="rect">
+            <a:avLst/>
+          </a:prstGeom>
+          <a:noFill/>
+        </p:spPr>
+        <p:txBody>
+          <a:bodyPr wrap="square" lIns="0" tIns="0">
+            <a:spAutoFit/>
+          </a:bodyPr>
           <a:lstStyle/>
           <a:p>
             <a:pPr algn="l">
@@ -16547,41 +16599,89 @@
               <a:spcAft>
                 <a:spcPts val="0"/>
               </a:spcAft>
-              <a:defRPr sz="2800" b="1">
-                <a:solidFill>
-                  <a:srgbClr val="1F3A5F"/>
-                </a:solidFill>
-                <a:latin typeface="Calibri"/>
-              </a:defRPr>
-            </a:pPr>
-            <a:r>
-              <a:rPr sz="2800" b="1">
-                <a:solidFill>
-                  <a:srgbClr val="1F3A5F"/>
-                </a:solidFill>
-                <a:latin typeface="Calibri"/>
-              </a:rPr>
-              <a:t>Where we are</a:t>
-            </a:r>
-          </a:p>
-        </p:txBody>
-      </p:sp>
-      <p:sp>
-        <p:nvSpPr>
-          <p:cNvPr id="3" name="Rectangle 2"/>
+              <a:defRPr sz="1000" b="0">
+                <a:solidFill>
+                  <a:srgbClr val="666666"/>
+                </a:solidFill>
+                <a:latin typeface="Calibri"/>
+              </a:defRPr>
+            </a:pPr>
+            <a:r>
+              <a:rPr sz="1000" b="0">
+                <a:solidFill>
+                  <a:srgbClr val="666666"/>
+                </a:solidFill>
+                <a:latin typeface="Calibri"/>
+              </a:rPr>
+              <a:t>Pathfinder Advanced - Op Program 12  |  Lesson 4</a:t>
+            </a:r>
+          </a:p>
+        </p:txBody>
+      </p:sp>
+      <p:sp>
+        <p:nvSpPr>
+          <p:cNvPr id="3" name="TextBox 2"/>
+          <p:cNvSpPr txBox="1"/>
+          <p:nvPr/>
+        </p:nvSpPr>
+        <p:spPr>
+          <a:xfrm>
+            <a:off x="11231575" y="6382512"/>
+            <a:ext cx="457200" cy="274320"/>
+          </a:xfrm>
+          <a:prstGeom prst="rect">
+            <a:avLst/>
+          </a:prstGeom>
+          <a:noFill/>
+        </p:spPr>
+        <p:txBody>
+          <a:bodyPr wrap="square" lIns="0" tIns="0">
+            <a:spAutoFit/>
+          </a:bodyPr>
+          <a:lstStyle/>
+          <a:p>
+            <a:pPr algn="r">
+              <a:lnSpc>
+                <a:spcPct val="100000"/>
+              </a:lnSpc>
+              <a:spcAft>
+                <a:spcPts val="0"/>
+              </a:spcAft>
+              <a:defRPr sz="1000" b="0">
+                <a:solidFill>
+                  <a:srgbClr val="666666"/>
+                </a:solidFill>
+                <a:latin typeface="Calibri"/>
+              </a:defRPr>
+            </a:pPr>
+            <a:r>
+              <a:rPr sz="1000" b="0">
+                <a:solidFill>
+                  <a:srgbClr val="666666"/>
+                </a:solidFill>
+                <a:latin typeface="Calibri"/>
+              </a:rPr>
+              <a:t>7</a:t>
+            </a:r>
+          </a:p>
+        </p:txBody>
+      </p:sp>
+      <p:sp>
+        <p:nvSpPr>
+          <p:cNvPr id="4" name="Rectangle 3"/>
           <p:cNvSpPr/>
           <p:nvPr/>
         </p:nvSpPr>
         <p:spPr>
           <a:xfrm>
-            <a:off x="502920" y="1097280"/>
-            <a:ext cx="11185855" cy="19050"/>
+            <a:off x="0" y="1234440"/>
+            <a:ext cx="256032" cy="1554480"/>
           </a:xfrm>
           <a:prstGeom prst="rect">
             <a:avLst/>
           </a:prstGeom>
           <a:solidFill>
-            <a:srgbClr val="C8D2DE"/>
+            <a:srgbClr val="0E7C86"/>
           </a:solidFill>
           <a:ln>
             <a:noFill/>
@@ -16612,14 +16712,14 @@
       </p:sp>
       <p:sp>
         <p:nvSpPr>
-          <p:cNvPr id="4" name="TextBox 3"/>
+          <p:cNvPr id="5" name="TextBox 4"/>
           <p:cNvSpPr txBox="1"/>
           <p:nvPr/>
         </p:nvSpPr>
         <p:spPr>
           <a:xfrm>
-            <a:off x="502920" y="6382512"/>
-            <a:ext cx="10545775" cy="274320"/>
+            <a:off x="777240" y="1325880"/>
+            <a:ext cx="10515600" cy="1051560"/>
           </a:xfrm>
           <a:prstGeom prst="rect">
             <a:avLst/>
@@ -16627,7 +16727,7 @@
           <a:noFill/>
         </p:spPr>
         <p:txBody>
-          <a:bodyPr wrap="square" lIns="0" tIns="0">
+          <a:bodyPr wrap="square" lIns="0" tIns="0" rIns="0" bIns="0">
             <a:spAutoFit/>
           </a:bodyPr>
           <a:lstStyle/>
@@ -16639,35 +16739,35 @@
               <a:spcAft>
                 <a:spcPts val="0"/>
               </a:spcAft>
-              <a:defRPr sz="1000" b="0">
-                <a:solidFill>
-                  <a:srgbClr val="666666"/>
-                </a:solidFill>
-                <a:latin typeface="Calibri"/>
-              </a:defRPr>
-            </a:pPr>
-            <a:r>
-              <a:rPr sz="1000" b="0">
-                <a:solidFill>
-                  <a:srgbClr val="666666"/>
-                </a:solidFill>
-                <a:latin typeface="Calibri"/>
-              </a:rPr>
-              <a:t>Pathfinder Advanced - Op Program 12  |  Lesson 4</a:t>
-            </a:r>
-          </a:p>
-        </p:txBody>
-      </p:sp>
-      <p:sp>
-        <p:nvSpPr>
-          <p:cNvPr id="5" name="TextBox 4"/>
+              <a:defRPr sz="3600" b="1">
+                <a:solidFill>
+                  <a:srgbClr val="1F3A5F"/>
+                </a:solidFill>
+                <a:latin typeface="Calibri"/>
+              </a:defRPr>
+            </a:pPr>
+            <a:r>
+              <a:rPr sz="3600" b="1">
+                <a:solidFill>
+                  <a:srgbClr val="1F3A5F"/>
+                </a:solidFill>
+                <a:latin typeface="Calibri"/>
+              </a:rPr>
+              <a:t>Measuring a redraw</a:t>
+            </a:r>
+          </a:p>
+        </p:txBody>
+      </p:sp>
+      <p:sp>
+        <p:nvSpPr>
+          <p:cNvPr id="6" name="TextBox 5"/>
           <p:cNvSpPr txBox="1"/>
           <p:nvPr/>
         </p:nvSpPr>
         <p:spPr>
           <a:xfrm>
-            <a:off x="11231575" y="6382512"/>
-            <a:ext cx="457200" cy="274320"/>
+            <a:off x="777240" y="2423160"/>
+            <a:ext cx="10515600" cy="685800"/>
           </a:xfrm>
           <a:prstGeom prst="rect">
             <a:avLst/>
@@ -16675,19 +16775,19 @@
           <a:noFill/>
         </p:spPr>
         <p:txBody>
-          <a:bodyPr wrap="square" lIns="0" tIns="0">
+          <a:bodyPr wrap="square" lIns="0" tIns="0" rIns="0" bIns="0">
             <a:spAutoFit/>
           </a:bodyPr>
           <a:lstStyle/>
           <a:p>
-            <a:pPr algn="r">
-              <a:lnSpc>
-                <a:spcPct val="100000"/>
-              </a:lnSpc>
-              <a:spcAft>
-                <a:spcPts val="0"/>
-              </a:spcAft>
-              <a:defRPr sz="1000" b="0">
+            <a:pPr algn="l">
+              <a:lnSpc>
+                <a:spcPct val="100000"/>
+              </a:lnSpc>
+              <a:spcAft>
+                <a:spcPts val="400"/>
+              </a:spcAft>
+              <a:defRPr sz="1600" b="0">
                 <a:solidFill>
                   <a:srgbClr val="666666"/>
                 </a:solidFill>
@@ -16695,27 +16795,27 @@
               </a:defRPr>
             </a:pPr>
             <a:r>
-              <a:rPr sz="1000" b="0">
+              <a:rPr sz="1600" b="0">
                 <a:solidFill>
                   <a:srgbClr val="666666"/>
                 </a:solidFill>
                 <a:latin typeface="Calibri"/>
               </a:rPr>
-              <a:t>7</a:t>
-            </a:r>
-          </a:p>
-        </p:txBody>
-      </p:sp>
-      <p:sp>
-        <p:nvSpPr>
-          <p:cNvPr id="6" name="Rounded Rectangle 5"/>
+              <a:t>About 35 minutes</a:t>
+            </a:r>
+          </a:p>
+        </p:txBody>
+      </p:sp>
+      <p:sp>
+        <p:nvSpPr>
+          <p:cNvPr id="7" name="Rounded Rectangle 6"/>
           <p:cNvSpPr/>
           <p:nvPr/>
         </p:nvSpPr>
         <p:spPr>
           <a:xfrm>
-            <a:off x="502920" y="2240280"/>
-            <a:ext cx="3631082" cy="1737360"/>
+            <a:off x="502920" y="3886200"/>
+            <a:ext cx="3631082" cy="1325880"/>
           </a:xfrm>
           <a:prstGeom prst="roundRect">
             <a:avLst>
@@ -16778,14 +16878,14 @@
       </p:sp>
       <p:sp>
         <p:nvSpPr>
-          <p:cNvPr id="7" name="TextBox 6"/>
+          <p:cNvPr id="8" name="TextBox 7"/>
           <p:cNvSpPr txBox="1"/>
           <p:nvPr/>
         </p:nvSpPr>
         <p:spPr>
           <a:xfrm>
-            <a:off x="502920" y="1856232"/>
-            <a:ext cx="3631082" cy="347472"/>
+            <a:off x="502920" y="3520440"/>
+            <a:ext cx="3631082" cy="310896"/>
           </a:xfrm>
           <a:prstGeom prst="rect">
             <a:avLst/>
@@ -16803,9 +16903,9 @@
                 <a:spcPct val="100000"/>
               </a:lnSpc>
               <a:spcAft>
-                <a:spcPts val="600"/>
-              </a:spcAft>
-              <a:defRPr sz="1200" b="1">
+                <a:spcPts val="200"/>
+              </a:spcAft>
+              <a:defRPr sz="1100" b="1">
                 <a:solidFill>
                   <a:srgbClr val="0E7C86"/>
                 </a:solidFill>
@@ -16813,7 +16913,7 @@
               </a:defRPr>
             </a:pPr>
             <a:r>
-              <a:rPr sz="1200" b="1">
+              <a:rPr sz="1100" b="1">
                 <a:solidFill>
                   <a:srgbClr val="0E7C86"/>
                 </a:solidFill>
@@ -16826,14 +16926,14 @@
       </p:sp>
       <p:sp>
         <p:nvSpPr>
-          <p:cNvPr id="8" name="Rounded Rectangle 7"/>
+          <p:cNvPr id="9" name="Rounded Rectangle 8"/>
           <p:cNvSpPr/>
           <p:nvPr/>
         </p:nvSpPr>
         <p:spPr>
           <a:xfrm>
-            <a:off x="4280306" y="2240280"/>
-            <a:ext cx="3631082" cy="1737360"/>
+            <a:off x="4280306" y="3886200"/>
+            <a:ext cx="3631082" cy="1325880"/>
           </a:xfrm>
           <a:prstGeom prst="roundRect">
             <a:avLst>
@@ -16896,14 +16996,14 @@
       </p:sp>
       <p:sp>
         <p:nvSpPr>
-          <p:cNvPr id="9" name="TextBox 8"/>
+          <p:cNvPr id="10" name="TextBox 9"/>
           <p:cNvSpPr txBox="1"/>
           <p:nvPr/>
         </p:nvSpPr>
         <p:spPr>
           <a:xfrm>
-            <a:off x="4280306" y="1856232"/>
-            <a:ext cx="3631082" cy="347472"/>
+            <a:off x="4280306" y="3520440"/>
+            <a:ext cx="3631082" cy="310896"/>
           </a:xfrm>
           <a:prstGeom prst="rect">
             <a:avLst/>
@@ -16921,9 +17021,9 @@
                 <a:spcPct val="100000"/>
               </a:lnSpc>
               <a:spcAft>
-                <a:spcPts val="600"/>
-              </a:spcAft>
-              <a:defRPr sz="1200" b="1">
+                <a:spcPts val="200"/>
+              </a:spcAft>
+              <a:defRPr sz="1100" b="1">
                 <a:solidFill>
                   <a:srgbClr val="0E7C86"/>
                 </a:solidFill>
@@ -16931,7 +17031,7 @@
               </a:defRPr>
             </a:pPr>
             <a:r>
-              <a:rPr sz="1200" b="1">
+              <a:rPr sz="1100" b="1">
                 <a:solidFill>
                   <a:srgbClr val="0E7C86"/>
                 </a:solidFill>
@@ -16944,14 +17044,14 @@
       </p:sp>
       <p:sp>
         <p:nvSpPr>
-          <p:cNvPr id="10" name="Rounded Rectangle 9"/>
+          <p:cNvPr id="11" name="Rounded Rectangle 10"/>
           <p:cNvSpPr/>
           <p:nvPr/>
         </p:nvSpPr>
         <p:spPr>
           <a:xfrm>
-            <a:off x="8057692" y="2240280"/>
-            <a:ext cx="3631082" cy="1737360"/>
+            <a:off x="8057692" y="3886200"/>
+            <a:ext cx="3631082" cy="1325880"/>
           </a:xfrm>
           <a:prstGeom prst="roundRect">
             <a:avLst>

--- a/ground-vehicle/docs/courses/advanced/l4_lighting_state_machine.pptx
+++ b/ground-vehicle/docs/courses/advanced/l4_lighting_state_machine.pptx
@@ -701,31 +701,7 @@
               <a:rPr sz="1200">
                 <a:latin typeface="Calibri"/>
               </a:rPr>
-              <a:t>This is the hardest slide in the lesson. Have a real vehicle out and point at LEDs while you talk.</a:t>
-            </a:r>
-          </a:p>
-          <a:p>
-            <a:r>
-              <a:rPr sz="1200">
-                <a:latin typeface="Calibri"/>
-              </a:rPr>
-              <a:t>The strip is ONE loop, so the two halves of each side run in opposite directions. That is the whole reason the arithmetic is asymmetric.</a:t>
-            </a:r>
-          </a:p>
-          <a:p>
-            <a:r>
-              <a:rPr sz="1200">
-                <a:latin typeface="Calibri"/>
-              </a:rPr>
-              <a:t>The bar grows outward from the center toward the turning corner, on both bars at once. Trace it with a finger before showing the indices.</a:t>
-            </a:r>
-          </a:p>
-          <a:p>
-            <a:r>
-              <a:rPr sz="1200">
-                <a:latin typeface="Calibri"/>
-              </a:rPr>
-              <a:t>Take the advice on the slide seriously: do not derive it. Step through it and read the numbers off a real vehicle. They do exactly that in the activity.</a:t>
+              <a:t>Twenty seconds. Second activity.</a:t>
             </a:r>
           </a:p>
         </p:txBody>
@@ -798,7 +774,7 @@
               <a:rPr sz="1200">
                 <a:latin typeface="Calibri"/>
               </a:rPr>
-              <a:t>Two details, both of which look like paranoia until you skip them.</a:t>
+              <a:t>This is the hardest slide in the lesson. Have a real vehicle out and point at LEDs while you talk.</a:t>
             </a:r>
           </a:p>
           <a:p>
@@ -806,7 +782,7 @@
               <a:rPr sz="1200">
                 <a:latin typeface="Calibri"/>
               </a:rPr>
-              <a:t>Repainting the base first means the previous frame is not left underneath. Ask what a signal painted over a stale frame would look like.</a:t>
+              <a:t>The strip is ONE loop, so the two halves of each side run in opposite directions. That is the whole reason the arithmetic is asymmetric.</a:t>
             </a:r>
           </a:p>
           <a:p>
@@ -814,7 +790,7 @@
               <a:rPr sz="1200">
                 <a:latin typeface="Calibri"/>
               </a:rPr>
-              <a:t>The D-pad only STARTS the animation. It does not hold it on and it does not stop it.</a:t>
+              <a:t>The bar grows outward from the center toward the turning corner, on both bars at once. Trace it with a finger before showing the indices.</a:t>
             </a:r>
           </a:p>
           <a:p>
@@ -822,7 +798,7 @@
               <a:rPr sz="1200">
                 <a:latin typeface="Calibri"/>
               </a:rPr>
-              <a:t>That matches a real indicator, which finishes its blink after you let go of the stalk. Small detail, and it is what makes it feel right.</a:t>
+              <a:t>Take the advice on the slide seriously: do not derive it. Step through it and read the numbers off a real vehicle. They do exactly that in the activity.</a:t>
             </a:r>
           </a:p>
         </p:txBody>
@@ -895,7 +871,31 @@
               <a:rPr sz="1200">
                 <a:latin typeface="Calibri"/>
               </a:rPr>
-              <a:t>Twenty seconds. Second activity.</a:t>
+              <a:t>Two details, both of which look like paranoia until you skip them.</a:t>
+            </a:r>
+          </a:p>
+          <a:p>
+            <a:r>
+              <a:rPr sz="1200">
+                <a:latin typeface="Calibri"/>
+              </a:rPr>
+              <a:t>Repainting the base first means the previous frame is not left underneath. Ask what a signal painted over a stale frame would look like.</a:t>
+            </a:r>
+          </a:p>
+          <a:p>
+            <a:r>
+              <a:rPr sz="1200">
+                <a:latin typeface="Calibri"/>
+              </a:rPr>
+              <a:t>The D-pad only STARTS the animation. It does not hold it on and it does not stop it.</a:t>
+            </a:r>
+          </a:p>
+          <a:p>
+            <a:r>
+              <a:rPr sz="1200">
+                <a:latin typeface="Calibri"/>
+              </a:rPr>
+              <a:t>That matches a real indicator, which finishes its blink after you let go of the stalk. Small detail, and it is what makes it feel right.</a:t>
             </a:r>
           </a:p>
         </p:txBody>
@@ -6413,22 +6413,24 @@
       <p:grpSpPr/>
       <p:sp>
         <p:nvSpPr>
-          <p:cNvPr id="2" name="Title 1"/>
-          <p:cNvSpPr>
-            <a:spLocks noGrp="1"/>
-          </p:cNvSpPr>
-          <p:nvPr>
-            <p:ph type="title"/>
-          </p:nvPr>
-        </p:nvSpPr>
-        <p:spPr>
-          <a:xfrm>
-            <a:off x="502920" y="274320"/>
-            <a:ext cx="11185855" cy="777240"/>
-          </a:xfrm>
-        </p:spPr>
-        <p:txBody>
-          <a:bodyPr wrap="square" anchor="b"/>
+          <p:cNvPr id="2" name="TextBox 1"/>
+          <p:cNvSpPr txBox="1"/>
+          <p:nvPr/>
+        </p:nvSpPr>
+        <p:spPr>
+          <a:xfrm>
+            <a:off x="502920" y="6382512"/>
+            <a:ext cx="10545775" cy="274320"/>
+          </a:xfrm>
+          <a:prstGeom prst="rect">
+            <a:avLst/>
+          </a:prstGeom>
+          <a:noFill/>
+        </p:spPr>
+        <p:txBody>
+          <a:bodyPr wrap="square" lIns="0" tIns="0">
+            <a:spAutoFit/>
+          </a:bodyPr>
           <a:lstStyle/>
           <a:p>
             <a:pPr algn="l">
@@ -6438,41 +6440,89 @@
               <a:spcAft>
                 <a:spcPts val="0"/>
               </a:spcAft>
-              <a:defRPr sz="2800" b="1">
-                <a:solidFill>
-                  <a:srgbClr val="1F3A5F"/>
-                </a:solidFill>
-                <a:latin typeface="Calibri"/>
-              </a:defRPr>
-            </a:pPr>
-            <a:r>
-              <a:rPr sz="2800" b="1">
-                <a:solidFill>
-                  <a:srgbClr val="1F3A5F"/>
-                </a:solidFill>
-                <a:latin typeface="Calibri"/>
-              </a:rPr>
-              <a:t>Turn signal geometry, which is the genuinely hard part</a:t>
-            </a:r>
-          </a:p>
-        </p:txBody>
-      </p:sp>
-      <p:sp>
-        <p:nvSpPr>
-          <p:cNvPr id="3" name="Rectangle 2"/>
+              <a:defRPr sz="1000" b="0">
+                <a:solidFill>
+                  <a:srgbClr val="666666"/>
+                </a:solidFill>
+                <a:latin typeface="Calibri"/>
+              </a:defRPr>
+            </a:pPr>
+            <a:r>
+              <a:rPr sz="1000" b="0">
+                <a:solidFill>
+                  <a:srgbClr val="666666"/>
+                </a:solidFill>
+                <a:latin typeface="Calibri"/>
+              </a:rPr>
+              <a:t>Pathfinder Advanced - Op Program 12  |  Lesson 4</a:t>
+            </a:r>
+          </a:p>
+        </p:txBody>
+      </p:sp>
+      <p:sp>
+        <p:nvSpPr>
+          <p:cNvPr id="3" name="TextBox 2"/>
+          <p:cNvSpPr txBox="1"/>
+          <p:nvPr/>
+        </p:nvSpPr>
+        <p:spPr>
+          <a:xfrm>
+            <a:off x="11231575" y="6382512"/>
+            <a:ext cx="457200" cy="274320"/>
+          </a:xfrm>
+          <a:prstGeom prst="rect">
+            <a:avLst/>
+          </a:prstGeom>
+          <a:noFill/>
+        </p:spPr>
+        <p:txBody>
+          <a:bodyPr wrap="square" lIns="0" tIns="0">
+            <a:spAutoFit/>
+          </a:bodyPr>
+          <a:lstStyle/>
+          <a:p>
+            <a:pPr algn="r">
+              <a:lnSpc>
+                <a:spcPct val="100000"/>
+              </a:lnSpc>
+              <a:spcAft>
+                <a:spcPts val="0"/>
+              </a:spcAft>
+              <a:defRPr sz="1000" b="0">
+                <a:solidFill>
+                  <a:srgbClr val="666666"/>
+                </a:solidFill>
+                <a:latin typeface="Calibri"/>
+              </a:defRPr>
+            </a:pPr>
+            <a:r>
+              <a:rPr sz="1000" b="0">
+                <a:solidFill>
+                  <a:srgbClr val="666666"/>
+                </a:solidFill>
+                <a:latin typeface="Calibri"/>
+              </a:rPr>
+              <a:t>10</a:t>
+            </a:r>
+          </a:p>
+        </p:txBody>
+      </p:sp>
+      <p:sp>
+        <p:nvSpPr>
+          <p:cNvPr id="4" name="Rectangle 3"/>
           <p:cNvSpPr/>
           <p:nvPr/>
         </p:nvSpPr>
         <p:spPr>
           <a:xfrm>
-            <a:off x="502920" y="1097280"/>
-            <a:ext cx="11185855" cy="19050"/>
+            <a:off x="0" y="1234440"/>
+            <a:ext cx="256032" cy="1554480"/>
           </a:xfrm>
           <a:prstGeom prst="rect">
             <a:avLst/>
           </a:prstGeom>
           <a:solidFill>
-            <a:srgbClr val="C8D2DE"/>
+            <a:srgbClr val="0E7C86"/>
           </a:solidFill>
           <a:ln>
             <a:noFill/>
@@ -6503,14 +6553,14 @@
       </p:sp>
       <p:sp>
         <p:nvSpPr>
-          <p:cNvPr id="4" name="TextBox 3"/>
+          <p:cNvPr id="5" name="TextBox 4"/>
           <p:cNvSpPr txBox="1"/>
           <p:nvPr/>
         </p:nvSpPr>
         <p:spPr>
           <a:xfrm>
-            <a:off x="502920" y="6382512"/>
-            <a:ext cx="10545775" cy="274320"/>
+            <a:off x="777240" y="1325880"/>
+            <a:ext cx="10515600" cy="1051560"/>
           </a:xfrm>
           <a:prstGeom prst="rect">
             <a:avLst/>
@@ -6518,7 +6568,7 @@
           <a:noFill/>
         </p:spPr>
         <p:txBody>
-          <a:bodyPr wrap="square" lIns="0" tIns="0">
+          <a:bodyPr wrap="square" lIns="0" tIns="0" rIns="0" bIns="0">
             <a:spAutoFit/>
           </a:bodyPr>
           <a:lstStyle/>
@@ -6530,35 +6580,35 @@
               <a:spcAft>
                 <a:spcPts val="0"/>
               </a:spcAft>
-              <a:defRPr sz="1000" b="0">
-                <a:solidFill>
-                  <a:srgbClr val="666666"/>
-                </a:solidFill>
-                <a:latin typeface="Calibri"/>
-              </a:defRPr>
-            </a:pPr>
-            <a:r>
-              <a:rPr sz="1000" b="0">
-                <a:solidFill>
-                  <a:srgbClr val="666666"/>
-                </a:solidFill>
-                <a:latin typeface="Calibri"/>
-              </a:rPr>
-              <a:t>Pathfinder Advanced - Op Program 12  |  Lesson 4</a:t>
-            </a:r>
-          </a:p>
-        </p:txBody>
-      </p:sp>
-      <p:sp>
-        <p:nvSpPr>
-          <p:cNvPr id="5" name="TextBox 4"/>
+              <a:defRPr sz="3600" b="1">
+                <a:solidFill>
+                  <a:srgbClr val="1F3A5F"/>
+                </a:solidFill>
+                <a:latin typeface="Calibri"/>
+              </a:defRPr>
+            </a:pPr>
+            <a:r>
+              <a:rPr sz="3600" b="1">
+                <a:solidFill>
+                  <a:srgbClr val="1F3A5F"/>
+                </a:solidFill>
+                <a:latin typeface="Calibri"/>
+              </a:rPr>
+              <a:t>Turn signal geometry</a:t>
+            </a:r>
+          </a:p>
+        </p:txBody>
+      </p:sp>
+      <p:sp>
+        <p:nvSpPr>
+          <p:cNvPr id="6" name="TextBox 5"/>
           <p:cNvSpPr txBox="1"/>
           <p:nvPr/>
         </p:nvSpPr>
         <p:spPr>
           <a:xfrm>
-            <a:off x="11231575" y="6382512"/>
-            <a:ext cx="457200" cy="274320"/>
+            <a:off x="777240" y="2423160"/>
+            <a:ext cx="10515600" cy="685800"/>
           </a:xfrm>
           <a:prstGeom prst="rect">
             <a:avLst/>
@@ -6566,47 +6616,117 @@
           <a:noFill/>
         </p:spPr>
         <p:txBody>
-          <a:bodyPr wrap="square" lIns="0" tIns="0">
+          <a:bodyPr wrap="square" lIns="0" tIns="0" rIns="0" bIns="0">
             <a:spAutoFit/>
           </a:bodyPr>
           <a:lstStyle/>
           <a:p>
-            <a:pPr algn="r">
+            <a:pPr algn="l">
+              <a:lnSpc>
+                <a:spcPct val="100000"/>
+              </a:lnSpc>
+              <a:spcAft>
+                <a:spcPts val="400"/>
+              </a:spcAft>
+              <a:defRPr sz="1600" b="0">
+                <a:solidFill>
+                  <a:srgbClr val="666666"/>
+                </a:solidFill>
+                <a:latin typeface="Calibri"/>
+              </a:defRPr>
+            </a:pPr>
+            <a:r>
+              <a:rPr sz="1600" b="0">
+                <a:solidFill>
+                  <a:srgbClr val="666666"/>
+                </a:solidFill>
+                <a:latin typeface="Calibri"/>
+              </a:rPr>
+              <a:t>About 40 minutes</a:t>
+            </a:r>
+          </a:p>
+        </p:txBody>
+      </p:sp>
+      <p:sp>
+        <p:nvSpPr>
+          <p:cNvPr id="7" name="Rounded Rectangle 6"/>
+          <p:cNvSpPr/>
+          <p:nvPr/>
+        </p:nvSpPr>
+        <p:spPr>
+          <a:xfrm>
+            <a:off x="502920" y="3886200"/>
+            <a:ext cx="3631082" cy="1325880"/>
+          </a:xfrm>
+          <a:prstGeom prst="roundRect">
+            <a:avLst>
+              <a:gd name="adj" fmla="val 8000"/>
+            </a:avLst>
+          </a:prstGeom>
+          <a:solidFill>
+            <a:srgbClr val="EEF3F8"/>
+          </a:solidFill>
+          <a:ln w="12700">
+            <a:solidFill>
+              <a:srgbClr val="0E7C86"/>
+            </a:solidFill>
+          </a:ln>
+          <a:effectLst/>
+        </p:spPr>
+        <p:style>
+          <a:lnRef idx="1">
+            <a:schemeClr val="accent1"/>
+          </a:lnRef>
+          <a:fillRef idx="3">
+            <a:schemeClr val="accent1"/>
+          </a:fillRef>
+          <a:effectRef idx="2">
+            <a:schemeClr val="accent1"/>
+          </a:effectRef>
+          <a:fontRef idx="minor">
+            <a:schemeClr val="lt1"/>
+          </a:fontRef>
+        </p:style>
+        <p:txBody>
+          <a:bodyPr rtlCol="0" anchor="ctr" wrap="square" lIns="73152" rIns="73152"/>
+          <a:lstStyle/>
+          <a:p>
+            <a:pPr algn="ctr">
               <a:lnSpc>
                 <a:spcPct val="100000"/>
               </a:lnSpc>
               <a:spcAft>
                 <a:spcPts val="0"/>
               </a:spcAft>
-              <a:defRPr sz="1000" b="0">
-                <a:solidFill>
-                  <a:srgbClr val="666666"/>
-                </a:solidFill>
-                <a:latin typeface="Calibri"/>
-              </a:defRPr>
-            </a:pPr>
-            <a:r>
-              <a:rPr sz="1000" b="0">
-                <a:solidFill>
-                  <a:srgbClr val="666666"/>
-                </a:solidFill>
-                <a:latin typeface="Calibri"/>
-              </a:rPr>
-              <a:t>10</a:t>
-            </a:r>
-          </a:p>
-        </p:txBody>
-      </p:sp>
-      <p:sp>
-        <p:nvSpPr>
-          <p:cNvPr id="6" name="TextBox 5"/>
+              <a:defRPr sz="1700" b="0">
+                <a:solidFill>
+                  <a:srgbClr val="1F3A5F"/>
+                </a:solidFill>
+                <a:latin typeface="Calibri"/>
+              </a:defRPr>
+            </a:pPr>
+            <a:r>
+              <a:rPr sz="1700" b="0">
+                <a:solidFill>
+                  <a:srgbClr val="1F3A5F"/>
+                </a:solidFill>
+                <a:latin typeface="Calibri"/>
+              </a:rPr>
+              <a:t>State machines</a:t>
+            </a:r>
+          </a:p>
+        </p:txBody>
+      </p:sp>
+      <p:sp>
+        <p:nvSpPr>
+          <p:cNvPr id="8" name="TextBox 7"/>
           <p:cNvSpPr txBox="1"/>
           <p:nvPr/>
         </p:nvSpPr>
         <p:spPr>
           <a:xfrm>
-            <a:off x="502920" y="1188720"/>
-            <a:ext cx="11185855" cy="530352"/>
+            <a:off x="502920" y="3520440"/>
+            <a:ext cx="3631082" cy="310896"/>
           </a:xfrm>
           <a:prstGeom prst="rect">
             <a:avLst/>
@@ -6619,14 +6739,14 @@
           </a:bodyPr>
           <a:lstStyle/>
           <a:p>
-            <a:pPr algn="l">
-              <a:lnSpc>
-                <a:spcPct val="100000"/>
-              </a:lnSpc>
-              <a:spcAft>
-                <a:spcPts val="600"/>
-              </a:spcAft>
-              <a:defRPr sz="1900" b="1">
+            <a:pPr algn="ctr">
+              <a:lnSpc>
+                <a:spcPct val="100000"/>
+              </a:lnSpc>
+              <a:spcAft>
+                <a:spcPts val="200"/>
+              </a:spcAft>
+              <a:defRPr sz="1100" b="1">
                 <a:solidFill>
                   <a:srgbClr val="0E7C86"/>
                 </a:solidFill>
@@ -6634,27 +6754,97 @@
               </a:defRPr>
             </a:pPr>
             <a:r>
-              <a:rPr sz="1900" b="1">
+              <a:rPr sz="1100" b="1">
                 <a:solidFill>
                   <a:srgbClr val="0E7C86"/>
                 </a:solidFill>
                 <a:latin typeface="Calibri"/>
               </a:rPr>
-              <a:t>Two bars, four directions, one loop of wire</a:t>
-            </a:r>
-          </a:p>
-        </p:txBody>
-      </p:sp>
-      <p:sp>
-        <p:nvSpPr>
-          <p:cNvPr id="7" name="TextBox 6"/>
+              <a:t>done</a:t>
+            </a:r>
+          </a:p>
+        </p:txBody>
+      </p:sp>
+      <p:sp>
+        <p:nvSpPr>
+          <p:cNvPr id="9" name="Rounded Rectangle 8"/>
+          <p:cNvSpPr/>
+          <p:nvPr/>
+        </p:nvSpPr>
+        <p:spPr>
+          <a:xfrm>
+            <a:off x="4280306" y="3886200"/>
+            <a:ext cx="3631082" cy="1325880"/>
+          </a:xfrm>
+          <a:prstGeom prst="roundRect">
+            <a:avLst>
+              <a:gd name="adj" fmla="val 8000"/>
+            </a:avLst>
+          </a:prstGeom>
+          <a:solidFill>
+            <a:srgbClr val="EEF3F8"/>
+          </a:solidFill>
+          <a:ln w="12700">
+            <a:solidFill>
+              <a:srgbClr val="0E7C86"/>
+            </a:solidFill>
+          </a:ln>
+          <a:effectLst/>
+        </p:spPr>
+        <p:style>
+          <a:lnRef idx="1">
+            <a:schemeClr val="accent1"/>
+          </a:lnRef>
+          <a:fillRef idx="3">
+            <a:schemeClr val="accent1"/>
+          </a:fillRef>
+          <a:effectRef idx="2">
+            <a:schemeClr val="accent1"/>
+          </a:effectRef>
+          <a:fontRef idx="minor">
+            <a:schemeClr val="lt1"/>
+          </a:fontRef>
+        </p:style>
+        <p:txBody>
+          <a:bodyPr rtlCol="0" anchor="ctr" wrap="square" lIns="73152" rIns="73152"/>
+          <a:lstStyle/>
+          <a:p>
+            <a:pPr algn="ctr">
+              <a:lnSpc>
+                <a:spcPct val="100000"/>
+              </a:lnSpc>
+              <a:spcAft>
+                <a:spcPts val="0"/>
+              </a:spcAft>
+              <a:defRPr sz="1700" b="0">
+                <a:solidFill>
+                  <a:srgbClr val="1F3A5F"/>
+                </a:solidFill>
+                <a:latin typeface="Calibri"/>
+              </a:defRPr>
+            </a:pPr>
+            <a:r>
+              <a:rPr sz="1700" b="0">
+                <a:solidFill>
+                  <a:srgbClr val="1F3A5F"/>
+                </a:solidFill>
+                <a:latin typeface="Calibri"/>
+              </a:rPr>
+              <a:t>Measuring a redraw</a:t>
+            </a:r>
+          </a:p>
+        </p:txBody>
+      </p:sp>
+      <p:sp>
+        <p:nvSpPr>
+          <p:cNvPr id="10" name="TextBox 9"/>
           <p:cNvSpPr txBox="1"/>
           <p:nvPr/>
         </p:nvSpPr>
         <p:spPr>
           <a:xfrm>
-            <a:off x="502920" y="1755648"/>
-            <a:ext cx="5364327" cy="4507992"/>
+            <a:off x="4280306" y="3520440"/>
+            <a:ext cx="3631082" cy="310896"/>
           </a:xfrm>
           <a:prstGeom prst="rect">
             <a:avLst/>
@@ -6667,133 +6857,112 @@
           </a:bodyPr>
           <a:lstStyle/>
           <a:p>
-            <a:pPr algn="l">
-              <a:lnSpc>
-                <a:spcPct val="100000"/>
-              </a:lnSpc>
-              <a:spcAft>
-                <a:spcPts val="900"/>
-              </a:spcAft>
-              <a:defRPr sz="1800" b="0">
-                <a:solidFill>
-                  <a:srgbClr val="222222"/>
-                </a:solidFill>
-                <a:latin typeface="Calibri"/>
-              </a:defRPr>
-            </a:pPr>
-            <a:r>
-              <a:rPr sz="1800" b="0">
-                <a:solidFill>
-                  <a:srgbClr val="222222"/>
-                </a:solidFill>
-                <a:latin typeface="Calibri"/>
-              </a:rPr>
-              <a:t>The strip is one loop, so the two halves of each side run in OPPOSITE directions and the arithmetic is not symmetric:</a:t>
-            </a:r>
-          </a:p>
-          <a:p>
-            <a:pPr lvl="1" algn="l">
-              <a:lnSpc>
-                <a:spcPct val="100000"/>
-              </a:lnSpc>
-              <a:spcAft>
-                <a:spcPts val="900"/>
-              </a:spcAft>
-              <a:defRPr sz="1800" b="0">
-                <a:solidFill>
-                  <a:srgbClr val="222222"/>
-                </a:solidFill>
-                <a:latin typeface="Calibri"/>
-              </a:defRPr>
-            </a:pPr>
-            <a:r>
-              <a:rPr sz="1800" b="0">
-                <a:solidFill>
-                  <a:srgbClr val="222222"/>
-                </a:solidFill>
-                <a:latin typeface="Calibri"/>
-              </a:rPr>
-              <a:t>front, left to right :   0 .. 15    left half 0-7,  right half 8-15</a:t>
-            </a:r>
-          </a:p>
-          <a:p>
-            <a:pPr lvl="1" algn="l">
-              <a:lnSpc>
-                <a:spcPct val="100000"/>
-              </a:lnSpc>
-              <a:spcAft>
-                <a:spcPts val="900"/>
-              </a:spcAft>
-              <a:defRPr sz="1800" b="0">
-                <a:solidFill>
-                  <a:srgbClr val="222222"/>
-                </a:solidFill>
-                <a:latin typeface="Calibri"/>
-              </a:defRPr>
-            </a:pPr>
-            <a:r>
-              <a:rPr sz="1800" b="0">
-                <a:solidFill>
-                  <a:srgbClr val="222222"/>
-                </a:solidFill>
-                <a:latin typeface="Calibri"/>
-              </a:rPr>
-              <a:t>rear,  right to left :  16 .. 31    right half 16-23, left half 24-31</a:t>
-            </a:r>
-          </a:p>
-          <a:p>
-            <a:pPr algn="l">
-              <a:lnSpc>
-                <a:spcPct val="100000"/>
-              </a:lnSpc>
-              <a:spcAft>
-                <a:spcPts val="900"/>
-              </a:spcAft>
-              <a:defRPr sz="900" b="0">
-                <a:solidFill>
-                  <a:srgbClr val="222222"/>
-                </a:solidFill>
-                <a:latin typeface="Calibri"/>
-              </a:defRPr>
-            </a:pPr>
-          </a:p>
-          <a:p>
-            <a:pPr algn="l">
-              <a:lnSpc>
-                <a:spcPct val="100000"/>
-              </a:lnSpc>
-              <a:spcAft>
-                <a:spcPts val="900"/>
-              </a:spcAft>
-              <a:defRPr sz="1800" b="0">
-                <a:solidFill>
-                  <a:srgbClr val="222222"/>
-                </a:solidFill>
-                <a:latin typeface="Calibri"/>
-              </a:defRPr>
-            </a:pPr>
-            <a:r>
-              <a:rPr sz="1800" b="0">
-                <a:solidFill>
-                  <a:srgbClr val="222222"/>
-                </a:solidFill>
-                <a:latin typeface="Calibri"/>
-              </a:rPr>
-              <a:t>The bar has to grow OUTWARD from the center of the vehicle toward the corner that is turning, on both bars at once.</a:t>
-            </a:r>
-          </a:p>
-        </p:txBody>
-      </p:sp>
-      <p:sp>
-        <p:nvSpPr>
-          <p:cNvPr id="8" name="TextBox 7"/>
+            <a:pPr algn="ctr">
+              <a:lnSpc>
+                <a:spcPct val="100000"/>
+              </a:lnSpc>
+              <a:spcAft>
+                <a:spcPts val="200"/>
+              </a:spcAft>
+              <a:defRPr sz="1100" b="1">
+                <a:solidFill>
+                  <a:srgbClr val="0E7C86"/>
+                </a:solidFill>
+                <a:latin typeface="Calibri"/>
+              </a:defRPr>
+            </a:pPr>
+            <a:r>
+              <a:rPr sz="1100" b="1">
+                <a:solidFill>
+                  <a:srgbClr val="0E7C86"/>
+                </a:solidFill>
+                <a:latin typeface="Calibri"/>
+              </a:rPr>
+              <a:t>done</a:t>
+            </a:r>
+          </a:p>
+        </p:txBody>
+      </p:sp>
+      <p:sp>
+        <p:nvSpPr>
+          <p:cNvPr id="11" name="Rounded Rectangle 10"/>
+          <p:cNvSpPr/>
+          <p:nvPr/>
+        </p:nvSpPr>
+        <p:spPr>
+          <a:xfrm>
+            <a:off x="8057692" y="3886200"/>
+            <a:ext cx="3631082" cy="1325880"/>
+          </a:xfrm>
+          <a:prstGeom prst="roundRect">
+            <a:avLst>
+              <a:gd name="adj" fmla="val 8000"/>
+            </a:avLst>
+          </a:prstGeom>
+          <a:solidFill>
+            <a:srgbClr val="D6ECEE"/>
+          </a:solidFill>
+          <a:ln w="25400">
+            <a:solidFill>
+              <a:srgbClr val="0E7C86"/>
+            </a:solidFill>
+          </a:ln>
+          <a:effectLst/>
+        </p:spPr>
+        <p:style>
+          <a:lnRef idx="1">
+            <a:schemeClr val="accent1"/>
+          </a:lnRef>
+          <a:fillRef idx="3">
+            <a:schemeClr val="accent1"/>
+          </a:fillRef>
+          <a:effectRef idx="2">
+            <a:schemeClr val="accent1"/>
+          </a:effectRef>
+          <a:fontRef idx="minor">
+            <a:schemeClr val="lt1"/>
+          </a:fontRef>
+        </p:style>
+        <p:txBody>
+          <a:bodyPr rtlCol="0" anchor="ctr" wrap="square" lIns="73152" rIns="73152"/>
+          <a:lstStyle/>
+          <a:p>
+            <a:pPr algn="ctr">
+              <a:lnSpc>
+                <a:spcPct val="100000"/>
+              </a:lnSpc>
+              <a:spcAft>
+                <a:spcPts val="0"/>
+              </a:spcAft>
+              <a:defRPr sz="1700" b="1">
+                <a:solidFill>
+                  <a:srgbClr val="1F3A5F"/>
+                </a:solidFill>
+                <a:latin typeface="Calibri"/>
+              </a:defRPr>
+            </a:pPr>
+            <a:r>
+              <a:rPr sz="1700" b="1">
+                <a:solidFill>
+                  <a:srgbClr val="1F3A5F"/>
+                </a:solidFill>
+                <a:latin typeface="Calibri"/>
+              </a:rPr>
+              <a:t>Turn signal geometry</a:t>
+            </a:r>
+          </a:p>
+        </p:txBody>
+      </p:sp>
+      <p:sp>
+        <p:nvSpPr>
+          <p:cNvPr id="12" name="TextBox 11"/>
           <p:cNvSpPr txBox="1"/>
           <p:nvPr/>
         </p:nvSpPr>
         <p:spPr>
           <a:xfrm>
-            <a:off x="6324447" y="1755648"/>
-            <a:ext cx="5364327" cy="4507992"/>
+            <a:off x="8057692" y="3520440"/>
+            <a:ext cx="3631082" cy="310896"/>
           </a:xfrm>
           <a:prstGeom prst="rect">
             <a:avLst/>
@@ -6806,210 +6975,28 @@
           </a:bodyPr>
           <a:lstStyle/>
           <a:p>
-            <a:pPr algn="l">
-              <a:lnSpc>
-                <a:spcPct val="100000"/>
-              </a:lnSpc>
-              <a:spcAft>
-                <a:spcPts val="500"/>
-              </a:spcAft>
-              <a:defRPr sz="1800" b="0">
-                <a:solidFill>
-                  <a:srgbClr val="222222"/>
-                </a:solidFill>
-                <a:latin typeface="Calibri"/>
-              </a:defRPr>
-            </a:pPr>
-            <a:r>
-              <a:rPr sz="1800" b="0">
-                <a:solidFill>
-                  <a:srgbClr val="222222"/>
-                </a:solidFill>
-                <a:latin typeface="Calibri"/>
-              </a:rPr>
-              <a:t>LEFT signal:</a:t>
-            </a:r>
-          </a:p>
-          <a:p>
-            <a:pPr lvl="1" algn="l">
-              <a:lnSpc>
-                <a:spcPct val="100000"/>
-              </a:lnSpc>
-              <a:spcAft>
-                <a:spcPts val="500"/>
-              </a:spcAft>
-              <a:defRPr sz="1800" b="0">
-                <a:solidFill>
-                  <a:srgbClr val="222222"/>
-                </a:solidFill>
-                <a:latin typeface="Calibri"/>
-              </a:defRPr>
-            </a:pPr>
-            <a:r>
-              <a:rPr sz="1800" b="0">
-                <a:solidFill>
-                  <a:srgbClr val="222222"/>
-                </a:solidFill>
-                <a:latin typeface="Calibri"/>
-              </a:rPr>
-              <a:t>front:  RIGHT_FRONT_START - 1 - i      (counts DOWN from 7)</a:t>
-            </a:r>
-          </a:p>
-          <a:p>
-            <a:pPr lvl="1" algn="l">
-              <a:lnSpc>
-                <a:spcPct val="100000"/>
-              </a:lnSpc>
-              <a:spcAft>
-                <a:spcPts val="500"/>
-              </a:spcAft>
-              <a:defRPr sz="1800" b="0">
-                <a:solidFill>
-                  <a:srgbClr val="222222"/>
-                </a:solidFill>
-                <a:latin typeface="Calibri"/>
-              </a:defRPr>
-            </a:pPr>
-            <a:r>
-              <a:rPr sz="1800" b="0">
-                <a:solidFill>
-                  <a:srgbClr val="222222"/>
-                </a:solidFill>
-                <a:latin typeface="Calibri"/>
-              </a:rPr>
-              <a:t>rear:   LEFT_REAR_START + i            (counts UP from 24)</a:t>
-            </a:r>
-          </a:p>
-          <a:p>
-            <a:pPr algn="l">
-              <a:lnSpc>
-                <a:spcPct val="100000"/>
-              </a:lnSpc>
-              <a:spcAft>
-                <a:spcPts val="500"/>
-              </a:spcAft>
-              <a:defRPr sz="900" b="0">
-                <a:solidFill>
-                  <a:srgbClr val="222222"/>
-                </a:solidFill>
-                <a:latin typeface="Calibri"/>
-              </a:defRPr>
-            </a:pPr>
-          </a:p>
-          <a:p>
-            <a:pPr algn="l">
-              <a:lnSpc>
-                <a:spcPct val="100000"/>
-              </a:lnSpc>
-              <a:spcAft>
-                <a:spcPts val="500"/>
-              </a:spcAft>
-              <a:defRPr sz="1800" b="0">
-                <a:solidFill>
-                  <a:srgbClr val="222222"/>
-                </a:solidFill>
-                <a:latin typeface="Calibri"/>
-              </a:defRPr>
-            </a:pPr>
-            <a:r>
-              <a:rPr sz="1800" b="0">
-                <a:solidFill>
-                  <a:srgbClr val="222222"/>
-                </a:solidFill>
-                <a:latin typeface="Calibri"/>
-              </a:rPr>
-              <a:t>RIGHT signal:</a:t>
-            </a:r>
-          </a:p>
-          <a:p>
-            <a:pPr lvl="1" algn="l">
-              <a:lnSpc>
-                <a:spcPct val="100000"/>
-              </a:lnSpc>
-              <a:spcAft>
-                <a:spcPts val="500"/>
-              </a:spcAft>
-              <a:defRPr sz="1800" b="0">
-                <a:solidFill>
-                  <a:srgbClr val="222222"/>
-                </a:solidFill>
-                <a:latin typeface="Calibri"/>
-              </a:defRPr>
-            </a:pPr>
-            <a:r>
-              <a:rPr sz="1800" b="0">
-                <a:solidFill>
-                  <a:srgbClr val="222222"/>
-                </a:solidFill>
-                <a:latin typeface="Calibri"/>
-              </a:rPr>
-              <a:t>front:  RIGHT_FRONT_START + i          (counts UP from 8)</a:t>
-            </a:r>
-          </a:p>
-          <a:p>
-            <a:pPr lvl="1" algn="l">
-              <a:lnSpc>
-                <a:spcPct val="100000"/>
-              </a:lnSpc>
-              <a:spcAft>
-                <a:spcPts val="500"/>
-              </a:spcAft>
-              <a:defRPr sz="1800" b="0">
-                <a:solidFill>
-                  <a:srgbClr val="222222"/>
-                </a:solidFill>
-                <a:latin typeface="Calibri"/>
-              </a:defRPr>
-            </a:pPr>
-            <a:r>
-              <a:rPr sz="1800" b="0">
-                <a:solidFill>
-                  <a:srgbClr val="222222"/>
-                </a:solidFill>
-                <a:latin typeface="Calibri"/>
-              </a:rPr>
-              <a:t>rear:   LEFT_REAR_START - 1 - i        (counts DOWN from 23)</a:t>
-            </a:r>
-          </a:p>
-          <a:p>
-            <a:pPr algn="l">
-              <a:lnSpc>
-                <a:spcPct val="100000"/>
-              </a:lnSpc>
-              <a:spcAft>
-                <a:spcPts val="500"/>
-              </a:spcAft>
-              <a:defRPr sz="900" b="0">
-                <a:solidFill>
-                  <a:srgbClr val="222222"/>
-                </a:solidFill>
-                <a:latin typeface="Calibri"/>
-              </a:defRPr>
-            </a:pPr>
-          </a:p>
-          <a:p>
-            <a:pPr algn="l">
-              <a:lnSpc>
-                <a:spcPct val="100000"/>
-              </a:lnSpc>
-              <a:spcAft>
-                <a:spcPts val="500"/>
-              </a:spcAft>
-              <a:defRPr sz="1800" b="0">
-                <a:solidFill>
-                  <a:srgbClr val="222222"/>
-                </a:solidFill>
-                <a:latin typeface="Calibri"/>
-              </a:defRPr>
-            </a:pPr>
-            <a:r>
-              <a:rPr sz="1800" b="0">
-                <a:solidFill>
-                  <a:srgbClr val="222222"/>
-                </a:solidFill>
-                <a:latin typeface="Calibri"/>
-              </a:rPr>
-              <a:t>Do not try to derive this. Step through it and read the indices.</a:t>
+            <a:pPr algn="ctr">
+              <a:lnSpc>
+                <a:spcPct val="100000"/>
+              </a:lnSpc>
+              <a:spcAft>
+                <a:spcPts val="200"/>
+              </a:spcAft>
+              <a:defRPr sz="1100" b="1">
+                <a:solidFill>
+                  <a:srgbClr val="0E7C86"/>
+                </a:solidFill>
+                <a:latin typeface="Calibri"/>
+              </a:defRPr>
+            </a:pPr>
+            <a:r>
+              <a:rPr sz="1100" b="1">
+                <a:solidFill>
+                  <a:srgbClr val="0E7C86"/>
+                </a:solidFill>
+                <a:latin typeface="Calibri"/>
+              </a:rPr>
+              <a:t>NOW</a:t>
             </a:r>
           </a:p>
         </p:txBody>
@@ -7073,7 +7060,7 @@
                 </a:solidFill>
                 <a:latin typeface="Calibri"/>
               </a:rPr>
-              <a:t>Two details that are easy to miss</a:t>
+              <a:t>Turn signal geometry, which is the genuinely hard part</a:t>
             </a:r>
           </a:p>
         </p:txBody>
@@ -7227,7 +7214,7 @@
         <p:spPr>
           <a:xfrm>
             <a:off x="502920" y="1188720"/>
-            <a:ext cx="7047088" cy="274320"/>
+            <a:ext cx="11185855" cy="530352"/>
           </a:xfrm>
           <a:prstGeom prst="rect">
             <a:avLst/>
@@ -7245,434 +7232,37 @@
                 <a:spcPct val="100000"/>
               </a:lnSpc>
               <a:spcAft>
-                <a:spcPts val="200"/>
-              </a:spcAft>
-              <a:defRPr sz="1200" b="1">
+                <a:spcPts val="600"/>
+              </a:spcAft>
+              <a:defRPr sz="1900" b="1">
                 <a:solidFill>
                   <a:srgbClr val="0E7C86"/>
                 </a:solidFill>
-                <a:latin typeface="Consolas"/>
-              </a:defRPr>
-            </a:pPr>
-            <a:r>
-              <a:rPr sz="1200" b="1">
+                <a:latin typeface="Calibri"/>
+              </a:defRPr>
+            </a:pPr>
+            <a:r>
+              <a:rPr sz="1900" b="1">
                 <a:solidFill>
                   <a:srgbClr val="0E7C86"/>
                 </a:solidFill>
-                <a:latin typeface="Consolas"/>
-              </a:rPr>
-              <a:t>Lighting.ino</a:t>
-            </a:r>
-          </a:p>
-        </p:txBody>
-      </p:sp>
-      <p:sp>
-        <p:nvSpPr>
-          <p:cNvPr id="7" name="CODE_PANEL"/>
-          <p:cNvSpPr/>
-          <p:nvPr/>
-        </p:nvSpPr>
-        <p:spPr>
-          <a:xfrm>
-            <a:off x="502920" y="1517904"/>
-            <a:ext cx="7047088" cy="4745736"/>
-          </a:xfrm>
-          <a:prstGeom prst="roundRect">
-            <a:avLst>
-              <a:gd name="adj" fmla="val 4000"/>
-            </a:avLst>
-          </a:prstGeom>
-          <a:solidFill>
-            <a:srgbClr val="F4F6F8"/>
-          </a:solidFill>
-          <a:ln w="12700">
-            <a:solidFill>
-              <a:srgbClr val="C8D2DE"/>
-            </a:solidFill>
-          </a:ln>
-          <a:effectLst/>
-        </p:spPr>
-        <p:style>
-          <a:lnRef idx="1">
-            <a:schemeClr val="accent1"/>
-          </a:lnRef>
-          <a:fillRef idx="3">
-            <a:schemeClr val="accent1"/>
-          </a:fillRef>
-          <a:effectRef idx="2">
-            <a:schemeClr val="accent1"/>
-          </a:effectRef>
-          <a:fontRef idx="minor">
-            <a:schemeClr val="lt1"/>
-          </a:fontRef>
-        </p:style>
-        <p:txBody>
-          <a:bodyPr rtlCol="0" anchor="t" wrap="square" lIns="146304" tIns="91440" bIns="73152"/>
-          <a:lstStyle/>
-          <a:p>
-            <a:pPr algn="l">
-              <a:lnSpc>
-                <a:spcPct val="100000"/>
-              </a:lnSpc>
-              <a:spcAft>
-                <a:spcPts val="0"/>
-              </a:spcAft>
-              <a:defRPr sz="1400">
-                <a:latin typeface="Consolas"/>
-              </a:defRPr>
-            </a:pPr>
-            <a:r>
-              <a:rPr sz="1400">
-                <a:solidFill>
-                  <a:srgbClr val="666666"/>
-                </a:solidFill>
-                <a:latin typeface="Consolas"/>
-              </a:rPr>
-              <a:t>// 1. Repaint the BASE lighting first, every frame.</a:t>
-            </a:r>
-          </a:p>
-          <a:p>
-            <a:pPr algn="l">
-              <a:lnSpc>
-                <a:spcPct val="100000"/>
-              </a:lnSpc>
-              <a:spcAft>
-                <a:spcPts val="0"/>
-              </a:spcAft>
-              <a:defRPr sz="1400">
-                <a:latin typeface="Consolas"/>
-              </a:defRPr>
-            </a:pPr>
-            <a:r>
-              <a:rPr sz="1400">
-                <a:solidFill>
-                  <a:srgbClr val="222222"/>
-                </a:solidFill>
-                <a:latin typeface="Consolas"/>
-              </a:rPr>
-              <a:t>strip.clear();</a:t>
-            </a:r>
-          </a:p>
-          <a:p>
-            <a:pPr algn="l">
-              <a:lnSpc>
-                <a:spcPct val="100000"/>
-              </a:lnSpc>
-              <a:spcAft>
-                <a:spcPts val="0"/>
-              </a:spcAft>
-              <a:defRPr sz="1400">
-                <a:latin typeface="Consolas"/>
-              </a:defRPr>
-            </a:pPr>
-            <a:r>
-              <a:rPr sz="1400">
-                <a:solidFill>
-                  <a:srgbClr val="222222"/>
-                </a:solidFill>
-                <a:latin typeface="Consolas"/>
-              </a:rPr>
-              <a:t>if (running_lights_on) {</a:t>
-            </a:r>
-          </a:p>
-          <a:p>
-            <a:pPr algn="l">
-              <a:lnSpc>
-                <a:spcPct val="100000"/>
-              </a:lnSpc>
-              <a:spcAft>
-                <a:spcPts val="0"/>
-              </a:spcAft>
-              <a:defRPr sz="1400">
-                <a:latin typeface="Consolas"/>
-              </a:defRPr>
-            </a:pPr>
-            <a:r>
-              <a:rPr sz="1400">
-                <a:solidFill>
-                  <a:srgbClr val="222222"/>
-                </a:solidFill>
-                <a:latin typeface="Consolas"/>
-              </a:rPr>
-              <a:t>  fill_range(LEFT_FRONT_START, CORNER_LEN * 2, headlights);</a:t>
-            </a:r>
-          </a:p>
-          <a:p>
-            <a:pPr algn="l">
-              <a:lnSpc>
-                <a:spcPct val="100000"/>
-              </a:lnSpc>
-              <a:spcAft>
-                <a:spcPts val="0"/>
-              </a:spcAft>
-              <a:defRPr sz="1400">
-                <a:latin typeface="Consolas"/>
-              </a:defRPr>
-            </a:pPr>
-            <a:r>
-              <a:rPr sz="1400">
-                <a:solidFill>
-                  <a:srgbClr val="222222"/>
-                </a:solidFill>
-                <a:latin typeface="Consolas"/>
-              </a:rPr>
-              <a:t>  fill_range(RIGHT_REAR_START, CORNER_LEN * 2, taillights);</a:t>
-            </a:r>
-          </a:p>
-          <a:p>
-            <a:pPr algn="l">
-              <a:lnSpc>
-                <a:spcPct val="100000"/>
-              </a:lnSpc>
-              <a:spcAft>
-                <a:spcPts val="0"/>
-              </a:spcAft>
-              <a:defRPr sz="1400">
-                <a:latin typeface="Consolas"/>
-              </a:defRPr>
-            </a:pPr>
-            <a:r>
-              <a:rPr sz="1400">
-                <a:solidFill>
-                  <a:srgbClr val="222222"/>
-                </a:solidFill>
-                <a:latin typeface="Consolas"/>
-              </a:rPr>
-              <a:t>}</a:t>
-            </a:r>
-          </a:p>
-          <a:p>
-            <a:pPr algn="l">
-              <a:lnSpc>
-                <a:spcPct val="100000"/>
-              </a:lnSpc>
-              <a:spcAft>
-                <a:spcPts val="0"/>
-              </a:spcAft>
-              <a:defRPr sz="1400">
-                <a:latin typeface="Consolas"/>
-              </a:defRPr>
-            </a:pPr>
-            <a:r>
-              <a:rPr sz="1400">
-                <a:solidFill>
-                  <a:srgbClr val="666666"/>
-                </a:solidFill>
-                <a:latin typeface="Consolas"/>
-              </a:rPr>
-              <a:t>// ...then blank the signaling side, then draw the amber over it.</a:t>
-            </a:r>
-          </a:p>
-          <a:p>
-            <a:pPr algn="l">
-              <a:lnSpc>
-                <a:spcPct val="100000"/>
-              </a:lnSpc>
-              <a:spcAft>
-                <a:spcPts val="0"/>
-              </a:spcAft>
-              <a:defRPr sz="1400">
-                <a:latin typeface="Consolas"/>
-              </a:defRPr>
-            </a:pPr>
-            <a:r>
-              <a:rPr sz="1400">
-                <a:solidFill>
-                  <a:srgbClr val="666666"/>
-                </a:solidFill>
-                <a:latin typeface="Consolas"/>
-              </a:rPr>
-              <a:t>// Painting only the amber would leave the last frame underneath.</a:t>
-            </a:r>
-          </a:p>
-          <a:p>
-            <a:pPr algn="l">
-              <a:lnSpc>
-                <a:spcPct val="100000"/>
-              </a:lnSpc>
-              <a:spcAft>
-                <a:spcPts val="0"/>
-              </a:spcAft>
-              <a:defRPr sz="1400">
-                <a:latin typeface="Consolas"/>
-              </a:defRPr>
-            </a:pPr>
-            <a:r>
-              <a:rPr sz="1400">
-                <a:solidFill>
-                  <a:srgbClr val="222222"/>
-                </a:solidFill>
-                <a:latin typeface="Consolas"/>
-              </a:rPr>
-              <a:t> </a:t>
-            </a:r>
-          </a:p>
-          <a:p>
-            <a:pPr algn="l">
-              <a:lnSpc>
-                <a:spcPct val="100000"/>
-              </a:lnSpc>
-              <a:spcAft>
-                <a:spcPts val="0"/>
-              </a:spcAft>
-              <a:defRPr sz="1400">
-                <a:latin typeface="Consolas"/>
-              </a:defRPr>
-            </a:pPr>
-            <a:r>
-              <a:rPr sz="1400">
-                <a:solidFill>
-                  <a:srgbClr val="666666"/>
-                </a:solidFill>
-                <a:latin typeface="Consolas"/>
-              </a:rPr>
-              <a:t>// 2. The animation finishes its own cycles.</a:t>
-            </a:r>
-          </a:p>
-          <a:p>
-            <a:pPr algn="l">
-              <a:lnSpc>
-                <a:spcPct val="100000"/>
-              </a:lnSpc>
-              <a:spcAft>
-                <a:spcPts val="0"/>
-              </a:spcAft>
-              <a:defRPr sz="1400">
-                <a:latin typeface="Consolas"/>
-              </a:defRPr>
-            </a:pPr>
-            <a:r>
-              <a:rPr sz="1400" b="1">
-                <a:solidFill>
-                  <a:srgbClr val="0E7C86"/>
-                </a:solidFill>
-                <a:latin typeface="Consolas"/>
-              </a:rPr>
-              <a:t>bool still_held = (led_mode == TURN_LEFT  &amp;&amp; (dpad &amp; DPAD_LEFT)) ||</a:t>
-            </a:r>
-          </a:p>
-          <a:p>
-            <a:pPr algn="l">
-              <a:lnSpc>
-                <a:spcPct val="100000"/>
-              </a:lnSpc>
-              <a:spcAft>
-                <a:spcPts val="0"/>
-              </a:spcAft>
-              <a:defRPr sz="1400">
-                <a:latin typeface="Consolas"/>
-              </a:defRPr>
-            </a:pPr>
-            <a:r>
-              <a:rPr sz="1400" b="1">
-                <a:solidFill>
-                  <a:srgbClr val="0E7C86"/>
-                </a:solidFill>
-                <a:latin typeface="Consolas"/>
-              </a:rPr>
-              <a:t>                  (led_mode == TURN_RIGHT &amp;&amp; (dpad &amp; DPAD_RIGHT));</a:t>
-            </a:r>
-          </a:p>
-          <a:p>
-            <a:pPr algn="l">
-              <a:lnSpc>
-                <a:spcPct val="100000"/>
-              </a:lnSpc>
-              <a:spcAft>
-                <a:spcPts val="0"/>
-              </a:spcAft>
-              <a:defRPr sz="1400">
-                <a:latin typeface="Consolas"/>
-              </a:defRPr>
-            </a:pPr>
-            <a:r>
-              <a:rPr sz="1400" b="1">
-                <a:solidFill>
-                  <a:srgbClr val="0E7C86"/>
-                </a:solidFill>
-                <a:latin typeface="Consolas"/>
-              </a:rPr>
-              <a:t>if (!still_held &amp;&amp; turn_signal_cycles &gt;= TURN_CYCLES) {</a:t>
-            </a:r>
-          </a:p>
-          <a:p>
-            <a:pPr algn="l">
-              <a:lnSpc>
-                <a:spcPct val="100000"/>
-              </a:lnSpc>
-              <a:spcAft>
-                <a:spcPts val="0"/>
-              </a:spcAft>
-              <a:defRPr sz="1400">
-                <a:latin typeface="Consolas"/>
-              </a:defRPr>
-            </a:pPr>
-            <a:r>
-              <a:rPr sz="1400">
-                <a:solidFill>
-                  <a:srgbClr val="222222"/>
-                </a:solidFill>
-                <a:latin typeface="Consolas"/>
-              </a:rPr>
-              <a:t>  led_mode = STANDBY;</a:t>
-            </a:r>
-          </a:p>
-          <a:p>
-            <a:pPr algn="l">
-              <a:lnSpc>
-                <a:spcPct val="100000"/>
-              </a:lnSpc>
-              <a:spcAft>
-                <a:spcPts val="0"/>
-              </a:spcAft>
-              <a:defRPr sz="1400">
-                <a:latin typeface="Consolas"/>
-              </a:defRPr>
-            </a:pPr>
-            <a:r>
-              <a:rPr sz="1400">
-                <a:solidFill>
-                  <a:srgbClr val="222222"/>
-                </a:solidFill>
-                <a:latin typeface="Consolas"/>
-              </a:rPr>
-              <a:t>  standby_dirty = true;</a:t>
-            </a:r>
-          </a:p>
-          <a:p>
-            <a:pPr algn="l">
-              <a:lnSpc>
-                <a:spcPct val="100000"/>
-              </a:lnSpc>
-              <a:spcAft>
-                <a:spcPts val="0"/>
-              </a:spcAft>
-              <a:defRPr sz="1400">
-                <a:latin typeface="Consolas"/>
-              </a:defRPr>
-            </a:pPr>
-            <a:r>
-              <a:rPr sz="1400">
-                <a:solidFill>
-                  <a:srgbClr val="222222"/>
-                </a:solidFill>
-                <a:latin typeface="Consolas"/>
-              </a:rPr>
-              <a:t>}</a:t>
-            </a:r>
-          </a:p>
-        </p:txBody>
-      </p:sp>
-      <p:sp>
-        <p:nvSpPr>
-          <p:cNvPr id="8" name="TextBox 7"/>
+                <a:latin typeface="Calibri"/>
+              </a:rPr>
+              <a:t>Two bars, four directions, one loop of wire</a:t>
+            </a:r>
+          </a:p>
+        </p:txBody>
+      </p:sp>
+      <p:sp>
+        <p:nvSpPr>
+          <p:cNvPr id="7" name="TextBox 6"/>
           <p:cNvSpPr txBox="1"/>
           <p:nvPr/>
         </p:nvSpPr>
         <p:spPr>
           <a:xfrm>
-            <a:off x="7870048" y="1517904"/>
-            <a:ext cx="3818727" cy="4745736"/>
+            <a:off x="502920" y="1755648"/>
+            <a:ext cx="5364327" cy="4507992"/>
           </a:xfrm>
           <a:prstGeom prst="rect">
             <a:avLst/>
@@ -7690,98 +7280,344 @@
                 <a:spcPct val="100000"/>
               </a:lnSpc>
               <a:spcAft>
-                <a:spcPts val="700"/>
-              </a:spcAft>
-              <a:defRPr sz="2000" b="0">
-                <a:solidFill>
-                  <a:srgbClr val="222222"/>
-                </a:solidFill>
-                <a:latin typeface="Calibri"/>
-              </a:defRPr>
-            </a:pPr>
-            <a:r>
-              <a:rPr sz="2000" b="0">
-                <a:solidFill>
-                  <a:srgbClr val="222222"/>
-                </a:solidFill>
-                <a:latin typeface="Calibri"/>
-              </a:rPr>
-              <a:t>The D-pad only ever STARTS the animation. It does not hold it on and it does not stop it.</a:t>
-            </a:r>
-          </a:p>
-          <a:p>
-            <a:pPr algn="l">
-              <a:lnSpc>
-                <a:spcPct val="100000"/>
-              </a:lnSpc>
-              <a:spcAft>
-                <a:spcPts val="700"/>
-              </a:spcAft>
-              <a:defRPr sz="2000" b="0">
-                <a:solidFill>
-                  <a:srgbClr val="222222"/>
-                </a:solidFill>
-                <a:latin typeface="Calibri"/>
-              </a:defRPr>
-            </a:pPr>
-            <a:r>
-              <a:rPr sz="2000" b="0">
-                <a:solidFill>
-                  <a:srgbClr val="222222"/>
-                </a:solidFill>
-                <a:latin typeface="Calibri"/>
-              </a:rPr>
-              <a:t>A real indicator does not stop mid-blink when you let go of the stalk. It finishes.</a:t>
-            </a:r>
-          </a:p>
-          <a:p>
-            <a:pPr algn="l">
-              <a:lnSpc>
-                <a:spcPct val="100000"/>
-              </a:lnSpc>
-              <a:spcAft>
-                <a:spcPts val="700"/>
-              </a:spcAft>
-              <a:defRPr sz="2000" b="0">
-                <a:solidFill>
-                  <a:srgbClr val="222222"/>
-                </a:solidFill>
-                <a:latin typeface="Calibri"/>
-              </a:defRPr>
-            </a:pPr>
-            <a:r>
-              <a:rPr sz="2000" b="0">
-                <a:solidFill>
-                  <a:srgbClr val="222222"/>
-                </a:solidFill>
-                <a:latin typeface="Calibri"/>
-              </a:rPr>
-              <a:t>Holding the D-pad keeps resetting the count, so it carries on for as long as you hold it and then finishes cleanly.</a:t>
-            </a:r>
-          </a:p>
-          <a:p>
-            <a:pPr algn="l">
-              <a:lnSpc>
-                <a:spcPct val="100000"/>
-              </a:lnSpc>
-              <a:spcAft>
-                <a:spcPts val="700"/>
-              </a:spcAft>
-              <a:defRPr sz="2000" b="0">
-                <a:solidFill>
-                  <a:srgbClr val="222222"/>
-                </a:solidFill>
-                <a:latin typeface="Calibri"/>
-              </a:defRPr>
-            </a:pPr>
-            <a:r>
-              <a:rPr sz="2000" b="0">
-                <a:solidFill>
-                  <a:srgbClr val="222222"/>
-                </a:solidFill>
-                <a:latin typeface="Calibri"/>
-              </a:rPr>
-              <a:t>This is a small thing that makes a machine feel considered rather than twitchy.</a:t>
+                <a:spcPts val="900"/>
+              </a:spcAft>
+              <a:defRPr sz="1800" b="0">
+                <a:solidFill>
+                  <a:srgbClr val="222222"/>
+                </a:solidFill>
+                <a:latin typeface="Calibri"/>
+              </a:defRPr>
+            </a:pPr>
+            <a:r>
+              <a:rPr sz="1800" b="0">
+                <a:solidFill>
+                  <a:srgbClr val="222222"/>
+                </a:solidFill>
+                <a:latin typeface="Calibri"/>
+              </a:rPr>
+              <a:t>The strip is one loop, so the two halves of each side run in OPPOSITE directions and the arithmetic is not symmetric:</a:t>
+            </a:r>
+          </a:p>
+          <a:p>
+            <a:pPr lvl="1" algn="l">
+              <a:lnSpc>
+                <a:spcPct val="100000"/>
+              </a:lnSpc>
+              <a:spcAft>
+                <a:spcPts val="900"/>
+              </a:spcAft>
+              <a:defRPr sz="1800" b="0">
+                <a:solidFill>
+                  <a:srgbClr val="222222"/>
+                </a:solidFill>
+                <a:latin typeface="Calibri"/>
+              </a:defRPr>
+            </a:pPr>
+            <a:r>
+              <a:rPr sz="1800" b="0">
+                <a:solidFill>
+                  <a:srgbClr val="222222"/>
+                </a:solidFill>
+                <a:latin typeface="Calibri"/>
+              </a:rPr>
+              <a:t>front, left to right :   0 .. 15    left half 0-7,  right half 8-15</a:t>
+            </a:r>
+          </a:p>
+          <a:p>
+            <a:pPr lvl="1" algn="l">
+              <a:lnSpc>
+                <a:spcPct val="100000"/>
+              </a:lnSpc>
+              <a:spcAft>
+                <a:spcPts val="900"/>
+              </a:spcAft>
+              <a:defRPr sz="1800" b="0">
+                <a:solidFill>
+                  <a:srgbClr val="222222"/>
+                </a:solidFill>
+                <a:latin typeface="Calibri"/>
+              </a:defRPr>
+            </a:pPr>
+            <a:r>
+              <a:rPr sz="1800" b="0">
+                <a:solidFill>
+                  <a:srgbClr val="222222"/>
+                </a:solidFill>
+                <a:latin typeface="Calibri"/>
+              </a:rPr>
+              <a:t>rear,  right to left :  16 .. 31    right half 16-23, left half 24-31</a:t>
+            </a:r>
+          </a:p>
+          <a:p>
+            <a:pPr algn="l">
+              <a:lnSpc>
+                <a:spcPct val="100000"/>
+              </a:lnSpc>
+              <a:spcAft>
+                <a:spcPts val="900"/>
+              </a:spcAft>
+              <a:defRPr sz="900" b="0">
+                <a:solidFill>
+                  <a:srgbClr val="222222"/>
+                </a:solidFill>
+                <a:latin typeface="Calibri"/>
+              </a:defRPr>
+            </a:pPr>
+          </a:p>
+          <a:p>
+            <a:pPr algn="l">
+              <a:lnSpc>
+                <a:spcPct val="100000"/>
+              </a:lnSpc>
+              <a:spcAft>
+                <a:spcPts val="900"/>
+              </a:spcAft>
+              <a:defRPr sz="1800" b="0">
+                <a:solidFill>
+                  <a:srgbClr val="222222"/>
+                </a:solidFill>
+                <a:latin typeface="Calibri"/>
+              </a:defRPr>
+            </a:pPr>
+            <a:r>
+              <a:rPr sz="1800" b="0">
+                <a:solidFill>
+                  <a:srgbClr val="222222"/>
+                </a:solidFill>
+                <a:latin typeface="Calibri"/>
+              </a:rPr>
+              <a:t>The bar has to grow OUTWARD from the center of the vehicle toward the corner that is turning, on both bars at once.</a:t>
+            </a:r>
+          </a:p>
+        </p:txBody>
+      </p:sp>
+      <p:sp>
+        <p:nvSpPr>
+          <p:cNvPr id="8" name="TextBox 7"/>
+          <p:cNvSpPr txBox="1"/>
+          <p:nvPr/>
+        </p:nvSpPr>
+        <p:spPr>
+          <a:xfrm>
+            <a:off x="6324447" y="1755648"/>
+            <a:ext cx="5364327" cy="4507992"/>
+          </a:xfrm>
+          <a:prstGeom prst="rect">
+            <a:avLst/>
+          </a:prstGeom>
+          <a:noFill/>
+        </p:spPr>
+        <p:txBody>
+          <a:bodyPr wrap="square" lIns="0" tIns="0" rIns="0" bIns="0">
+            <a:spAutoFit/>
+          </a:bodyPr>
+          <a:lstStyle/>
+          <a:p>
+            <a:pPr algn="l">
+              <a:lnSpc>
+                <a:spcPct val="100000"/>
+              </a:lnSpc>
+              <a:spcAft>
+                <a:spcPts val="500"/>
+              </a:spcAft>
+              <a:defRPr sz="1800" b="0">
+                <a:solidFill>
+                  <a:srgbClr val="222222"/>
+                </a:solidFill>
+                <a:latin typeface="Calibri"/>
+              </a:defRPr>
+            </a:pPr>
+            <a:r>
+              <a:rPr sz="1800" b="0">
+                <a:solidFill>
+                  <a:srgbClr val="222222"/>
+                </a:solidFill>
+                <a:latin typeface="Calibri"/>
+              </a:rPr>
+              <a:t>LEFT signal:</a:t>
+            </a:r>
+          </a:p>
+          <a:p>
+            <a:pPr lvl="1" algn="l">
+              <a:lnSpc>
+                <a:spcPct val="100000"/>
+              </a:lnSpc>
+              <a:spcAft>
+                <a:spcPts val="500"/>
+              </a:spcAft>
+              <a:defRPr sz="1800" b="0">
+                <a:solidFill>
+                  <a:srgbClr val="222222"/>
+                </a:solidFill>
+                <a:latin typeface="Calibri"/>
+              </a:defRPr>
+            </a:pPr>
+            <a:r>
+              <a:rPr sz="1800" b="0">
+                <a:solidFill>
+                  <a:srgbClr val="222222"/>
+                </a:solidFill>
+                <a:latin typeface="Calibri"/>
+              </a:rPr>
+              <a:t>front:  RIGHT_FRONT_START - 1 - i      (counts DOWN from 7)</a:t>
+            </a:r>
+          </a:p>
+          <a:p>
+            <a:pPr lvl="1" algn="l">
+              <a:lnSpc>
+                <a:spcPct val="100000"/>
+              </a:lnSpc>
+              <a:spcAft>
+                <a:spcPts val="500"/>
+              </a:spcAft>
+              <a:defRPr sz="1800" b="0">
+                <a:solidFill>
+                  <a:srgbClr val="222222"/>
+                </a:solidFill>
+                <a:latin typeface="Calibri"/>
+              </a:defRPr>
+            </a:pPr>
+            <a:r>
+              <a:rPr sz="1800" b="0">
+                <a:solidFill>
+                  <a:srgbClr val="222222"/>
+                </a:solidFill>
+                <a:latin typeface="Calibri"/>
+              </a:rPr>
+              <a:t>rear:   LEFT_REAR_START + i            (counts UP from 24)</a:t>
+            </a:r>
+          </a:p>
+          <a:p>
+            <a:pPr algn="l">
+              <a:lnSpc>
+                <a:spcPct val="100000"/>
+              </a:lnSpc>
+              <a:spcAft>
+                <a:spcPts val="500"/>
+              </a:spcAft>
+              <a:defRPr sz="900" b="0">
+                <a:solidFill>
+                  <a:srgbClr val="222222"/>
+                </a:solidFill>
+                <a:latin typeface="Calibri"/>
+              </a:defRPr>
+            </a:pPr>
+          </a:p>
+          <a:p>
+            <a:pPr algn="l">
+              <a:lnSpc>
+                <a:spcPct val="100000"/>
+              </a:lnSpc>
+              <a:spcAft>
+                <a:spcPts val="500"/>
+              </a:spcAft>
+              <a:defRPr sz="1800" b="0">
+                <a:solidFill>
+                  <a:srgbClr val="222222"/>
+                </a:solidFill>
+                <a:latin typeface="Calibri"/>
+              </a:defRPr>
+            </a:pPr>
+            <a:r>
+              <a:rPr sz="1800" b="0">
+                <a:solidFill>
+                  <a:srgbClr val="222222"/>
+                </a:solidFill>
+                <a:latin typeface="Calibri"/>
+              </a:rPr>
+              <a:t>RIGHT signal:</a:t>
+            </a:r>
+          </a:p>
+          <a:p>
+            <a:pPr lvl="1" algn="l">
+              <a:lnSpc>
+                <a:spcPct val="100000"/>
+              </a:lnSpc>
+              <a:spcAft>
+                <a:spcPts val="500"/>
+              </a:spcAft>
+              <a:defRPr sz="1800" b="0">
+                <a:solidFill>
+                  <a:srgbClr val="222222"/>
+                </a:solidFill>
+                <a:latin typeface="Calibri"/>
+              </a:defRPr>
+            </a:pPr>
+            <a:r>
+              <a:rPr sz="1800" b="0">
+                <a:solidFill>
+                  <a:srgbClr val="222222"/>
+                </a:solidFill>
+                <a:latin typeface="Calibri"/>
+              </a:rPr>
+              <a:t>front:  RIGHT_FRONT_START + i          (counts UP from 8)</a:t>
+            </a:r>
+          </a:p>
+          <a:p>
+            <a:pPr lvl="1" algn="l">
+              <a:lnSpc>
+                <a:spcPct val="100000"/>
+              </a:lnSpc>
+              <a:spcAft>
+                <a:spcPts val="500"/>
+              </a:spcAft>
+              <a:defRPr sz="1800" b="0">
+                <a:solidFill>
+                  <a:srgbClr val="222222"/>
+                </a:solidFill>
+                <a:latin typeface="Calibri"/>
+              </a:defRPr>
+            </a:pPr>
+            <a:r>
+              <a:rPr sz="1800" b="0">
+                <a:solidFill>
+                  <a:srgbClr val="222222"/>
+                </a:solidFill>
+                <a:latin typeface="Calibri"/>
+              </a:rPr>
+              <a:t>rear:   LEFT_REAR_START - 1 - i        (counts DOWN from 23)</a:t>
+            </a:r>
+          </a:p>
+          <a:p>
+            <a:pPr algn="l">
+              <a:lnSpc>
+                <a:spcPct val="100000"/>
+              </a:lnSpc>
+              <a:spcAft>
+                <a:spcPts val="500"/>
+              </a:spcAft>
+              <a:defRPr sz="900" b="0">
+                <a:solidFill>
+                  <a:srgbClr val="222222"/>
+                </a:solidFill>
+                <a:latin typeface="Calibri"/>
+              </a:defRPr>
+            </a:pPr>
+          </a:p>
+          <a:p>
+            <a:pPr algn="l">
+              <a:lnSpc>
+                <a:spcPct val="100000"/>
+              </a:lnSpc>
+              <a:spcAft>
+                <a:spcPts val="500"/>
+              </a:spcAft>
+              <a:defRPr sz="1800" b="0">
+                <a:solidFill>
+                  <a:srgbClr val="222222"/>
+                </a:solidFill>
+                <a:latin typeface="Calibri"/>
+              </a:defRPr>
+            </a:pPr>
+            <a:r>
+              <a:rPr sz="1800" b="0">
+                <a:solidFill>
+                  <a:srgbClr val="222222"/>
+                </a:solidFill>
+                <a:latin typeface="Calibri"/>
+              </a:rPr>
+              <a:t>Do not try to derive this. Step through it and read the indices.</a:t>
             </a:r>
           </a:p>
         </p:txBody>
@@ -7806,24 +7642,22 @@
       <p:grpSpPr/>
       <p:sp>
         <p:nvSpPr>
-          <p:cNvPr id="2" name="TextBox 1"/>
-          <p:cNvSpPr txBox="1"/>
-          <p:nvPr/>
-        </p:nvSpPr>
-        <p:spPr>
-          <a:xfrm>
-            <a:off x="502920" y="6382512"/>
-            <a:ext cx="10545775" cy="274320"/>
-          </a:xfrm>
-          <a:prstGeom prst="rect">
-            <a:avLst/>
-          </a:prstGeom>
-          <a:noFill/>
-        </p:spPr>
-        <p:txBody>
-          <a:bodyPr wrap="square" lIns="0" tIns="0">
-            <a:spAutoFit/>
-          </a:bodyPr>
+          <p:cNvPr id="2" name="Title 1"/>
+          <p:cNvSpPr>
+            <a:spLocks noGrp="1"/>
+          </p:cNvSpPr>
+          <p:nvPr>
+            <p:ph type="title"/>
+          </p:nvPr>
+        </p:nvSpPr>
+        <p:spPr>
+          <a:xfrm>
+            <a:off x="502920" y="274320"/>
+            <a:ext cx="11185855" cy="777240"/>
+          </a:xfrm>
+        </p:spPr>
+        <p:txBody>
+          <a:bodyPr wrap="square" anchor="b"/>
           <a:lstStyle/>
           <a:p>
             <a:pPr algn="l">
@@ -7833,89 +7667,41 @@
               <a:spcAft>
                 <a:spcPts val="0"/>
               </a:spcAft>
-              <a:defRPr sz="1000" b="0">
-                <a:solidFill>
-                  <a:srgbClr val="666666"/>
-                </a:solidFill>
-                <a:latin typeface="Calibri"/>
-              </a:defRPr>
-            </a:pPr>
-            <a:r>
-              <a:rPr sz="1000" b="0">
-                <a:solidFill>
-                  <a:srgbClr val="666666"/>
-                </a:solidFill>
-                <a:latin typeface="Calibri"/>
-              </a:rPr>
-              <a:t>Pathfinder Advanced - Op Program 12  |  Lesson 4</a:t>
-            </a:r>
-          </a:p>
-        </p:txBody>
-      </p:sp>
-      <p:sp>
-        <p:nvSpPr>
-          <p:cNvPr id="3" name="TextBox 2"/>
-          <p:cNvSpPr txBox="1"/>
-          <p:nvPr/>
-        </p:nvSpPr>
-        <p:spPr>
-          <a:xfrm>
-            <a:off x="11231575" y="6382512"/>
-            <a:ext cx="457200" cy="274320"/>
-          </a:xfrm>
-          <a:prstGeom prst="rect">
-            <a:avLst/>
-          </a:prstGeom>
-          <a:noFill/>
-        </p:spPr>
-        <p:txBody>
-          <a:bodyPr wrap="square" lIns="0" tIns="0">
-            <a:spAutoFit/>
-          </a:bodyPr>
-          <a:lstStyle/>
-          <a:p>
-            <a:pPr algn="r">
-              <a:lnSpc>
-                <a:spcPct val="100000"/>
-              </a:lnSpc>
-              <a:spcAft>
-                <a:spcPts val="0"/>
-              </a:spcAft>
-              <a:defRPr sz="1000" b="0">
-                <a:solidFill>
-                  <a:srgbClr val="666666"/>
-                </a:solidFill>
-                <a:latin typeface="Calibri"/>
-              </a:defRPr>
-            </a:pPr>
-            <a:r>
-              <a:rPr sz="1000" b="0">
-                <a:solidFill>
-                  <a:srgbClr val="666666"/>
-                </a:solidFill>
-                <a:latin typeface="Calibri"/>
-              </a:rPr>
-              <a:t>12</a:t>
-            </a:r>
-          </a:p>
-        </p:txBody>
-      </p:sp>
-      <p:sp>
-        <p:nvSpPr>
-          <p:cNvPr id="4" name="Rectangle 3"/>
+              <a:defRPr sz="2800" b="1">
+                <a:solidFill>
+                  <a:srgbClr val="1F3A5F"/>
+                </a:solidFill>
+                <a:latin typeface="Calibri"/>
+              </a:defRPr>
+            </a:pPr>
+            <a:r>
+              <a:rPr sz="2800" b="1">
+                <a:solidFill>
+                  <a:srgbClr val="1F3A5F"/>
+                </a:solidFill>
+                <a:latin typeface="Calibri"/>
+              </a:rPr>
+              <a:t>Two details that are easy to miss</a:t>
+            </a:r>
+          </a:p>
+        </p:txBody>
+      </p:sp>
+      <p:sp>
+        <p:nvSpPr>
+          <p:cNvPr id="3" name="Rectangle 2"/>
           <p:cNvSpPr/>
           <p:nvPr/>
         </p:nvSpPr>
         <p:spPr>
           <a:xfrm>
-            <a:off x="0" y="1234440"/>
-            <a:ext cx="256032" cy="1554480"/>
+            <a:off x="502920" y="1097280"/>
+            <a:ext cx="11185855" cy="19050"/>
           </a:xfrm>
           <a:prstGeom prst="rect">
             <a:avLst/>
           </a:prstGeom>
           <a:solidFill>
-            <a:srgbClr val="0E7C86"/>
+            <a:srgbClr val="C8D2DE"/>
           </a:solidFill>
           <a:ln>
             <a:noFill/>
@@ -7946,14 +7732,14 @@
       </p:sp>
       <p:sp>
         <p:nvSpPr>
-          <p:cNvPr id="5" name="TextBox 4"/>
+          <p:cNvPr id="4" name="TextBox 3"/>
           <p:cNvSpPr txBox="1"/>
           <p:nvPr/>
         </p:nvSpPr>
         <p:spPr>
           <a:xfrm>
-            <a:off x="777240" y="1325880"/>
-            <a:ext cx="10515600" cy="1051560"/>
+            <a:off x="502920" y="6382512"/>
+            <a:ext cx="10545775" cy="274320"/>
           </a:xfrm>
           <a:prstGeom prst="rect">
             <a:avLst/>
@@ -7961,7 +7747,7 @@
           <a:noFill/>
         </p:spPr>
         <p:txBody>
-          <a:bodyPr wrap="square" lIns="0" tIns="0" rIns="0" bIns="0">
+          <a:bodyPr wrap="square" lIns="0" tIns="0">
             <a:spAutoFit/>
           </a:bodyPr>
           <a:lstStyle/>
@@ -7973,35 +7759,35 @@
               <a:spcAft>
                 <a:spcPts val="0"/>
               </a:spcAft>
-              <a:defRPr sz="3600" b="1">
-                <a:solidFill>
-                  <a:srgbClr val="1F3A5F"/>
-                </a:solidFill>
-                <a:latin typeface="Calibri"/>
-              </a:defRPr>
-            </a:pPr>
-            <a:r>
-              <a:rPr sz="3600" b="1">
-                <a:solidFill>
-                  <a:srgbClr val="1F3A5F"/>
-                </a:solidFill>
-                <a:latin typeface="Calibri"/>
-              </a:rPr>
-              <a:t>Turn signal geometry</a:t>
-            </a:r>
-          </a:p>
-        </p:txBody>
-      </p:sp>
-      <p:sp>
-        <p:nvSpPr>
-          <p:cNvPr id="6" name="TextBox 5"/>
+              <a:defRPr sz="1000" b="0">
+                <a:solidFill>
+                  <a:srgbClr val="666666"/>
+                </a:solidFill>
+                <a:latin typeface="Calibri"/>
+              </a:defRPr>
+            </a:pPr>
+            <a:r>
+              <a:rPr sz="1000" b="0">
+                <a:solidFill>
+                  <a:srgbClr val="666666"/>
+                </a:solidFill>
+                <a:latin typeface="Calibri"/>
+              </a:rPr>
+              <a:t>Pathfinder Advanced - Op Program 12  |  Lesson 4</a:t>
+            </a:r>
+          </a:p>
+        </p:txBody>
+      </p:sp>
+      <p:sp>
+        <p:nvSpPr>
+          <p:cNvPr id="5" name="TextBox 4"/>
           <p:cNvSpPr txBox="1"/>
           <p:nvPr/>
         </p:nvSpPr>
         <p:spPr>
           <a:xfrm>
-            <a:off x="777240" y="2423160"/>
-            <a:ext cx="10515600" cy="685800"/>
+            <a:off x="11231575" y="6382512"/>
+            <a:ext cx="457200" cy="274320"/>
           </a:xfrm>
           <a:prstGeom prst="rect">
             <a:avLst/>
@@ -8009,6 +7795,54 @@
           <a:noFill/>
         </p:spPr>
         <p:txBody>
+          <a:bodyPr wrap="square" lIns="0" tIns="0">
+            <a:spAutoFit/>
+          </a:bodyPr>
+          <a:lstStyle/>
+          <a:p>
+            <a:pPr algn="r">
+              <a:lnSpc>
+                <a:spcPct val="100000"/>
+              </a:lnSpc>
+              <a:spcAft>
+                <a:spcPts val="0"/>
+              </a:spcAft>
+              <a:defRPr sz="1000" b="0">
+                <a:solidFill>
+                  <a:srgbClr val="666666"/>
+                </a:solidFill>
+                <a:latin typeface="Calibri"/>
+              </a:defRPr>
+            </a:pPr>
+            <a:r>
+              <a:rPr sz="1000" b="0">
+                <a:solidFill>
+                  <a:srgbClr val="666666"/>
+                </a:solidFill>
+                <a:latin typeface="Calibri"/>
+              </a:rPr>
+              <a:t>12</a:t>
+            </a:r>
+          </a:p>
+        </p:txBody>
+      </p:sp>
+      <p:sp>
+        <p:nvSpPr>
+          <p:cNvPr id="6" name="TextBox 5"/>
+          <p:cNvSpPr txBox="1"/>
+          <p:nvPr/>
+        </p:nvSpPr>
+        <p:spPr>
+          <a:xfrm>
+            <a:off x="502920" y="1188720"/>
+            <a:ext cx="7047088" cy="274320"/>
+          </a:xfrm>
+          <a:prstGeom prst="rect">
+            <a:avLst/>
+          </a:prstGeom>
+          <a:noFill/>
+        </p:spPr>
+        <p:txBody>
           <a:bodyPr wrap="square" lIns="0" tIns="0" rIns="0" bIns="0">
             <a:spAutoFit/>
           </a:bodyPr>
@@ -8019,49 +7853,49 @@
                 <a:spcPct val="100000"/>
               </a:lnSpc>
               <a:spcAft>
-                <a:spcPts val="400"/>
-              </a:spcAft>
-              <a:defRPr sz="1600" b="0">
-                <a:solidFill>
-                  <a:srgbClr val="666666"/>
-                </a:solidFill>
-                <a:latin typeface="Calibri"/>
-              </a:defRPr>
-            </a:pPr>
-            <a:r>
-              <a:rPr sz="1600" b="0">
-                <a:solidFill>
-                  <a:srgbClr val="666666"/>
-                </a:solidFill>
-                <a:latin typeface="Calibri"/>
-              </a:rPr>
-              <a:t>About 35 minutes</a:t>
-            </a:r>
-          </a:p>
-        </p:txBody>
-      </p:sp>
-      <p:sp>
-        <p:nvSpPr>
-          <p:cNvPr id="7" name="Rounded Rectangle 6"/>
+                <a:spcPts val="200"/>
+              </a:spcAft>
+              <a:defRPr sz="1200" b="1">
+                <a:solidFill>
+                  <a:srgbClr val="0E7C86"/>
+                </a:solidFill>
+                <a:latin typeface="Consolas"/>
+              </a:defRPr>
+            </a:pPr>
+            <a:r>
+              <a:rPr sz="1200" b="1">
+                <a:solidFill>
+                  <a:srgbClr val="0E7C86"/>
+                </a:solidFill>
+                <a:latin typeface="Consolas"/>
+              </a:rPr>
+              <a:t>Lighting.ino</a:t>
+            </a:r>
+          </a:p>
+        </p:txBody>
+      </p:sp>
+      <p:sp>
+        <p:nvSpPr>
+          <p:cNvPr id="7" name="CODE_PANEL"/>
           <p:cNvSpPr/>
           <p:nvPr/>
         </p:nvSpPr>
         <p:spPr>
           <a:xfrm>
-            <a:off x="502920" y="3886200"/>
-            <a:ext cx="3631082" cy="1325880"/>
+            <a:off x="502920" y="1517904"/>
+            <a:ext cx="7047088" cy="4745736"/>
           </a:xfrm>
           <a:prstGeom prst="roundRect">
             <a:avLst>
-              <a:gd name="adj" fmla="val 8000"/>
+              <a:gd name="adj" fmla="val 4000"/>
             </a:avLst>
           </a:prstGeom>
           <a:solidFill>
-            <a:srgbClr val="EEF3F8"/>
+            <a:srgbClr val="F4F6F8"/>
           </a:solidFill>
           <a:ln w="12700">
             <a:solidFill>
-              <a:srgbClr val="0E7C86"/>
+              <a:srgbClr val="C8D2DE"/>
             </a:solidFill>
           </a:ln>
           <a:effectLst/>
@@ -8081,31 +7915,358 @@
           </a:fontRef>
         </p:style>
         <p:txBody>
-          <a:bodyPr rtlCol="0" anchor="ctr" wrap="square" lIns="73152" rIns="73152"/>
-          <a:lstStyle/>
-          <a:p>
-            <a:pPr algn="ctr">
+          <a:bodyPr rtlCol="0" anchor="t" wrap="square" lIns="146304" tIns="91440" bIns="73152"/>
+          <a:lstStyle/>
+          <a:p>
+            <a:pPr algn="l">
               <a:lnSpc>
                 <a:spcPct val="100000"/>
               </a:lnSpc>
               <a:spcAft>
                 <a:spcPts val="0"/>
               </a:spcAft>
-              <a:defRPr sz="1700" b="0">
-                <a:solidFill>
-                  <a:srgbClr val="1F3A5F"/>
-                </a:solidFill>
-                <a:latin typeface="Calibri"/>
-              </a:defRPr>
-            </a:pPr>
-            <a:r>
-              <a:rPr sz="1700" b="0">
-                <a:solidFill>
-                  <a:srgbClr val="1F3A5F"/>
-                </a:solidFill>
-                <a:latin typeface="Calibri"/>
-              </a:rPr>
-              <a:t>State machines</a:t>
+              <a:defRPr sz="1400">
+                <a:latin typeface="Consolas"/>
+              </a:defRPr>
+            </a:pPr>
+            <a:r>
+              <a:rPr sz="1400">
+                <a:solidFill>
+                  <a:srgbClr val="666666"/>
+                </a:solidFill>
+                <a:latin typeface="Consolas"/>
+              </a:rPr>
+              <a:t>// 1. Repaint the BASE lighting first, every frame.</a:t>
+            </a:r>
+          </a:p>
+          <a:p>
+            <a:pPr algn="l">
+              <a:lnSpc>
+                <a:spcPct val="100000"/>
+              </a:lnSpc>
+              <a:spcAft>
+                <a:spcPts val="0"/>
+              </a:spcAft>
+              <a:defRPr sz="1400">
+                <a:latin typeface="Consolas"/>
+              </a:defRPr>
+            </a:pPr>
+            <a:r>
+              <a:rPr sz="1400">
+                <a:solidFill>
+                  <a:srgbClr val="222222"/>
+                </a:solidFill>
+                <a:latin typeface="Consolas"/>
+              </a:rPr>
+              <a:t>strip.clear();</a:t>
+            </a:r>
+          </a:p>
+          <a:p>
+            <a:pPr algn="l">
+              <a:lnSpc>
+                <a:spcPct val="100000"/>
+              </a:lnSpc>
+              <a:spcAft>
+                <a:spcPts val="0"/>
+              </a:spcAft>
+              <a:defRPr sz="1400">
+                <a:latin typeface="Consolas"/>
+              </a:defRPr>
+            </a:pPr>
+            <a:r>
+              <a:rPr sz="1400">
+                <a:solidFill>
+                  <a:srgbClr val="222222"/>
+                </a:solidFill>
+                <a:latin typeface="Consolas"/>
+              </a:rPr>
+              <a:t>if (running_lights_on) {</a:t>
+            </a:r>
+          </a:p>
+          <a:p>
+            <a:pPr algn="l">
+              <a:lnSpc>
+                <a:spcPct val="100000"/>
+              </a:lnSpc>
+              <a:spcAft>
+                <a:spcPts val="0"/>
+              </a:spcAft>
+              <a:defRPr sz="1400">
+                <a:latin typeface="Consolas"/>
+              </a:defRPr>
+            </a:pPr>
+            <a:r>
+              <a:rPr sz="1400">
+                <a:solidFill>
+                  <a:srgbClr val="222222"/>
+                </a:solidFill>
+                <a:latin typeface="Consolas"/>
+              </a:rPr>
+              <a:t>  fill_range(LEFT_FRONT_START, CORNER_LEN * 2, headlights);</a:t>
+            </a:r>
+          </a:p>
+          <a:p>
+            <a:pPr algn="l">
+              <a:lnSpc>
+                <a:spcPct val="100000"/>
+              </a:lnSpc>
+              <a:spcAft>
+                <a:spcPts val="0"/>
+              </a:spcAft>
+              <a:defRPr sz="1400">
+                <a:latin typeface="Consolas"/>
+              </a:defRPr>
+            </a:pPr>
+            <a:r>
+              <a:rPr sz="1400">
+                <a:solidFill>
+                  <a:srgbClr val="222222"/>
+                </a:solidFill>
+                <a:latin typeface="Consolas"/>
+              </a:rPr>
+              <a:t>  fill_range(RIGHT_REAR_START, CORNER_LEN * 2, taillights);</a:t>
+            </a:r>
+          </a:p>
+          <a:p>
+            <a:pPr algn="l">
+              <a:lnSpc>
+                <a:spcPct val="100000"/>
+              </a:lnSpc>
+              <a:spcAft>
+                <a:spcPts val="0"/>
+              </a:spcAft>
+              <a:defRPr sz="1400">
+                <a:latin typeface="Consolas"/>
+              </a:defRPr>
+            </a:pPr>
+            <a:r>
+              <a:rPr sz="1400">
+                <a:solidFill>
+                  <a:srgbClr val="222222"/>
+                </a:solidFill>
+                <a:latin typeface="Consolas"/>
+              </a:rPr>
+              <a:t>}</a:t>
+            </a:r>
+          </a:p>
+          <a:p>
+            <a:pPr algn="l">
+              <a:lnSpc>
+                <a:spcPct val="100000"/>
+              </a:lnSpc>
+              <a:spcAft>
+                <a:spcPts val="0"/>
+              </a:spcAft>
+              <a:defRPr sz="1400">
+                <a:latin typeface="Consolas"/>
+              </a:defRPr>
+            </a:pPr>
+            <a:r>
+              <a:rPr sz="1400">
+                <a:solidFill>
+                  <a:srgbClr val="666666"/>
+                </a:solidFill>
+                <a:latin typeface="Consolas"/>
+              </a:rPr>
+              <a:t>// ...then blank the signaling side, then draw the amber over it.</a:t>
+            </a:r>
+          </a:p>
+          <a:p>
+            <a:pPr algn="l">
+              <a:lnSpc>
+                <a:spcPct val="100000"/>
+              </a:lnSpc>
+              <a:spcAft>
+                <a:spcPts val="0"/>
+              </a:spcAft>
+              <a:defRPr sz="1400">
+                <a:latin typeface="Consolas"/>
+              </a:defRPr>
+            </a:pPr>
+            <a:r>
+              <a:rPr sz="1400">
+                <a:solidFill>
+                  <a:srgbClr val="666666"/>
+                </a:solidFill>
+                <a:latin typeface="Consolas"/>
+              </a:rPr>
+              <a:t>// Painting only the amber would leave the last frame underneath.</a:t>
+            </a:r>
+          </a:p>
+          <a:p>
+            <a:pPr algn="l">
+              <a:lnSpc>
+                <a:spcPct val="100000"/>
+              </a:lnSpc>
+              <a:spcAft>
+                <a:spcPts val="0"/>
+              </a:spcAft>
+              <a:defRPr sz="1400">
+                <a:latin typeface="Consolas"/>
+              </a:defRPr>
+            </a:pPr>
+            <a:r>
+              <a:rPr sz="1400">
+                <a:solidFill>
+                  <a:srgbClr val="222222"/>
+                </a:solidFill>
+                <a:latin typeface="Consolas"/>
+              </a:rPr>
+              <a:t> </a:t>
+            </a:r>
+          </a:p>
+          <a:p>
+            <a:pPr algn="l">
+              <a:lnSpc>
+                <a:spcPct val="100000"/>
+              </a:lnSpc>
+              <a:spcAft>
+                <a:spcPts val="0"/>
+              </a:spcAft>
+              <a:defRPr sz="1400">
+                <a:latin typeface="Consolas"/>
+              </a:defRPr>
+            </a:pPr>
+            <a:r>
+              <a:rPr sz="1400">
+                <a:solidFill>
+                  <a:srgbClr val="666666"/>
+                </a:solidFill>
+                <a:latin typeface="Consolas"/>
+              </a:rPr>
+              <a:t>// 2. The animation finishes its own cycles.</a:t>
+            </a:r>
+          </a:p>
+          <a:p>
+            <a:pPr algn="l">
+              <a:lnSpc>
+                <a:spcPct val="100000"/>
+              </a:lnSpc>
+              <a:spcAft>
+                <a:spcPts val="0"/>
+              </a:spcAft>
+              <a:defRPr sz="1400">
+                <a:latin typeface="Consolas"/>
+              </a:defRPr>
+            </a:pPr>
+            <a:r>
+              <a:rPr sz="1400" b="1">
+                <a:solidFill>
+                  <a:srgbClr val="0E7C86"/>
+                </a:solidFill>
+                <a:latin typeface="Consolas"/>
+              </a:rPr>
+              <a:t>bool still_held = (led_mode == TURN_LEFT  &amp;&amp; (dpad &amp; DPAD_LEFT)) ||</a:t>
+            </a:r>
+          </a:p>
+          <a:p>
+            <a:pPr algn="l">
+              <a:lnSpc>
+                <a:spcPct val="100000"/>
+              </a:lnSpc>
+              <a:spcAft>
+                <a:spcPts val="0"/>
+              </a:spcAft>
+              <a:defRPr sz="1400">
+                <a:latin typeface="Consolas"/>
+              </a:defRPr>
+            </a:pPr>
+            <a:r>
+              <a:rPr sz="1400" b="1">
+                <a:solidFill>
+                  <a:srgbClr val="0E7C86"/>
+                </a:solidFill>
+                <a:latin typeface="Consolas"/>
+              </a:rPr>
+              <a:t>                  (led_mode == TURN_RIGHT &amp;&amp; (dpad &amp; DPAD_RIGHT));</a:t>
+            </a:r>
+          </a:p>
+          <a:p>
+            <a:pPr algn="l">
+              <a:lnSpc>
+                <a:spcPct val="100000"/>
+              </a:lnSpc>
+              <a:spcAft>
+                <a:spcPts val="0"/>
+              </a:spcAft>
+              <a:defRPr sz="1400">
+                <a:latin typeface="Consolas"/>
+              </a:defRPr>
+            </a:pPr>
+            <a:r>
+              <a:rPr sz="1400" b="1">
+                <a:solidFill>
+                  <a:srgbClr val="0E7C86"/>
+                </a:solidFill>
+                <a:latin typeface="Consolas"/>
+              </a:rPr>
+              <a:t>if (!still_held &amp;&amp; turn_signal_cycles &gt;= TURN_CYCLES) {</a:t>
+            </a:r>
+          </a:p>
+          <a:p>
+            <a:pPr algn="l">
+              <a:lnSpc>
+                <a:spcPct val="100000"/>
+              </a:lnSpc>
+              <a:spcAft>
+                <a:spcPts val="0"/>
+              </a:spcAft>
+              <a:defRPr sz="1400">
+                <a:latin typeface="Consolas"/>
+              </a:defRPr>
+            </a:pPr>
+            <a:r>
+              <a:rPr sz="1400">
+                <a:solidFill>
+                  <a:srgbClr val="222222"/>
+                </a:solidFill>
+                <a:latin typeface="Consolas"/>
+              </a:rPr>
+              <a:t>  led_mode = STANDBY;</a:t>
+            </a:r>
+          </a:p>
+          <a:p>
+            <a:pPr algn="l">
+              <a:lnSpc>
+                <a:spcPct val="100000"/>
+              </a:lnSpc>
+              <a:spcAft>
+                <a:spcPts val="0"/>
+              </a:spcAft>
+              <a:defRPr sz="1400">
+                <a:latin typeface="Consolas"/>
+              </a:defRPr>
+            </a:pPr>
+            <a:r>
+              <a:rPr sz="1400">
+                <a:solidFill>
+                  <a:srgbClr val="222222"/>
+                </a:solidFill>
+                <a:latin typeface="Consolas"/>
+              </a:rPr>
+              <a:t>  standby_dirty = true;</a:t>
+            </a:r>
+          </a:p>
+          <a:p>
+            <a:pPr algn="l">
+              <a:lnSpc>
+                <a:spcPct val="100000"/>
+              </a:lnSpc>
+              <a:spcAft>
+                <a:spcPts val="0"/>
+              </a:spcAft>
+              <a:defRPr sz="1400">
+                <a:latin typeface="Consolas"/>
+              </a:defRPr>
+            </a:pPr>
+            <a:r>
+              <a:rPr sz="1400">
+                <a:solidFill>
+                  <a:srgbClr val="222222"/>
+                </a:solidFill>
+                <a:latin typeface="Consolas"/>
+              </a:rPr>
+              <a:t>}</a:t>
             </a:r>
           </a:p>
         </p:txBody>
@@ -8118,8 +8279,8 @@
         </p:nvSpPr>
         <p:spPr>
           <a:xfrm>
-            <a:off x="502920" y="3520440"/>
-            <a:ext cx="3631082" cy="310896"/>
+            <a:off x="7870048" y="1517904"/>
+            <a:ext cx="3818727" cy="4745736"/>
           </a:xfrm>
           <a:prstGeom prst="rect">
             <a:avLst/>
@@ -8132,264 +8293,103 @@
           </a:bodyPr>
           <a:lstStyle/>
           <a:p>
-            <a:pPr algn="ctr">
-              <a:lnSpc>
-                <a:spcPct val="100000"/>
-              </a:lnSpc>
-              <a:spcAft>
-                <a:spcPts val="200"/>
-              </a:spcAft>
-              <a:defRPr sz="1100" b="1">
-                <a:solidFill>
-                  <a:srgbClr val="0E7C86"/>
-                </a:solidFill>
-                <a:latin typeface="Calibri"/>
-              </a:defRPr>
-            </a:pPr>
-            <a:r>
-              <a:rPr sz="1100" b="1">
-                <a:solidFill>
-                  <a:srgbClr val="0E7C86"/>
-                </a:solidFill>
-                <a:latin typeface="Calibri"/>
-              </a:rPr>
-              <a:t>done</a:t>
-            </a:r>
-          </a:p>
-        </p:txBody>
-      </p:sp>
-      <p:sp>
-        <p:nvSpPr>
-          <p:cNvPr id="9" name="Rounded Rectangle 8"/>
-          <p:cNvSpPr/>
-          <p:nvPr/>
-        </p:nvSpPr>
-        <p:spPr>
-          <a:xfrm>
-            <a:off x="4280306" y="3886200"/>
-            <a:ext cx="3631082" cy="1325880"/>
-          </a:xfrm>
-          <a:prstGeom prst="roundRect">
-            <a:avLst>
-              <a:gd name="adj" fmla="val 8000"/>
-            </a:avLst>
-          </a:prstGeom>
-          <a:solidFill>
-            <a:srgbClr val="EEF3F8"/>
-          </a:solidFill>
-          <a:ln w="12700">
-            <a:solidFill>
-              <a:srgbClr val="0E7C86"/>
-            </a:solidFill>
-          </a:ln>
-          <a:effectLst/>
-        </p:spPr>
-        <p:style>
-          <a:lnRef idx="1">
-            <a:schemeClr val="accent1"/>
-          </a:lnRef>
-          <a:fillRef idx="3">
-            <a:schemeClr val="accent1"/>
-          </a:fillRef>
-          <a:effectRef idx="2">
-            <a:schemeClr val="accent1"/>
-          </a:effectRef>
-          <a:fontRef idx="minor">
-            <a:schemeClr val="lt1"/>
-          </a:fontRef>
-        </p:style>
-        <p:txBody>
-          <a:bodyPr rtlCol="0" anchor="ctr" wrap="square" lIns="73152" rIns="73152"/>
-          <a:lstStyle/>
-          <a:p>
-            <a:pPr algn="ctr">
-              <a:lnSpc>
-                <a:spcPct val="100000"/>
-              </a:lnSpc>
-              <a:spcAft>
-                <a:spcPts val="0"/>
-              </a:spcAft>
-              <a:defRPr sz="1700" b="0">
-                <a:solidFill>
-                  <a:srgbClr val="1F3A5F"/>
-                </a:solidFill>
-                <a:latin typeface="Calibri"/>
-              </a:defRPr>
-            </a:pPr>
-            <a:r>
-              <a:rPr sz="1700" b="0">
-                <a:solidFill>
-                  <a:srgbClr val="1F3A5F"/>
-                </a:solidFill>
-                <a:latin typeface="Calibri"/>
-              </a:rPr>
-              <a:t>Measuring a redraw</a:t>
-            </a:r>
-          </a:p>
-        </p:txBody>
-      </p:sp>
-      <p:sp>
-        <p:nvSpPr>
-          <p:cNvPr id="10" name="TextBox 9"/>
-          <p:cNvSpPr txBox="1"/>
-          <p:nvPr/>
-        </p:nvSpPr>
-        <p:spPr>
-          <a:xfrm>
-            <a:off x="4280306" y="3520440"/>
-            <a:ext cx="3631082" cy="310896"/>
-          </a:xfrm>
-          <a:prstGeom prst="rect">
-            <a:avLst/>
-          </a:prstGeom>
-          <a:noFill/>
-        </p:spPr>
-        <p:txBody>
-          <a:bodyPr wrap="square" lIns="0" tIns="0" rIns="0" bIns="0">
-            <a:spAutoFit/>
-          </a:bodyPr>
-          <a:lstStyle/>
-          <a:p>
-            <a:pPr algn="ctr">
-              <a:lnSpc>
-                <a:spcPct val="100000"/>
-              </a:lnSpc>
-              <a:spcAft>
-                <a:spcPts val="200"/>
-              </a:spcAft>
-              <a:defRPr sz="1100" b="1">
-                <a:solidFill>
-                  <a:srgbClr val="0E7C86"/>
-                </a:solidFill>
-                <a:latin typeface="Calibri"/>
-              </a:defRPr>
-            </a:pPr>
-            <a:r>
-              <a:rPr sz="1100" b="1">
-                <a:solidFill>
-                  <a:srgbClr val="0E7C86"/>
-                </a:solidFill>
-                <a:latin typeface="Calibri"/>
-              </a:rPr>
-              <a:t>done</a:t>
-            </a:r>
-          </a:p>
-        </p:txBody>
-      </p:sp>
-      <p:sp>
-        <p:nvSpPr>
-          <p:cNvPr id="11" name="Rounded Rectangle 10"/>
-          <p:cNvSpPr/>
-          <p:nvPr/>
-        </p:nvSpPr>
-        <p:spPr>
-          <a:xfrm>
-            <a:off x="8057692" y="3886200"/>
-            <a:ext cx="3631082" cy="1325880"/>
-          </a:xfrm>
-          <a:prstGeom prst="roundRect">
-            <a:avLst>
-              <a:gd name="adj" fmla="val 8000"/>
-            </a:avLst>
-          </a:prstGeom>
-          <a:solidFill>
-            <a:srgbClr val="D6ECEE"/>
-          </a:solidFill>
-          <a:ln w="25400">
-            <a:solidFill>
-              <a:srgbClr val="0E7C86"/>
-            </a:solidFill>
-          </a:ln>
-          <a:effectLst/>
-        </p:spPr>
-        <p:style>
-          <a:lnRef idx="1">
-            <a:schemeClr val="accent1"/>
-          </a:lnRef>
-          <a:fillRef idx="3">
-            <a:schemeClr val="accent1"/>
-          </a:fillRef>
-          <a:effectRef idx="2">
-            <a:schemeClr val="accent1"/>
-          </a:effectRef>
-          <a:fontRef idx="minor">
-            <a:schemeClr val="lt1"/>
-          </a:fontRef>
-        </p:style>
-        <p:txBody>
-          <a:bodyPr rtlCol="0" anchor="ctr" wrap="square" lIns="73152" rIns="73152"/>
-          <a:lstStyle/>
-          <a:p>
-            <a:pPr algn="ctr">
-              <a:lnSpc>
-                <a:spcPct val="100000"/>
-              </a:lnSpc>
-              <a:spcAft>
-                <a:spcPts val="0"/>
-              </a:spcAft>
-              <a:defRPr sz="1700" b="1">
-                <a:solidFill>
-                  <a:srgbClr val="1F3A5F"/>
-                </a:solidFill>
-                <a:latin typeface="Calibri"/>
-              </a:defRPr>
-            </a:pPr>
-            <a:r>
-              <a:rPr sz="1700" b="1">
-                <a:solidFill>
-                  <a:srgbClr val="1F3A5F"/>
-                </a:solidFill>
-                <a:latin typeface="Calibri"/>
-              </a:rPr>
-              <a:t>Turn signal geometry</a:t>
-            </a:r>
-          </a:p>
-        </p:txBody>
-      </p:sp>
-      <p:sp>
-        <p:nvSpPr>
-          <p:cNvPr id="12" name="TextBox 11"/>
-          <p:cNvSpPr txBox="1"/>
-          <p:nvPr/>
-        </p:nvSpPr>
-        <p:spPr>
-          <a:xfrm>
-            <a:off x="8057692" y="3520440"/>
-            <a:ext cx="3631082" cy="310896"/>
-          </a:xfrm>
-          <a:prstGeom prst="rect">
-            <a:avLst/>
-          </a:prstGeom>
-          <a:noFill/>
-        </p:spPr>
-        <p:txBody>
-          <a:bodyPr wrap="square" lIns="0" tIns="0" rIns="0" bIns="0">
-            <a:spAutoFit/>
-          </a:bodyPr>
-          <a:lstStyle/>
-          <a:p>
-            <a:pPr algn="ctr">
-              <a:lnSpc>
-                <a:spcPct val="100000"/>
-              </a:lnSpc>
-              <a:spcAft>
-                <a:spcPts val="200"/>
-              </a:spcAft>
-              <a:defRPr sz="1100" b="1">
-                <a:solidFill>
-                  <a:srgbClr val="0E7C86"/>
-                </a:solidFill>
-                <a:latin typeface="Calibri"/>
-              </a:defRPr>
-            </a:pPr>
-            <a:r>
-              <a:rPr sz="1100" b="1">
-                <a:solidFill>
-                  <a:srgbClr val="0E7C86"/>
-                </a:solidFill>
-                <a:latin typeface="Calibri"/>
-              </a:rPr>
-              <a:t>NOW</a:t>
+            <a:pPr algn="l">
+              <a:lnSpc>
+                <a:spcPct val="100000"/>
+              </a:lnSpc>
+              <a:spcAft>
+                <a:spcPts val="700"/>
+              </a:spcAft>
+              <a:defRPr sz="2000" b="0">
+                <a:solidFill>
+                  <a:srgbClr val="222222"/>
+                </a:solidFill>
+                <a:latin typeface="Calibri"/>
+              </a:defRPr>
+            </a:pPr>
+            <a:r>
+              <a:rPr sz="2000" b="0">
+                <a:solidFill>
+                  <a:srgbClr val="222222"/>
+                </a:solidFill>
+                <a:latin typeface="Calibri"/>
+              </a:rPr>
+              <a:t>The D-pad only ever STARTS the animation. It does not hold it on and it does not stop it.</a:t>
+            </a:r>
+          </a:p>
+          <a:p>
+            <a:pPr algn="l">
+              <a:lnSpc>
+                <a:spcPct val="100000"/>
+              </a:lnSpc>
+              <a:spcAft>
+                <a:spcPts val="700"/>
+              </a:spcAft>
+              <a:defRPr sz="2000" b="0">
+                <a:solidFill>
+                  <a:srgbClr val="222222"/>
+                </a:solidFill>
+                <a:latin typeface="Calibri"/>
+              </a:defRPr>
+            </a:pPr>
+            <a:r>
+              <a:rPr sz="2000" b="0">
+                <a:solidFill>
+                  <a:srgbClr val="222222"/>
+                </a:solidFill>
+                <a:latin typeface="Calibri"/>
+              </a:rPr>
+              <a:t>A real indicator does not stop mid-blink when you let go of the stalk. It finishes.</a:t>
+            </a:r>
+          </a:p>
+          <a:p>
+            <a:pPr algn="l">
+              <a:lnSpc>
+                <a:spcPct val="100000"/>
+              </a:lnSpc>
+              <a:spcAft>
+                <a:spcPts val="700"/>
+              </a:spcAft>
+              <a:defRPr sz="2000" b="0">
+                <a:solidFill>
+                  <a:srgbClr val="222222"/>
+                </a:solidFill>
+                <a:latin typeface="Calibri"/>
+              </a:defRPr>
+            </a:pPr>
+            <a:r>
+              <a:rPr sz="2000" b="0">
+                <a:solidFill>
+                  <a:srgbClr val="222222"/>
+                </a:solidFill>
+                <a:latin typeface="Calibri"/>
+              </a:rPr>
+              <a:t>Holding the D-pad keeps resetting the count, so it carries on for as long as you hold it and then finishes cleanly.</a:t>
+            </a:r>
+          </a:p>
+          <a:p>
+            <a:pPr algn="l">
+              <a:lnSpc>
+                <a:spcPct val="100000"/>
+              </a:lnSpc>
+              <a:spcAft>
+                <a:spcPts val="700"/>
+              </a:spcAft>
+              <a:defRPr sz="2000" b="0">
+                <a:solidFill>
+                  <a:srgbClr val="222222"/>
+                </a:solidFill>
+                <a:latin typeface="Calibri"/>
+              </a:defRPr>
+            </a:pPr>
+            <a:r>
+              <a:rPr sz="2000" b="0">
+                <a:solidFill>
+                  <a:srgbClr val="222222"/>
+                </a:solidFill>
+                <a:latin typeface="Calibri"/>
+              </a:rPr>
+              <a:t>This is a small thing that makes a machine feel considered rather than twitchy.</a:t>
             </a:r>
           </a:p>
         </p:txBody>
@@ -16801,7 +16801,7 @@
                 </a:solidFill>
                 <a:latin typeface="Calibri"/>
               </a:rPr>
-              <a:t>About 35 minutes</a:t>
+              <a:t>About 50 minutes</a:t>
             </a:r>
           </a:p>
         </p:txBody>

--- a/ground-vehicle/docs/courses/advanced/l4_lighting_state_machine.pptx
+++ b/ground-vehicle/docs/courses/advanced/l4_lighting_state_machine.pptx
@@ -5966,7 +5966,7 @@
                 </a:solidFill>
                 <a:latin typeface="Calibri"/>
               </a:rPr>
-              <a:t>9</a:t>
+              <a:t>10</a:t>
             </a:r>
           </a:p>
         </p:txBody>
@@ -6502,7 +6502,7 @@
                 </a:solidFill>
                 <a:latin typeface="Calibri"/>
               </a:rPr>
-              <a:t>10</a:t>
+              <a:t>11</a:t>
             </a:r>
           </a:p>
         </p:txBody>
@@ -7200,7 +7200,7 @@
                 </a:solidFill>
                 <a:latin typeface="Calibri"/>
               </a:rPr>
-              <a:t>11</a:t>
+              <a:t>12</a:t>
             </a:r>
           </a:p>
         </p:txBody>
@@ -7821,7 +7821,7 @@
                 </a:solidFill>
                 <a:latin typeface="Calibri"/>
               </a:rPr>
-              <a:t>12</a:t>
+              <a:t>13</a:t>
             </a:r>
           </a:p>
         </p:txBody>
@@ -8593,7 +8593,7 @@
                 </a:solidFill>
                 <a:latin typeface="Calibri"/>
               </a:rPr>
-              <a:t>13</a:t>
+              <a:t>14</a:t>
             </a:r>
           </a:p>
         </p:txBody>
@@ -9260,7 +9260,7 @@
                 </a:solidFill>
                 <a:latin typeface="Calibri"/>
               </a:rPr>
-              <a:t>14</a:t>
+              <a:t>15</a:t>
             </a:r>
           </a:p>
         </p:txBody>
@@ -10142,7 +10142,7 @@
                 </a:solidFill>
                 <a:latin typeface="Calibri"/>
               </a:rPr>
-              <a:t>15</a:t>
+              <a:t>16</a:t>
             </a:r>
           </a:p>
         </p:txBody>
@@ -10549,7 +10549,7 @@
                 </a:solidFill>
                 <a:latin typeface="Calibri"/>
               </a:rPr>
-              <a:t>16</a:t>
+              <a:t>17</a:t>
             </a:r>
           </a:p>
         </p:txBody>
@@ -11211,7 +11211,7 @@
                 </a:solidFill>
                 <a:latin typeface="Calibri"/>
               </a:rPr>
-              <a:t>17</a:t>
+              <a:t>18</a:t>
             </a:r>
           </a:p>
         </p:txBody>
@@ -11841,7 +11841,7 @@
                 </a:solidFill>
                 <a:latin typeface="Calibri"/>
               </a:rPr>
-              <a:t>18</a:t>
+              <a:t>19</a:t>
             </a:r>
           </a:p>
         </p:txBody>
@@ -12316,7 +12316,7 @@
                 </a:solidFill>
                 <a:latin typeface="Calibri"/>
               </a:rPr>
-              <a:t>1</a:t>
+              <a:t>2</a:t>
             </a:r>
           </a:p>
         </p:txBody>
@@ -12716,7 +12716,7 @@
                 </a:solidFill>
                 <a:latin typeface="Calibri"/>
               </a:rPr>
-              <a:t>2</a:t>
+              <a:t>3</a:t>
             </a:r>
           </a:p>
         </p:txBody>
@@ -13406,7 +13406,7 @@
                 </a:solidFill>
                 <a:latin typeface="Calibri"/>
               </a:rPr>
-              <a:t>3</a:t>
+              <a:t>4</a:t>
             </a:r>
           </a:p>
         </p:txBody>
@@ -13952,7 +13952,7 @@
                 </a:solidFill>
                 <a:latin typeface="Calibri"/>
               </a:rPr>
-              <a:t>4</a:t>
+              <a:t>5</a:t>
             </a:r>
           </a:p>
         </p:txBody>
@@ -15374,7 +15374,7 @@
                 </a:solidFill>
                 <a:latin typeface="Calibri"/>
               </a:rPr>
-              <a:t>5</a:t>
+              <a:t>6</a:t>
             </a:r>
           </a:p>
         </p:txBody>
@@ -15913,7 +15913,7 @@
                 </a:solidFill>
                 <a:latin typeface="Calibri"/>
               </a:rPr>
-              <a:t>6</a:t>
+              <a:t>7</a:t>
             </a:r>
           </a:p>
         </p:txBody>
@@ -16661,7 +16661,7 @@
                 </a:solidFill>
                 <a:latin typeface="Calibri"/>
               </a:rPr>
-              <a:t>7</a:t>
+              <a:t>8</a:t>
             </a:r>
           </a:p>
         </p:txBody>
@@ -17311,7 +17311,7 @@
                 </a:solidFill>
                 <a:latin typeface="Calibri"/>
               </a:rPr>
-              <a:t>8</a:t>
+              <a:t>9</a:t>
             </a:r>
           </a:p>
         </p:txBody>

--- a/ground-vehicle/docs/courses/advanced/l4_lighting_state_machine.pptx
+++ b/ground-vehicle/docs/courses/advanced/l4_lighting_state_machine.pptx
@@ -6382,7 +6382,7 @@
               <a:t>KEY POINT   </a:t>
             </a:r>
             <a:r>
-              <a:rPr sz="1500">
+              <a:rPr sz="1800">
                 <a:solidFill>
                   <a:srgbClr val="222222"/>
                 </a:solidFill>
@@ -11001,7 +11001,7 @@
               <a:t>KEY POINT   </a:t>
             </a:r>
             <a:r>
-              <a:rPr sz="1500">
+              <a:rPr sz="1800">
                 <a:solidFill>
                   <a:srgbClr val="222222"/>
                 </a:solidFill>
@@ -15164,7 +15164,7 @@
               <a:t>KEY POINT   </a:t>
             </a:r>
             <a:r>
-              <a:rPr sz="1500">
+              <a:rPr sz="1800">
                 <a:solidFill>
                   <a:srgbClr val="222222"/>
                 </a:solidFill>
@@ -15703,7 +15703,7 @@
               <a:t>KEY POINT   </a:t>
             </a:r>
             <a:r>
-              <a:rPr sz="1500">
+              <a:rPr sz="1800">
                 <a:solidFill>
                   <a:srgbClr val="222222"/>
                 </a:solidFill>

--- a/ground-vehicle/docs/courses/advanced/l4_lighting_state_machine.pptx
+++ b/ground-vehicle/docs/courses/advanced/l4_lighting_state_machine.pptx
@@ -9686,138 +9686,6 @@
               <a:t> </a:t>
             </a:r>
           </a:p>
-          <a:p>
-            <a:pPr algn="l">
-              <a:lnSpc>
-                <a:spcPct val="100000"/>
-              </a:lnSpc>
-              <a:spcAft>
-                <a:spcPts val="0"/>
-              </a:spcAft>
-              <a:defRPr sz="1400">
-                <a:latin typeface="Consolas"/>
-              </a:defRPr>
-            </a:pPr>
-            <a:r>
-              <a:rPr sz="1400">
-                <a:solidFill>
-                  <a:srgbClr val="222222"/>
-                </a:solidFill>
-                <a:latin typeface="Consolas"/>
-              </a:rPr>
-              <a:t>  if (led_mode == KITT_SCANNER) {</a:t>
-            </a:r>
-          </a:p>
-          <a:p>
-            <a:pPr algn="l">
-              <a:lnSpc>
-                <a:spcPct val="100000"/>
-              </a:lnSpc>
-              <a:spcAft>
-                <a:spcPts val="0"/>
-              </a:spcAft>
-              <a:defRPr sz="1400">
-                <a:latin typeface="Consolas"/>
-              </a:defRPr>
-            </a:pPr>
-            <a:r>
-              <a:rPr sz="1400" b="1">
-                <a:solidFill>
-                  <a:srgbClr val="0E7C86"/>
-                </a:solidFill>
-                <a:latin typeface="Consolas"/>
-              </a:rPr>
-              <a:t>    if (now - kitt_time &lt; (unsigned long)KITT_SPEED_MS) return;</a:t>
-            </a:r>
-          </a:p>
-          <a:p>
-            <a:pPr algn="l">
-              <a:lnSpc>
-                <a:spcPct val="100000"/>
-              </a:lnSpc>
-              <a:spcAft>
-                <a:spcPts val="0"/>
-              </a:spcAft>
-              <a:defRPr sz="1400">
-                <a:latin typeface="Consolas"/>
-              </a:defRPr>
-            </a:pPr>
-            <a:r>
-              <a:rPr sz="1400">
-                <a:solidFill>
-                  <a:srgbClr val="222222"/>
-                </a:solidFill>
-                <a:latin typeface="Consolas"/>
-              </a:rPr>
-              <a:t>    kitt_time = now;</a:t>
-            </a:r>
-          </a:p>
-          <a:p>
-            <a:pPr algn="l">
-              <a:lnSpc>
-                <a:spcPct val="100000"/>
-              </a:lnSpc>
-              <a:spcAft>
-                <a:spcPts val="0"/>
-              </a:spcAft>
-              <a:defRPr sz="1400">
-                <a:latin typeface="Consolas"/>
-              </a:defRPr>
-            </a:pPr>
-            <a:r>
-              <a:rPr sz="1400">
-                <a:solidFill>
-                  <a:srgbClr val="666666"/>
-                </a:solidFill>
-                <a:latin typeface="Consolas"/>
-              </a:rPr>
-              <a:t>    // ...draw one frame, step the dot, maybe hand back...</a:t>
-            </a:r>
-          </a:p>
-          <a:p>
-            <a:pPr algn="l">
-              <a:lnSpc>
-                <a:spcPct val="100000"/>
-              </a:lnSpc>
-              <a:spcAft>
-                <a:spcPts val="0"/>
-              </a:spcAft>
-              <a:defRPr sz="1400">
-                <a:latin typeface="Consolas"/>
-              </a:defRPr>
-            </a:pPr>
-            <a:r>
-              <a:rPr sz="1400">
-                <a:solidFill>
-                  <a:srgbClr val="222222"/>
-                </a:solidFill>
-                <a:latin typeface="Consolas"/>
-              </a:rPr>
-              <a:t>    return;</a:t>
-            </a:r>
-          </a:p>
-          <a:p>
-            <a:pPr algn="l">
-              <a:lnSpc>
-                <a:spcPct val="100000"/>
-              </a:lnSpc>
-              <a:spcAft>
-                <a:spcPts val="0"/>
-              </a:spcAft>
-              <a:defRPr sz="1400">
-                <a:latin typeface="Consolas"/>
-              </a:defRPr>
-            </a:pPr>
-            <a:r>
-              <a:rPr sz="1400">
-                <a:solidFill>
-                  <a:srgbClr val="222222"/>
-                </a:solidFill>
-                <a:latin typeface="Consolas"/>
-              </a:rPr>
-              <a:t>  }</a:t>
-            </a:r>
-          </a:p>
         </p:txBody>
       </p:sp>
       <p:sp>
@@ -10257,7 +10125,7 @@
                 </a:solidFill>
                 <a:latin typeface="Consolas"/>
               </a:rPr>
-              <a:t> </a:t>
+              <a:t>  if (led_mode == KITT_SCANNER) {</a:t>
             </a:r>
           </a:p>
           <a:p>
@@ -10279,7 +10147,7 @@
                 </a:solidFill>
                 <a:latin typeface="Consolas"/>
               </a:rPr>
-              <a:t>  if (led_mode == STANDBY &amp;&amp; standby_dirty) {</a:t>
+              <a:t>    if (now - kitt_time &lt; (unsigned long)KITT_SPEED_MS) return;</a:t>
             </a:r>
           </a:p>
           <a:p>
@@ -10298,6 +10166,138 @@
               <a:rPr sz="1400" b="1">
                 <a:solidFill>
                   <a:srgbClr val="0E7C86"/>
+                </a:solidFill>
+                <a:latin typeface="Consolas"/>
+              </a:rPr>
+              <a:t>    kitt_time = now;</a:t>
+            </a:r>
+          </a:p>
+          <a:p>
+            <a:pPr algn="l">
+              <a:lnSpc>
+                <a:spcPct val="100000"/>
+              </a:lnSpc>
+              <a:spcAft>
+                <a:spcPts val="0"/>
+              </a:spcAft>
+              <a:defRPr sz="1400">
+                <a:latin typeface="Consolas"/>
+              </a:defRPr>
+            </a:pPr>
+            <a:r>
+              <a:rPr sz="1400">
+                <a:solidFill>
+                  <a:srgbClr val="666666"/>
+                </a:solidFill>
+                <a:latin typeface="Consolas"/>
+              </a:rPr>
+              <a:t>    // ...draw one frame, step the dot, maybe hand back...</a:t>
+            </a:r>
+          </a:p>
+          <a:p>
+            <a:pPr algn="l">
+              <a:lnSpc>
+                <a:spcPct val="100000"/>
+              </a:lnSpc>
+              <a:spcAft>
+                <a:spcPts val="0"/>
+              </a:spcAft>
+              <a:defRPr sz="1400">
+                <a:latin typeface="Consolas"/>
+              </a:defRPr>
+            </a:pPr>
+            <a:r>
+              <a:rPr sz="1400">
+                <a:solidFill>
+                  <a:srgbClr val="222222"/>
+                </a:solidFill>
+                <a:latin typeface="Consolas"/>
+              </a:rPr>
+              <a:t>    return;</a:t>
+            </a:r>
+          </a:p>
+          <a:p>
+            <a:pPr algn="l">
+              <a:lnSpc>
+                <a:spcPct val="100000"/>
+              </a:lnSpc>
+              <a:spcAft>
+                <a:spcPts val="0"/>
+              </a:spcAft>
+              <a:defRPr sz="1400">
+                <a:latin typeface="Consolas"/>
+              </a:defRPr>
+            </a:pPr>
+            <a:r>
+              <a:rPr sz="1400">
+                <a:solidFill>
+                  <a:srgbClr val="222222"/>
+                </a:solidFill>
+                <a:latin typeface="Consolas"/>
+              </a:rPr>
+              <a:t>  }</a:t>
+            </a:r>
+          </a:p>
+          <a:p>
+            <a:pPr algn="l">
+              <a:lnSpc>
+                <a:spcPct val="100000"/>
+              </a:lnSpc>
+              <a:spcAft>
+                <a:spcPts val="0"/>
+              </a:spcAft>
+              <a:defRPr sz="1400">
+                <a:latin typeface="Consolas"/>
+              </a:defRPr>
+            </a:pPr>
+            <a:r>
+              <a:rPr sz="1400">
+                <a:solidFill>
+                  <a:srgbClr val="222222"/>
+                </a:solidFill>
+                <a:latin typeface="Consolas"/>
+              </a:rPr>
+              <a:t> </a:t>
+            </a:r>
+          </a:p>
+          <a:p>
+            <a:pPr algn="l">
+              <a:lnSpc>
+                <a:spcPct val="100000"/>
+              </a:lnSpc>
+              <a:spcAft>
+                <a:spcPts val="0"/>
+              </a:spcAft>
+              <a:defRPr sz="1400">
+                <a:latin typeface="Consolas"/>
+              </a:defRPr>
+            </a:pPr>
+            <a:r>
+              <a:rPr sz="1400">
+                <a:solidFill>
+                  <a:srgbClr val="222222"/>
+                </a:solidFill>
+                <a:latin typeface="Consolas"/>
+              </a:rPr>
+              <a:t>  if (led_mode == STANDBY &amp;&amp; standby_dirty) {</a:t>
+            </a:r>
+          </a:p>
+          <a:p>
+            <a:pPr algn="l">
+              <a:lnSpc>
+                <a:spcPct val="100000"/>
+              </a:lnSpc>
+              <a:spcAft>
+                <a:spcPts val="0"/>
+              </a:spcAft>
+              <a:defRPr sz="1400">
+                <a:latin typeface="Consolas"/>
+              </a:defRPr>
+            </a:pPr>
+            <a:r>
+              <a:rPr sz="1400">
+                <a:solidFill>
+                  <a:srgbClr val="222222"/>
                 </a:solidFill>
                 <a:latin typeface="Consolas"/>
               </a:rPr>
